--- a/마켓센싱리포트_AI혁신_2p.pptx
+++ b/마켓센싱리포트_AI혁신_2p.pptx
@@ -3141,7 +3141,7 @@
         </p:nvSpPr>
         <p:spPr>
           <a:xfrm>
-            <a:off x="502920" y="274320"/>
+            <a:off x="502920" y="256032"/>
             <a:ext cx="11155680" cy="548640"/>
           </a:xfrm>
           <a:prstGeom prst="rect">
@@ -3171,7 +3171,7 @@
                 <a:latin typeface="Noto Sans CJK KR"/>
                 <a:ea typeface="Noto Sans CJK KR"/>
               </a:rPr>
-              <a:t>마켓센싱 리포트 제작 프로세스 혁신</a:t>
+              <a:t>마켓센싱 리포트 AI 전환 : As-Is → To-Be</a:t>
             </a:r>
           </a:p>
         </p:txBody>
@@ -3184,7 +3184,7 @@
         </p:nvSpPr>
         <p:spPr>
           <a:xfrm>
-            <a:off x="502920" y="713232"/>
+            <a:off x="502920" y="685800"/>
             <a:ext cx="11155680" cy="320040"/>
           </a:xfrm>
           <a:prstGeom prst="rect">
@@ -3214,7 +3214,7 @@
                 <a:latin typeface="Noto Sans CJK KR"/>
                 <a:ea typeface="Noto Sans CJK KR"/>
               </a:rPr>
-              <a:t>현행(As-Is) 수작업 중심 프로세스의 병목을 진단하고, AI 기반 To-Be로 재설계</a:t>
+              <a:t>정형·반복 업무는 '대체', 암묵지 기반 판단은 '증폭' — MAGI 5계층 인텔리전스 구조로 재설계</a:t>
             </a:r>
           </a:p>
         </p:txBody>
@@ -3227,7 +3227,7 @@
         </p:nvCxnSpPr>
         <p:spPr>
           <a:xfrm>
-            <a:off x="502920" y="1115568"/>
+            <a:off x="502920" y="1078992"/>
             <a:ext cx="11183112" cy="0"/>
           </a:xfrm>
           <a:prstGeom prst="bentConnector3">
@@ -3262,8 +3262,8 @@
         </p:nvSpPr>
         <p:spPr>
           <a:xfrm>
-            <a:off x="502920" y="1417320"/>
-            <a:ext cx="1234440" cy="310896"/>
+            <a:off x="502920" y="1325880"/>
+            <a:ext cx="1234440" cy="292608"/>
           </a:xfrm>
           <a:prstGeom prst="roundRect">
             <a:avLst/>
@@ -3291,7 +3291,7 @@
           </a:fontRef>
         </p:style>
         <p:txBody>
-          <a:bodyPr rtlCol="0" anchor="ctr" wrap="square" lIns="54864" rIns="54864" tIns="27432" bIns="27432"/>
+          <a:bodyPr rtlCol="0" anchor="ctr" wrap="square" lIns="64008" rIns="64008" tIns="27432" bIns="27432"/>
           <a:lstStyle/>
           <a:p>
             <a:pPr algn="ctr">
@@ -3323,8 +3323,8 @@
         </p:nvSpPr>
         <p:spPr>
           <a:xfrm>
-            <a:off x="1874519" y="1444752"/>
-            <a:ext cx="8686800" cy="274320"/>
+            <a:off x="1874519" y="1353312"/>
+            <a:ext cx="8961120" cy="274320"/>
           </a:xfrm>
           <a:prstGeom prst="rect">
             <a:avLst/>
@@ -3353,7 +3353,7 @@
                 <a:latin typeface="Noto Sans CJK KR"/>
                 <a:ea typeface="Noto Sans CJK KR"/>
               </a:rPr>
-              <a:t>소스 수집부터 인사이트까지 대부분 수작업 · 담당자 역량 의존</a:t>
+              <a:t>수집·정리·정형화·분석을 사람이 수작업 반복 · 인사이트가 베테랑 개인에 의존</a:t>
             </a:r>
           </a:p>
         </p:txBody>
@@ -3366,8 +3366,8 @@
         </p:nvSpPr>
         <p:spPr>
           <a:xfrm>
-            <a:off x="502920" y="1874519"/>
-            <a:ext cx="1755648" cy="841248"/>
+            <a:off x="502920" y="1746504"/>
+            <a:ext cx="1755648" cy="786384"/>
           </a:xfrm>
           <a:prstGeom prst="roundRect">
             <a:avLst/>
@@ -3397,7 +3397,7 @@
           </a:fontRef>
         </p:style>
         <p:txBody>
-          <a:bodyPr rtlCol="0" anchor="ctr" wrap="square" lIns="54864" rIns="54864" tIns="27432" bIns="27432"/>
+          <a:bodyPr rtlCol="0" anchor="ctr" wrap="square" lIns="64008" rIns="64008" tIns="27432" bIns="27432"/>
           <a:lstStyle/>
           <a:p>
             <a:pPr algn="ctr">
@@ -3409,7 +3409,7 @@
               </a:spcAft>
             </a:pPr>
             <a:r>
-              <a:rPr sz="1150" b="1">
+              <a:rPr sz="1100" b="1">
                 <a:solidFill>
                   <a:srgbClr val="22282E"/>
                 </a:solidFill>
@@ -3429,15 +3429,15 @@
               </a:spcAft>
             </a:pPr>
             <a:r>
-              <a:rPr sz="950" b="0">
+              <a:rPr sz="850" b="0">
                 <a:solidFill>
                   <a:srgbClr val="4B555E"/>
                 </a:solidFill>
                 <a:latin typeface="Noto Sans CJK KR"/>
                 <a:ea typeface="Noto Sans CJK KR"/>
               </a:rPr>
-              <a:t>4개 소스
-수동 취합</a:t>
+              <a:t>4개 소스 수동 취합
+(스크랩·메일링·보고서·검색)</a:t>
             </a:r>
           </a:p>
         </p:txBody>
@@ -3450,8 +3450,8 @@
         </p:nvSpPr>
         <p:spPr>
           <a:xfrm>
-            <a:off x="2240279" y="2194560"/>
-            <a:ext cx="182880" cy="201168"/>
+            <a:off x="2240279" y="2048255"/>
+            <a:ext cx="182880" cy="182880"/>
           </a:xfrm>
           <a:prstGeom prst="chevron">
             <a:avLst/>
@@ -3494,8 +3494,8 @@
         </p:nvSpPr>
         <p:spPr>
           <a:xfrm>
-            <a:off x="2386584" y="1874519"/>
-            <a:ext cx="1755648" cy="841248"/>
+            <a:off x="2386584" y="1746504"/>
+            <a:ext cx="1755648" cy="786384"/>
           </a:xfrm>
           <a:prstGeom prst="roundRect">
             <a:avLst/>
@@ -3525,7 +3525,7 @@
           </a:fontRef>
         </p:style>
         <p:txBody>
-          <a:bodyPr rtlCol="0" anchor="ctr" wrap="square" lIns="54864" rIns="54864" tIns="27432" bIns="27432"/>
+          <a:bodyPr rtlCol="0" anchor="ctr" wrap="square" lIns="64008" rIns="64008" tIns="27432" bIns="27432"/>
           <a:lstStyle/>
           <a:p>
             <a:pPr algn="ctr">
@@ -3537,7 +3537,7 @@
               </a:spcAft>
             </a:pPr>
             <a:r>
-              <a:rPr sz="1150" b="1">
+              <a:rPr sz="1100" b="1">
                 <a:solidFill>
                   <a:srgbClr val="22282E"/>
                 </a:solidFill>
@@ -3557,7 +3557,7 @@
               </a:spcAft>
             </a:pPr>
             <a:r>
-              <a:rPr sz="950" b="0">
+              <a:rPr sz="850" b="0">
                 <a:solidFill>
                   <a:srgbClr val="4B555E"/>
                 </a:solidFill>
@@ -3578,8 +3578,8 @@
         </p:nvSpPr>
         <p:spPr>
           <a:xfrm>
-            <a:off x="4123944" y="2194560"/>
-            <a:ext cx="182880" cy="201168"/>
+            <a:off x="4123944" y="2048255"/>
+            <a:ext cx="182880" cy="182880"/>
           </a:xfrm>
           <a:prstGeom prst="chevron">
             <a:avLst/>
@@ -3622,8 +3622,8 @@
         </p:nvSpPr>
         <p:spPr>
           <a:xfrm>
-            <a:off x="4270248" y="1874519"/>
-            <a:ext cx="1755648" cy="841248"/>
+            <a:off x="4270248" y="1746504"/>
+            <a:ext cx="1755648" cy="786384"/>
           </a:xfrm>
           <a:prstGeom prst="roundRect">
             <a:avLst/>
@@ -3653,7 +3653,7 @@
           </a:fontRef>
         </p:style>
         <p:txBody>
-          <a:bodyPr rtlCol="0" anchor="ctr" wrap="square" lIns="54864" rIns="54864" tIns="27432" bIns="27432"/>
+          <a:bodyPr rtlCol="0" anchor="ctr" wrap="square" lIns="64008" rIns="64008" tIns="27432" bIns="27432"/>
           <a:lstStyle/>
           <a:p>
             <a:pPr algn="ctr">
@@ -3665,14 +3665,14 @@
               </a:spcAft>
             </a:pPr>
             <a:r>
-              <a:rPr sz="1150" b="1">
+              <a:rPr sz="1100" b="1">
                 <a:solidFill>
                   <a:srgbClr val="22282E"/>
                 </a:solidFill>
                 <a:latin typeface="Noto Sans CJK KR"/>
                 <a:ea typeface="Noto Sans CJK KR"/>
               </a:rPr>
-              <a:t>③ 요약·번역</a:t>
+              <a:t>③ 정리·정형화</a:t>
             </a:r>
           </a:p>
           <a:p>
@@ -3685,15 +3685,15 @@
               </a:spcAft>
             </a:pPr>
             <a:r>
-              <a:rPr sz="950" b="0">
+              <a:rPr sz="850" b="0">
                 <a:solidFill>
                   <a:srgbClr val="4B555E"/>
                 </a:solidFill>
                 <a:latin typeface="Noto Sans CJK KR"/>
                 <a:ea typeface="Noto Sans CJK KR"/>
               </a:rPr>
-              <a:t>기사별 용어·
-차별점 수작업</a:t>
+              <a:t>기사별 요약·번역·
+용어 수작업</a:t>
             </a:r>
           </a:p>
         </p:txBody>
@@ -3706,8 +3706,8 @@
         </p:nvSpPr>
         <p:spPr>
           <a:xfrm>
-            <a:off x="6007608" y="2194560"/>
-            <a:ext cx="182880" cy="201168"/>
+            <a:off x="6007608" y="2048255"/>
+            <a:ext cx="182880" cy="182880"/>
           </a:xfrm>
           <a:prstGeom prst="chevron">
             <a:avLst/>
@@ -3750,8 +3750,8 @@
         </p:nvSpPr>
         <p:spPr>
           <a:xfrm>
-            <a:off x="6153912" y="1874519"/>
-            <a:ext cx="1755648" cy="841248"/>
+            <a:off x="6153912" y="1746504"/>
+            <a:ext cx="1755648" cy="786384"/>
           </a:xfrm>
           <a:prstGeom prst="roundRect">
             <a:avLst/>
@@ -3781,7 +3781,7 @@
           </a:fontRef>
         </p:style>
         <p:txBody>
-          <a:bodyPr rtlCol="0" anchor="ctr" wrap="square" lIns="54864" rIns="54864" tIns="27432" bIns="27432"/>
+          <a:bodyPr rtlCol="0" anchor="ctr" wrap="square" lIns="64008" rIns="64008" tIns="27432" bIns="27432"/>
           <a:lstStyle/>
           <a:p>
             <a:pPr algn="ctr">
@@ -3793,7 +3793,7 @@
               </a:spcAft>
             </a:pPr>
             <a:r>
-              <a:rPr sz="1150" b="1">
+              <a:rPr sz="1100" b="1">
                 <a:solidFill>
                   <a:srgbClr val="22282E"/>
                 </a:solidFill>
@@ -3813,7 +3813,7 @@
               </a:spcAft>
             </a:pPr>
             <a:r>
-              <a:rPr sz="950" b="0">
+              <a:rPr sz="850" b="0">
                 <a:solidFill>
                   <a:srgbClr val="4B555E"/>
                 </a:solidFill>
@@ -3834,8 +3834,8 @@
         </p:nvSpPr>
         <p:spPr>
           <a:xfrm>
-            <a:off x="7891271" y="2194560"/>
-            <a:ext cx="182880" cy="201168"/>
+            <a:off x="7891271" y="2048255"/>
+            <a:ext cx="182880" cy="182880"/>
           </a:xfrm>
           <a:prstGeom prst="chevron">
             <a:avLst/>
@@ -3878,8 +3878,8 @@
         </p:nvSpPr>
         <p:spPr>
           <a:xfrm>
-            <a:off x="8037576" y="1874519"/>
-            <a:ext cx="1755648" cy="841248"/>
+            <a:off x="8037576" y="1746504"/>
+            <a:ext cx="1755648" cy="786384"/>
           </a:xfrm>
           <a:prstGeom prst="roundRect">
             <a:avLst/>
@@ -3909,7 +3909,7 @@
           </a:fontRef>
         </p:style>
         <p:txBody>
-          <a:bodyPr rtlCol="0" anchor="ctr" wrap="square" lIns="54864" rIns="54864" tIns="27432" bIns="27432"/>
+          <a:bodyPr rtlCol="0" anchor="ctr" wrap="square" lIns="64008" rIns="64008" tIns="27432" bIns="27432"/>
           <a:lstStyle/>
           <a:p>
             <a:pPr algn="ctr">
@@ -3921,7 +3921,7 @@
               </a:spcAft>
             </a:pPr>
             <a:r>
-              <a:rPr sz="1150" b="1">
+              <a:rPr sz="1100" b="1">
                 <a:solidFill>
                   <a:srgbClr val="22282E"/>
                 </a:solidFill>
@@ -3941,15 +3941,15 @@
               </a:spcAft>
             </a:pPr>
             <a:r>
-              <a:rPr sz="950" b="0">
+              <a:rPr sz="850" b="0">
                 <a:solidFill>
                   <a:srgbClr val="4B555E"/>
                 </a:solidFill>
                 <a:latin typeface="Noto Sans CJK KR"/>
                 <a:ea typeface="Noto Sans CJK KR"/>
               </a:rPr>
-              <a:t>담당자
-암묵지 의존</a:t>
+              <a:t>베테랑 암묵지
+개인 의존</a:t>
             </a:r>
           </a:p>
         </p:txBody>
@@ -3962,8 +3962,8 @@
         </p:nvSpPr>
         <p:spPr>
           <a:xfrm>
-            <a:off x="9774936" y="2194560"/>
-            <a:ext cx="182880" cy="201168"/>
+            <a:off x="9774936" y="2048255"/>
+            <a:ext cx="182880" cy="182880"/>
           </a:xfrm>
           <a:prstGeom prst="chevron">
             <a:avLst/>
@@ -4006,8 +4006,8 @@
         </p:nvSpPr>
         <p:spPr>
           <a:xfrm>
-            <a:off x="9921240" y="1874519"/>
-            <a:ext cx="1755648" cy="841248"/>
+            <a:off x="9921240" y="1746504"/>
+            <a:ext cx="1755648" cy="786384"/>
           </a:xfrm>
           <a:prstGeom prst="roundRect">
             <a:avLst/>
@@ -4037,7 +4037,7 @@
           </a:fontRef>
         </p:style>
         <p:txBody>
-          <a:bodyPr rtlCol="0" anchor="ctr" wrap="square" lIns="54864" rIns="54864" tIns="27432" bIns="27432"/>
+          <a:bodyPr rtlCol="0" anchor="ctr" wrap="square" lIns="64008" rIns="64008" tIns="27432" bIns="27432"/>
           <a:lstStyle/>
           <a:p>
             <a:pPr algn="ctr">
@@ -4049,7 +4049,7 @@
               </a:spcAft>
             </a:pPr>
             <a:r>
-              <a:rPr sz="1150" b="1">
+              <a:rPr sz="1100" b="1">
                 <a:solidFill>
                   <a:srgbClr val="22282E"/>
                 </a:solidFill>
@@ -4069,7 +4069,7 @@
               </a:spcAft>
             </a:pPr>
             <a:r>
-              <a:rPr sz="950" b="0">
+              <a:rPr sz="850" b="0">
                 <a:solidFill>
                   <a:srgbClr val="4B555E"/>
                 </a:solidFill>
@@ -4090,8 +4090,8 @@
         </p:nvSpPr>
         <p:spPr>
           <a:xfrm>
-            <a:off x="502920" y="2825496"/>
-            <a:ext cx="5522976" cy="566928"/>
+            <a:off x="502920" y="2624328"/>
+            <a:ext cx="7406640" cy="512064"/>
           </a:xfrm>
           <a:prstGeom prst="roundRect">
             <a:avLst/>
@@ -4121,7 +4121,7 @@
           </a:fontRef>
         </p:style>
         <p:txBody>
-          <a:bodyPr rtlCol="0" anchor="ctr" wrap="square" lIns="54864" rIns="54864" tIns="27432" bIns="27432"/>
+          <a:bodyPr rtlCol="0" anchor="ctr" wrap="square" lIns="64008" rIns="64008" tIns="27432" bIns="27432"/>
           <a:lstStyle/>
           <a:p>
             <a:pPr algn="ctr">
@@ -4140,7 +4140,7 @@
                 <a:latin typeface="Noto Sans CJK KR"/>
                 <a:ea typeface="Noto Sans CJK KR"/>
               </a:rPr>
-              <a:t>▲ 병목</a:t>
+              <a:t>▲ 병목 1  시간</a:t>
             </a:r>
           </a:p>
           <a:p>
@@ -4160,7 +4160,7 @@
                 <a:latin typeface="Noto Sans CJK KR"/>
                 <a:ea typeface="Noto Sans CJK KR"/>
               </a:rPr>
-              <a:t>① 수집 · ③ 요약·번역 · ④ 시각화 ─ 반복 수작업에 시간 집중 (시간 병목)</a:t>
+              <a:t>①~④ 수집·정형화 반복업무에 분석가 시간이 과도하게 소모</a:t>
             </a:r>
           </a:p>
         </p:txBody>
@@ -4173,8 +4173,8 @@
         </p:nvSpPr>
         <p:spPr>
           <a:xfrm>
-            <a:off x="8037576" y="2825496"/>
-            <a:ext cx="3639312" cy="566928"/>
+            <a:off x="8037576" y="2624328"/>
+            <a:ext cx="3639312" cy="512064"/>
           </a:xfrm>
           <a:prstGeom prst="roundRect">
             <a:avLst/>
@@ -4204,7 +4204,7 @@
           </a:fontRef>
         </p:style>
         <p:txBody>
-          <a:bodyPr rtlCol="0" anchor="ctr" wrap="square" lIns="54864" rIns="54864" tIns="27432" bIns="27432"/>
+          <a:bodyPr rtlCol="0" anchor="ctr" wrap="square" lIns="64008" rIns="64008" tIns="27432" bIns="27432"/>
           <a:lstStyle/>
           <a:p>
             <a:pPr algn="ctr">
@@ -4223,7 +4223,7 @@
                 <a:latin typeface="Noto Sans CJK KR"/>
                 <a:ea typeface="Noto Sans CJK KR"/>
               </a:rPr>
-              <a:t>▲ 병목</a:t>
+              <a:t>▲ 병목 2  품질·속인화</a:t>
             </a:r>
           </a:p>
           <a:p>
@@ -4243,7 +4243,7 @@
                 <a:latin typeface="Noto Sans CJK KR"/>
                 <a:ea typeface="Noto Sans CJK KR"/>
               </a:rPr>
-              <a:t>⑤ 인사이트·우선순위가 개인 암묵지에 의존 (품질·속인화 병목)</a:t>
+              <a:t>⑤ 인사이트가 개인에 속인화·관점별 분석 미체계 → 편차</a:t>
             </a:r>
           </a:p>
         </p:txBody>
@@ -4256,8 +4256,8 @@
         </p:nvSpPr>
         <p:spPr>
           <a:xfrm>
-            <a:off x="502920" y="4343400"/>
-            <a:ext cx="1234440" cy="310896"/>
+            <a:off x="502920" y="3977639"/>
+            <a:ext cx="1234440" cy="292608"/>
           </a:xfrm>
           <a:prstGeom prst="roundRect">
             <a:avLst/>
@@ -4285,7 +4285,7 @@
           </a:fontRef>
         </p:style>
         <p:txBody>
-          <a:bodyPr rtlCol="0" anchor="ctr" wrap="square" lIns="54864" rIns="54864" tIns="27432" bIns="27432"/>
+          <a:bodyPr rtlCol="0" anchor="ctr" wrap="square" lIns="64008" rIns="64008" tIns="27432" bIns="27432"/>
           <a:lstStyle/>
           <a:p>
             <a:pPr algn="ctr">
@@ -4317,8 +4317,8 @@
         </p:nvSpPr>
         <p:spPr>
           <a:xfrm>
-            <a:off x="1874519" y="4370832"/>
-            <a:ext cx="8503920" cy="274320"/>
+            <a:off x="1874519" y="4005072"/>
+            <a:ext cx="9418320" cy="274320"/>
           </a:xfrm>
           <a:prstGeom prst="rect">
             <a:avLst/>
@@ -4347,7 +4347,7 @@
                 <a:latin typeface="Noto Sans CJK KR"/>
                 <a:ea typeface="Noto Sans CJK KR"/>
               </a:rPr>
-              <a:t>수집~시각화는 AI가 자동화, 사람은 인사이트·암묵지 큐레이션에 집중</a:t>
+              <a:t>L1 수집은 자동화로 '대체', L2~L4 암묵지·4관점 판단은 '증폭' — 최종 판단·책임은 인간</a:t>
             </a:r>
           </a:p>
         </p:txBody>
@@ -4360,8 +4360,69 @@
         </p:nvSpPr>
         <p:spPr>
           <a:xfrm>
-            <a:off x="502920" y="4800600"/>
-            <a:ext cx="1755648" cy="841248"/>
+            <a:off x="539496" y="4526280"/>
+            <a:ext cx="1005840" cy="182880"/>
+          </a:xfrm>
+          <a:prstGeom prst="roundRect">
+            <a:avLst/>
+          </a:prstGeom>
+          <a:solidFill>
+            <a:srgbClr val="2E6E69"/>
+          </a:solidFill>
+          <a:ln>
+            <a:noFill/>
+          </a:ln>
+          <a:effectLst/>
+        </p:spPr>
+        <p:style>
+          <a:lnRef idx="1">
+            <a:schemeClr val="accent1"/>
+          </a:lnRef>
+          <a:fillRef idx="3">
+            <a:schemeClr val="accent1"/>
+          </a:fillRef>
+          <a:effectRef idx="2">
+            <a:schemeClr val="accent1"/>
+          </a:effectRef>
+          <a:fontRef idx="minor">
+            <a:schemeClr val="lt1"/>
+          </a:fontRef>
+        </p:style>
+        <p:txBody>
+          <a:bodyPr rtlCol="0" anchor="ctr" wrap="square" lIns="64008" rIns="64008" tIns="27432" bIns="27432"/>
+          <a:lstStyle/>
+          <a:p>
+            <a:pPr algn="ctr">
+              <a:lnSpc>
+                <a:spcPct val="100000"/>
+              </a:lnSpc>
+              <a:spcAft>
+                <a:spcPts val="0"/>
+              </a:spcAft>
+            </a:pPr>
+            <a:r>
+              <a:rPr sz="750" b="1">
+                <a:solidFill>
+                  <a:srgbClr val="FFFFFF"/>
+                </a:solidFill>
+                <a:latin typeface="Noto Sans CJK KR"/>
+                <a:ea typeface="Noto Sans CJK KR"/>
+              </a:rPr>
+              <a:t>대체 · AI</a:t>
+            </a:r>
+          </a:p>
+        </p:txBody>
+      </p:sp>
+      <p:sp>
+        <p:nvSpPr>
+          <p:cNvPr id="24" name="Rounded Rectangle 23"/>
+          <p:cNvSpPr/>
+          <p:nvPr/>
+        </p:nvSpPr>
+        <p:spPr>
+          <a:xfrm>
+            <a:off x="502920" y="4727448"/>
+            <a:ext cx="2084831" cy="841248"/>
           </a:xfrm>
           <a:prstGeom prst="roundRect">
             <a:avLst/>
@@ -4391,7 +4452,7 @@
           </a:fontRef>
         </p:style>
         <p:txBody>
-          <a:bodyPr rtlCol="0" anchor="ctr" wrap="square" lIns="54864" rIns="54864" tIns="27432" bIns="27432"/>
+          <a:bodyPr rtlCol="0" anchor="ctr" wrap="square" lIns="64008" rIns="64008" tIns="27432" bIns="27432"/>
           <a:lstStyle/>
           <a:p>
             <a:pPr algn="ctr">
@@ -4403,14 +4464,14 @@
               </a:spcAft>
             </a:pPr>
             <a:r>
-              <a:rPr sz="1150" b="1">
+              <a:rPr sz="1050" b="1">
                 <a:solidFill>
                   <a:srgbClr val="2E6E69"/>
                 </a:solidFill>
                 <a:latin typeface="Noto Sans CJK KR"/>
                 <a:ea typeface="Noto Sans CJK KR"/>
               </a:rPr>
-              <a:t>① AI 자동수집</a:t>
+              <a:t>L1  수집 계층</a:t>
             </a:r>
           </a:p>
           <a:p>
@@ -4423,29 +4484,29 @@
               </a:spcAft>
             </a:pPr>
             <a:r>
-              <a:rPr sz="950" b="0">
+              <a:rPr sz="830" b="0">
                 <a:solidFill>
                   <a:srgbClr val="4B555E"/>
                 </a:solidFill>
                 <a:latin typeface="Noto Sans CJK KR"/>
                 <a:ea typeface="Noto Sans CJK KR"/>
               </a:rPr>
-              <a:t>RSS·크롤링·
-검색 자동화</a:t>
-            </a:r>
-          </a:p>
-        </p:txBody>
-      </p:sp>
-      <p:sp>
-        <p:nvSpPr>
-          <p:cNvPr id="24" name="Chevron 23"/>
+              <a:t>뉴스·공시·규제·경쟁사
+크롤링·중복제거·1차 스코어링</a:t>
+            </a:r>
+          </a:p>
+        </p:txBody>
+      </p:sp>
+      <p:sp>
+        <p:nvSpPr>
+          <p:cNvPr id="25" name="Chevron 24"/>
           <p:cNvSpPr/>
           <p:nvPr/>
         </p:nvSpPr>
         <p:spPr>
           <a:xfrm>
-            <a:off x="2240279" y="5120640"/>
-            <a:ext cx="182880" cy="201168"/>
+            <a:off x="2578608" y="5056632"/>
+            <a:ext cx="228600" cy="182880"/>
           </a:xfrm>
           <a:prstGeom prst="chevron">
             <a:avLst/>
@@ -4482,14 +4543,264 @@
       </p:sp>
       <p:sp>
         <p:nvSpPr>
-          <p:cNvPr id="25" name="Rounded Rectangle 24"/>
+          <p:cNvPr id="26" name="Rounded Rectangle 25"/>
           <p:cNvSpPr/>
           <p:nvPr/>
         </p:nvSpPr>
         <p:spPr>
           <a:xfrm>
-            <a:off x="2386584" y="4800600"/>
-            <a:ext cx="1755648" cy="841248"/>
+            <a:off x="2807208" y="4526280"/>
+            <a:ext cx="1005840" cy="182880"/>
+          </a:xfrm>
+          <a:prstGeom prst="roundRect">
+            <a:avLst/>
+          </a:prstGeom>
+          <a:solidFill>
+            <a:srgbClr val="8A5A1E"/>
+          </a:solidFill>
+          <a:ln>
+            <a:noFill/>
+          </a:ln>
+          <a:effectLst/>
+        </p:spPr>
+        <p:style>
+          <a:lnRef idx="1">
+            <a:schemeClr val="accent1"/>
+          </a:lnRef>
+          <a:fillRef idx="3">
+            <a:schemeClr val="accent1"/>
+          </a:fillRef>
+          <a:effectRef idx="2">
+            <a:schemeClr val="accent1"/>
+          </a:effectRef>
+          <a:fontRef idx="minor">
+            <a:schemeClr val="lt1"/>
+          </a:fontRef>
+        </p:style>
+        <p:txBody>
+          <a:bodyPr rtlCol="0" anchor="ctr" wrap="square" lIns="64008" rIns="64008" tIns="27432" bIns="27432"/>
+          <a:lstStyle/>
+          <a:p>
+            <a:pPr algn="ctr">
+              <a:lnSpc>
+                <a:spcPct val="100000"/>
+              </a:lnSpc>
+              <a:spcAft>
+                <a:spcPts val="0"/>
+              </a:spcAft>
+            </a:pPr>
+            <a:r>
+              <a:rPr sz="750" b="1">
+                <a:solidFill>
+                  <a:srgbClr val="FFFFFF"/>
+                </a:solidFill>
+                <a:latin typeface="Noto Sans CJK KR"/>
+                <a:ea typeface="Noto Sans CJK KR"/>
+              </a:rPr>
+              <a:t>증폭 · moat</a:t>
+            </a:r>
+          </a:p>
+        </p:txBody>
+      </p:sp>
+      <p:sp>
+        <p:nvSpPr>
+          <p:cNvPr id="27" name="Rounded Rectangle 26"/>
+          <p:cNvSpPr/>
+          <p:nvPr/>
+        </p:nvSpPr>
+        <p:spPr>
+          <a:xfrm>
+            <a:off x="2770632" y="4727448"/>
+            <a:ext cx="2084831" cy="841248"/>
+          </a:xfrm>
+          <a:prstGeom prst="roundRect">
+            <a:avLst/>
+          </a:prstGeom>
+          <a:solidFill>
+            <a:srgbClr val="F3ECDF"/>
+          </a:solidFill>
+          <a:ln w="12700">
+            <a:solidFill>
+              <a:srgbClr val="8A5A1E"/>
+            </a:solidFill>
+          </a:ln>
+          <a:effectLst/>
+        </p:spPr>
+        <p:style>
+          <a:lnRef idx="1">
+            <a:schemeClr val="accent1"/>
+          </a:lnRef>
+          <a:fillRef idx="3">
+            <a:schemeClr val="accent1"/>
+          </a:fillRef>
+          <a:effectRef idx="2">
+            <a:schemeClr val="accent1"/>
+          </a:effectRef>
+          <a:fontRef idx="minor">
+            <a:schemeClr val="lt1"/>
+          </a:fontRef>
+        </p:style>
+        <p:txBody>
+          <a:bodyPr rtlCol="0" anchor="ctr" wrap="square" lIns="64008" rIns="64008" tIns="27432" bIns="27432"/>
+          <a:lstStyle/>
+          <a:p>
+            <a:pPr algn="ctr">
+              <a:lnSpc>
+                <a:spcPct val="100000"/>
+              </a:lnSpc>
+              <a:spcAft>
+                <a:spcPts val="200"/>
+              </a:spcAft>
+            </a:pPr>
+            <a:r>
+              <a:rPr sz="1050" b="1">
+                <a:solidFill>
+                  <a:srgbClr val="8A5A1E"/>
+                </a:solidFill>
+                <a:latin typeface="Noto Sans CJK KR"/>
+                <a:ea typeface="Noto Sans CJK KR"/>
+              </a:rPr>
+              <a:t>L2  지식 계층 ★</a:t>
+            </a:r>
+          </a:p>
+          <a:p>
+            <a:pPr algn="ctr">
+              <a:lnSpc>
+                <a:spcPct val="100000"/>
+              </a:lnSpc>
+              <a:spcAft>
+                <a:spcPts val="0"/>
+              </a:spcAft>
+            </a:pPr>
+            <a:r>
+              <a:rPr sz="830" b="0">
+                <a:solidFill>
+                  <a:srgbClr val="4B555E"/>
+                </a:solidFill>
+                <a:latin typeface="Noto Sans CJK KR"/>
+                <a:ea typeface="Noto Sans CJK KR"/>
+              </a:rPr>
+              <a:t>베테랑 암묵지 KB (moat)
+수주/실주·근거 코퍼스·RAG</a:t>
+            </a:r>
+          </a:p>
+        </p:txBody>
+      </p:sp>
+      <p:sp>
+        <p:nvSpPr>
+          <p:cNvPr id="28" name="Chevron 27"/>
+          <p:cNvSpPr/>
+          <p:nvPr/>
+        </p:nvSpPr>
+        <p:spPr>
+          <a:xfrm>
+            <a:off x="4846320" y="5056632"/>
+            <a:ext cx="228600" cy="182880"/>
+          </a:xfrm>
+          <a:prstGeom prst="chevron">
+            <a:avLst/>
+          </a:prstGeom>
+          <a:solidFill>
+            <a:srgbClr val="8A5A1E"/>
+          </a:solidFill>
+          <a:ln>
+            <a:noFill/>
+          </a:ln>
+          <a:effectLst/>
+        </p:spPr>
+        <p:style>
+          <a:lnRef idx="1">
+            <a:schemeClr val="accent1"/>
+          </a:lnRef>
+          <a:fillRef idx="3">
+            <a:schemeClr val="accent1"/>
+          </a:fillRef>
+          <a:effectRef idx="2">
+            <a:schemeClr val="accent1"/>
+          </a:effectRef>
+          <a:fontRef idx="minor">
+            <a:schemeClr val="lt1"/>
+          </a:fontRef>
+        </p:style>
+        <p:txBody>
+          <a:bodyPr rtlCol="0" anchor="ctr"/>
+          <a:lstStyle/>
+          <a:p>
+            <a:pPr algn="ctr"/>
+          </a:p>
+        </p:txBody>
+      </p:sp>
+      <p:sp>
+        <p:nvSpPr>
+          <p:cNvPr id="29" name="Rounded Rectangle 28"/>
+          <p:cNvSpPr/>
+          <p:nvPr/>
+        </p:nvSpPr>
+        <p:spPr>
+          <a:xfrm>
+            <a:off x="5074920" y="4526280"/>
+            <a:ext cx="1005840" cy="182880"/>
+          </a:xfrm>
+          <a:prstGeom prst="roundRect">
+            <a:avLst/>
+          </a:prstGeom>
+          <a:solidFill>
+            <a:srgbClr val="2E6E69"/>
+          </a:solidFill>
+          <a:ln>
+            <a:noFill/>
+          </a:ln>
+          <a:effectLst/>
+        </p:spPr>
+        <p:style>
+          <a:lnRef idx="1">
+            <a:schemeClr val="accent1"/>
+          </a:lnRef>
+          <a:fillRef idx="3">
+            <a:schemeClr val="accent1"/>
+          </a:fillRef>
+          <a:effectRef idx="2">
+            <a:schemeClr val="accent1"/>
+          </a:effectRef>
+          <a:fontRef idx="minor">
+            <a:schemeClr val="lt1"/>
+          </a:fontRef>
+        </p:style>
+        <p:txBody>
+          <a:bodyPr rtlCol="0" anchor="ctr" wrap="square" lIns="64008" rIns="64008" tIns="27432" bIns="27432"/>
+          <a:lstStyle/>
+          <a:p>
+            <a:pPr algn="ctr">
+              <a:lnSpc>
+                <a:spcPct val="100000"/>
+              </a:lnSpc>
+              <a:spcAft>
+                <a:spcPts val="0"/>
+              </a:spcAft>
+            </a:pPr>
+            <a:r>
+              <a:rPr sz="750" b="1">
+                <a:solidFill>
+                  <a:srgbClr val="FFFFFF"/>
+                </a:solidFill>
+                <a:latin typeface="Noto Sans CJK KR"/>
+                <a:ea typeface="Noto Sans CJK KR"/>
+              </a:rPr>
+              <a:t>증폭 · MAGI</a:t>
+            </a:r>
+          </a:p>
+        </p:txBody>
+      </p:sp>
+      <p:sp>
+        <p:nvSpPr>
+          <p:cNvPr id="30" name="Rounded Rectangle 29"/>
+          <p:cNvSpPr/>
+          <p:nvPr/>
+        </p:nvSpPr>
+        <p:spPr>
+          <a:xfrm>
+            <a:off x="5038344" y="4727448"/>
+            <a:ext cx="2084831" cy="841248"/>
           </a:xfrm>
           <a:prstGeom prst="roundRect">
             <a:avLst/>
@@ -4519,7 +4830,7 @@
           </a:fontRef>
         </p:style>
         <p:txBody>
-          <a:bodyPr rtlCol="0" anchor="ctr" wrap="square" lIns="54864" rIns="54864" tIns="27432" bIns="27432"/>
+          <a:bodyPr rtlCol="0" anchor="ctr" wrap="square" lIns="64008" rIns="64008" tIns="27432" bIns="27432"/>
           <a:lstStyle/>
           <a:p>
             <a:pPr algn="ctr">
@@ -4531,14 +4842,14 @@
               </a:spcAft>
             </a:pPr>
             <a:r>
-              <a:rPr sz="1150" b="1">
+              <a:rPr sz="1050" b="1">
                 <a:solidFill>
                   <a:srgbClr val="2E6E69"/>
                 </a:solidFill>
                 <a:latin typeface="Noto Sans CJK KR"/>
                 <a:ea typeface="Noto Sans CJK KR"/>
               </a:rPr>
-              <a:t>② AI 분류</a:t>
+              <a:t>L3  에이전트 계층</a:t>
             </a:r>
           </a:p>
           <a:p>
@@ -4551,29 +4862,29 @@
               </a:spcAft>
             </a:pPr>
             <a:r>
-              <a:rPr sz="950" b="0">
+              <a:rPr sz="830" b="0">
                 <a:solidFill>
                   <a:srgbClr val="4B555E"/>
                 </a:solidFill>
                 <a:latin typeface="Noto Sans CJK KR"/>
                 <a:ea typeface="Noto Sans CJK KR"/>
               </a:rPr>
-              <a:t>중요도·카테고리
-자동 태깅</a:t>
-            </a:r>
-          </a:p>
-        </p:txBody>
-      </p:sp>
-      <p:sp>
-        <p:nvSpPr>
-          <p:cNvPr id="26" name="Chevron 25"/>
+              <a:t>기획·영업·기술위협·경쟁사
+4관점 MAGI · 관점충돌=신호</a:t>
+            </a:r>
+          </a:p>
+        </p:txBody>
+      </p:sp>
+      <p:sp>
+        <p:nvSpPr>
+          <p:cNvPr id="31" name="Chevron 30"/>
           <p:cNvSpPr/>
           <p:nvPr/>
         </p:nvSpPr>
         <p:spPr>
           <a:xfrm>
-            <a:off x="4123944" y="5120640"/>
-            <a:ext cx="182880" cy="201168"/>
+            <a:off x="7114031" y="5056632"/>
+            <a:ext cx="228600" cy="182880"/>
           </a:xfrm>
           <a:prstGeom prst="chevron">
             <a:avLst/>
@@ -4610,14 +4921,411 @@
       </p:sp>
       <p:sp>
         <p:nvSpPr>
-          <p:cNvPr id="27" name="Rounded Rectangle 26"/>
+          <p:cNvPr id="32" name="Rounded Rectangle 31"/>
           <p:cNvSpPr/>
           <p:nvPr/>
         </p:nvSpPr>
         <p:spPr>
           <a:xfrm>
-            <a:off x="4270248" y="4800600"/>
-            <a:ext cx="1755648" cy="841248"/>
+            <a:off x="7342631" y="4526280"/>
+            <a:ext cx="1005840" cy="182880"/>
+          </a:xfrm>
+          <a:prstGeom prst="roundRect">
+            <a:avLst/>
+          </a:prstGeom>
+          <a:solidFill>
+            <a:srgbClr val="8A5A1E"/>
+          </a:solidFill>
+          <a:ln>
+            <a:noFill/>
+          </a:ln>
+          <a:effectLst/>
+        </p:spPr>
+        <p:style>
+          <a:lnRef idx="1">
+            <a:schemeClr val="accent1"/>
+          </a:lnRef>
+          <a:fillRef idx="3">
+            <a:schemeClr val="accent1"/>
+          </a:fillRef>
+          <a:effectRef idx="2">
+            <a:schemeClr val="accent1"/>
+          </a:effectRef>
+          <a:fontRef idx="minor">
+            <a:schemeClr val="lt1"/>
+          </a:fontRef>
+        </p:style>
+        <p:txBody>
+          <a:bodyPr rtlCol="0" anchor="ctr" wrap="square" lIns="64008" rIns="64008" tIns="27432" bIns="27432"/>
+          <a:lstStyle/>
+          <a:p>
+            <a:pPr algn="ctr">
+              <a:lnSpc>
+                <a:spcPct val="100000"/>
+              </a:lnSpc>
+              <a:spcAft>
+                <a:spcPts val="0"/>
+              </a:spcAft>
+            </a:pPr>
+            <a:r>
+              <a:rPr sz="750" b="1">
+                <a:solidFill>
+                  <a:srgbClr val="FFFFFF"/>
+                </a:solidFill>
+                <a:latin typeface="Noto Sans CJK KR"/>
+                <a:ea typeface="Noto Sans CJK KR"/>
+              </a:rPr>
+              <a:t>증폭 · 인간</a:t>
+            </a:r>
+          </a:p>
+        </p:txBody>
+      </p:sp>
+      <p:sp>
+        <p:nvSpPr>
+          <p:cNvPr id="33" name="Rounded Rectangle 32"/>
+          <p:cNvSpPr/>
+          <p:nvPr/>
+        </p:nvSpPr>
+        <p:spPr>
+          <a:xfrm>
+            <a:off x="7306055" y="4727448"/>
+            <a:ext cx="2084831" cy="841248"/>
+          </a:xfrm>
+          <a:prstGeom prst="roundRect">
+            <a:avLst/>
+          </a:prstGeom>
+          <a:solidFill>
+            <a:srgbClr val="F3ECDF"/>
+          </a:solidFill>
+          <a:ln w="12700">
+            <a:solidFill>
+              <a:srgbClr val="8A5A1E"/>
+            </a:solidFill>
+          </a:ln>
+          <a:effectLst/>
+        </p:spPr>
+        <p:style>
+          <a:lnRef idx="1">
+            <a:schemeClr val="accent1"/>
+          </a:lnRef>
+          <a:fillRef idx="3">
+            <a:schemeClr val="accent1"/>
+          </a:fillRef>
+          <a:effectRef idx="2">
+            <a:schemeClr val="accent1"/>
+          </a:effectRef>
+          <a:fontRef idx="minor">
+            <a:schemeClr val="lt1"/>
+          </a:fontRef>
+        </p:style>
+        <p:txBody>
+          <a:bodyPr rtlCol="0" anchor="ctr" wrap="square" lIns="64008" rIns="64008" tIns="27432" bIns="27432"/>
+          <a:lstStyle/>
+          <a:p>
+            <a:pPr algn="ctr">
+              <a:lnSpc>
+                <a:spcPct val="100000"/>
+              </a:lnSpc>
+              <a:spcAft>
+                <a:spcPts val="200"/>
+              </a:spcAft>
+            </a:pPr>
+            <a:r>
+              <a:rPr sz="1050" b="1">
+                <a:solidFill>
+                  <a:srgbClr val="8A5A1E"/>
+                </a:solidFill>
+                <a:latin typeface="Noto Sans CJK KR"/>
+                <a:ea typeface="Noto Sans CJK KR"/>
+              </a:rPr>
+              <a:t>L4  종합·판단</a:t>
+            </a:r>
+          </a:p>
+          <a:p>
+            <a:pPr algn="ctr">
+              <a:lnSpc>
+                <a:spcPct val="100000"/>
+              </a:lnSpc>
+              <a:spcAft>
+                <a:spcPts val="0"/>
+              </a:spcAft>
+            </a:pPr>
+            <a:r>
+              <a:rPr sz="830" b="0">
+                <a:solidFill>
+                  <a:srgbClr val="4B555E"/>
+                </a:solidFill>
+                <a:latin typeface="Noto Sans CJK KR"/>
+                <a:ea typeface="Noto Sans CJK KR"/>
+              </a:rPr>
+              <a:t>휴먼인더루프
+채택/기각·good/bad 라벨</a:t>
+            </a:r>
+          </a:p>
+        </p:txBody>
+      </p:sp>
+      <p:sp>
+        <p:nvSpPr>
+          <p:cNvPr id="34" name="Chevron 33"/>
+          <p:cNvSpPr/>
+          <p:nvPr/>
+        </p:nvSpPr>
+        <p:spPr>
+          <a:xfrm>
+            <a:off x="9381744" y="5056632"/>
+            <a:ext cx="228600" cy="182880"/>
+          </a:xfrm>
+          <a:prstGeom prst="chevron">
+            <a:avLst/>
+          </a:prstGeom>
+          <a:solidFill>
+            <a:srgbClr val="8A5A1E"/>
+          </a:solidFill>
+          <a:ln>
+            <a:noFill/>
+          </a:ln>
+          <a:effectLst/>
+        </p:spPr>
+        <p:style>
+          <a:lnRef idx="1">
+            <a:schemeClr val="accent1"/>
+          </a:lnRef>
+          <a:fillRef idx="3">
+            <a:schemeClr val="accent1"/>
+          </a:fillRef>
+          <a:effectRef idx="2">
+            <a:schemeClr val="accent1"/>
+          </a:effectRef>
+          <a:fontRef idx="minor">
+            <a:schemeClr val="lt1"/>
+          </a:fontRef>
+        </p:style>
+        <p:txBody>
+          <a:bodyPr rtlCol="0" anchor="ctr"/>
+          <a:lstStyle/>
+          <a:p>
+            <a:pPr algn="ctr"/>
+          </a:p>
+        </p:txBody>
+      </p:sp>
+      <p:sp>
+        <p:nvSpPr>
+          <p:cNvPr id="35" name="Rounded Rectangle 34"/>
+          <p:cNvSpPr/>
+          <p:nvPr/>
+        </p:nvSpPr>
+        <p:spPr>
+          <a:xfrm>
+            <a:off x="9610344" y="4526280"/>
+            <a:ext cx="1005840" cy="182880"/>
+          </a:xfrm>
+          <a:prstGeom prst="roundRect">
+            <a:avLst/>
+          </a:prstGeom>
+          <a:solidFill>
+            <a:srgbClr val="8A939B"/>
+          </a:solidFill>
+          <a:ln>
+            <a:noFill/>
+          </a:ln>
+          <a:effectLst/>
+        </p:spPr>
+        <p:style>
+          <a:lnRef idx="1">
+            <a:schemeClr val="accent1"/>
+          </a:lnRef>
+          <a:fillRef idx="3">
+            <a:schemeClr val="accent1"/>
+          </a:fillRef>
+          <a:effectRef idx="2">
+            <a:schemeClr val="accent1"/>
+          </a:effectRef>
+          <a:fontRef idx="minor">
+            <a:schemeClr val="lt1"/>
+          </a:fontRef>
+        </p:style>
+        <p:txBody>
+          <a:bodyPr rtlCol="0" anchor="ctr" wrap="square" lIns="64008" rIns="64008" tIns="27432" bIns="27432"/>
+          <a:lstStyle/>
+          <a:p>
+            <a:pPr algn="ctr">
+              <a:lnSpc>
+                <a:spcPct val="100000"/>
+              </a:lnSpc>
+              <a:spcAft>
+                <a:spcPts val="0"/>
+              </a:spcAft>
+            </a:pPr>
+            <a:r>
+              <a:rPr sz="750" b="1">
+                <a:solidFill>
+                  <a:srgbClr val="FFFFFF"/>
+                </a:solidFill>
+                <a:latin typeface="Noto Sans CJK KR"/>
+                <a:ea typeface="Noto Sans CJK KR"/>
+              </a:rPr>
+              <a:t>학습</a:t>
+            </a:r>
+          </a:p>
+        </p:txBody>
+      </p:sp>
+      <p:sp>
+        <p:nvSpPr>
+          <p:cNvPr id="36" name="Rounded Rectangle 35"/>
+          <p:cNvSpPr/>
+          <p:nvPr/>
+        </p:nvSpPr>
+        <p:spPr>
+          <a:xfrm>
+            <a:off x="9573768" y="4727448"/>
+            <a:ext cx="2084831" cy="841248"/>
+          </a:xfrm>
+          <a:prstGeom prst="roundRect">
+            <a:avLst/>
+          </a:prstGeom>
+          <a:solidFill>
+            <a:srgbClr val="F5F6F7"/>
+          </a:solidFill>
+          <a:ln w="12700">
+            <a:solidFill>
+              <a:srgbClr val="8A939B"/>
+            </a:solidFill>
+          </a:ln>
+          <a:effectLst/>
+        </p:spPr>
+        <p:style>
+          <a:lnRef idx="1">
+            <a:schemeClr val="accent1"/>
+          </a:lnRef>
+          <a:fillRef idx="3">
+            <a:schemeClr val="accent1"/>
+          </a:fillRef>
+          <a:effectRef idx="2">
+            <a:schemeClr val="accent1"/>
+          </a:effectRef>
+          <a:fontRef idx="minor">
+            <a:schemeClr val="lt1"/>
+          </a:fontRef>
+        </p:style>
+        <p:txBody>
+          <a:bodyPr rtlCol="0" anchor="ctr" wrap="square" lIns="64008" rIns="64008" tIns="27432" bIns="27432"/>
+          <a:lstStyle/>
+          <a:p>
+            <a:pPr algn="ctr">
+              <a:lnSpc>
+                <a:spcPct val="100000"/>
+              </a:lnSpc>
+              <a:spcAft>
+                <a:spcPts val="200"/>
+              </a:spcAft>
+            </a:pPr>
+            <a:r>
+              <a:rPr sz="1050" b="1">
+                <a:solidFill>
+                  <a:srgbClr val="4B555E"/>
+                </a:solidFill>
+                <a:latin typeface="Noto Sans CJK KR"/>
+                <a:ea typeface="Noto Sans CJK KR"/>
+              </a:rPr>
+              <a:t>L5  학습 계층</a:t>
+            </a:r>
+          </a:p>
+          <a:p>
+            <a:pPr algn="ctr">
+              <a:lnSpc>
+                <a:spcPct val="100000"/>
+              </a:lnSpc>
+              <a:spcAft>
+                <a:spcPts val="0"/>
+              </a:spcAft>
+            </a:pPr>
+            <a:r>
+              <a:rPr sz="830" b="0">
+                <a:solidFill>
+                  <a:srgbClr val="4B555E"/>
+                </a:solidFill>
+                <a:latin typeface="Noto Sans CJK KR"/>
+                <a:ea typeface="Noto Sans CJK KR"/>
+              </a:rPr>
+              <a:t>사례 축적·루브릭/프롬프트
+개선 (피드백 루프)</a:t>
+            </a:r>
+          </a:p>
+        </p:txBody>
+      </p:sp>
+      <p:sp>
+        <p:nvSpPr>
+          <p:cNvPr id="37" name="Rounded Rectangle 36"/>
+          <p:cNvSpPr/>
+          <p:nvPr/>
+        </p:nvSpPr>
+        <p:spPr>
+          <a:xfrm>
+            <a:off x="502920" y="5678424"/>
+            <a:ext cx="11155680" cy="310896"/>
+          </a:xfrm>
+          <a:prstGeom prst="roundRect">
+            <a:avLst/>
+          </a:prstGeom>
+          <a:solidFill>
+            <a:srgbClr val="FBFBFC"/>
+          </a:solidFill>
+          <a:ln w="9525">
+            <a:solidFill>
+              <a:srgbClr val="D5D9DD"/>
+            </a:solidFill>
+          </a:ln>
+          <a:effectLst/>
+        </p:spPr>
+        <p:style>
+          <a:lnRef idx="1">
+            <a:schemeClr val="accent1"/>
+          </a:lnRef>
+          <a:fillRef idx="3">
+            <a:schemeClr val="accent1"/>
+          </a:fillRef>
+          <a:effectRef idx="2">
+            <a:schemeClr val="accent1"/>
+          </a:effectRef>
+          <a:fontRef idx="minor">
+            <a:schemeClr val="lt1"/>
+          </a:fontRef>
+        </p:style>
+        <p:txBody>
+          <a:bodyPr rtlCol="0" anchor="ctr" wrap="square" lIns="64008" rIns="64008" tIns="27432" bIns="27432"/>
+          <a:lstStyle/>
+          <a:p>
+            <a:pPr algn="ctr">
+              <a:lnSpc>
+                <a:spcPct val="100000"/>
+              </a:lnSpc>
+              <a:spcAft>
+                <a:spcPts val="0"/>
+              </a:spcAft>
+            </a:pPr>
+            <a:r>
+              <a:rPr sz="900" b="0">
+                <a:solidFill>
+                  <a:srgbClr val="4B555E"/>
+                </a:solidFill>
+                <a:latin typeface="Noto Sans CJK KR"/>
+                <a:ea typeface="Noto Sans CJK KR"/>
+              </a:rPr>
+              <a:t>↺  피드백 루프 : L5 good/bad 라벨·사례가 few-shot·검색 컨텍스트로 L2·L3에 재투입 → 관점별 인사이트 품질 개선</a:t>
+            </a:r>
+          </a:p>
+        </p:txBody>
+      </p:sp>
+      <p:sp>
+        <p:nvSpPr>
+          <p:cNvPr id="38" name="Rounded Rectangle 37"/>
+          <p:cNvSpPr/>
+          <p:nvPr/>
+        </p:nvSpPr>
+        <p:spPr>
+          <a:xfrm>
+            <a:off x="10881360" y="3995927"/>
+            <a:ext cx="182880" cy="182880"/>
           </a:xfrm>
           <a:prstGeom prst="roundRect">
             <a:avLst/>
@@ -4647,7 +5355,7 @@
           </a:fontRef>
         </p:style>
         <p:txBody>
-          <a:bodyPr rtlCol="0" anchor="ctr" wrap="square" lIns="54864" rIns="54864" tIns="27432" bIns="27432"/>
+          <a:bodyPr rtlCol="0" anchor="ctr" wrap="square" lIns="64008" rIns="64008" tIns="27432" bIns="27432"/>
           <a:lstStyle/>
           <a:p>
             <a:pPr algn="ctr">
@@ -4655,225 +5363,75 @@
                 <a:spcPct val="100000"/>
               </a:lnSpc>
               <a:spcAft>
-                <a:spcPts val="200"/>
-              </a:spcAft>
-            </a:pPr>
-            <a:r>
-              <a:rPr sz="1150" b="1">
+                <a:spcPts val="0"/>
+              </a:spcAft>
+            </a:pPr>
+            <a:r>
+              <a:rPr sz="100" b="0">
                 <a:solidFill>
                   <a:srgbClr val="2E6E69"/>
                 </a:solidFill>
                 <a:latin typeface="Noto Sans CJK KR"/>
                 <a:ea typeface="Noto Sans CJK KR"/>
               </a:rPr>
-              <a:t>③ AI 요약·번역</a:t>
-            </a:r>
-          </a:p>
-          <a:p>
-            <a:pPr algn="ctr">
-              <a:lnSpc>
-                <a:spcPct val="100000"/>
+              <a:t/>
+            </a:r>
+          </a:p>
+        </p:txBody>
+      </p:sp>
+      <p:sp>
+        <p:nvSpPr>
+          <p:cNvPr id="39" name="TextBox 38"/>
+          <p:cNvSpPr txBox="1"/>
+          <p:nvPr/>
+        </p:nvSpPr>
+        <p:spPr>
+          <a:xfrm>
+            <a:off x="11119104" y="4005071"/>
+            <a:ext cx="1188720" cy="182880"/>
+          </a:xfrm>
+          <a:prstGeom prst="rect">
+            <a:avLst/>
+          </a:prstGeom>
+          <a:noFill/>
+        </p:spPr>
+        <p:txBody>
+          <a:bodyPr wrap="square" anchor="t" lIns="0" rIns="0" tIns="0" bIns="0">
+            <a:spAutoFit/>
+          </a:bodyPr>
+          <a:lstStyle/>
+          <a:p>
+            <a:pPr algn="l">
+              <a:lnSpc>
+                <a:spcPct val="105000"/>
               </a:lnSpc>
               <a:spcAft>
                 <a:spcPts val="0"/>
               </a:spcAft>
             </a:pPr>
             <a:r>
-              <a:rPr sz="950" b="0">
+              <a:rPr sz="850" b="0">
                 <a:solidFill>
                   <a:srgbClr val="4B555E"/>
                 </a:solidFill>
                 <a:latin typeface="Noto Sans CJK KR"/>
                 <a:ea typeface="Noto Sans CJK KR"/>
               </a:rPr>
-              <a:t>용어·차별점
-초안 자동생성</a:t>
-            </a:r>
-          </a:p>
-        </p:txBody>
-      </p:sp>
-      <p:sp>
-        <p:nvSpPr>
-          <p:cNvPr id="28" name="Chevron 27"/>
+              <a:t>대체(AI)</a:t>
+            </a:r>
+          </a:p>
+        </p:txBody>
+      </p:sp>
+      <p:sp>
+        <p:nvSpPr>
+          <p:cNvPr id="40" name="Rounded Rectangle 39"/>
           <p:cNvSpPr/>
           <p:nvPr/>
         </p:nvSpPr>
         <p:spPr>
           <a:xfrm>
-            <a:off x="6007608" y="5120640"/>
-            <a:ext cx="182880" cy="201168"/>
-          </a:xfrm>
-          <a:prstGeom prst="chevron">
-            <a:avLst/>
-          </a:prstGeom>
-          <a:solidFill>
-            <a:srgbClr val="2E6E69"/>
-          </a:solidFill>
-          <a:ln>
-            <a:noFill/>
-          </a:ln>
-          <a:effectLst/>
-        </p:spPr>
-        <p:style>
-          <a:lnRef idx="1">
-            <a:schemeClr val="accent1"/>
-          </a:lnRef>
-          <a:fillRef idx="3">
-            <a:schemeClr val="accent1"/>
-          </a:fillRef>
-          <a:effectRef idx="2">
-            <a:schemeClr val="accent1"/>
-          </a:effectRef>
-          <a:fontRef idx="minor">
-            <a:schemeClr val="lt1"/>
-          </a:fontRef>
-        </p:style>
-        <p:txBody>
-          <a:bodyPr rtlCol="0" anchor="ctr"/>
-          <a:lstStyle/>
-          <a:p>
-            <a:pPr algn="ctr"/>
-          </a:p>
-        </p:txBody>
-      </p:sp>
-      <p:sp>
-        <p:nvSpPr>
-          <p:cNvPr id="29" name="Rounded Rectangle 28"/>
-          <p:cNvSpPr/>
-          <p:nvPr/>
-        </p:nvSpPr>
-        <p:spPr>
-          <a:xfrm>
-            <a:off x="6153912" y="4800600"/>
-            <a:ext cx="1755648" cy="841248"/>
-          </a:xfrm>
-          <a:prstGeom prst="roundRect">
-            <a:avLst/>
-          </a:prstGeom>
-          <a:solidFill>
-            <a:srgbClr val="E7F0EE"/>
-          </a:solidFill>
-          <a:ln w="12700">
-            <a:solidFill>
-              <a:srgbClr val="2E6E69"/>
-            </a:solidFill>
-          </a:ln>
-          <a:effectLst/>
-        </p:spPr>
-        <p:style>
-          <a:lnRef idx="1">
-            <a:schemeClr val="accent1"/>
-          </a:lnRef>
-          <a:fillRef idx="3">
-            <a:schemeClr val="accent1"/>
-          </a:fillRef>
-          <a:effectRef idx="2">
-            <a:schemeClr val="accent1"/>
-          </a:effectRef>
-          <a:fontRef idx="minor">
-            <a:schemeClr val="lt1"/>
-          </a:fontRef>
-        </p:style>
-        <p:txBody>
-          <a:bodyPr rtlCol="0" anchor="ctr" wrap="square" lIns="54864" rIns="54864" tIns="27432" bIns="27432"/>
-          <a:lstStyle/>
-          <a:p>
-            <a:pPr algn="ctr">
-              <a:lnSpc>
-                <a:spcPct val="100000"/>
-              </a:lnSpc>
-              <a:spcAft>
-                <a:spcPts val="200"/>
-              </a:spcAft>
-            </a:pPr>
-            <a:r>
-              <a:rPr sz="1150" b="1">
-                <a:solidFill>
-                  <a:srgbClr val="2E6E69"/>
-                </a:solidFill>
-                <a:latin typeface="Noto Sans CJK KR"/>
-                <a:ea typeface="Noto Sans CJK KR"/>
-              </a:rPr>
-              <a:t>④ AI 시각화</a:t>
-            </a:r>
-          </a:p>
-          <a:p>
-            <a:pPr algn="ctr">
-              <a:lnSpc>
-                <a:spcPct val="100000"/>
-              </a:lnSpc>
-              <a:spcAft>
-                <a:spcPts val="0"/>
-              </a:spcAft>
-            </a:pPr>
-            <a:r>
-              <a:rPr sz="950" b="0">
-                <a:solidFill>
-                  <a:srgbClr val="4B555E"/>
-                </a:solidFill>
-                <a:latin typeface="Noto Sans CJK KR"/>
-                <a:ea typeface="Noto Sans CJK KR"/>
-              </a:rPr>
-              <a:t>표·수치
-자동 보완</a:t>
-            </a:r>
-          </a:p>
-        </p:txBody>
-      </p:sp>
-      <p:sp>
-        <p:nvSpPr>
-          <p:cNvPr id="30" name="Chevron 29"/>
-          <p:cNvSpPr/>
-          <p:nvPr/>
-        </p:nvSpPr>
-        <p:spPr>
-          <a:xfrm>
-            <a:off x="7891271" y="5120640"/>
-            <a:ext cx="182880" cy="201168"/>
-          </a:xfrm>
-          <a:prstGeom prst="chevron">
-            <a:avLst/>
-          </a:prstGeom>
-          <a:solidFill>
-            <a:srgbClr val="8A5A1E"/>
-          </a:solidFill>
-          <a:ln>
-            <a:noFill/>
-          </a:ln>
-          <a:effectLst/>
-        </p:spPr>
-        <p:style>
-          <a:lnRef idx="1">
-            <a:schemeClr val="accent1"/>
-          </a:lnRef>
-          <a:fillRef idx="3">
-            <a:schemeClr val="accent1"/>
-          </a:fillRef>
-          <a:effectRef idx="2">
-            <a:schemeClr val="accent1"/>
-          </a:effectRef>
-          <a:fontRef idx="minor">
-            <a:schemeClr val="lt1"/>
-          </a:fontRef>
-        </p:style>
-        <p:txBody>
-          <a:bodyPr rtlCol="0" anchor="ctr"/>
-          <a:lstStyle/>
-          <a:p>
-            <a:pPr algn="ctr"/>
-          </a:p>
-        </p:txBody>
-      </p:sp>
-      <p:sp>
-        <p:nvSpPr>
-          <p:cNvPr id="31" name="Rounded Rectangle 30"/>
-          <p:cNvSpPr/>
-          <p:nvPr/>
-        </p:nvSpPr>
-        <p:spPr>
-          <a:xfrm>
-            <a:off x="8037576" y="4800600"/>
-            <a:ext cx="1755648" cy="841248"/>
+            <a:off x="10881360" y="4242815"/>
+            <a:ext cx="182880" cy="182880"/>
           </a:xfrm>
           <a:prstGeom prst="roundRect">
             <a:avLst/>
@@ -4903,7 +5461,7 @@
           </a:fontRef>
         </p:style>
         <p:txBody>
-          <a:bodyPr rtlCol="0" anchor="ctr" wrap="square" lIns="54864" rIns="54864" tIns="27432" bIns="27432"/>
+          <a:bodyPr rtlCol="0" anchor="ctr" wrap="square" lIns="64008" rIns="64008" tIns="27432" bIns="27432"/>
           <a:lstStyle/>
           <a:p>
             <a:pPr algn="ctr">
@@ -4911,355 +5469,17 @@
                 <a:spcPct val="100000"/>
               </a:lnSpc>
               <a:spcAft>
-                <a:spcPts val="200"/>
-              </a:spcAft>
-            </a:pPr>
-            <a:r>
-              <a:rPr sz="1150" b="1">
+                <a:spcPts val="0"/>
+              </a:spcAft>
+            </a:pPr>
+            <a:r>
+              <a:rPr sz="100" b="0">
                 <a:solidFill>
                   <a:srgbClr val="8A5A1E"/>
                 </a:solidFill>
                 <a:latin typeface="Noto Sans CJK KR"/>
                 <a:ea typeface="Noto Sans CJK KR"/>
               </a:rPr>
-              <a:t>⑤ 인사이트 검증</a:t>
-            </a:r>
-          </a:p>
-          <a:p>
-            <a:pPr algn="ctr">
-              <a:lnSpc>
-                <a:spcPct val="100000"/>
-              </a:lnSpc>
-              <a:spcAft>
-                <a:spcPts val="0"/>
-              </a:spcAft>
-            </a:pPr>
-            <a:r>
-              <a:rPr sz="950" b="0">
-                <a:solidFill>
-                  <a:srgbClr val="4B555E"/>
-                </a:solidFill>
-                <a:latin typeface="Noto Sans CJK KR"/>
-                <a:ea typeface="Noto Sans CJK KR"/>
-              </a:rPr>
-              <a:t>★ 사람: 암묵지
-큐레이션·검증</a:t>
-            </a:r>
-          </a:p>
-        </p:txBody>
-      </p:sp>
-      <p:sp>
-        <p:nvSpPr>
-          <p:cNvPr id="32" name="Chevron 31"/>
-          <p:cNvSpPr/>
-          <p:nvPr/>
-        </p:nvSpPr>
-        <p:spPr>
-          <a:xfrm>
-            <a:off x="9774936" y="5120640"/>
-            <a:ext cx="182880" cy="201168"/>
-          </a:xfrm>
-          <a:prstGeom prst="chevron">
-            <a:avLst/>
-          </a:prstGeom>
-          <a:solidFill>
-            <a:srgbClr val="8A5A1E"/>
-          </a:solidFill>
-          <a:ln>
-            <a:noFill/>
-          </a:ln>
-          <a:effectLst/>
-        </p:spPr>
-        <p:style>
-          <a:lnRef idx="1">
-            <a:schemeClr val="accent1"/>
-          </a:lnRef>
-          <a:fillRef idx="3">
-            <a:schemeClr val="accent1"/>
-          </a:fillRef>
-          <a:effectRef idx="2">
-            <a:schemeClr val="accent1"/>
-          </a:effectRef>
-          <a:fontRef idx="minor">
-            <a:schemeClr val="lt1"/>
-          </a:fontRef>
-        </p:style>
-        <p:txBody>
-          <a:bodyPr rtlCol="0" anchor="ctr"/>
-          <a:lstStyle/>
-          <a:p>
-            <a:pPr algn="ctr"/>
-          </a:p>
-        </p:txBody>
-      </p:sp>
-      <p:sp>
-        <p:nvSpPr>
-          <p:cNvPr id="33" name="Rounded Rectangle 32"/>
-          <p:cNvSpPr/>
-          <p:nvPr/>
-        </p:nvSpPr>
-        <p:spPr>
-          <a:xfrm>
-            <a:off x="9921240" y="4800600"/>
-            <a:ext cx="1755648" cy="841248"/>
-          </a:xfrm>
-          <a:prstGeom prst="roundRect">
-            <a:avLst/>
-          </a:prstGeom>
-          <a:solidFill>
-            <a:srgbClr val="F3ECDF"/>
-          </a:solidFill>
-          <a:ln w="12700">
-            <a:solidFill>
-              <a:srgbClr val="8A5A1E"/>
-            </a:solidFill>
-          </a:ln>
-          <a:effectLst/>
-        </p:spPr>
-        <p:style>
-          <a:lnRef idx="1">
-            <a:schemeClr val="accent1"/>
-          </a:lnRef>
-          <a:fillRef idx="3">
-            <a:schemeClr val="accent1"/>
-          </a:fillRef>
-          <a:effectRef idx="2">
-            <a:schemeClr val="accent1"/>
-          </a:effectRef>
-          <a:fontRef idx="minor">
-            <a:schemeClr val="lt1"/>
-          </a:fontRef>
-        </p:style>
-        <p:txBody>
-          <a:bodyPr rtlCol="0" anchor="ctr" wrap="square" lIns="54864" rIns="54864" tIns="27432" bIns="27432"/>
-          <a:lstStyle/>
-          <a:p>
-            <a:pPr algn="ctr">
-              <a:lnSpc>
-                <a:spcPct val="100000"/>
-              </a:lnSpc>
-              <a:spcAft>
-                <a:spcPts val="200"/>
-              </a:spcAft>
-            </a:pPr>
-            <a:r>
-              <a:rPr sz="1150" b="1">
-                <a:solidFill>
-                  <a:srgbClr val="8A5A1E"/>
-                </a:solidFill>
-                <a:latin typeface="Noto Sans CJK KR"/>
-                <a:ea typeface="Noto Sans CJK KR"/>
-              </a:rPr>
-              <a:t>⑥ 리포트 완성</a:t>
-            </a:r>
-          </a:p>
-          <a:p>
-            <a:pPr algn="ctr">
-              <a:lnSpc>
-                <a:spcPct val="100000"/>
-              </a:lnSpc>
-              <a:spcAft>
-                <a:spcPts val="0"/>
-              </a:spcAft>
-            </a:pPr>
-            <a:r>
-              <a:rPr sz="950" b="0">
-                <a:solidFill>
-                  <a:srgbClr val="4B555E"/>
-                </a:solidFill>
-                <a:latin typeface="Noto Sans CJK KR"/>
-                <a:ea typeface="Noto Sans CJK KR"/>
-              </a:rPr>
-              <a:t>사람
-최종 판단</a:t>
-            </a:r>
-          </a:p>
-        </p:txBody>
-      </p:sp>
-      <p:sp>
-        <p:nvSpPr>
-          <p:cNvPr id="34" name="Rounded Rectangle 33"/>
-          <p:cNvSpPr/>
-          <p:nvPr/>
-        </p:nvSpPr>
-        <p:spPr>
-          <a:xfrm>
-            <a:off x="502920" y="5751576"/>
-            <a:ext cx="7406640" cy="475488"/>
-          </a:xfrm>
-          <a:prstGeom prst="roundRect">
-            <a:avLst/>
-          </a:prstGeom>
-          <a:solidFill>
-            <a:srgbClr val="F5F6F7"/>
-          </a:solidFill>
-          <a:ln w="12700">
-            <a:solidFill>
-              <a:srgbClr val="D5D9DD"/>
-            </a:solidFill>
-          </a:ln>
-          <a:effectLst/>
-        </p:spPr>
-        <p:style>
-          <a:lnRef idx="1">
-            <a:schemeClr val="accent1"/>
-          </a:lnRef>
-          <a:fillRef idx="3">
-            <a:schemeClr val="accent1"/>
-          </a:fillRef>
-          <a:effectRef idx="2">
-            <a:schemeClr val="accent1"/>
-          </a:effectRef>
-          <a:fontRef idx="minor">
-            <a:schemeClr val="lt1"/>
-          </a:fontRef>
-        </p:style>
-        <p:txBody>
-          <a:bodyPr rtlCol="0" anchor="ctr" wrap="square" lIns="54864" rIns="54864" tIns="27432" bIns="27432"/>
-          <a:lstStyle/>
-          <a:p>
-            <a:pPr algn="ctr">
-              <a:lnSpc>
-                <a:spcPct val="100000"/>
-              </a:lnSpc>
-              <a:spcAft>
-                <a:spcPts val="0"/>
-              </a:spcAft>
-            </a:pPr>
-            <a:r>
-              <a:rPr sz="1000" b="0">
-                <a:solidFill>
-                  <a:srgbClr val="22282E"/>
-                </a:solidFill>
-                <a:latin typeface="Noto Sans CJK KR"/>
-                <a:ea typeface="Noto Sans CJK KR"/>
-              </a:rPr>
-              <a:t>개선  ①~④ AI 처리로 수집·요약 반복노동 제거 → 담당자 시간 확보</a:t>
-            </a:r>
-          </a:p>
-        </p:txBody>
-      </p:sp>
-      <p:sp>
-        <p:nvSpPr>
-          <p:cNvPr id="35" name="Rounded Rectangle 34"/>
-          <p:cNvSpPr/>
-          <p:nvPr/>
-        </p:nvSpPr>
-        <p:spPr>
-          <a:xfrm>
-            <a:off x="8037576" y="5751576"/>
-            <a:ext cx="3639312" cy="475488"/>
-          </a:xfrm>
-          <a:prstGeom prst="roundRect">
-            <a:avLst/>
-          </a:prstGeom>
-          <a:solidFill>
-            <a:srgbClr val="F5F6F7"/>
-          </a:solidFill>
-          <a:ln w="12700">
-            <a:solidFill>
-              <a:srgbClr val="8A5A1E"/>
-            </a:solidFill>
-          </a:ln>
-          <a:effectLst/>
-        </p:spPr>
-        <p:style>
-          <a:lnRef idx="1">
-            <a:schemeClr val="accent1"/>
-          </a:lnRef>
-          <a:fillRef idx="3">
-            <a:schemeClr val="accent1"/>
-          </a:fillRef>
-          <a:effectRef idx="2">
-            <a:schemeClr val="accent1"/>
-          </a:effectRef>
-          <a:fontRef idx="minor">
-            <a:schemeClr val="lt1"/>
-          </a:fontRef>
-        </p:style>
-        <p:txBody>
-          <a:bodyPr rtlCol="0" anchor="ctr" wrap="square" lIns="54864" rIns="54864" tIns="27432" bIns="27432"/>
-          <a:lstStyle/>
-          <a:p>
-            <a:pPr algn="ctr">
-              <a:lnSpc>
-                <a:spcPct val="100000"/>
-              </a:lnSpc>
-              <a:spcAft>
-                <a:spcPts val="0"/>
-              </a:spcAft>
-            </a:pPr>
-            <a:r>
-              <a:rPr sz="1000" b="1">
-                <a:solidFill>
-                  <a:srgbClr val="8A5A1E"/>
-                </a:solidFill>
-                <a:latin typeface="Noto Sans CJK KR"/>
-                <a:ea typeface="Noto Sans CJK KR"/>
-              </a:rPr>
-              <a:t>암묵지를 규칙·프롬프트로 형식지화 → 품질 표준화·속인화 해소</a:t>
-            </a:r>
-          </a:p>
-        </p:txBody>
-      </p:sp>
-      <p:sp>
-        <p:nvSpPr>
-          <p:cNvPr id="36" name="Rounded Rectangle 35"/>
-          <p:cNvSpPr/>
-          <p:nvPr/>
-        </p:nvSpPr>
-        <p:spPr>
-          <a:xfrm>
-            <a:off x="10744200" y="4361688"/>
-            <a:ext cx="201168" cy="201168"/>
-          </a:xfrm>
-          <a:prstGeom prst="roundRect">
-            <a:avLst/>
-          </a:prstGeom>
-          <a:solidFill>
-            <a:srgbClr val="E7F0EE"/>
-          </a:solidFill>
-          <a:ln w="12700">
-            <a:solidFill>
-              <a:srgbClr val="2E6E69"/>
-            </a:solidFill>
-          </a:ln>
-          <a:effectLst/>
-        </p:spPr>
-        <p:style>
-          <a:lnRef idx="1">
-            <a:schemeClr val="accent1"/>
-          </a:lnRef>
-          <a:fillRef idx="3">
-            <a:schemeClr val="accent1"/>
-          </a:fillRef>
-          <a:effectRef idx="2">
-            <a:schemeClr val="accent1"/>
-          </a:effectRef>
-          <a:fontRef idx="minor">
-            <a:schemeClr val="lt1"/>
-          </a:fontRef>
-        </p:style>
-        <p:txBody>
-          <a:bodyPr rtlCol="0" anchor="ctr" wrap="square" lIns="54864" rIns="54864" tIns="27432" bIns="27432"/>
-          <a:lstStyle/>
-          <a:p>
-            <a:pPr algn="ctr">
-              <a:lnSpc>
-                <a:spcPct val="100000"/>
-              </a:lnSpc>
-              <a:spcAft>
-                <a:spcPts val="0"/>
-              </a:spcAft>
-            </a:pPr>
-            <a:r>
-              <a:rPr sz="100" b="0">
-                <a:solidFill>
-                  <a:srgbClr val="2E6E69"/>
-                </a:solidFill>
-                <a:latin typeface="Noto Sans CJK KR"/>
-                <a:ea typeface="Noto Sans CJK KR"/>
-              </a:rPr>
               <a:t/>
             </a:r>
           </a:p>
@@ -5267,14 +5487,14 @@
       </p:sp>
       <p:sp>
         <p:nvSpPr>
-          <p:cNvPr id="37" name="TextBox 36"/>
+          <p:cNvPr id="41" name="TextBox 40"/>
           <p:cNvSpPr txBox="1"/>
           <p:nvPr/>
         </p:nvSpPr>
         <p:spPr>
           <a:xfrm>
-            <a:off x="11000232" y="4379975"/>
-            <a:ext cx="1371600" cy="201168"/>
+            <a:off x="11119104" y="4251959"/>
+            <a:ext cx="1188720" cy="182880"/>
           </a:xfrm>
           <a:prstGeom prst="rect">
             <a:avLst/>
@@ -5296,120 +5516,14 @@
               </a:spcAft>
             </a:pPr>
             <a:r>
-              <a:rPr sz="900" b="0">
+              <a:rPr sz="850" b="0">
                 <a:solidFill>
                   <a:srgbClr val="4B555E"/>
                 </a:solidFill>
                 <a:latin typeface="Noto Sans CJK KR"/>
                 <a:ea typeface="Noto Sans CJK KR"/>
               </a:rPr>
-              <a:t>AI 자동화</a:t>
-            </a:r>
-          </a:p>
-        </p:txBody>
-      </p:sp>
-      <p:sp>
-        <p:nvSpPr>
-          <p:cNvPr id="38" name="Rounded Rectangle 37"/>
-          <p:cNvSpPr/>
-          <p:nvPr/>
-        </p:nvSpPr>
-        <p:spPr>
-          <a:xfrm>
-            <a:off x="10744200" y="4636007"/>
-            <a:ext cx="201168" cy="201168"/>
-          </a:xfrm>
-          <a:prstGeom prst="roundRect">
-            <a:avLst/>
-          </a:prstGeom>
-          <a:solidFill>
-            <a:srgbClr val="F3ECDF"/>
-          </a:solidFill>
-          <a:ln w="12700">
-            <a:solidFill>
-              <a:srgbClr val="8A5A1E"/>
-            </a:solidFill>
-          </a:ln>
-          <a:effectLst/>
-        </p:spPr>
-        <p:style>
-          <a:lnRef idx="1">
-            <a:schemeClr val="accent1"/>
-          </a:lnRef>
-          <a:fillRef idx="3">
-            <a:schemeClr val="accent1"/>
-          </a:fillRef>
-          <a:effectRef idx="2">
-            <a:schemeClr val="accent1"/>
-          </a:effectRef>
-          <a:fontRef idx="minor">
-            <a:schemeClr val="lt1"/>
-          </a:fontRef>
-        </p:style>
-        <p:txBody>
-          <a:bodyPr rtlCol="0" anchor="ctr" wrap="square" lIns="54864" rIns="54864" tIns="27432" bIns="27432"/>
-          <a:lstStyle/>
-          <a:p>
-            <a:pPr algn="ctr">
-              <a:lnSpc>
-                <a:spcPct val="100000"/>
-              </a:lnSpc>
-              <a:spcAft>
-                <a:spcPts val="0"/>
-              </a:spcAft>
-            </a:pPr>
-            <a:r>
-              <a:rPr sz="100" b="0">
-                <a:solidFill>
-                  <a:srgbClr val="8A5A1E"/>
-                </a:solidFill>
-                <a:latin typeface="Noto Sans CJK KR"/>
-                <a:ea typeface="Noto Sans CJK KR"/>
-              </a:rPr>
-              <a:t/>
-            </a:r>
-          </a:p>
-        </p:txBody>
-      </p:sp>
-      <p:sp>
-        <p:nvSpPr>
-          <p:cNvPr id="39" name="TextBox 38"/>
-          <p:cNvSpPr txBox="1"/>
-          <p:nvPr/>
-        </p:nvSpPr>
-        <p:spPr>
-          <a:xfrm>
-            <a:off x="11000232" y="4654296"/>
-            <a:ext cx="1371600" cy="201168"/>
-          </a:xfrm>
-          <a:prstGeom prst="rect">
-            <a:avLst/>
-          </a:prstGeom>
-          <a:noFill/>
-        </p:spPr>
-        <p:txBody>
-          <a:bodyPr wrap="square" anchor="t" lIns="0" rIns="0" tIns="0" bIns="0">
-            <a:spAutoFit/>
-          </a:bodyPr>
-          <a:lstStyle/>
-          <a:p>
-            <a:pPr algn="l">
-              <a:lnSpc>
-                <a:spcPct val="105000"/>
-              </a:lnSpc>
-              <a:spcAft>
-                <a:spcPts val="0"/>
-              </a:spcAft>
-            </a:pPr>
-            <a:r>
-              <a:rPr sz="900" b="0">
-                <a:solidFill>
-                  <a:srgbClr val="4B555E"/>
-                </a:solidFill>
-                <a:latin typeface="Noto Sans CJK KR"/>
-                <a:ea typeface="Noto Sans CJK KR"/>
-              </a:rPr>
-              <a:t>사람 역할</a:t>
+              <a:t>증폭(사람)</a:t>
             </a:r>
           </a:p>
         </p:txBody>
@@ -5484,7 +5598,7 @@
         </p:nvSpPr>
         <p:spPr>
           <a:xfrm>
-            <a:off x="502920" y="274320"/>
+            <a:off x="502920" y="256032"/>
             <a:ext cx="11155680" cy="548640"/>
           </a:xfrm>
           <a:prstGeom prst="rect">
@@ -5507,14 +5621,14 @@
               </a:spcAft>
             </a:pPr>
             <a:r>
-              <a:rPr sz="2200" b="1">
+              <a:rPr sz="2100" b="1">
                 <a:solidFill>
                   <a:srgbClr val="22282E"/>
                 </a:solidFill>
                 <a:latin typeface="Noto Sans CJK KR"/>
                 <a:ea typeface="Noto Sans CJK KR"/>
               </a:rPr>
-              <a:t>To-Be 실행 설계 : AI 구현 · 사람 역할 · 추진계획</a:t>
+              <a:t>To-Be 실행 설계 : MAGI 4관점 에이전트 · 암묵지 코드화 · 추진 로드맵</a:t>
             </a:r>
           </a:p>
         </p:txBody>
@@ -5527,7 +5641,7 @@
         </p:nvSpPr>
         <p:spPr>
           <a:xfrm>
-            <a:off x="502920" y="713232"/>
+            <a:off x="502920" y="676656"/>
             <a:ext cx="11155680" cy="320040"/>
           </a:xfrm>
           <a:prstGeom prst="rect">
@@ -5557,7 +5671,7 @@
                 <a:latin typeface="Noto Sans CJK KR"/>
                 <a:ea typeface="Noto Sans CJK KR"/>
               </a:rPr>
-              <a:t>단계별 AI 기술을 하이브리드로 적용하고, 핵심 과제인 '암묵지의 형식지화'는 사람이 담당</a:t>
+              <a:t>차별화는 '증폭'과 '암묵지 코드화'에서 나온다 — 크롤러에 3을 쓰면 지식 캡처에 7을 쓰는 비대칭 투자</a:t>
             </a:r>
           </a:p>
         </p:txBody>
@@ -5570,7 +5684,7 @@
         </p:nvCxnSpPr>
         <p:spPr>
           <a:xfrm>
-            <a:off x="502920" y="1115568"/>
+            <a:off x="502920" y="1069848"/>
             <a:ext cx="11183112" cy="0"/>
           </a:xfrm>
           <a:prstGeom prst="bentConnector3">
@@ -5605,8 +5719,8 @@
         </p:nvSpPr>
         <p:spPr>
           <a:xfrm>
-            <a:off x="502920" y="1325880"/>
-            <a:ext cx="2834640" cy="310896"/>
+            <a:off x="502920" y="1280160"/>
+            <a:ext cx="3200400" cy="301752"/>
           </a:xfrm>
           <a:prstGeom prst="roundRect">
             <a:avLst/>
@@ -5634,7 +5748,7 @@
           </a:fontRef>
         </p:style>
         <p:txBody>
-          <a:bodyPr rtlCol="0" anchor="ctr" wrap="square" lIns="54864" rIns="54864" tIns="27432" bIns="27432"/>
+          <a:bodyPr rtlCol="0" anchor="ctr" wrap="square" lIns="64008" rIns="64008" tIns="27432" bIns="27432"/>
           <a:lstStyle/>
           <a:p>
             <a:pPr algn="ctr">
@@ -5653,32 +5767,30 @@
                 <a:latin typeface="Noto Sans CJK KR"/>
                 <a:ea typeface="Noto Sans CJK KR"/>
               </a:rPr>
-              <a:t>① 단계별 AI 구현 (하이브리드)</a:t>
-            </a:r>
-          </a:p>
-        </p:txBody>
-      </p:sp>
-      <p:sp>
-        <p:nvSpPr>
-          <p:cNvPr id="7" name="Rectangle 6"/>
+              <a:t>① MAGI 4관점 에이전트 (L3 코어)</a:t>
+            </a:r>
+          </a:p>
+        </p:txBody>
+      </p:sp>
+      <p:sp>
+        <p:nvSpPr>
+          <p:cNvPr id="7" name="Rounded Rectangle 6"/>
           <p:cNvSpPr/>
           <p:nvPr/>
         </p:nvSpPr>
         <p:spPr>
           <a:xfrm>
-            <a:off x="502920" y="1746504"/>
-            <a:ext cx="5623560" cy="397764"/>
-          </a:xfrm>
-          <a:prstGeom prst="rect">
+            <a:off x="502920" y="1664207"/>
+            <a:ext cx="1051560" cy="498348"/>
+          </a:xfrm>
+          <a:prstGeom prst="roundRect">
             <a:avLst/>
           </a:prstGeom>
           <a:solidFill>
-            <a:srgbClr val="22282E"/>
+            <a:srgbClr val="2E6E69"/>
           </a:solidFill>
-          <a:ln w="9525">
-            <a:solidFill>
-              <a:srgbClr val="D5D9DD"/>
-            </a:solidFill>
+          <a:ln>
+            <a:noFill/>
           </a:ln>
           <a:effectLst/>
         </p:spPr>
@@ -5697,38 +5809,12 @@
           </a:fontRef>
         </p:style>
         <p:txBody>
-          <a:bodyPr rtlCol="0" anchor="ctr"/>
-          <a:lstStyle/>
-          <a:p>
-            <a:pPr algn="ctr"/>
-          </a:p>
-        </p:txBody>
-      </p:sp>
-      <p:sp>
-        <p:nvSpPr>
-          <p:cNvPr id="8" name="TextBox 7"/>
-          <p:cNvSpPr txBox="1"/>
-          <p:nvPr/>
-        </p:nvSpPr>
-        <p:spPr>
-          <a:xfrm>
-            <a:off x="594360" y="1746504"/>
-            <a:ext cx="1005840" cy="397764"/>
-          </a:xfrm>
-          <a:prstGeom prst="rect">
-            <a:avLst/>
-          </a:prstGeom>
-          <a:noFill/>
-        </p:spPr>
-        <p:txBody>
-          <a:bodyPr wrap="square" anchor="ctr" lIns="0" rIns="0" tIns="0" bIns="0">
-            <a:spAutoFit/>
-          </a:bodyPr>
-          <a:lstStyle/>
-          <a:p>
-            <a:pPr algn="l">
-              <a:lnSpc>
-                <a:spcPct val="105000"/>
+          <a:bodyPr rtlCol="0" anchor="ctr" wrap="square" lIns="64008" rIns="64008" tIns="27432" bIns="27432"/>
+          <a:lstStyle/>
+          <a:p>
+            <a:pPr algn="ctr">
+              <a:lnSpc>
+                <a:spcPct val="100000"/>
               </a:lnSpc>
               <a:spcAft>
                 <a:spcPts val="0"/>
@@ -5742,109 +5828,23 @@
                 <a:latin typeface="Noto Sans CJK KR"/>
                 <a:ea typeface="Noto Sans CJK KR"/>
               </a:rPr>
-              <a:t>공정 단계</a:t>
-            </a:r>
-          </a:p>
-        </p:txBody>
-      </p:sp>
-      <p:sp>
-        <p:nvSpPr>
-          <p:cNvPr id="9" name="TextBox 8"/>
-          <p:cNvSpPr txBox="1"/>
-          <p:nvPr/>
-        </p:nvSpPr>
-        <p:spPr>
-          <a:xfrm>
-            <a:off x="1737360" y="1746504"/>
-            <a:ext cx="3429000" cy="397764"/>
-          </a:xfrm>
-          <a:prstGeom prst="rect">
-            <a:avLst/>
-          </a:prstGeom>
-          <a:noFill/>
-        </p:spPr>
-        <p:txBody>
-          <a:bodyPr wrap="square" anchor="ctr" lIns="0" rIns="0" tIns="0" bIns="0">
-            <a:spAutoFit/>
-          </a:bodyPr>
-          <a:lstStyle/>
-          <a:p>
-            <a:pPr algn="l">
-              <a:lnSpc>
-                <a:spcPct val="105000"/>
-              </a:lnSpc>
-              <a:spcAft>
-                <a:spcPts val="0"/>
-              </a:spcAft>
-            </a:pPr>
-            <a:r>
-              <a:rPr sz="1000" b="1">
-                <a:solidFill>
-                  <a:srgbClr val="FFFFFF"/>
-                </a:solidFill>
-                <a:latin typeface="Noto Sans CJK KR"/>
-                <a:ea typeface="Noto Sans CJK KR"/>
-              </a:rPr>
-              <a:t>적용 AI 기술</a:t>
-            </a:r>
-          </a:p>
-        </p:txBody>
-      </p:sp>
-      <p:sp>
-        <p:nvSpPr>
-          <p:cNvPr id="10" name="TextBox 9"/>
-          <p:cNvSpPr txBox="1"/>
-          <p:nvPr/>
-        </p:nvSpPr>
-        <p:spPr>
-          <a:xfrm>
-            <a:off x="5257800" y="1746504"/>
-            <a:ext cx="822960" cy="397764"/>
-          </a:xfrm>
-          <a:prstGeom prst="rect">
-            <a:avLst/>
-          </a:prstGeom>
-          <a:noFill/>
-        </p:spPr>
-        <p:txBody>
-          <a:bodyPr wrap="square" anchor="ctr" lIns="0" rIns="0" tIns="0" bIns="0">
-            <a:spAutoFit/>
-          </a:bodyPr>
-          <a:lstStyle/>
-          <a:p>
-            <a:pPr algn="ctr">
-              <a:lnSpc>
-                <a:spcPct val="105000"/>
-              </a:lnSpc>
-              <a:spcAft>
-                <a:spcPts val="0"/>
-              </a:spcAft>
-            </a:pPr>
-            <a:r>
-              <a:rPr sz="950" b="1">
-                <a:solidFill>
-                  <a:srgbClr val="FFFFFF"/>
-                </a:solidFill>
-                <a:latin typeface="Noto Sans CJK KR"/>
-                <a:ea typeface="Noto Sans CJK KR"/>
-              </a:rPr>
-              <a:t>도입</a:t>
-            </a:r>
-          </a:p>
-        </p:txBody>
-      </p:sp>
-      <p:sp>
-        <p:nvSpPr>
-          <p:cNvPr id="11" name="Rectangle 10"/>
+              <a:t>기획</a:t>
+            </a:r>
+          </a:p>
+        </p:txBody>
+      </p:sp>
+      <p:sp>
+        <p:nvSpPr>
+          <p:cNvPr id="8" name="Rounded Rectangle 7"/>
           <p:cNvSpPr/>
           <p:nvPr/>
         </p:nvSpPr>
         <p:spPr>
           <a:xfrm>
-            <a:off x="502920" y="2144268"/>
-            <a:ext cx="5623560" cy="397764"/>
-          </a:xfrm>
-          <a:prstGeom prst="rect">
+            <a:off x="1618488" y="1664207"/>
+            <a:ext cx="4507992" cy="498348"/>
+          </a:xfrm>
+          <a:prstGeom prst="roundRect">
             <a:avLst/>
           </a:prstGeom>
           <a:solidFill>
@@ -5872,163 +5872,69 @@
           </a:fontRef>
         </p:style>
         <p:txBody>
-          <a:bodyPr rtlCol="0" anchor="ctr"/>
-          <a:lstStyle/>
-          <a:p>
-            <a:pPr algn="ctr"/>
-          </a:p>
-        </p:txBody>
-      </p:sp>
-      <p:sp>
-        <p:nvSpPr>
-          <p:cNvPr id="12" name="TextBox 11"/>
-          <p:cNvSpPr txBox="1"/>
-          <p:nvPr/>
-        </p:nvSpPr>
-        <p:spPr>
-          <a:xfrm>
-            <a:off x="594360" y="2144268"/>
-            <a:ext cx="1005840" cy="397764"/>
-          </a:xfrm>
-          <a:prstGeom prst="rect">
-            <a:avLst/>
-          </a:prstGeom>
-          <a:noFill/>
-        </p:spPr>
-        <p:txBody>
-          <a:bodyPr wrap="square" anchor="ctr" lIns="0" rIns="0" tIns="0" bIns="0">
-            <a:spAutoFit/>
-          </a:bodyPr>
-          <a:lstStyle/>
-          <a:p>
-            <a:pPr algn="l">
-              <a:lnSpc>
-                <a:spcPct val="105000"/>
+          <a:bodyPr rtlCol="0" anchor="ctr" wrap="square" lIns="64008" rIns="64008" tIns="27432" bIns="27432"/>
+          <a:lstStyle/>
+          <a:p>
+            <a:pPr algn="ctr">
+              <a:lnSpc>
+                <a:spcPct val="100000"/>
+              </a:lnSpc>
+              <a:spcAft>
+                <a:spcPts val="200"/>
+              </a:spcAft>
+            </a:pPr>
+            <a:r>
+              <a:rPr sz="950" b="1">
+                <a:solidFill>
+                  <a:srgbClr val="22282E"/>
+                </a:solidFill>
+                <a:latin typeface="Noto Sans CJK KR"/>
+                <a:ea typeface="Noto Sans CJK KR"/>
+              </a:rPr>
+              <a:t>제품·시장전략·중장기 트렌드</a:t>
+            </a:r>
+          </a:p>
+          <a:p>
+            <a:pPr algn="ctr">
+              <a:lnSpc>
+                <a:spcPct val="100000"/>
               </a:lnSpc>
               <a:spcAft>
                 <a:spcPts val="0"/>
               </a:spcAft>
             </a:pPr>
             <a:r>
-              <a:rPr sz="1050" b="1">
-                <a:solidFill>
-                  <a:srgbClr val="22282E"/>
-                </a:solidFill>
-                <a:latin typeface="Noto Sans CJK KR"/>
-                <a:ea typeface="Noto Sans CJK KR"/>
-              </a:rPr>
-              <a:t>수집</a:t>
-            </a:r>
-          </a:p>
-        </p:txBody>
-      </p:sp>
-      <p:sp>
-        <p:nvSpPr>
-          <p:cNvPr id="13" name="TextBox 12"/>
-          <p:cNvSpPr txBox="1"/>
-          <p:nvPr/>
-        </p:nvSpPr>
-        <p:spPr>
-          <a:xfrm>
-            <a:off x="1737360" y="2144268"/>
-            <a:ext cx="3429000" cy="397764"/>
-          </a:xfrm>
-          <a:prstGeom prst="rect">
-            <a:avLst/>
-          </a:prstGeom>
-          <a:noFill/>
-        </p:spPr>
-        <p:txBody>
-          <a:bodyPr wrap="square" anchor="ctr" lIns="0" rIns="0" tIns="0" bIns="0">
-            <a:spAutoFit/>
-          </a:bodyPr>
-          <a:lstStyle/>
-          <a:p>
-            <a:pPr algn="l">
-              <a:lnSpc>
-                <a:spcPct val="105000"/>
-              </a:lnSpc>
-              <a:spcAft>
-                <a:spcPts val="0"/>
-              </a:spcAft>
-            </a:pPr>
-            <a:r>
-              <a:rPr sz="1000" b="0">
-                <a:solidFill>
-                  <a:srgbClr val="4B555E"/>
-                </a:solidFill>
-                <a:latin typeface="Noto Sans CJK KR"/>
-                <a:ea typeface="Noto Sans CJK KR"/>
-              </a:rPr>
-              <a:t>웹크롤링·RSS·검색 API 자동화</a:t>
-            </a:r>
-          </a:p>
-        </p:txBody>
-      </p:sp>
-      <p:sp>
-        <p:nvSpPr>
-          <p:cNvPr id="14" name="TextBox 13"/>
-          <p:cNvSpPr txBox="1"/>
-          <p:nvPr/>
-        </p:nvSpPr>
-        <p:spPr>
-          <a:xfrm>
-            <a:off x="5257800" y="2144268"/>
-            <a:ext cx="822960" cy="397764"/>
-          </a:xfrm>
-          <a:prstGeom prst="rect">
-            <a:avLst/>
-          </a:prstGeom>
-          <a:noFill/>
-        </p:spPr>
-        <p:txBody>
-          <a:bodyPr wrap="square" anchor="ctr" lIns="0" rIns="0" tIns="0" bIns="0">
-            <a:spAutoFit/>
-          </a:bodyPr>
-          <a:lstStyle/>
-          <a:p>
-            <a:pPr algn="ctr">
-              <a:lnSpc>
-                <a:spcPct val="105000"/>
-              </a:lnSpc>
-              <a:spcAft>
-                <a:spcPts val="0"/>
-              </a:spcAft>
-            </a:pPr>
-            <a:r>
-              <a:rPr sz="950" b="0">
+              <a:rPr sz="900" b="0">
                 <a:solidFill>
                   <a:srgbClr val="2E6E69"/>
                 </a:solidFill>
                 <a:latin typeface="Noto Sans CJK KR"/>
                 <a:ea typeface="Noto Sans CJK KR"/>
               </a:rPr>
-              <a:t>1단계</a:t>
-            </a:r>
-          </a:p>
-        </p:txBody>
-      </p:sp>
-      <p:sp>
-        <p:nvSpPr>
-          <p:cNvPr id="15" name="Rectangle 14"/>
+              <a:t>Q. 우리 제품/로드맵에 주는 의미는?</a:t>
+            </a:r>
+          </a:p>
+        </p:txBody>
+      </p:sp>
+      <p:sp>
+        <p:nvSpPr>
+          <p:cNvPr id="9" name="Rounded Rectangle 8"/>
           <p:cNvSpPr/>
           <p:nvPr/>
         </p:nvSpPr>
         <p:spPr>
           <a:xfrm>
-            <a:off x="502920" y="2542032"/>
-            <a:ext cx="5623560" cy="397764"/>
-          </a:xfrm>
-          <a:prstGeom prst="rect">
+            <a:off x="502920" y="2208276"/>
+            <a:ext cx="1051560" cy="498348"/>
+          </a:xfrm>
+          <a:prstGeom prst="roundRect">
             <a:avLst/>
           </a:prstGeom>
           <a:solidFill>
-            <a:srgbClr val="FFFFFF"/>
+            <a:srgbClr val="2E6E69"/>
           </a:solidFill>
-          <a:ln w="9525">
-            <a:solidFill>
-              <a:srgbClr val="D5D9DD"/>
-            </a:solidFill>
+          <a:ln>
+            <a:noFill/>
           </a:ln>
           <a:effectLst/>
         </p:spPr>
@@ -6047,38 +5953,12 @@
           </a:fontRef>
         </p:style>
         <p:txBody>
-          <a:bodyPr rtlCol="0" anchor="ctr"/>
-          <a:lstStyle/>
-          <a:p>
-            <a:pPr algn="ctr"/>
-          </a:p>
-        </p:txBody>
-      </p:sp>
-      <p:sp>
-        <p:nvSpPr>
-          <p:cNvPr id="16" name="TextBox 15"/>
-          <p:cNvSpPr txBox="1"/>
-          <p:nvPr/>
-        </p:nvSpPr>
-        <p:spPr>
-          <a:xfrm>
-            <a:off x="594360" y="2542032"/>
-            <a:ext cx="1005840" cy="397764"/>
-          </a:xfrm>
-          <a:prstGeom prst="rect">
-            <a:avLst/>
-          </a:prstGeom>
-          <a:noFill/>
-        </p:spPr>
-        <p:txBody>
-          <a:bodyPr wrap="square" anchor="ctr" lIns="0" rIns="0" tIns="0" bIns="0">
-            <a:spAutoFit/>
-          </a:bodyPr>
-          <a:lstStyle/>
-          <a:p>
-            <a:pPr algn="l">
-              <a:lnSpc>
-                <a:spcPct val="105000"/>
+          <a:bodyPr rtlCol="0" anchor="ctr" wrap="square" lIns="64008" rIns="64008" tIns="27432" bIns="27432"/>
+          <a:lstStyle/>
+          <a:p>
+            <a:pPr algn="ctr">
+              <a:lnSpc>
+                <a:spcPct val="100000"/>
               </a:lnSpc>
               <a:spcAft>
                 <a:spcPts val="0"/>
@@ -6087,114 +5967,28 @@
             <a:r>
               <a:rPr sz="1050" b="1">
                 <a:solidFill>
-                  <a:srgbClr val="22282E"/>
-                </a:solidFill>
-                <a:latin typeface="Noto Sans CJK KR"/>
-                <a:ea typeface="Noto Sans CJK KR"/>
-              </a:rPr>
-              <a:t>분류</a:t>
-            </a:r>
-          </a:p>
-        </p:txBody>
-      </p:sp>
-      <p:sp>
-        <p:nvSpPr>
-          <p:cNvPr id="17" name="TextBox 16"/>
-          <p:cNvSpPr txBox="1"/>
-          <p:nvPr/>
-        </p:nvSpPr>
-        <p:spPr>
-          <a:xfrm>
-            <a:off x="1737360" y="2542032"/>
-            <a:ext cx="3429000" cy="397764"/>
-          </a:xfrm>
-          <a:prstGeom prst="rect">
-            <a:avLst/>
-          </a:prstGeom>
-          <a:noFill/>
-        </p:spPr>
-        <p:txBody>
-          <a:bodyPr wrap="square" anchor="ctr" lIns="0" rIns="0" tIns="0" bIns="0">
-            <a:spAutoFit/>
-          </a:bodyPr>
-          <a:lstStyle/>
-          <a:p>
-            <a:pPr algn="l">
-              <a:lnSpc>
-                <a:spcPct val="105000"/>
-              </a:lnSpc>
-              <a:spcAft>
-                <a:spcPts val="0"/>
-              </a:spcAft>
-            </a:pPr>
-            <a:r>
-              <a:rPr sz="1000" b="0">
-                <a:solidFill>
-                  <a:srgbClr val="4B555E"/>
-                </a:solidFill>
-                <a:latin typeface="Noto Sans CJK KR"/>
-                <a:ea typeface="Noto Sans CJK KR"/>
-              </a:rPr>
-              <a:t>LLM 중요도·카테고리 태깅</a:t>
-            </a:r>
-          </a:p>
-        </p:txBody>
-      </p:sp>
-      <p:sp>
-        <p:nvSpPr>
-          <p:cNvPr id="18" name="TextBox 17"/>
-          <p:cNvSpPr txBox="1"/>
-          <p:nvPr/>
-        </p:nvSpPr>
-        <p:spPr>
-          <a:xfrm>
-            <a:off x="5257800" y="2542032"/>
-            <a:ext cx="822960" cy="397764"/>
-          </a:xfrm>
-          <a:prstGeom prst="rect">
-            <a:avLst/>
-          </a:prstGeom>
-          <a:noFill/>
-        </p:spPr>
-        <p:txBody>
-          <a:bodyPr wrap="square" anchor="ctr" lIns="0" rIns="0" tIns="0" bIns="0">
-            <a:spAutoFit/>
-          </a:bodyPr>
-          <a:lstStyle/>
-          <a:p>
-            <a:pPr algn="ctr">
-              <a:lnSpc>
-                <a:spcPct val="105000"/>
-              </a:lnSpc>
-              <a:spcAft>
-                <a:spcPts val="0"/>
-              </a:spcAft>
-            </a:pPr>
-            <a:r>
-              <a:rPr sz="950" b="0">
-                <a:solidFill>
-                  <a:srgbClr val="2E6E69"/>
-                </a:solidFill>
-                <a:latin typeface="Noto Sans CJK KR"/>
-                <a:ea typeface="Noto Sans CJK KR"/>
-              </a:rPr>
-              <a:t>1~2단계</a:t>
-            </a:r>
-          </a:p>
-        </p:txBody>
-      </p:sp>
-      <p:sp>
-        <p:nvSpPr>
-          <p:cNvPr id="19" name="Rectangle 18"/>
+                  <a:srgbClr val="FFFFFF"/>
+                </a:solidFill>
+                <a:latin typeface="Noto Sans CJK KR"/>
+                <a:ea typeface="Noto Sans CJK KR"/>
+              </a:rPr>
+              <a:t>영업</a:t>
+            </a:r>
+          </a:p>
+        </p:txBody>
+      </p:sp>
+      <p:sp>
+        <p:nvSpPr>
+          <p:cNvPr id="10" name="Rounded Rectangle 9"/>
           <p:cNvSpPr/>
           <p:nvPr/>
         </p:nvSpPr>
         <p:spPr>
           <a:xfrm>
-            <a:off x="502920" y="2939796"/>
-            <a:ext cx="5623560" cy="397764"/>
-          </a:xfrm>
-          <a:prstGeom prst="rect">
+            <a:off x="1618488" y="2208276"/>
+            <a:ext cx="4507992" cy="498348"/>
+          </a:xfrm>
+          <a:prstGeom prst="roundRect">
             <a:avLst/>
           </a:prstGeom>
           <a:solidFill>
@@ -6222,163 +6016,69 @@
           </a:fontRef>
         </p:style>
         <p:txBody>
-          <a:bodyPr rtlCol="0" anchor="ctr"/>
-          <a:lstStyle/>
-          <a:p>
-            <a:pPr algn="ctr"/>
-          </a:p>
-        </p:txBody>
-      </p:sp>
-      <p:sp>
-        <p:nvSpPr>
-          <p:cNvPr id="20" name="TextBox 19"/>
-          <p:cNvSpPr txBox="1"/>
-          <p:nvPr/>
-        </p:nvSpPr>
-        <p:spPr>
-          <a:xfrm>
-            <a:off x="594360" y="2939796"/>
-            <a:ext cx="1005840" cy="397764"/>
-          </a:xfrm>
-          <a:prstGeom prst="rect">
-            <a:avLst/>
-          </a:prstGeom>
-          <a:noFill/>
-        </p:spPr>
-        <p:txBody>
-          <a:bodyPr wrap="square" anchor="ctr" lIns="0" rIns="0" tIns="0" bIns="0">
-            <a:spAutoFit/>
-          </a:bodyPr>
-          <a:lstStyle/>
-          <a:p>
-            <a:pPr algn="l">
-              <a:lnSpc>
-                <a:spcPct val="105000"/>
+          <a:bodyPr rtlCol="0" anchor="ctr" wrap="square" lIns="64008" rIns="64008" tIns="27432" bIns="27432"/>
+          <a:lstStyle/>
+          <a:p>
+            <a:pPr algn="ctr">
+              <a:lnSpc>
+                <a:spcPct val="100000"/>
+              </a:lnSpc>
+              <a:spcAft>
+                <a:spcPts val="200"/>
+              </a:spcAft>
+            </a:pPr>
+            <a:r>
+              <a:rPr sz="950" b="1">
+                <a:solidFill>
+                  <a:srgbClr val="22282E"/>
+                </a:solidFill>
+                <a:latin typeface="Noto Sans CJK KR"/>
+                <a:ea typeface="Noto Sans CJK KR"/>
+              </a:rPr>
+              <a:t>수주 기회·위협·고객 파이프라인</a:t>
+            </a:r>
+          </a:p>
+          <a:p>
+            <a:pPr algn="ctr">
+              <a:lnSpc>
+                <a:spcPct val="100000"/>
               </a:lnSpc>
               <a:spcAft>
                 <a:spcPts val="0"/>
               </a:spcAft>
             </a:pPr>
             <a:r>
-              <a:rPr sz="1050" b="1">
-                <a:solidFill>
-                  <a:srgbClr val="22282E"/>
-                </a:solidFill>
-                <a:latin typeface="Noto Sans CJK KR"/>
-                <a:ea typeface="Noto Sans CJK KR"/>
-              </a:rPr>
-              <a:t>요약·번역</a:t>
-            </a:r>
-          </a:p>
-        </p:txBody>
-      </p:sp>
-      <p:sp>
-        <p:nvSpPr>
-          <p:cNvPr id="21" name="TextBox 20"/>
-          <p:cNvSpPr txBox="1"/>
-          <p:nvPr/>
-        </p:nvSpPr>
-        <p:spPr>
-          <a:xfrm>
-            <a:off x="1737360" y="2939796"/>
-            <a:ext cx="3429000" cy="397764"/>
-          </a:xfrm>
-          <a:prstGeom prst="rect">
-            <a:avLst/>
-          </a:prstGeom>
-          <a:noFill/>
-        </p:spPr>
-        <p:txBody>
-          <a:bodyPr wrap="square" anchor="ctr" lIns="0" rIns="0" tIns="0" bIns="0">
-            <a:spAutoFit/>
-          </a:bodyPr>
-          <a:lstStyle/>
-          <a:p>
-            <a:pPr algn="l">
-              <a:lnSpc>
-                <a:spcPct val="105000"/>
-              </a:lnSpc>
-              <a:spcAft>
-                <a:spcPts val="0"/>
-              </a:spcAft>
-            </a:pPr>
-            <a:r>
-              <a:rPr sz="1000" b="0">
-                <a:solidFill>
-                  <a:srgbClr val="4B555E"/>
-                </a:solidFill>
-                <a:latin typeface="Noto Sans CJK KR"/>
-                <a:ea typeface="Noto Sans CJK KR"/>
-              </a:rPr>
-              <a:t>LLM 요약·번역·용어/차별점 설명</a:t>
-            </a:r>
-          </a:p>
-        </p:txBody>
-      </p:sp>
-      <p:sp>
-        <p:nvSpPr>
-          <p:cNvPr id="22" name="TextBox 21"/>
-          <p:cNvSpPr txBox="1"/>
-          <p:nvPr/>
-        </p:nvSpPr>
-        <p:spPr>
-          <a:xfrm>
-            <a:off x="5257800" y="2939796"/>
-            <a:ext cx="822960" cy="397764"/>
-          </a:xfrm>
-          <a:prstGeom prst="rect">
-            <a:avLst/>
-          </a:prstGeom>
-          <a:noFill/>
-        </p:spPr>
-        <p:txBody>
-          <a:bodyPr wrap="square" anchor="ctr" lIns="0" rIns="0" tIns="0" bIns="0">
-            <a:spAutoFit/>
-          </a:bodyPr>
-          <a:lstStyle/>
-          <a:p>
-            <a:pPr algn="ctr">
-              <a:lnSpc>
-                <a:spcPct val="105000"/>
-              </a:lnSpc>
-              <a:spcAft>
-                <a:spcPts val="0"/>
-              </a:spcAft>
-            </a:pPr>
-            <a:r>
-              <a:rPr sz="950" b="0">
+              <a:rPr sz="900" b="0">
                 <a:solidFill>
                   <a:srgbClr val="2E6E69"/>
                 </a:solidFill>
                 <a:latin typeface="Noto Sans CJK KR"/>
                 <a:ea typeface="Noto Sans CJK KR"/>
               </a:rPr>
-              <a:t>1단계</a:t>
-            </a:r>
-          </a:p>
-        </p:txBody>
-      </p:sp>
-      <p:sp>
-        <p:nvSpPr>
-          <p:cNvPr id="23" name="Rectangle 22"/>
+              <a:t>Q. 딜과 고객관계에 주는 의미는?</a:t>
+            </a:r>
+          </a:p>
+        </p:txBody>
+      </p:sp>
+      <p:sp>
+        <p:nvSpPr>
+          <p:cNvPr id="11" name="Rounded Rectangle 10"/>
           <p:cNvSpPr/>
           <p:nvPr/>
         </p:nvSpPr>
         <p:spPr>
           <a:xfrm>
-            <a:off x="502920" y="3337560"/>
-            <a:ext cx="5623560" cy="397764"/>
-          </a:xfrm>
-          <a:prstGeom prst="rect">
+            <a:off x="502920" y="2752344"/>
+            <a:ext cx="1051560" cy="498348"/>
+          </a:xfrm>
+          <a:prstGeom prst="roundRect">
             <a:avLst/>
           </a:prstGeom>
           <a:solidFill>
-            <a:srgbClr val="FFFFFF"/>
+            <a:srgbClr val="2E6E69"/>
           </a:solidFill>
-          <a:ln w="9525">
-            <a:solidFill>
-              <a:srgbClr val="D5D9DD"/>
-            </a:solidFill>
+          <a:ln>
+            <a:noFill/>
           </a:ln>
           <a:effectLst/>
         </p:spPr>
@@ -6397,38 +6097,12 @@
           </a:fontRef>
         </p:style>
         <p:txBody>
-          <a:bodyPr rtlCol="0" anchor="ctr"/>
-          <a:lstStyle/>
-          <a:p>
-            <a:pPr algn="ctr"/>
-          </a:p>
-        </p:txBody>
-      </p:sp>
-      <p:sp>
-        <p:nvSpPr>
-          <p:cNvPr id="24" name="TextBox 23"/>
-          <p:cNvSpPr txBox="1"/>
-          <p:nvPr/>
-        </p:nvSpPr>
-        <p:spPr>
-          <a:xfrm>
-            <a:off x="594360" y="3337560"/>
-            <a:ext cx="1005840" cy="397764"/>
-          </a:xfrm>
-          <a:prstGeom prst="rect">
-            <a:avLst/>
-          </a:prstGeom>
-          <a:noFill/>
-        </p:spPr>
-        <p:txBody>
-          <a:bodyPr wrap="square" anchor="ctr" lIns="0" rIns="0" tIns="0" bIns="0">
-            <a:spAutoFit/>
-          </a:bodyPr>
-          <a:lstStyle/>
-          <a:p>
-            <a:pPr algn="l">
-              <a:lnSpc>
-                <a:spcPct val="105000"/>
+          <a:bodyPr rtlCol="0" anchor="ctr" wrap="square" lIns="64008" rIns="64008" tIns="27432" bIns="27432"/>
+          <a:lstStyle/>
+          <a:p>
+            <a:pPr algn="ctr">
+              <a:lnSpc>
+                <a:spcPct val="100000"/>
               </a:lnSpc>
               <a:spcAft>
                 <a:spcPts val="0"/>
@@ -6437,114 +6111,28 @@
             <a:r>
               <a:rPr sz="1050" b="1">
                 <a:solidFill>
-                  <a:srgbClr val="22282E"/>
-                </a:solidFill>
-                <a:latin typeface="Noto Sans CJK KR"/>
-                <a:ea typeface="Noto Sans CJK KR"/>
-              </a:rPr>
-              <a:t>시각화</a:t>
-            </a:r>
-          </a:p>
-        </p:txBody>
-      </p:sp>
-      <p:sp>
-        <p:nvSpPr>
-          <p:cNvPr id="25" name="TextBox 24"/>
-          <p:cNvSpPr txBox="1"/>
-          <p:nvPr/>
-        </p:nvSpPr>
-        <p:spPr>
-          <a:xfrm>
-            <a:off x="1737360" y="3337560"/>
-            <a:ext cx="3429000" cy="397764"/>
-          </a:xfrm>
-          <a:prstGeom prst="rect">
-            <a:avLst/>
-          </a:prstGeom>
-          <a:noFill/>
-        </p:spPr>
-        <p:txBody>
-          <a:bodyPr wrap="square" anchor="ctr" lIns="0" rIns="0" tIns="0" bIns="0">
-            <a:spAutoFit/>
-          </a:bodyPr>
-          <a:lstStyle/>
-          <a:p>
-            <a:pPr algn="l">
-              <a:lnSpc>
-                <a:spcPct val="105000"/>
-              </a:lnSpc>
-              <a:spcAft>
-                <a:spcPts val="0"/>
-              </a:spcAft>
-            </a:pPr>
-            <a:r>
-              <a:rPr sz="1000" b="0">
-                <a:solidFill>
-                  <a:srgbClr val="4B555E"/>
-                </a:solidFill>
-                <a:latin typeface="Noto Sans CJK KR"/>
-                <a:ea typeface="Noto Sans CJK KR"/>
-              </a:rPr>
-              <a:t>LLM 기반 표·차트 초안 생성</a:t>
-            </a:r>
-          </a:p>
-        </p:txBody>
-      </p:sp>
-      <p:sp>
-        <p:nvSpPr>
-          <p:cNvPr id="26" name="TextBox 25"/>
-          <p:cNvSpPr txBox="1"/>
-          <p:nvPr/>
-        </p:nvSpPr>
-        <p:spPr>
-          <a:xfrm>
-            <a:off x="5257800" y="3337560"/>
-            <a:ext cx="822960" cy="397764"/>
-          </a:xfrm>
-          <a:prstGeom prst="rect">
-            <a:avLst/>
-          </a:prstGeom>
-          <a:noFill/>
-        </p:spPr>
-        <p:txBody>
-          <a:bodyPr wrap="square" anchor="ctr" lIns="0" rIns="0" tIns="0" bIns="0">
-            <a:spAutoFit/>
-          </a:bodyPr>
-          <a:lstStyle/>
-          <a:p>
-            <a:pPr algn="ctr">
-              <a:lnSpc>
-                <a:spcPct val="105000"/>
-              </a:lnSpc>
-              <a:spcAft>
-                <a:spcPts val="0"/>
-              </a:spcAft>
-            </a:pPr>
-            <a:r>
-              <a:rPr sz="950" b="0">
-                <a:solidFill>
-                  <a:srgbClr val="2E6E69"/>
-                </a:solidFill>
-                <a:latin typeface="Noto Sans CJK KR"/>
-                <a:ea typeface="Noto Sans CJK KR"/>
-              </a:rPr>
-              <a:t>2단계</a:t>
-            </a:r>
-          </a:p>
-        </p:txBody>
-      </p:sp>
-      <p:sp>
-        <p:nvSpPr>
-          <p:cNvPr id="27" name="Rectangle 26"/>
+                  <a:srgbClr val="FFFFFF"/>
+                </a:solidFill>
+                <a:latin typeface="Noto Sans CJK KR"/>
+                <a:ea typeface="Noto Sans CJK KR"/>
+              </a:rPr>
+              <a:t>기술·위협</a:t>
+            </a:r>
+          </a:p>
+        </p:txBody>
+      </p:sp>
+      <p:sp>
+        <p:nvSpPr>
+          <p:cNvPr id="12" name="Rounded Rectangle 11"/>
           <p:cNvSpPr/>
           <p:nvPr/>
         </p:nvSpPr>
         <p:spPr>
           <a:xfrm>
-            <a:off x="502920" y="3735324"/>
-            <a:ext cx="5623560" cy="397764"/>
-          </a:xfrm>
-          <a:prstGeom prst="rect">
+            <a:off x="1618488" y="2752344"/>
+            <a:ext cx="4507992" cy="498348"/>
+          </a:xfrm>
+          <a:prstGeom prst="roundRect">
             <a:avLst/>
           </a:prstGeom>
           <a:solidFill>
@@ -6572,38 +6160,93 @@
           </a:fontRef>
         </p:style>
         <p:txBody>
-          <a:bodyPr rtlCol="0" anchor="ctr"/>
-          <a:lstStyle/>
-          <a:p>
-            <a:pPr algn="ctr"/>
-          </a:p>
-        </p:txBody>
-      </p:sp>
-      <p:sp>
-        <p:nvSpPr>
-          <p:cNvPr id="28" name="TextBox 27"/>
-          <p:cNvSpPr txBox="1"/>
+          <a:bodyPr rtlCol="0" anchor="ctr" wrap="square" lIns="64008" rIns="64008" tIns="27432" bIns="27432"/>
+          <a:lstStyle/>
+          <a:p>
+            <a:pPr algn="ctr">
+              <a:lnSpc>
+                <a:spcPct val="100000"/>
+              </a:lnSpc>
+              <a:spcAft>
+                <a:spcPts val="200"/>
+              </a:spcAft>
+            </a:pPr>
+            <a:r>
+              <a:rPr sz="950" b="1">
+                <a:solidFill>
+                  <a:srgbClr val="22282E"/>
+                </a:solidFill>
+                <a:latin typeface="Noto Sans CJK KR"/>
+                <a:ea typeface="Noto Sans CJK KR"/>
+              </a:rPr>
+              <a:t>보안위협·신기술·규제 파급</a:t>
+            </a:r>
+          </a:p>
+          <a:p>
+            <a:pPr algn="ctr">
+              <a:lnSpc>
+                <a:spcPct val="100000"/>
+              </a:lnSpc>
+              <a:spcAft>
+                <a:spcPts val="0"/>
+              </a:spcAft>
+            </a:pPr>
+            <a:r>
+              <a:rPr sz="900" b="0">
+                <a:solidFill>
+                  <a:srgbClr val="2E6E69"/>
+                </a:solidFill>
+                <a:latin typeface="Noto Sans CJK KR"/>
+                <a:ea typeface="Noto Sans CJK KR"/>
+              </a:rPr>
+              <a:t>Q. 위협지형·기술경쟁력에 주는 의미는?</a:t>
+            </a:r>
+          </a:p>
+        </p:txBody>
+      </p:sp>
+      <p:sp>
+        <p:nvSpPr>
+          <p:cNvPr id="13" name="Rounded Rectangle 12"/>
+          <p:cNvSpPr/>
           <p:nvPr/>
         </p:nvSpPr>
         <p:spPr>
           <a:xfrm>
-            <a:off x="594360" y="3735324"/>
-            <a:ext cx="1005840" cy="397764"/>
-          </a:xfrm>
-          <a:prstGeom prst="rect">
+            <a:off x="502920" y="3296412"/>
+            <a:ext cx="1051560" cy="498348"/>
+          </a:xfrm>
+          <a:prstGeom prst="roundRect">
             <a:avLst/>
           </a:prstGeom>
-          <a:noFill/>
-        </p:spPr>
-        <p:txBody>
-          <a:bodyPr wrap="square" anchor="ctr" lIns="0" rIns="0" tIns="0" bIns="0">
-            <a:spAutoFit/>
-          </a:bodyPr>
-          <a:lstStyle/>
-          <a:p>
-            <a:pPr algn="l">
-              <a:lnSpc>
-                <a:spcPct val="105000"/>
+          <a:solidFill>
+            <a:srgbClr val="2E6E69"/>
+          </a:solidFill>
+          <a:ln>
+            <a:noFill/>
+          </a:ln>
+          <a:effectLst/>
+        </p:spPr>
+        <p:style>
+          <a:lnRef idx="1">
+            <a:schemeClr val="accent1"/>
+          </a:lnRef>
+          <a:fillRef idx="3">
+            <a:schemeClr val="accent1"/>
+          </a:fillRef>
+          <a:effectRef idx="2">
+            <a:schemeClr val="accent1"/>
+          </a:effectRef>
+          <a:fontRef idx="minor">
+            <a:schemeClr val="lt1"/>
+          </a:fontRef>
+        </p:style>
+        <p:txBody>
+          <a:bodyPr rtlCol="0" anchor="ctr" wrap="square" lIns="64008" rIns="64008" tIns="27432" bIns="27432"/>
+          <a:lstStyle/>
+          <a:p>
+            <a:pPr algn="ctr">
+              <a:lnSpc>
+                <a:spcPct val="100000"/>
               </a:lnSpc>
               <a:spcAft>
                 <a:spcPts val="0"/>
@@ -6612,175 +6255,192 @@
             <a:r>
               <a:rPr sz="1050" b="1">
                 <a:solidFill>
-                  <a:srgbClr val="22282E"/>
-                </a:solidFill>
-                <a:latin typeface="Noto Sans CJK KR"/>
-                <a:ea typeface="Noto Sans CJK KR"/>
-              </a:rPr>
-              <a:t>인사이트</a:t>
-            </a:r>
-          </a:p>
-        </p:txBody>
-      </p:sp>
-      <p:sp>
-        <p:nvSpPr>
-          <p:cNvPr id="29" name="TextBox 28"/>
-          <p:cNvSpPr txBox="1"/>
+                  <a:srgbClr val="FFFFFF"/>
+                </a:solidFill>
+                <a:latin typeface="Noto Sans CJK KR"/>
+                <a:ea typeface="Noto Sans CJK KR"/>
+              </a:rPr>
+              <a:t>경쟁사</a:t>
+            </a:r>
+          </a:p>
+        </p:txBody>
+      </p:sp>
+      <p:sp>
+        <p:nvSpPr>
+          <p:cNvPr id="14" name="Rounded Rectangle 13"/>
+          <p:cNvSpPr/>
           <p:nvPr/>
         </p:nvSpPr>
         <p:spPr>
           <a:xfrm>
-            <a:off x="1737360" y="3735324"/>
-            <a:ext cx="3429000" cy="397764"/>
-          </a:xfrm>
-          <a:prstGeom prst="rect">
+            <a:off x="1618488" y="3296412"/>
+            <a:ext cx="4507992" cy="498348"/>
+          </a:xfrm>
+          <a:prstGeom prst="roundRect">
             <a:avLst/>
           </a:prstGeom>
-          <a:noFill/>
-        </p:spPr>
-        <p:txBody>
-          <a:bodyPr wrap="square" anchor="ctr" lIns="0" rIns="0" tIns="0" bIns="0">
-            <a:spAutoFit/>
-          </a:bodyPr>
-          <a:lstStyle/>
-          <a:p>
-            <a:pPr algn="l">
-              <a:lnSpc>
-                <a:spcPct val="105000"/>
+          <a:solidFill>
+            <a:srgbClr val="F5F6F7"/>
+          </a:solidFill>
+          <a:ln w="9525">
+            <a:solidFill>
+              <a:srgbClr val="D5D9DD"/>
+            </a:solidFill>
+          </a:ln>
+          <a:effectLst/>
+        </p:spPr>
+        <p:style>
+          <a:lnRef idx="1">
+            <a:schemeClr val="accent1"/>
+          </a:lnRef>
+          <a:fillRef idx="3">
+            <a:schemeClr val="accent1"/>
+          </a:fillRef>
+          <a:effectRef idx="2">
+            <a:schemeClr val="accent1"/>
+          </a:effectRef>
+          <a:fontRef idx="minor">
+            <a:schemeClr val="lt1"/>
+          </a:fontRef>
+        </p:style>
+        <p:txBody>
+          <a:bodyPr rtlCol="0" anchor="ctr" wrap="square" lIns="64008" rIns="64008" tIns="27432" bIns="27432"/>
+          <a:lstStyle/>
+          <a:p>
+            <a:pPr algn="ctr">
+              <a:lnSpc>
+                <a:spcPct val="100000"/>
+              </a:lnSpc>
+              <a:spcAft>
+                <a:spcPts val="200"/>
+              </a:spcAft>
+            </a:pPr>
+            <a:r>
+              <a:rPr sz="950" b="1">
+                <a:solidFill>
+                  <a:srgbClr val="22282E"/>
+                </a:solidFill>
+                <a:latin typeface="Noto Sans CJK KR"/>
+                <a:ea typeface="Noto Sans CJK KR"/>
+              </a:rPr>
+              <a:t>경쟁 3사 입장에서 동향 시뮬레이션</a:t>
+            </a:r>
+          </a:p>
+          <a:p>
+            <a:pPr algn="ctr">
+              <a:lnSpc>
+                <a:spcPct val="100000"/>
               </a:lnSpc>
               <a:spcAft>
                 <a:spcPts val="0"/>
               </a:spcAft>
             </a:pPr>
             <a:r>
-              <a:rPr sz="1000" b="0">
-                <a:solidFill>
-                  <a:srgbClr val="4B555E"/>
-                </a:solidFill>
-                <a:latin typeface="Noto Sans CJK KR"/>
-                <a:ea typeface="Noto Sans CJK KR"/>
-              </a:rPr>
-              <a:t>RAG(과거리포트)+암묵지 룰 프롬프트</a:t>
-            </a:r>
-          </a:p>
-        </p:txBody>
-      </p:sp>
-      <p:sp>
-        <p:nvSpPr>
-          <p:cNvPr id="30" name="TextBox 29"/>
-          <p:cNvSpPr txBox="1"/>
+              <a:rPr sz="900" b="0">
+                <a:solidFill>
+                  <a:srgbClr val="2E6E69"/>
+                </a:solidFill>
+                <a:latin typeface="Noto Sans CJK KR"/>
+                <a:ea typeface="Noto Sans CJK KR"/>
+              </a:rPr>
+              <a:t>Q. 경쟁사라면 어떻게 움직일까?</a:t>
+            </a:r>
+          </a:p>
+        </p:txBody>
+      </p:sp>
+      <p:sp>
+        <p:nvSpPr>
+          <p:cNvPr id="15" name="Rounded Rectangle 14"/>
+          <p:cNvSpPr/>
           <p:nvPr/>
         </p:nvSpPr>
         <p:spPr>
           <a:xfrm>
-            <a:off x="5257800" y="3735324"/>
-            <a:ext cx="822960" cy="397764"/>
-          </a:xfrm>
-          <a:prstGeom prst="rect">
+            <a:off x="502920" y="3886200"/>
+            <a:ext cx="5623560" cy="603504"/>
+          </a:xfrm>
+          <a:prstGeom prst="roundRect">
             <a:avLst/>
           </a:prstGeom>
-          <a:noFill/>
-        </p:spPr>
-        <p:txBody>
-          <a:bodyPr wrap="square" anchor="ctr" lIns="0" rIns="0" tIns="0" bIns="0">
-            <a:spAutoFit/>
-          </a:bodyPr>
+          <a:solidFill>
+            <a:srgbClr val="E7F0EE"/>
+          </a:solidFill>
+          <a:ln w="12700">
+            <a:solidFill>
+              <a:srgbClr val="2E6E69"/>
+            </a:solidFill>
+          </a:ln>
+          <a:effectLst/>
+        </p:spPr>
+        <p:style>
+          <a:lnRef idx="1">
+            <a:schemeClr val="accent1"/>
+          </a:lnRef>
+          <a:fillRef idx="3">
+            <a:schemeClr val="accent1"/>
+          </a:fillRef>
+          <a:effectRef idx="2">
+            <a:schemeClr val="accent1"/>
+          </a:effectRef>
+          <a:fontRef idx="minor">
+            <a:schemeClr val="lt1"/>
+          </a:fontRef>
+        </p:style>
+        <p:txBody>
+          <a:bodyPr rtlCol="0" anchor="ctr" wrap="square" lIns="64008" rIns="64008" tIns="27432" bIns="27432"/>
           <a:lstStyle/>
           <a:p>
             <a:pPr algn="ctr">
               <a:lnSpc>
-                <a:spcPct val="105000"/>
+                <a:spcPct val="100000"/>
+              </a:lnSpc>
+              <a:spcAft>
+                <a:spcPts val="300"/>
+              </a:spcAft>
+            </a:pPr>
+            <a:r>
+              <a:rPr sz="930" b="1">
+                <a:solidFill>
+                  <a:srgbClr val="2E6E69"/>
+                </a:solidFill>
+                <a:latin typeface="Noto Sans CJK KR"/>
+                <a:ea typeface="Noto Sans CJK KR"/>
+              </a:rPr>
+              <a:t>동일 입력을 각자 스탠스로 해석 → 관점 충돌 = 인간에 우선 노출되는 '주목 신호'</a:t>
+            </a:r>
+          </a:p>
+          <a:p>
+            <a:pPr algn="ctr">
+              <a:lnSpc>
+                <a:spcPct val="100000"/>
               </a:lnSpc>
               <a:spcAft>
                 <a:spcPts val="0"/>
               </a:spcAft>
             </a:pPr>
             <a:r>
-              <a:rPr sz="950" b="0">
-                <a:solidFill>
-                  <a:srgbClr val="2E6E69"/>
-                </a:solidFill>
-                <a:latin typeface="Noto Sans CJK KR"/>
-                <a:ea typeface="Noto Sans CJK KR"/>
-              </a:rPr>
-              <a:t>2단계</a:t>
-            </a:r>
-          </a:p>
-        </p:txBody>
-      </p:sp>
-      <p:sp>
-        <p:nvSpPr>
-          <p:cNvPr id="31" name="TextBox 30"/>
-          <p:cNvSpPr txBox="1"/>
-          <p:nvPr/>
-        </p:nvSpPr>
-        <p:spPr>
-          <a:xfrm>
-            <a:off x="521208" y="4224527"/>
-            <a:ext cx="5623560" cy="457200"/>
-          </a:xfrm>
-          <a:prstGeom prst="rect">
-            <a:avLst/>
-          </a:prstGeom>
-          <a:noFill/>
-        </p:spPr>
-        <p:txBody>
-          <a:bodyPr wrap="square" anchor="t" lIns="0" rIns="0" tIns="0" bIns="0">
-            <a:spAutoFit/>
-          </a:bodyPr>
-          <a:lstStyle/>
-          <a:p>
-            <a:pPr algn="l">
-              <a:lnSpc>
-                <a:spcPct val="105000"/>
-              </a:lnSpc>
-              <a:spcAft>
-                <a:spcPts val="300"/>
-              </a:spcAft>
-            </a:pPr>
-            <a:r>
-              <a:rPr sz="950" b="1">
-                <a:solidFill>
-                  <a:srgbClr val="2E6E69"/>
-                </a:solidFill>
-                <a:latin typeface="Noto Sans CJK KR"/>
-                <a:ea typeface="Noto Sans CJK KR"/>
-              </a:rPr>
-              <a:t>1단계 (Quick win) : Cowork/Claude 스킬·스케줄로 즉시 자동화</a:t>
-            </a:r>
-          </a:p>
-          <a:p>
-            <a:pPr algn="l">
-              <a:lnSpc>
-                <a:spcPct val="105000"/>
-              </a:lnSpc>
-              <a:spcAft>
-                <a:spcPts val="0"/>
-              </a:spcAft>
-            </a:pPr>
-            <a:r>
-              <a:rPr sz="950" b="0">
-                <a:solidFill>
-                  <a:srgbClr val="8A939B"/>
-                </a:solidFill>
-                <a:latin typeface="Noto Sans CJK KR"/>
-                <a:ea typeface="Noto Sans CJK KR"/>
-              </a:rPr>
-              <a:t>2단계 : 검증 후 자체 파이프라인으로 시스템화 (중장기)</a:t>
-            </a:r>
-          </a:p>
-        </p:txBody>
-      </p:sp>
-      <p:sp>
-        <p:nvSpPr>
-          <p:cNvPr id="32" name="Rounded Rectangle 31"/>
+              <a:rPr sz="900" b="0">
+                <a:solidFill>
+                  <a:srgbClr val="4B555E"/>
+                </a:solidFill>
+                <a:latin typeface="Noto Sans CJK KR"/>
+                <a:ea typeface="Noto Sans CJK KR"/>
+              </a:rPr>
+              <a:t>(MAGI 교착 = 의사결정 트리거) · 최종 판단·편집·책임은 인간(휴먼인더루프)</a:t>
+            </a:r>
+          </a:p>
+        </p:txBody>
+      </p:sp>
+      <p:sp>
+        <p:nvSpPr>
+          <p:cNvPr id="16" name="Rounded Rectangle 15"/>
           <p:cNvSpPr/>
           <p:nvPr/>
         </p:nvSpPr>
         <p:spPr>
           <a:xfrm>
-            <a:off x="6446520" y="1325880"/>
-            <a:ext cx="3383280" cy="310896"/>
+            <a:off x="6446520" y="1280160"/>
+            <a:ext cx="4023360" cy="301752"/>
           </a:xfrm>
           <a:prstGeom prst="roundRect">
             <a:avLst/>
@@ -6808,7 +6468,7 @@
           </a:fontRef>
         </p:style>
         <p:txBody>
-          <a:bodyPr rtlCol="0" anchor="ctr" wrap="square" lIns="54864" rIns="54864" tIns="27432" bIns="27432"/>
+          <a:bodyPr rtlCol="0" anchor="ctr" wrap="square" lIns="64008" rIns="64008" tIns="27432" bIns="27432"/>
           <a:lstStyle/>
           <a:p>
             <a:pPr algn="ctr">
@@ -6827,21 +6487,21 @@
                 <a:latin typeface="Noto Sans CJK KR"/>
                 <a:ea typeface="Noto Sans CJK KR"/>
               </a:rPr>
-              <a:t>② 사람의 역할 ─ 암묵지 정리가 핵심</a:t>
-            </a:r>
-          </a:p>
-        </p:txBody>
-      </p:sp>
-      <p:sp>
-        <p:nvSpPr>
-          <p:cNvPr id="33" name="Rounded Rectangle 32"/>
+              <a:t>② 암묵지 코드화 (moat) — 사람의 핵심 역할</a:t>
+            </a:r>
+          </a:p>
+        </p:txBody>
+      </p:sp>
+      <p:sp>
+        <p:nvSpPr>
+          <p:cNvPr id="17" name="Rounded Rectangle 16"/>
           <p:cNvSpPr/>
           <p:nvPr/>
         </p:nvSpPr>
         <p:spPr>
           <a:xfrm>
-            <a:off x="6446520" y="1746504"/>
-            <a:ext cx="5239512" cy="2395728"/>
+            <a:off x="6446520" y="1664207"/>
+            <a:ext cx="5239512" cy="2615184"/>
           </a:xfrm>
           <a:prstGeom prst="roundRect">
             <a:avLst/>
@@ -6871,7 +6531,7 @@
           </a:fontRef>
         </p:style>
         <p:txBody>
-          <a:bodyPr rtlCol="0" anchor="ctr" wrap="square" lIns="54864" rIns="54864" tIns="27432" bIns="27432"/>
+          <a:bodyPr rtlCol="0" anchor="ctr" wrap="square" lIns="64008" rIns="64008" tIns="27432" bIns="27432"/>
           <a:lstStyle/>
           <a:p>
             <a:pPr algn="ctr">
@@ -6897,13 +6557,13 @@
       </p:sp>
       <p:sp>
         <p:nvSpPr>
-          <p:cNvPr id="34" name="Oval 33"/>
+          <p:cNvPr id="18" name="Oval 17"/>
           <p:cNvSpPr/>
           <p:nvPr/>
         </p:nvSpPr>
         <p:spPr>
           <a:xfrm>
-            <a:off x="6647688" y="1938527"/>
+            <a:off x="6647688" y="1865376"/>
             <a:ext cx="274320" cy="274320"/>
           </a:xfrm>
           <a:prstGeom prst="ellipse">
@@ -6951,14 +6611,14 @@
       </p:sp>
       <p:sp>
         <p:nvSpPr>
-          <p:cNvPr id="35" name="TextBox 34"/>
+          <p:cNvPr id="19" name="TextBox 18"/>
           <p:cNvSpPr txBox="1"/>
           <p:nvPr/>
         </p:nvSpPr>
         <p:spPr>
           <a:xfrm>
-            <a:off x="7050024" y="1892807"/>
-            <a:ext cx="4462272" cy="530352"/>
+            <a:off x="7050024" y="1810512"/>
+            <a:ext cx="4462272" cy="548640"/>
           </a:xfrm>
           <a:prstGeom prst="rect">
             <a:avLst/>
@@ -6980,14 +6640,14 @@
               </a:spcAft>
             </a:pPr>
             <a:r>
-              <a:rPr sz="1100" b="1">
+              <a:rPr sz="1050" b="1">
                 <a:solidFill>
                   <a:srgbClr val="22282E"/>
                 </a:solidFill>
                 <a:latin typeface="Noto Sans CJK KR"/>
                 <a:ea typeface="Noto Sans CJK KR"/>
               </a:rPr>
-              <a:t>선정 우선순위 기준 명문화</a:t>
+              <a:t>결론(what) 아닌 근거(why)를 코드화</a:t>
             </a:r>
           </a:p>
           <a:p>
@@ -7000,27 +6660,27 @@
               </a:spcAft>
             </a:pPr>
             <a:r>
-              <a:rPr sz="930" b="0">
+              <a:rPr sz="900" b="0">
                 <a:solidFill>
                   <a:srgbClr val="4B555E"/>
                 </a:solidFill>
                 <a:latin typeface="Noto Sans CJK KR"/>
                 <a:ea typeface="Noto Sans CJK KR"/>
               </a:rPr>
-              <a:t>경쟁사 순위·신기술 판단기준을 규칙으로 정의</a:t>
-            </a:r>
-          </a:p>
-        </p:txBody>
-      </p:sp>
-      <p:sp>
-        <p:nvSpPr>
-          <p:cNvPr id="36" name="Oval 35"/>
+              <a:t>전이되는 건 결론이 아니라 근거 — 항상 '왜'를 잡는다</a:t>
+            </a:r>
+          </a:p>
+        </p:txBody>
+      </p:sp>
+      <p:sp>
+        <p:nvSpPr>
+          <p:cNvPr id="20" name="Oval 19"/>
           <p:cNvSpPr/>
           <p:nvPr/>
         </p:nvSpPr>
         <p:spPr>
           <a:xfrm>
-            <a:off x="6647688" y="2487168"/>
+            <a:off x="6647688" y="2455164"/>
             <a:ext cx="274320" cy="274320"/>
           </a:xfrm>
           <a:prstGeom prst="ellipse">
@@ -7068,14 +6728,14 @@
       </p:sp>
       <p:sp>
         <p:nvSpPr>
-          <p:cNvPr id="37" name="TextBox 36"/>
+          <p:cNvPr id="21" name="TextBox 20"/>
           <p:cNvSpPr txBox="1"/>
           <p:nvPr/>
         </p:nvSpPr>
         <p:spPr>
           <a:xfrm>
-            <a:off x="7050024" y="2441448"/>
-            <a:ext cx="4462272" cy="530352"/>
+            <a:off x="7050024" y="2400300"/>
+            <a:ext cx="4462272" cy="548640"/>
           </a:xfrm>
           <a:prstGeom prst="rect">
             <a:avLst/>
@@ -7097,14 +6757,14 @@
               </a:spcAft>
             </a:pPr>
             <a:r>
-              <a:rPr sz="1100" b="1">
+              <a:rPr sz="1050" b="1">
                 <a:solidFill>
                   <a:srgbClr val="22282E"/>
                 </a:solidFill>
                 <a:latin typeface="Noto Sans CJK KR"/>
                 <a:ea typeface="Noto Sans CJK KR"/>
               </a:rPr>
-              <a:t>인사이트 도출 로직 형식지화</a:t>
+              <a:t>근거 우선(Evidence-First) 스키마</a:t>
             </a:r>
           </a:p>
           <a:p>
@@ -7117,27 +6777,27 @@
               </a:spcAft>
             </a:pPr>
             <a:r>
-              <a:rPr sz="930" b="0">
+              <a:rPr sz="900" b="0">
                 <a:solidFill>
                   <a:srgbClr val="4B555E"/>
                 </a:solidFill>
                 <a:latin typeface="Noto Sans CJK KR"/>
                 <a:ea typeface="Noto Sans CJK KR"/>
               </a:rPr>
-              <a:t>'당사 인사이트' 도출 사고를 체크리스트·프롬프트化</a:t>
-            </a:r>
-          </a:p>
-        </p:txBody>
-      </p:sp>
-      <p:sp>
-        <p:nvSpPr>
-          <p:cNvPr id="38" name="Oval 37"/>
+              <a:t>트리거→판단→★근거·추론→반대고려→경계조건→검증→라벨</a:t>
+            </a:r>
+          </a:p>
+        </p:txBody>
+      </p:sp>
+      <p:sp>
+        <p:nvSpPr>
+          <p:cNvPr id="22" name="Oval 21"/>
           <p:cNvSpPr/>
           <p:nvPr/>
         </p:nvSpPr>
         <p:spPr>
           <a:xfrm>
-            <a:off x="6647688" y="3035807"/>
+            <a:off x="6647688" y="3044952"/>
             <a:ext cx="274320" cy="274320"/>
           </a:xfrm>
           <a:prstGeom prst="ellipse">
@@ -7185,14 +6845,14 @@
       </p:sp>
       <p:sp>
         <p:nvSpPr>
-          <p:cNvPr id="39" name="TextBox 38"/>
+          <p:cNvPr id="23" name="TextBox 22"/>
           <p:cNvSpPr txBox="1"/>
           <p:nvPr/>
         </p:nvSpPr>
         <p:spPr>
           <a:xfrm>
-            <a:off x="7050024" y="2990087"/>
-            <a:ext cx="4462272" cy="530352"/>
+            <a:off x="7050024" y="2990088"/>
+            <a:ext cx="4462272" cy="548640"/>
           </a:xfrm>
           <a:prstGeom prst="rect">
             <a:avLst/>
@@ -7214,14 +6874,14 @@
               </a:spcAft>
             </a:pPr>
             <a:r>
-              <a:rPr sz="1100" b="1">
+              <a:rPr sz="1050" b="1">
                 <a:solidFill>
                   <a:srgbClr val="22282E"/>
                 </a:solidFill>
                 <a:latin typeface="Noto Sans CJK KR"/>
                 <a:ea typeface="Noto Sans CJK KR"/>
               </a:rPr>
-              <a:t>AI 초안 검증 및 최종 판단</a:t>
+              <a:t>구체 사례 인터뷰로 추출</a:t>
             </a:r>
           </a:p>
           <a:p>
@@ -7234,27 +6894,27 @@
               </a:spcAft>
             </a:pPr>
             <a:r>
-              <a:rPr sz="930" b="0">
+              <a:rPr sz="900" b="0">
                 <a:solidFill>
                   <a:srgbClr val="4B555E"/>
                 </a:solidFill>
                 <a:latin typeface="Noto Sans CJK KR"/>
                 <a:ea typeface="Noto Sans CJK KR"/>
               </a:rPr>
-              <a:t>사실관계·논조·맥락 검수, 발송 전 최종 책임</a:t>
-            </a:r>
-          </a:p>
-        </p:txBody>
-      </p:sp>
-      <p:sp>
-        <p:nvSpPr>
-          <p:cNvPr id="40" name="Oval 39"/>
+              <a:t>'왜' 3회 되묻기 · 시드 20~30건 + 인워크플로 라벨 누적</a:t>
+            </a:r>
+          </a:p>
+        </p:txBody>
+      </p:sp>
+      <p:sp>
+        <p:nvSpPr>
+          <p:cNvPr id="24" name="Oval 23"/>
           <p:cNvSpPr/>
           <p:nvPr/>
         </p:nvSpPr>
         <p:spPr>
           <a:xfrm>
-            <a:off x="6647688" y="3584447"/>
+            <a:off x="6647688" y="3634740"/>
             <a:ext cx="274320" cy="274320"/>
           </a:xfrm>
           <a:prstGeom prst="ellipse">
@@ -7302,14 +6962,14 @@
       </p:sp>
       <p:sp>
         <p:nvSpPr>
-          <p:cNvPr id="41" name="TextBox 40"/>
+          <p:cNvPr id="25" name="TextBox 24"/>
           <p:cNvSpPr txBox="1"/>
           <p:nvPr/>
         </p:nvSpPr>
         <p:spPr>
           <a:xfrm>
-            <a:off x="7050024" y="3538727"/>
-            <a:ext cx="4462272" cy="530352"/>
+            <a:off x="7050024" y="3579876"/>
+            <a:ext cx="4462272" cy="548640"/>
           </a:xfrm>
           <a:prstGeom prst="rect">
             <a:avLst/>
@@ -7331,14 +6991,14 @@
               </a:spcAft>
             </a:pPr>
             <a:r>
-              <a:rPr sz="1100" b="1">
+              <a:rPr sz="1050" b="1">
                 <a:solidFill>
                   <a:srgbClr val="22282E"/>
                 </a:solidFill>
                 <a:latin typeface="Noto Sans CJK KR"/>
                 <a:ea typeface="Noto Sans CJK KR"/>
               </a:rPr>
-              <a:t>피드백 루프 운영</a:t>
+              <a:t>good/bad 라벨 = 학습 데이터</a:t>
             </a:r>
           </a:p>
           <a:p>
@@ -7351,28 +7011,28 @@
               </a:spcAft>
             </a:pPr>
             <a:r>
-              <a:rPr sz="930" b="0">
+              <a:rPr sz="900" b="0">
                 <a:solidFill>
                   <a:srgbClr val="4B555E"/>
                 </a:solidFill>
                 <a:latin typeface="Noto Sans CJK KR"/>
                 <a:ea typeface="Noto Sans CJK KR"/>
               </a:rPr>
-              <a:t>결과 기반 프롬프트·룰 지속 고도화</a:t>
-            </a:r>
-          </a:p>
-        </p:txBody>
-      </p:sp>
-      <p:sp>
-        <p:nvSpPr>
-          <p:cNvPr id="42" name="Rounded Rectangle 41"/>
+              <a:t>라벨·근거가 few-shot·검색 컨텍스트로 L5 루프에 직접 투입</a:t>
+            </a:r>
+          </a:p>
+        </p:txBody>
+      </p:sp>
+      <p:sp>
+        <p:nvSpPr>
+          <p:cNvPr id="26" name="Rounded Rectangle 25"/>
           <p:cNvSpPr/>
           <p:nvPr/>
         </p:nvSpPr>
         <p:spPr>
           <a:xfrm>
             <a:off x="502920" y="4590288"/>
-            <a:ext cx="2560320" cy="310896"/>
+            <a:ext cx="4114800" cy="301752"/>
           </a:xfrm>
           <a:prstGeom prst="roundRect">
             <a:avLst/>
@@ -7400,7 +7060,7 @@
           </a:fontRef>
         </p:style>
         <p:txBody>
-          <a:bodyPr rtlCol="0" anchor="ctr" wrap="square" lIns="54864" rIns="54864" tIns="27432" bIns="27432"/>
+          <a:bodyPr rtlCol="0" anchor="ctr" wrap="square" lIns="64008" rIns="64008" tIns="27432" bIns="27432"/>
           <a:lstStyle/>
           <a:p>
             <a:pPr algn="ctr">
@@ -7412,28 +7072,28 @@
               </a:spcAft>
             </a:pPr>
             <a:r>
-              <a:rPr sz="1100" b="1">
+              <a:rPr sz="1050" b="1">
                 <a:solidFill>
                   <a:srgbClr val="FFFFFF"/>
                 </a:solidFill>
                 <a:latin typeface="Noto Sans CJK KR"/>
                 <a:ea typeface="Noto Sans CJK KR"/>
               </a:rPr>
-              <a:t>③ 추진계획 (8월 → 10월)</a:t>
+              <a:t>③ 추진 로드맵 — 10월 파일럿 완료 목표 (Phase 0→3 압축)</a:t>
             </a:r>
           </a:p>
         </p:txBody>
       </p:sp>
       <p:cxnSp>
         <p:nvCxnSpPr>
-          <p:cNvPr id="43" name="Connector 42"/>
+          <p:cNvPr id="27" name="Connector 26"/>
           <p:cNvCxnSpPr/>
           <p:nvPr/>
         </p:nvCxnSpPr>
         <p:spPr>
           <a:xfrm>
-            <a:off x="3291840" y="4745736"/>
-            <a:ext cx="8275320" cy="0"/>
+            <a:off x="4846320" y="4736592"/>
+            <a:ext cx="6720839" cy="0"/>
           </a:xfrm>
           <a:prstGeom prst="bentConnector3">
             <a:avLst/>
@@ -7461,7 +7121,7 @@
       </p:cxnSp>
       <p:sp>
         <p:nvSpPr>
-          <p:cNvPr id="44" name="Rounded Rectangle 43"/>
+          <p:cNvPr id="28" name="Rounded Rectangle 27"/>
           <p:cNvSpPr/>
           <p:nvPr/>
         </p:nvSpPr>
@@ -7496,7 +7156,7 @@
           </a:fontRef>
         </p:style>
         <p:txBody>
-          <a:bodyPr rtlCol="0" anchor="ctr" wrap="square" lIns="54864" rIns="54864" tIns="27432" bIns="27432"/>
+          <a:bodyPr rtlCol="0" anchor="ctr" wrap="square" lIns="64008" rIns="64008" tIns="27432" bIns="27432"/>
           <a:lstStyle/>
           <a:p>
             <a:pPr algn="ctr">
@@ -7508,21 +7168,21 @@
               </a:spcAft>
             </a:pPr>
             <a:r>
-              <a:rPr sz="1200" b="1">
+              <a:rPr sz="1100" b="1">
                 <a:solidFill>
                   <a:srgbClr val="FFFFFF"/>
                 </a:solidFill>
                 <a:latin typeface="Noto Sans CJK KR"/>
                 <a:ea typeface="Noto Sans CJK KR"/>
               </a:rPr>
-              <a:t>8월   기반 구축 · Quick win</a:t>
-            </a:r>
-          </a:p>
-        </p:txBody>
-      </p:sp>
-      <p:sp>
-        <p:nvSpPr>
-          <p:cNvPr id="45" name="Rounded Rectangle 44"/>
+              <a:t>8월   Phase 0~1  정렬·시드·수집 PoC</a:t>
+            </a:r>
+          </a:p>
+        </p:txBody>
+      </p:sp>
+      <p:sp>
+        <p:nvSpPr>
+          <p:cNvPr id="29" name="Rounded Rectangle 28"/>
           <p:cNvSpPr/>
           <p:nvPr/>
         </p:nvSpPr>
@@ -7559,7 +7219,7 @@
           </a:fontRef>
         </p:style>
         <p:txBody>
-          <a:bodyPr rtlCol="0" anchor="ctr" wrap="square" lIns="54864" rIns="54864" tIns="27432" bIns="27432"/>
+          <a:bodyPr rtlCol="0" anchor="ctr" wrap="square" lIns="64008" rIns="64008" tIns="27432" bIns="27432"/>
           <a:lstStyle/>
           <a:p>
             <a:pPr algn="ctr">
@@ -7585,7 +7245,7 @@
       </p:sp>
       <p:sp>
         <p:nvSpPr>
-          <p:cNvPr id="46" name="TextBox 45"/>
+          <p:cNvPr id="30" name="TextBox 29"/>
           <p:cNvSpPr txBox="1"/>
           <p:nvPr/>
         </p:nvSpPr>
@@ -7614,14 +7274,14 @@
               </a:spcAft>
             </a:pPr>
             <a:r>
-              <a:rPr sz="1000" b="0">
+              <a:rPr sz="950" b="0">
                 <a:solidFill>
                   <a:srgbClr val="4B555E"/>
                 </a:solidFill>
                 <a:latin typeface="Noto Sans CJK KR"/>
                 <a:ea typeface="Noto Sans CJK KR"/>
               </a:rPr>
-              <a:t>•  암묵지 형식지화: 선정기준·검색어·소스 정리</a:t>
+              <a:t>•  범위·스코어링 기준·에이전트 스탠스 정의</a:t>
             </a:r>
           </a:p>
           <a:p>
@@ -7634,14 +7294,14 @@
               </a:spcAft>
             </a:pPr>
             <a:r>
-              <a:rPr sz="1000" b="0">
+              <a:rPr sz="950" b="0">
                 <a:solidFill>
                   <a:srgbClr val="4B555E"/>
                 </a:solidFill>
                 <a:latin typeface="Noto Sans CJK KR"/>
                 <a:ea typeface="Noto Sans CJK KR"/>
               </a:rPr>
-              <a:t>•  수집 자동화 PoC (Cowork 스킬·스케줄)</a:t>
+              <a:t>•  베테랑 워크숍 → 핵심사례 20~30건 시드 KB</a:t>
             </a:r>
           </a:p>
           <a:p>
@@ -7654,21 +7314,21 @@
               </a:spcAft>
             </a:pPr>
             <a:r>
-              <a:rPr sz="1000" b="0">
+              <a:rPr sz="950" b="0">
                 <a:solidFill>
                   <a:srgbClr val="4B555E"/>
                 </a:solidFill>
                 <a:latin typeface="Noto Sans CJK KR"/>
                 <a:ea typeface="Noto Sans CJK KR"/>
               </a:rPr>
-              <a:t>•  요약·번역 초안 자동화</a:t>
-            </a:r>
-          </a:p>
-        </p:txBody>
-      </p:sp>
-      <p:sp>
-        <p:nvSpPr>
-          <p:cNvPr id="47" name="Rounded Rectangle 46"/>
+              <a:t>•  L1 수집 자동화 파이프라인 PoC</a:t>
+            </a:r>
+          </a:p>
+        </p:txBody>
+      </p:sp>
+      <p:sp>
+        <p:nvSpPr>
+          <p:cNvPr id="31" name="Rounded Rectangle 30"/>
           <p:cNvSpPr/>
           <p:nvPr/>
         </p:nvSpPr>
@@ -7703,7 +7363,7 @@
           </a:fontRef>
         </p:style>
         <p:txBody>
-          <a:bodyPr rtlCol="0" anchor="ctr" wrap="square" lIns="54864" rIns="54864" tIns="27432" bIns="27432"/>
+          <a:bodyPr rtlCol="0" anchor="ctr" wrap="square" lIns="64008" rIns="64008" tIns="27432" bIns="27432"/>
           <a:lstStyle/>
           <a:p>
             <a:pPr algn="ctr">
@@ -7715,21 +7375,21 @@
               </a:spcAft>
             </a:pPr>
             <a:r>
-              <a:rPr sz="1200" b="1">
+              <a:rPr sz="1100" b="1">
                 <a:solidFill>
                   <a:srgbClr val="FFFFFF"/>
                 </a:solidFill>
                 <a:latin typeface="Noto Sans CJK KR"/>
                 <a:ea typeface="Noto Sans CJK KR"/>
               </a:rPr>
-              <a:t>9월   파이프라인 · 시범운영</a:t>
-            </a:r>
-          </a:p>
-        </p:txBody>
-      </p:sp>
-      <p:sp>
-        <p:nvSpPr>
-          <p:cNvPr id="48" name="Rounded Rectangle 47"/>
+              <a:t>9월   Phase 2  에이전트 PoC</a:t>
+            </a:r>
+          </a:p>
+        </p:txBody>
+      </p:sp>
+      <p:sp>
+        <p:nvSpPr>
+          <p:cNvPr id="32" name="Rounded Rectangle 31"/>
           <p:cNvSpPr/>
           <p:nvPr/>
         </p:nvSpPr>
@@ -7766,7 +7426,7 @@
           </a:fontRef>
         </p:style>
         <p:txBody>
-          <a:bodyPr rtlCol="0" anchor="ctr" wrap="square" lIns="54864" rIns="54864" tIns="27432" bIns="27432"/>
+          <a:bodyPr rtlCol="0" anchor="ctr" wrap="square" lIns="64008" rIns="64008" tIns="27432" bIns="27432"/>
           <a:lstStyle/>
           <a:p>
             <a:pPr algn="ctr">
@@ -7792,7 +7452,7 @@
       </p:sp>
       <p:sp>
         <p:nvSpPr>
-          <p:cNvPr id="49" name="TextBox 48"/>
+          <p:cNvPr id="33" name="TextBox 32"/>
           <p:cNvSpPr txBox="1"/>
           <p:nvPr/>
         </p:nvSpPr>
@@ -7821,14 +7481,14 @@
               </a:spcAft>
             </a:pPr>
             <a:r>
-              <a:rPr sz="1000" b="0">
+              <a:rPr sz="950" b="0">
                 <a:solidFill>
                   <a:srgbClr val="4B555E"/>
                 </a:solidFill>
                 <a:latin typeface="Noto Sans CJK KR"/>
                 <a:ea typeface="Noto Sans CJK KR"/>
               </a:rPr>
-              <a:t>•  AI 분류·시각화 초안 파이프라인 구축</a:t>
+              <a:t>•  4관점 에이전트 프로토타입 구축</a:t>
             </a:r>
           </a:p>
           <a:p>
@@ -7841,14 +7501,14 @@
               </a:spcAft>
             </a:pPr>
             <a:r>
-              <a:rPr sz="1000" b="0">
+              <a:rPr sz="950" b="0">
                 <a:solidFill>
                   <a:srgbClr val="4B555E"/>
                 </a:solidFill>
                 <a:latin typeface="Noto Sans CJK KR"/>
                 <a:ea typeface="Noto Sans CJK KR"/>
               </a:rPr>
-              <a:t>•  인사이트 프롬프트 v1 + RAG 연결</a:t>
+              <a:t>•  과거 리포트로 백테스트·튜닝</a:t>
             </a:r>
           </a:p>
           <a:p>
@@ -7861,21 +7521,21 @@
               </a:spcAft>
             </a:pPr>
             <a:r>
-              <a:rPr sz="1000" b="0">
+              <a:rPr sz="950" b="0">
                 <a:solidFill>
                   <a:srgbClr val="4B555E"/>
                 </a:solidFill>
                 <a:latin typeface="Noto Sans CJK KR"/>
                 <a:ea typeface="Noto Sans CJK KR"/>
               </a:rPr>
-              <a:t>•  기존 방식과 병행 시범운영·검증</a:t>
-            </a:r>
-          </a:p>
-        </p:txBody>
-      </p:sp>
-      <p:sp>
-        <p:nvSpPr>
-          <p:cNvPr id="50" name="Rounded Rectangle 49"/>
+              <a:t>•  관점 충돌 신호·확신도 뷰 설계</a:t>
+            </a:r>
+          </a:p>
+        </p:txBody>
+      </p:sp>
+      <p:sp>
+        <p:nvSpPr>
+          <p:cNvPr id="34" name="Rounded Rectangle 33"/>
           <p:cNvSpPr/>
           <p:nvPr/>
         </p:nvSpPr>
@@ -7910,7 +7570,7 @@
           </a:fontRef>
         </p:style>
         <p:txBody>
-          <a:bodyPr rtlCol="0" anchor="ctr" wrap="square" lIns="54864" rIns="54864" tIns="27432" bIns="27432"/>
+          <a:bodyPr rtlCol="0" anchor="ctr" wrap="square" lIns="64008" rIns="64008" tIns="27432" bIns="27432"/>
           <a:lstStyle/>
           <a:p>
             <a:pPr algn="ctr">
@@ -7922,21 +7582,21 @@
               </a:spcAft>
             </a:pPr>
             <a:r>
-              <a:rPr sz="1200" b="1">
+              <a:rPr sz="1100" b="1">
                 <a:solidFill>
                   <a:srgbClr val="FFFFFF"/>
                 </a:solidFill>
                 <a:latin typeface="Noto Sans CJK KR"/>
                 <a:ea typeface="Noto Sans CJK KR"/>
               </a:rPr>
-              <a:t>10월   고도화 · 정식 전환</a:t>
-            </a:r>
-          </a:p>
-        </p:txBody>
-      </p:sp>
-      <p:sp>
-        <p:nvSpPr>
-          <p:cNvPr id="51" name="Rounded Rectangle 50"/>
+              <a:t>10월   Phase 3  휴먼인더루프 파일럿</a:t>
+            </a:r>
+          </a:p>
+        </p:txBody>
+      </p:sp>
+      <p:sp>
+        <p:nvSpPr>
+          <p:cNvPr id="35" name="Rounded Rectangle 34"/>
           <p:cNvSpPr/>
           <p:nvPr/>
         </p:nvSpPr>
@@ -7973,7 +7633,7 @@
           </a:fontRef>
         </p:style>
         <p:txBody>
-          <a:bodyPr rtlCol="0" anchor="ctr" wrap="square" lIns="54864" rIns="54864" tIns="27432" bIns="27432"/>
+          <a:bodyPr rtlCol="0" anchor="ctr" wrap="square" lIns="64008" rIns="64008" tIns="27432" bIns="27432"/>
           <a:lstStyle/>
           <a:p>
             <a:pPr algn="ctr">
@@ -7999,7 +7659,7 @@
       </p:sp>
       <p:sp>
         <p:nvSpPr>
-          <p:cNvPr id="52" name="TextBox 51"/>
+          <p:cNvPr id="36" name="TextBox 35"/>
           <p:cNvSpPr txBox="1"/>
           <p:nvPr/>
         </p:nvSpPr>
@@ -8028,14 +7688,14 @@
               </a:spcAft>
             </a:pPr>
             <a:r>
-              <a:rPr sz="1000" b="0">
+              <a:rPr sz="950" b="0">
                 <a:solidFill>
                   <a:srgbClr val="4B555E"/>
                 </a:solidFill>
                 <a:latin typeface="Noto Sans CJK KR"/>
                 <a:ea typeface="Noto Sans CJK KR"/>
               </a:rPr>
-              <a:t>•  품질 검증 및 프롬프트 고도화</a:t>
+              <a:t>•  1~2회 실제 발행 사이클 병행 적용</a:t>
             </a:r>
           </a:p>
           <a:p>
@@ -8048,14 +7708,14 @@
               </a:spcAft>
             </a:pPr>
             <a:r>
-              <a:rPr sz="1000" b="0">
+              <a:rPr sz="950" b="0">
                 <a:solidFill>
                   <a:srgbClr val="4B555E"/>
                 </a:solidFill>
                 <a:latin typeface="Noto Sans CJK KR"/>
                 <a:ea typeface="Noto Sans CJK KR"/>
               </a:rPr>
-              <a:t>•  표준 프로세스 확정·정식 전환</a:t>
+              <a:t>•  라벨링 운영 → 라벨 데이터셋 확보</a:t>
             </a:r>
           </a:p>
           <a:p>
@@ -8068,14 +7728,14 @@
               </a:spcAft>
             </a:pPr>
             <a:r>
-              <a:rPr sz="1000" b="0">
-                <a:solidFill>
-                  <a:srgbClr val="4B555E"/>
-                </a:solidFill>
-                <a:latin typeface="Noto Sans CJK KR"/>
-                <a:ea typeface="Noto Sans CJK KR"/>
-              </a:rPr>
-              <a:t>•  중장기 자체 시스템화 로드맵 수립</a:t>
+              <a:rPr sz="950" b="0">
+                <a:solidFill>
+                  <a:srgbClr val="8A939B"/>
+                </a:solidFill>
+                <a:latin typeface="Noto Sans CJK KR"/>
+                <a:ea typeface="Noto Sans CJK KR"/>
+              </a:rPr>
+              <a:t>•  ※ 이후 Phase 4 정식운영·개선 확장</a:t>
             </a:r>
           </a:p>
         </p:txBody>

--- a/마켓센싱리포트_AI혁신_2p.pptx
+++ b/마켓센싱리포트_AI혁신_2p.pptx
@@ -3501,11 +3501,11 @@
             <a:avLst/>
           </a:prstGeom>
           <a:solidFill>
-            <a:srgbClr val="ECEEF0"/>
+            <a:srgbClr val="F7EAE3"/>
           </a:solidFill>
           <a:ln w="12700">
             <a:solidFill>
-              <a:srgbClr val="C3C9CF"/>
+              <a:srgbClr val="B4532A"/>
             </a:solidFill>
           </a:ln>
           <a:effectLst/>
@@ -3539,12 +3539,12 @@
             <a:r>
               <a:rPr sz="1100" b="1">
                 <a:solidFill>
-                  <a:srgbClr val="22282E"/>
-                </a:solidFill>
-                <a:latin typeface="Noto Sans CJK KR"/>
-                <a:ea typeface="Noto Sans CJK KR"/>
-              </a:rPr>
-              <a:t>② 주제 선정</a:t>
+                  <a:srgbClr val="7A381C"/>
+                </a:solidFill>
+                <a:latin typeface="Noto Sans CJK KR"/>
+                <a:ea typeface="Noto Sans CJK KR"/>
+              </a:rPr>
+              <a:t>★ ② 주제 선정</a:t>
             </a:r>
           </a:p>
           <a:p>
@@ -3564,8 +3564,8 @@
                 <a:latin typeface="Noto Sans CJK KR"/>
                 <a:ea typeface="Noto Sans CJK KR"/>
               </a:rPr>
-              <a:t>우선순위
-수동 판단</a:t>
+              <a:t>선택 우선순위 판단
+(무엇을·왜 뽑나)</a:t>
             </a:r>
           </a:p>
         </p:txBody>
@@ -3885,11 +3885,11 @@
             <a:avLst/>
           </a:prstGeom>
           <a:solidFill>
-            <a:srgbClr val="ECEEF0"/>
+            <a:srgbClr val="F7EAE3"/>
           </a:solidFill>
           <a:ln w="12700">
             <a:solidFill>
-              <a:srgbClr val="C3C9CF"/>
+              <a:srgbClr val="B4532A"/>
             </a:solidFill>
           </a:ln>
           <a:effectLst/>
@@ -3923,12 +3923,12 @@
             <a:r>
               <a:rPr sz="1100" b="1">
                 <a:solidFill>
-                  <a:srgbClr val="22282E"/>
-                </a:solidFill>
-                <a:latin typeface="Noto Sans CJK KR"/>
-                <a:ea typeface="Noto Sans CJK KR"/>
-              </a:rPr>
-              <a:t>⑤ 인사이트 도출</a:t>
+                  <a:srgbClr val="7A381C"/>
+                </a:solidFill>
+                <a:latin typeface="Noto Sans CJK KR"/>
+                <a:ea typeface="Noto Sans CJK KR"/>
+              </a:rPr>
+              <a:t>★ ⑤ 인사이트 도출</a:t>
             </a:r>
           </a:p>
           <a:p>
@@ -4090,8 +4090,91 @@
         </p:nvSpPr>
         <p:spPr>
           <a:xfrm>
-            <a:off x="502920" y="2624328"/>
-            <a:ext cx="7406640" cy="512064"/>
+            <a:off x="502920" y="2642616"/>
+            <a:ext cx="5522975" cy="512064"/>
+          </a:xfrm>
+          <a:prstGeom prst="roundRect">
+            <a:avLst/>
+          </a:prstGeom>
+          <a:solidFill>
+            <a:srgbClr val="F5F6F7"/>
+          </a:solidFill>
+          <a:ln w="12700">
+            <a:solidFill>
+              <a:srgbClr val="C3C9CF"/>
+            </a:solidFill>
+          </a:ln>
+          <a:effectLst/>
+        </p:spPr>
+        <p:style>
+          <a:lnRef idx="1">
+            <a:schemeClr val="accent1"/>
+          </a:lnRef>
+          <a:fillRef idx="3">
+            <a:schemeClr val="accent1"/>
+          </a:fillRef>
+          <a:effectRef idx="2">
+            <a:schemeClr val="accent1"/>
+          </a:effectRef>
+          <a:fontRef idx="minor">
+            <a:schemeClr val="lt1"/>
+          </a:fontRef>
+        </p:style>
+        <p:txBody>
+          <a:bodyPr rtlCol="0" anchor="ctr" wrap="square" lIns="64008" rIns="64008" tIns="27432" bIns="27432"/>
+          <a:lstStyle/>
+          <a:p>
+            <a:pPr algn="ctr">
+              <a:lnSpc>
+                <a:spcPct val="100000"/>
+              </a:lnSpc>
+              <a:spcAft>
+                <a:spcPts val="100"/>
+              </a:spcAft>
+            </a:pPr>
+            <a:r>
+              <a:rPr sz="950" b="1">
+                <a:solidFill>
+                  <a:srgbClr val="4B555E"/>
+                </a:solidFill>
+                <a:latin typeface="Noto Sans CJK KR"/>
+                <a:ea typeface="Noto Sans CJK KR"/>
+              </a:rPr>
+              <a:t>▲ 시간 병목 · 반복업무</a:t>
+            </a:r>
+          </a:p>
+          <a:p>
+            <a:pPr algn="ctr">
+              <a:lnSpc>
+                <a:spcPct val="100000"/>
+              </a:lnSpc>
+              <a:spcAft>
+                <a:spcPts val="0"/>
+              </a:spcAft>
+            </a:pPr>
+            <a:r>
+              <a:rPr sz="900" b="0">
+                <a:solidFill>
+                  <a:srgbClr val="4B555E"/>
+                </a:solidFill>
+                <a:latin typeface="Noto Sans CJK KR"/>
+                <a:ea typeface="Noto Sans CJK KR"/>
+              </a:rPr>
+              <a:t>①·③·④ 수집·정리·시각화 반복작업에 분석가 시간이 과다 소모</a:t>
+            </a:r>
+          </a:p>
+        </p:txBody>
+      </p:sp>
+      <p:sp>
+        <p:nvSpPr>
+          <p:cNvPr id="20" name="Rounded Rectangle 19"/>
+          <p:cNvSpPr/>
+          <p:nvPr/>
+        </p:nvSpPr>
+        <p:spPr>
+          <a:xfrm>
+            <a:off x="6153911" y="2642616"/>
+            <a:ext cx="5522975" cy="512064"/>
           </a:xfrm>
           <a:prstGeom prst="roundRect">
             <a:avLst/>
@@ -4140,7 +4223,7 @@
                 <a:latin typeface="Noto Sans CJK KR"/>
                 <a:ea typeface="Noto Sans CJK KR"/>
               </a:rPr>
-              <a:t>▲ 병목 1  시간</a:t>
+              <a:t>★ 암묵지·품질 병목 · 속인화</a:t>
             </a:r>
           </a:p>
           <a:p>
@@ -4153,28 +4236,403 @@
               </a:spcAft>
             </a:pPr>
             <a:r>
-              <a:rPr sz="900" b="0">
+              <a:rPr sz="850" b="0">
                 <a:solidFill>
                   <a:srgbClr val="7A381C"/>
                 </a:solidFill>
                 <a:latin typeface="Noto Sans CJK KR"/>
                 <a:ea typeface="Noto Sans CJK KR"/>
               </a:rPr>
-              <a:t>①~④ 수집·정형화 반복업무에 분석가 시간이 과도하게 소모</a:t>
-            </a:r>
-          </a:p>
-        </p:txBody>
-      </p:sp>
-      <p:sp>
-        <p:nvSpPr>
-          <p:cNvPr id="20" name="Rounded Rectangle 19"/>
+              <a:t>② 주제 선정 = '선택 우선순위'(왜 뽑나 = 인사이트) · ⑤ 인사이트 도출 → 편차</a:t>
+            </a:r>
+          </a:p>
+        </p:txBody>
+      </p:sp>
+      <p:sp>
+        <p:nvSpPr>
+          <p:cNvPr id="21" name="TextBox 20"/>
+          <p:cNvSpPr txBox="1"/>
+          <p:nvPr/>
+        </p:nvSpPr>
+        <p:spPr>
+          <a:xfrm>
+            <a:off x="502920" y="3182112"/>
+            <a:ext cx="6400800" cy="201168"/>
+          </a:xfrm>
+          <a:prstGeom prst="rect">
+            <a:avLst/>
+          </a:prstGeom>
+          <a:noFill/>
+        </p:spPr>
+        <p:txBody>
+          <a:bodyPr wrap="square" anchor="t" lIns="0" rIns="0" tIns="0" bIns="0">
+            <a:spAutoFit/>
+          </a:bodyPr>
+          <a:lstStyle/>
+          <a:p>
+            <a:pPr algn="l">
+              <a:lnSpc>
+                <a:spcPct val="105000"/>
+              </a:lnSpc>
+              <a:spcAft>
+                <a:spcPts val="0"/>
+              </a:spcAft>
+            </a:pPr>
+            <a:r>
+              <a:rPr sz="950" b="1">
+                <a:solidFill>
+                  <a:srgbClr val="4B555E"/>
+                </a:solidFill>
+                <a:latin typeface="Noto Sans CJK KR"/>
+                <a:ea typeface="Noto Sans CJK KR"/>
+              </a:rPr>
+              <a:t>① 정보수집 — 4개 소스 (수동 취합)</a:t>
+            </a:r>
+          </a:p>
+        </p:txBody>
+      </p:sp>
+      <p:sp>
+        <p:nvSpPr>
+          <p:cNvPr id="22" name="Rounded Rectangle 21"/>
           <p:cNvSpPr/>
           <p:nvPr/>
         </p:nvSpPr>
         <p:spPr>
           <a:xfrm>
-            <a:off x="8037576" y="2624328"/>
-            <a:ext cx="3639312" cy="512064"/>
+            <a:off x="502920" y="3401568"/>
+            <a:ext cx="2665476" cy="402336"/>
+          </a:xfrm>
+          <a:prstGeom prst="roundRect">
+            <a:avLst/>
+          </a:prstGeom>
+          <a:solidFill>
+            <a:srgbClr val="ECEEF0"/>
+          </a:solidFill>
+          <a:ln w="9525">
+            <a:solidFill>
+              <a:srgbClr val="C3C9CF"/>
+            </a:solidFill>
+          </a:ln>
+          <a:effectLst/>
+        </p:spPr>
+        <p:style>
+          <a:lnRef idx="1">
+            <a:schemeClr val="accent1"/>
+          </a:lnRef>
+          <a:fillRef idx="3">
+            <a:schemeClr val="accent1"/>
+          </a:fillRef>
+          <a:effectRef idx="2">
+            <a:schemeClr val="accent1"/>
+          </a:effectRef>
+          <a:fontRef idx="minor">
+            <a:schemeClr val="lt1"/>
+          </a:fontRef>
+        </p:style>
+        <p:txBody>
+          <a:bodyPr rtlCol="0" anchor="ctr" wrap="square" lIns="64008" rIns="64008" tIns="27432" bIns="27432"/>
+          <a:lstStyle/>
+          <a:p>
+            <a:pPr algn="ctr">
+              <a:lnSpc>
+                <a:spcPct val="100000"/>
+              </a:lnSpc>
+              <a:spcAft>
+                <a:spcPts val="100"/>
+              </a:spcAft>
+            </a:pPr>
+            <a:r>
+              <a:rPr sz="950" b="1">
+                <a:solidFill>
+                  <a:srgbClr val="22282E"/>
+                </a:solidFill>
+                <a:latin typeface="Noto Sans CJK KR"/>
+                <a:ea typeface="Noto Sans CJK KR"/>
+              </a:rPr>
+              <a:t>❶ 커뮤니케이션팀</a:t>
+            </a:r>
+          </a:p>
+          <a:p>
+            <a:pPr algn="ctr">
+              <a:lnSpc>
+                <a:spcPct val="100000"/>
+              </a:lnSpc>
+              <a:spcAft>
+                <a:spcPts val="0"/>
+              </a:spcAft>
+            </a:pPr>
+            <a:r>
+              <a:rPr sz="830" b="0">
+                <a:solidFill>
+                  <a:srgbClr val="4B555E"/>
+                </a:solidFill>
+                <a:latin typeface="Noto Sans CJK KR"/>
+                <a:ea typeface="Noto Sans CJK KR"/>
+              </a:rPr>
+              <a:t>신문스크랩 기사</a:t>
+            </a:r>
+          </a:p>
+        </p:txBody>
+      </p:sp>
+      <p:sp>
+        <p:nvSpPr>
+          <p:cNvPr id="23" name="Rounded Rectangle 22"/>
+          <p:cNvSpPr/>
+          <p:nvPr/>
+        </p:nvSpPr>
+        <p:spPr>
+          <a:xfrm>
+            <a:off x="3332988" y="3401568"/>
+            <a:ext cx="2665476" cy="402336"/>
+          </a:xfrm>
+          <a:prstGeom prst="roundRect">
+            <a:avLst/>
+          </a:prstGeom>
+          <a:solidFill>
+            <a:srgbClr val="ECEEF0"/>
+          </a:solidFill>
+          <a:ln w="9525">
+            <a:solidFill>
+              <a:srgbClr val="C3C9CF"/>
+            </a:solidFill>
+          </a:ln>
+          <a:effectLst/>
+        </p:spPr>
+        <p:style>
+          <a:lnRef idx="1">
+            <a:schemeClr val="accent1"/>
+          </a:lnRef>
+          <a:fillRef idx="3">
+            <a:schemeClr val="accent1"/>
+          </a:fillRef>
+          <a:effectRef idx="2">
+            <a:schemeClr val="accent1"/>
+          </a:effectRef>
+          <a:fontRef idx="minor">
+            <a:schemeClr val="lt1"/>
+          </a:fontRef>
+        </p:style>
+        <p:txBody>
+          <a:bodyPr rtlCol="0" anchor="ctr" wrap="square" lIns="64008" rIns="64008" tIns="27432" bIns="27432"/>
+          <a:lstStyle/>
+          <a:p>
+            <a:pPr algn="ctr">
+              <a:lnSpc>
+                <a:spcPct val="100000"/>
+              </a:lnSpc>
+              <a:spcAft>
+                <a:spcPts val="100"/>
+              </a:spcAft>
+            </a:pPr>
+            <a:r>
+              <a:rPr sz="950" b="1">
+                <a:solidFill>
+                  <a:srgbClr val="22282E"/>
+                </a:solidFill>
+                <a:latin typeface="Noto Sans CJK KR"/>
+                <a:ea typeface="Noto Sans CJK KR"/>
+              </a:rPr>
+              <a:t>❷ 사업부메일링</a:t>
+            </a:r>
+          </a:p>
+          <a:p>
+            <a:pPr algn="ctr">
+              <a:lnSpc>
+                <a:spcPct val="100000"/>
+              </a:lnSpc>
+              <a:spcAft>
+                <a:spcPts val="0"/>
+              </a:spcAft>
+            </a:pPr>
+            <a:r>
+              <a:rPr sz="830" b="0">
+                <a:solidFill>
+                  <a:srgbClr val="4B555E"/>
+                </a:solidFill>
+                <a:latin typeface="Noto Sans CJK KR"/>
+                <a:ea typeface="Noto Sans CJK KR"/>
+              </a:rPr>
+              <a:t>'오늘의 시장동향'</a:t>
+            </a:r>
+          </a:p>
+        </p:txBody>
+      </p:sp>
+      <p:sp>
+        <p:nvSpPr>
+          <p:cNvPr id="24" name="Rounded Rectangle 23"/>
+          <p:cNvSpPr/>
+          <p:nvPr/>
+        </p:nvSpPr>
+        <p:spPr>
+          <a:xfrm>
+            <a:off x="6163056" y="3401568"/>
+            <a:ext cx="2665476" cy="402336"/>
+          </a:xfrm>
+          <a:prstGeom prst="roundRect">
+            <a:avLst/>
+          </a:prstGeom>
+          <a:solidFill>
+            <a:srgbClr val="ECEEF0"/>
+          </a:solidFill>
+          <a:ln w="9525">
+            <a:solidFill>
+              <a:srgbClr val="C3C9CF"/>
+            </a:solidFill>
+          </a:ln>
+          <a:effectLst/>
+        </p:spPr>
+        <p:style>
+          <a:lnRef idx="1">
+            <a:schemeClr val="accent1"/>
+          </a:lnRef>
+          <a:fillRef idx="3">
+            <a:schemeClr val="accent1"/>
+          </a:fillRef>
+          <a:effectRef idx="2">
+            <a:schemeClr val="accent1"/>
+          </a:effectRef>
+          <a:fontRef idx="minor">
+            <a:schemeClr val="lt1"/>
+          </a:fontRef>
+        </p:style>
+        <p:txBody>
+          <a:bodyPr rtlCol="0" anchor="ctr" wrap="square" lIns="64008" rIns="64008" tIns="27432" bIns="27432"/>
+          <a:lstStyle/>
+          <a:p>
+            <a:pPr algn="ctr">
+              <a:lnSpc>
+                <a:spcPct val="100000"/>
+              </a:lnSpc>
+              <a:spcAft>
+                <a:spcPts val="100"/>
+              </a:spcAft>
+            </a:pPr>
+            <a:r>
+              <a:rPr sz="950" b="1">
+                <a:solidFill>
+                  <a:srgbClr val="22282E"/>
+                </a:solidFill>
+                <a:latin typeface="Noto Sans CJK KR"/>
+                <a:ea typeface="Noto Sans CJK KR"/>
+              </a:rPr>
+              <a:t>❸ 정기보고서·전시회</a:t>
+            </a:r>
+          </a:p>
+          <a:p>
+            <a:pPr algn="ctr">
+              <a:lnSpc>
+                <a:spcPct val="100000"/>
+              </a:lnSpc>
+              <a:spcAft>
+                <a:spcPts val="0"/>
+              </a:spcAft>
+            </a:pPr>
+            <a:r>
+              <a:rPr sz="830" b="0">
+                <a:solidFill>
+                  <a:srgbClr val="4B555E"/>
+                </a:solidFill>
+                <a:latin typeface="Noto Sans CJK KR"/>
+                <a:ea typeface="Noto Sans CJK KR"/>
+              </a:rPr>
+              <a:t>IMF·한국은행·KISIA / CES·MWC</a:t>
+            </a:r>
+          </a:p>
+        </p:txBody>
+      </p:sp>
+      <p:sp>
+        <p:nvSpPr>
+          <p:cNvPr id="25" name="Rounded Rectangle 24"/>
+          <p:cNvSpPr/>
+          <p:nvPr/>
+        </p:nvSpPr>
+        <p:spPr>
+          <a:xfrm>
+            <a:off x="8993124" y="3401568"/>
+            <a:ext cx="2665476" cy="402336"/>
+          </a:xfrm>
+          <a:prstGeom prst="roundRect">
+            <a:avLst/>
+          </a:prstGeom>
+          <a:solidFill>
+            <a:srgbClr val="ECEEF0"/>
+          </a:solidFill>
+          <a:ln w="9525">
+            <a:solidFill>
+              <a:srgbClr val="C3C9CF"/>
+            </a:solidFill>
+          </a:ln>
+          <a:effectLst/>
+        </p:spPr>
+        <p:style>
+          <a:lnRef idx="1">
+            <a:schemeClr val="accent1"/>
+          </a:lnRef>
+          <a:fillRef idx="3">
+            <a:schemeClr val="accent1"/>
+          </a:fillRef>
+          <a:effectRef idx="2">
+            <a:schemeClr val="accent1"/>
+          </a:effectRef>
+          <a:fontRef idx="minor">
+            <a:schemeClr val="lt1"/>
+          </a:fontRef>
+        </p:style>
+        <p:txBody>
+          <a:bodyPr rtlCol="0" anchor="ctr" wrap="square" lIns="64008" rIns="64008" tIns="27432" bIns="27432"/>
+          <a:lstStyle/>
+          <a:p>
+            <a:pPr algn="ctr">
+              <a:lnSpc>
+                <a:spcPct val="100000"/>
+              </a:lnSpc>
+              <a:spcAft>
+                <a:spcPts val="100"/>
+              </a:spcAft>
+            </a:pPr>
+            <a:r>
+              <a:rPr sz="950" b="1">
+                <a:solidFill>
+                  <a:srgbClr val="22282E"/>
+                </a:solidFill>
+                <a:latin typeface="Noto Sans CJK KR"/>
+                <a:ea typeface="Noto Sans CJK KR"/>
+              </a:rPr>
+              <a:t>❹ 검색어 기반 검색</a:t>
+            </a:r>
+          </a:p>
+          <a:p>
+            <a:pPr algn="ctr">
+              <a:lnSpc>
+                <a:spcPct val="100000"/>
+              </a:lnSpc>
+              <a:spcAft>
+                <a:spcPts val="0"/>
+              </a:spcAft>
+            </a:pPr>
+            <a:r>
+              <a:rPr sz="830" b="0">
+                <a:solidFill>
+                  <a:srgbClr val="4B555E"/>
+                </a:solidFill>
+                <a:latin typeface="Noto Sans CJK KR"/>
+                <a:ea typeface="Noto Sans CJK KR"/>
+              </a:rPr>
+              <a:t>경쟁사·글로벌·업계 (중요도순)</a:t>
+            </a:r>
+          </a:p>
+        </p:txBody>
+      </p:sp>
+      <p:sp>
+        <p:nvSpPr>
+          <p:cNvPr id="26" name="Rounded Rectangle 25"/>
+          <p:cNvSpPr/>
+          <p:nvPr/>
+        </p:nvSpPr>
+        <p:spPr>
+          <a:xfrm>
+            <a:off x="502920" y="3858768"/>
+            <a:ext cx="2148840" cy="365760"/>
           </a:xfrm>
           <a:prstGeom prst="roundRect">
             <a:avLst/>
@@ -4182,7 +4640,7 @@
           <a:solidFill>
             <a:srgbClr val="F7EAE3"/>
           </a:solidFill>
-          <a:ln w="12700">
+          <a:ln w="9525">
             <a:solidFill>
               <a:srgbClr val="B4532A"/>
             </a:solidFill>
@@ -4216,14 +4674,14 @@
               </a:spcAft>
             </a:pPr>
             <a:r>
-              <a:rPr sz="950" b="1">
-                <a:solidFill>
-                  <a:srgbClr val="B4532A"/>
-                </a:solidFill>
-                <a:latin typeface="Noto Sans CJK KR"/>
-                <a:ea typeface="Noto Sans CJK KR"/>
-              </a:rPr>
-              <a:t>▲ 병목 2  품질·속인화</a:t>
+              <a:rPr sz="930" b="1">
+                <a:solidFill>
+                  <a:srgbClr val="7A381C"/>
+                </a:solidFill>
+                <a:latin typeface="Noto Sans CJK KR"/>
+                <a:ea typeface="Noto Sans CJK KR"/>
+              </a:rPr>
+              <a:t>★ ② 선택 우선순위</a:t>
             </a:r>
           </a:p>
           <a:p>
@@ -4236,27 +4694,90 @@
               </a:spcAft>
             </a:pPr>
             <a:r>
-              <a:rPr sz="900" b="0">
+              <a:rPr sz="819" b="0">
                 <a:solidFill>
                   <a:srgbClr val="7A381C"/>
                 </a:solidFill>
                 <a:latin typeface="Noto Sans CJK KR"/>
                 <a:ea typeface="Noto Sans CJK KR"/>
               </a:rPr>
-              <a:t>⑤ 인사이트가 개인에 속인화·관점별 분석 미체계 → 편차</a:t>
-            </a:r>
-          </a:p>
-        </p:txBody>
-      </p:sp>
-      <p:sp>
-        <p:nvSpPr>
-          <p:cNvPr id="21" name="Rounded Rectangle 20"/>
+              <a:t>암묵지 = 왜 뽑나</a:t>
+            </a:r>
+          </a:p>
+        </p:txBody>
+      </p:sp>
+      <p:sp>
+        <p:nvSpPr>
+          <p:cNvPr id="27" name="Rounded Rectangle 26"/>
           <p:cNvSpPr/>
           <p:nvPr/>
         </p:nvSpPr>
         <p:spPr>
           <a:xfrm>
-            <a:off x="502920" y="3977639"/>
+            <a:off x="2761488" y="3858768"/>
+            <a:ext cx="8924544" cy="365760"/>
+          </a:xfrm>
+          <a:prstGeom prst="roundRect">
+            <a:avLst/>
+          </a:prstGeom>
+          <a:solidFill>
+            <a:srgbClr val="FCF8F5"/>
+          </a:solidFill>
+          <a:ln w="9525">
+            <a:solidFill>
+              <a:srgbClr val="B4532A"/>
+            </a:solidFill>
+          </a:ln>
+          <a:effectLst/>
+        </p:spPr>
+        <p:style>
+          <a:lnRef idx="1">
+            <a:schemeClr val="accent1"/>
+          </a:lnRef>
+          <a:fillRef idx="3">
+            <a:schemeClr val="accent1"/>
+          </a:fillRef>
+          <a:effectRef idx="2">
+            <a:schemeClr val="accent1"/>
+          </a:effectRef>
+          <a:fontRef idx="minor">
+            <a:schemeClr val="lt1"/>
+          </a:fontRef>
+        </p:style>
+        <p:txBody>
+          <a:bodyPr rtlCol="0" anchor="ctr" wrap="square" lIns="64008" rIns="64008" tIns="27432" bIns="27432"/>
+          <a:lstStyle/>
+          <a:p>
+            <a:pPr algn="ctr">
+              <a:lnSpc>
+                <a:spcPct val="100000"/>
+              </a:lnSpc>
+              <a:spcAft>
+                <a:spcPts val="0"/>
+              </a:spcAft>
+            </a:pPr>
+            <a:r>
+              <a:rPr sz="930" b="0">
+                <a:solidFill>
+                  <a:srgbClr val="22282E"/>
+                </a:solidFill>
+                <a:latin typeface="Noto Sans CJK KR"/>
+                <a:ea typeface="Noto Sans CJK KR"/>
+              </a:rPr>
+              <a:t>당사 연관성 높은 경쟁사 우선  ▸  향후 도입 가능 신기술·신서비스  ▸  영업확대 기회 정책·시장·사회이슈</a:t>
+            </a:r>
+          </a:p>
+        </p:txBody>
+      </p:sp>
+      <p:sp>
+        <p:nvSpPr>
+          <p:cNvPr id="28" name="Rounded Rectangle 27"/>
+          <p:cNvSpPr/>
+          <p:nvPr/>
+        </p:nvSpPr>
+        <p:spPr>
+          <a:xfrm>
+            <a:off x="502920" y="4343400"/>
             <a:ext cx="1234440" cy="292608"/>
           </a:xfrm>
           <a:prstGeom prst="roundRect">
@@ -4311,13 +4832,13 @@
       </p:sp>
       <p:sp>
         <p:nvSpPr>
-          <p:cNvPr id="22" name="TextBox 21"/>
+          <p:cNvPr id="29" name="TextBox 28"/>
           <p:cNvSpPr txBox="1"/>
           <p:nvPr/>
         </p:nvSpPr>
         <p:spPr>
           <a:xfrm>
-            <a:off x="1874519" y="4005072"/>
+            <a:off x="1874519" y="4370832"/>
             <a:ext cx="9418320" cy="274320"/>
           </a:xfrm>
           <a:prstGeom prst="rect">
@@ -4354,13 +4875,13 @@
       </p:sp>
       <p:sp>
         <p:nvSpPr>
-          <p:cNvPr id="23" name="Rounded Rectangle 22"/>
+          <p:cNvPr id="30" name="Rounded Rectangle 29"/>
           <p:cNvSpPr/>
           <p:nvPr/>
         </p:nvSpPr>
         <p:spPr>
           <a:xfrm>
-            <a:off x="539496" y="4526280"/>
+            <a:off x="539496" y="4892040"/>
             <a:ext cx="1005840" cy="182880"/>
           </a:xfrm>
           <a:prstGeom prst="roundRect">
@@ -4415,13 +4936,13 @@
       </p:sp>
       <p:sp>
         <p:nvSpPr>
-          <p:cNvPr id="24" name="Rounded Rectangle 23"/>
+          <p:cNvPr id="31" name="Rounded Rectangle 30"/>
           <p:cNvSpPr/>
           <p:nvPr/>
         </p:nvSpPr>
         <p:spPr>
           <a:xfrm>
-            <a:off x="502920" y="4727448"/>
+            <a:off x="502920" y="5093208"/>
             <a:ext cx="2084831" cy="841248"/>
           </a:xfrm>
           <a:prstGeom prst="roundRect">
@@ -4499,13 +5020,13 @@
       </p:sp>
       <p:sp>
         <p:nvSpPr>
-          <p:cNvPr id="25" name="Chevron 24"/>
+          <p:cNvPr id="32" name="Chevron 31"/>
           <p:cNvSpPr/>
           <p:nvPr/>
         </p:nvSpPr>
         <p:spPr>
           <a:xfrm>
-            <a:off x="2578608" y="5056632"/>
+            <a:off x="2578608" y="5422392"/>
             <a:ext cx="228600" cy="182880"/>
           </a:xfrm>
           <a:prstGeom prst="chevron">
@@ -4543,13 +5064,13 @@
       </p:sp>
       <p:sp>
         <p:nvSpPr>
-          <p:cNvPr id="26" name="Rounded Rectangle 25"/>
+          <p:cNvPr id="33" name="Rounded Rectangle 32"/>
           <p:cNvSpPr/>
           <p:nvPr/>
         </p:nvSpPr>
         <p:spPr>
           <a:xfrm>
-            <a:off x="2807208" y="4526280"/>
+            <a:off x="2807208" y="4892040"/>
             <a:ext cx="1005840" cy="182880"/>
           </a:xfrm>
           <a:prstGeom prst="roundRect">
@@ -4604,13 +5125,13 @@
       </p:sp>
       <p:sp>
         <p:nvSpPr>
-          <p:cNvPr id="27" name="Rounded Rectangle 26"/>
+          <p:cNvPr id="34" name="Rounded Rectangle 33"/>
           <p:cNvSpPr/>
           <p:nvPr/>
         </p:nvSpPr>
         <p:spPr>
           <a:xfrm>
-            <a:off x="2770632" y="4727448"/>
+            <a:off x="2770632" y="5093208"/>
             <a:ext cx="2084831" cy="841248"/>
           </a:xfrm>
           <a:prstGeom prst="roundRect">
@@ -4688,13 +5209,13 @@
       </p:sp>
       <p:sp>
         <p:nvSpPr>
-          <p:cNvPr id="28" name="Chevron 27"/>
+          <p:cNvPr id="35" name="Chevron 34"/>
           <p:cNvSpPr/>
           <p:nvPr/>
         </p:nvSpPr>
         <p:spPr>
           <a:xfrm>
-            <a:off x="4846320" y="5056632"/>
+            <a:off x="4846320" y="5422392"/>
             <a:ext cx="228600" cy="182880"/>
           </a:xfrm>
           <a:prstGeom prst="chevron">
@@ -4732,13 +5253,13 @@
       </p:sp>
       <p:sp>
         <p:nvSpPr>
-          <p:cNvPr id="29" name="Rounded Rectangle 28"/>
+          <p:cNvPr id="36" name="Rounded Rectangle 35"/>
           <p:cNvSpPr/>
           <p:nvPr/>
         </p:nvSpPr>
         <p:spPr>
           <a:xfrm>
-            <a:off x="5074920" y="4526280"/>
+            <a:off x="5074920" y="4892040"/>
             <a:ext cx="1005840" cy="182880"/>
           </a:xfrm>
           <a:prstGeom prst="roundRect">
@@ -4793,13 +5314,13 @@
       </p:sp>
       <p:sp>
         <p:nvSpPr>
-          <p:cNvPr id="30" name="Rounded Rectangle 29"/>
+          <p:cNvPr id="37" name="Rounded Rectangle 36"/>
           <p:cNvSpPr/>
           <p:nvPr/>
         </p:nvSpPr>
         <p:spPr>
           <a:xfrm>
-            <a:off x="5038344" y="4727448"/>
+            <a:off x="5038344" y="5093208"/>
             <a:ext cx="2084831" cy="841248"/>
           </a:xfrm>
           <a:prstGeom prst="roundRect">
@@ -4877,13 +5398,13 @@
       </p:sp>
       <p:sp>
         <p:nvSpPr>
-          <p:cNvPr id="31" name="Chevron 30"/>
+          <p:cNvPr id="38" name="Chevron 37"/>
           <p:cNvSpPr/>
           <p:nvPr/>
         </p:nvSpPr>
         <p:spPr>
           <a:xfrm>
-            <a:off x="7114031" y="5056632"/>
+            <a:off x="7114031" y="5422392"/>
             <a:ext cx="228600" cy="182880"/>
           </a:xfrm>
           <a:prstGeom prst="chevron">
@@ -4921,13 +5442,13 @@
       </p:sp>
       <p:sp>
         <p:nvSpPr>
-          <p:cNvPr id="32" name="Rounded Rectangle 31"/>
+          <p:cNvPr id="39" name="Rounded Rectangle 38"/>
           <p:cNvSpPr/>
           <p:nvPr/>
         </p:nvSpPr>
         <p:spPr>
           <a:xfrm>
-            <a:off x="7342631" y="4526280"/>
+            <a:off x="7342631" y="4892040"/>
             <a:ext cx="1005840" cy="182880"/>
           </a:xfrm>
           <a:prstGeom prst="roundRect">
@@ -4982,13 +5503,13 @@
       </p:sp>
       <p:sp>
         <p:nvSpPr>
-          <p:cNvPr id="33" name="Rounded Rectangle 32"/>
+          <p:cNvPr id="40" name="Rounded Rectangle 39"/>
           <p:cNvSpPr/>
           <p:nvPr/>
         </p:nvSpPr>
         <p:spPr>
           <a:xfrm>
-            <a:off x="7306055" y="4727448"/>
+            <a:off x="7306055" y="5093208"/>
             <a:ext cx="2084831" cy="841248"/>
           </a:xfrm>
           <a:prstGeom prst="roundRect">
@@ -5066,13 +5587,13 @@
       </p:sp>
       <p:sp>
         <p:nvSpPr>
-          <p:cNvPr id="34" name="Chevron 33"/>
+          <p:cNvPr id="41" name="Chevron 40"/>
           <p:cNvSpPr/>
           <p:nvPr/>
         </p:nvSpPr>
         <p:spPr>
           <a:xfrm>
-            <a:off x="9381744" y="5056632"/>
+            <a:off x="9381744" y="5422392"/>
             <a:ext cx="228600" cy="182880"/>
           </a:xfrm>
           <a:prstGeom prst="chevron">
@@ -5110,13 +5631,13 @@
       </p:sp>
       <p:sp>
         <p:nvSpPr>
-          <p:cNvPr id="35" name="Rounded Rectangle 34"/>
+          <p:cNvPr id="42" name="Rounded Rectangle 41"/>
           <p:cNvSpPr/>
           <p:nvPr/>
         </p:nvSpPr>
         <p:spPr>
           <a:xfrm>
-            <a:off x="9610344" y="4526280"/>
+            <a:off x="9610344" y="4892040"/>
             <a:ext cx="1005840" cy="182880"/>
           </a:xfrm>
           <a:prstGeom prst="roundRect">
@@ -5171,13 +5692,13 @@
       </p:sp>
       <p:sp>
         <p:nvSpPr>
-          <p:cNvPr id="36" name="Rounded Rectangle 35"/>
+          <p:cNvPr id="43" name="Rounded Rectangle 42"/>
           <p:cNvSpPr/>
           <p:nvPr/>
         </p:nvSpPr>
         <p:spPr>
           <a:xfrm>
-            <a:off x="9573768" y="4727448"/>
+            <a:off x="9573768" y="5093208"/>
             <a:ext cx="2084831" cy="841248"/>
           </a:xfrm>
           <a:prstGeom prst="roundRect">
@@ -5255,13 +5776,13 @@
       </p:sp>
       <p:sp>
         <p:nvSpPr>
-          <p:cNvPr id="37" name="Rounded Rectangle 36"/>
+          <p:cNvPr id="44" name="Rounded Rectangle 43"/>
           <p:cNvSpPr/>
           <p:nvPr/>
         </p:nvSpPr>
         <p:spPr>
           <a:xfrm>
-            <a:off x="502920" y="5678424"/>
+            <a:off x="502920" y="6044184"/>
             <a:ext cx="11155680" cy="310896"/>
           </a:xfrm>
           <a:prstGeom prst="roundRect">
@@ -5318,13 +5839,13 @@
       </p:sp>
       <p:sp>
         <p:nvSpPr>
-          <p:cNvPr id="38" name="Rounded Rectangle 37"/>
+          <p:cNvPr id="45" name="Rounded Rectangle 44"/>
           <p:cNvSpPr/>
           <p:nvPr/>
         </p:nvSpPr>
         <p:spPr>
           <a:xfrm>
-            <a:off x="10881360" y="3995927"/>
+            <a:off x="10881360" y="4361688"/>
             <a:ext cx="182880" cy="182880"/>
           </a:xfrm>
           <a:prstGeom prst="roundRect">
@@ -5381,13 +5902,13 @@
       </p:sp>
       <p:sp>
         <p:nvSpPr>
-          <p:cNvPr id="39" name="TextBox 38"/>
+          <p:cNvPr id="46" name="TextBox 45"/>
           <p:cNvSpPr txBox="1"/>
           <p:nvPr/>
         </p:nvSpPr>
         <p:spPr>
           <a:xfrm>
-            <a:off x="11119104" y="4005071"/>
+            <a:off x="11119104" y="4370831"/>
             <a:ext cx="1188720" cy="182880"/>
           </a:xfrm>
           <a:prstGeom prst="rect">
@@ -5424,13 +5945,13 @@
       </p:sp>
       <p:sp>
         <p:nvSpPr>
-          <p:cNvPr id="40" name="Rounded Rectangle 39"/>
+          <p:cNvPr id="47" name="Rounded Rectangle 46"/>
           <p:cNvSpPr/>
           <p:nvPr/>
         </p:nvSpPr>
         <p:spPr>
           <a:xfrm>
-            <a:off x="10881360" y="4242815"/>
+            <a:off x="10881360" y="4608575"/>
             <a:ext cx="182880" cy="182880"/>
           </a:xfrm>
           <a:prstGeom prst="roundRect">
@@ -5487,13 +6008,13 @@
       </p:sp>
       <p:sp>
         <p:nvSpPr>
-          <p:cNvPr id="41" name="TextBox 40"/>
+          <p:cNvPr id="48" name="TextBox 47"/>
           <p:cNvSpPr txBox="1"/>
           <p:nvPr/>
         </p:nvSpPr>
         <p:spPr>
           <a:xfrm>
-            <a:off x="11119104" y="4251959"/>
+            <a:off x="11119104" y="4617720"/>
             <a:ext cx="1188720" cy="182880"/>
           </a:xfrm>
           <a:prstGeom prst="rect">

--- a/마켓센싱리포트_AI혁신_2p.pptx
+++ b/마켓센싱리포트_AI혁신_2p.pptx
@@ -3141,8 +3141,8 @@
         </p:nvSpPr>
         <p:spPr>
           <a:xfrm>
-            <a:off x="502920" y="256032"/>
-            <a:ext cx="11155680" cy="548640"/>
+            <a:off x="502920" y="201168"/>
+            <a:ext cx="11155680" cy="457200"/>
           </a:xfrm>
           <a:prstGeom prst="rect">
             <a:avLst/>
@@ -3164,7 +3164,7 @@
               </a:spcAft>
             </a:pPr>
             <a:r>
-              <a:rPr sz="2200" b="1">
+              <a:rPr sz="2100" b="1">
                 <a:solidFill>
                   <a:srgbClr val="22282E"/>
                 </a:solidFill>
@@ -3184,8 +3184,8 @@
         </p:nvSpPr>
         <p:spPr>
           <a:xfrm>
-            <a:off x="502920" y="685800"/>
-            <a:ext cx="11155680" cy="320040"/>
+            <a:off x="502920" y="603504"/>
+            <a:ext cx="11155680" cy="274320"/>
           </a:xfrm>
           <a:prstGeom prst="rect">
             <a:avLst/>
@@ -3207,53 +3207,81 @@
               </a:spcAft>
             </a:pPr>
             <a:r>
-              <a:rPr sz="1200" b="0">
+              <a:rPr sz="1150" b="0">
                 <a:solidFill>
                   <a:srgbClr val="8A939B"/>
                 </a:solidFill>
                 <a:latin typeface="Noto Sans CJK KR"/>
                 <a:ea typeface="Noto Sans CJK KR"/>
               </a:rPr>
-              <a:t>정형·반복 업무는 '대체', 암묵지 기반 판단은 '증폭' — MAGI 5계층 인텔리전스 구조로 재설계</a:t>
-            </a:r>
-          </a:p>
-        </p:txBody>
-      </p:sp>
-      <p:cxnSp>
-        <p:nvCxnSpPr>
-          <p:cNvPr id="5" name="Connector 4"/>
-          <p:cNvCxnSpPr/>
+              <a:t>정형·반복 업무는 '대체', 암묵지 기반 판단은 '증폭' — 다관점 AI 에이전트 · 5계층 구조로 재설계</a:t>
+            </a:r>
+          </a:p>
+        </p:txBody>
+      </p:sp>
+      <p:sp>
+        <p:nvSpPr>
+          <p:cNvPr id="5" name="Rounded Rectangle 4"/>
+          <p:cNvSpPr/>
           <p:nvPr/>
-        </p:nvCxnSpPr>
-        <p:spPr>
-          <a:xfrm>
-            <a:off x="502920" y="1078992"/>
-            <a:ext cx="11183112" cy="0"/>
-          </a:xfrm>
-          <a:prstGeom prst="bentConnector3">
+        </p:nvSpPr>
+        <p:spPr>
+          <a:xfrm>
+            <a:off x="502920" y="932688"/>
+            <a:ext cx="11183112" cy="384048"/>
+          </a:xfrm>
+          <a:prstGeom prst="roundRect">
             <a:avLst/>
           </a:prstGeom>
-          <a:ln w="15240">
+          <a:solidFill>
+            <a:srgbClr val="E7F0EE"/>
+          </a:solidFill>
+          <a:ln w="15875">
             <a:solidFill>
-              <a:srgbClr val="D5D9DD"/>
+              <a:srgbClr val="2E6E69"/>
             </a:solidFill>
           </a:ln>
+          <a:effectLst/>
         </p:spPr>
         <p:style>
-          <a:lnRef idx="2">
+          <a:lnRef idx="1">
             <a:schemeClr val="accent1"/>
           </a:lnRef>
-          <a:fillRef idx="0">
+          <a:fillRef idx="3">
             <a:schemeClr val="accent1"/>
           </a:fillRef>
-          <a:effectRef idx="1">
+          <a:effectRef idx="2">
             <a:schemeClr val="accent1"/>
           </a:effectRef>
           <a:fontRef idx="minor">
-            <a:schemeClr val="tx1"/>
+            <a:schemeClr val="lt1"/>
           </a:fontRef>
         </p:style>
-      </p:cxnSp>
+        <p:txBody>
+          <a:bodyPr rtlCol="0" anchor="ctr" wrap="square" lIns="64008" rIns="64008" tIns="27432" bIns="27432"/>
+          <a:lstStyle/>
+          <a:p>
+            <a:pPr algn="ctr">
+              <a:lnSpc>
+                <a:spcPct val="100000"/>
+              </a:lnSpc>
+              <a:spcAft>
+                <a:spcPts val="0"/>
+              </a:spcAft>
+            </a:pPr>
+            <a:r>
+              <a:rPr sz="1050" b="1">
+                <a:solidFill>
+                  <a:srgbClr val="2E6E69"/>
+                </a:solidFill>
+                <a:latin typeface="Noto Sans CJK KR"/>
+                <a:ea typeface="Noto Sans CJK KR"/>
+              </a:rPr>
+              <a:t>★ 리포트의 진짜 가치는 뉴스 나열이 아니라, 오래 근무한 내부 직원의 '암묵지' 기반 해석에서 나온다 — 이 암묵지의 속인화(屬人化)가 최대 리스크</a:t>
+            </a:r>
+          </a:p>
+        </p:txBody>
+      </p:sp>
       <p:sp>
         <p:nvSpPr>
           <p:cNvPr id="6" name="Rounded Rectangle 5"/>
@@ -3262,8 +3290,8 @@
         </p:nvSpPr>
         <p:spPr>
           <a:xfrm>
-            <a:off x="502920" y="1325880"/>
-            <a:ext cx="1234440" cy="292608"/>
+            <a:off x="502920" y="1463040"/>
+            <a:ext cx="1234440" cy="274320"/>
           </a:xfrm>
           <a:prstGeom prst="roundRect">
             <a:avLst/>
@@ -3323,7 +3351,7 @@
         </p:nvSpPr>
         <p:spPr>
           <a:xfrm>
-            <a:off x="1874519" y="1353312"/>
+            <a:off x="1874519" y="1490472"/>
             <a:ext cx="8961120" cy="274320"/>
           </a:xfrm>
           <a:prstGeom prst="rect">
@@ -3346,7 +3374,7 @@
               </a:spcAft>
             </a:pPr>
             <a:r>
-              <a:rPr sz="1050" b="0">
+              <a:rPr sz="1000" b="0">
                 <a:solidFill>
                   <a:srgbClr val="4B555E"/>
                 </a:solidFill>
@@ -3366,8 +3394,8 @@
         </p:nvSpPr>
         <p:spPr>
           <a:xfrm>
-            <a:off x="502920" y="1746504"/>
-            <a:ext cx="1755648" cy="786384"/>
+            <a:off x="502920" y="1847088"/>
+            <a:ext cx="1755648" cy="731520"/>
           </a:xfrm>
           <a:prstGeom prst="roundRect">
             <a:avLst/>
@@ -3436,8 +3464,8 @@
                 <a:latin typeface="Noto Sans CJK KR"/>
                 <a:ea typeface="Noto Sans CJK KR"/>
               </a:rPr>
-              <a:t>4개 소스 수동 취합
-(스크랩·메일링·보고서·검색)</a:t>
+              <a:t>5개 기본축
+수동 소싱</a:t>
             </a:r>
           </a:p>
         </p:txBody>
@@ -3450,7 +3478,7 @@
         </p:nvSpPr>
         <p:spPr>
           <a:xfrm>
-            <a:off x="2240279" y="2048255"/>
+            <a:off x="2240279" y="2121408"/>
             <a:ext cx="182880" cy="182880"/>
           </a:xfrm>
           <a:prstGeom prst="chevron">
@@ -3494,8 +3522,8 @@
         </p:nvSpPr>
         <p:spPr>
           <a:xfrm>
-            <a:off x="2386584" y="1746504"/>
-            <a:ext cx="1755648" cy="786384"/>
+            <a:off x="2386584" y="1847088"/>
+            <a:ext cx="1755648" cy="731520"/>
           </a:xfrm>
           <a:prstGeom prst="roundRect">
             <a:avLst/>
@@ -3578,7 +3606,7 @@
         </p:nvSpPr>
         <p:spPr>
           <a:xfrm>
-            <a:off x="4123944" y="2048255"/>
+            <a:off x="4123944" y="2121408"/>
             <a:ext cx="182880" cy="182880"/>
           </a:xfrm>
           <a:prstGeom prst="chevron">
@@ -3622,8 +3650,8 @@
         </p:nvSpPr>
         <p:spPr>
           <a:xfrm>
-            <a:off x="4270248" y="1746504"/>
-            <a:ext cx="1755648" cy="786384"/>
+            <a:off x="4270248" y="1847088"/>
+            <a:ext cx="1755648" cy="731520"/>
           </a:xfrm>
           <a:prstGeom prst="roundRect">
             <a:avLst/>
@@ -3706,7 +3734,7 @@
         </p:nvSpPr>
         <p:spPr>
           <a:xfrm>
-            <a:off x="6007608" y="2048255"/>
+            <a:off x="6007608" y="2121408"/>
             <a:ext cx="182880" cy="182880"/>
           </a:xfrm>
           <a:prstGeom prst="chevron">
@@ -3750,8 +3778,8 @@
         </p:nvSpPr>
         <p:spPr>
           <a:xfrm>
-            <a:off x="6153912" y="1746504"/>
-            <a:ext cx="1755648" cy="786384"/>
+            <a:off x="6153912" y="1847088"/>
+            <a:ext cx="1755648" cy="731520"/>
           </a:xfrm>
           <a:prstGeom prst="roundRect">
             <a:avLst/>
@@ -3834,7 +3862,7 @@
         </p:nvSpPr>
         <p:spPr>
           <a:xfrm>
-            <a:off x="7891271" y="2048255"/>
+            <a:off x="7891271" y="2121408"/>
             <a:ext cx="182880" cy="182880"/>
           </a:xfrm>
           <a:prstGeom prst="chevron">
@@ -3878,8 +3906,8 @@
         </p:nvSpPr>
         <p:spPr>
           <a:xfrm>
-            <a:off x="8037576" y="1746504"/>
-            <a:ext cx="1755648" cy="786384"/>
+            <a:off x="8037576" y="1847088"/>
+            <a:ext cx="1755648" cy="731520"/>
           </a:xfrm>
           <a:prstGeom prst="roundRect">
             <a:avLst/>
@@ -3962,7 +3990,7 @@
         </p:nvSpPr>
         <p:spPr>
           <a:xfrm>
-            <a:off x="9774936" y="2048255"/>
+            <a:off x="9774936" y="2121408"/>
             <a:ext cx="182880" cy="182880"/>
           </a:xfrm>
           <a:prstGeom prst="chevron">
@@ -4006,8 +4034,8 @@
         </p:nvSpPr>
         <p:spPr>
           <a:xfrm>
-            <a:off x="9921240" y="1746504"/>
-            <a:ext cx="1755648" cy="786384"/>
+            <a:off x="9921240" y="1847088"/>
+            <a:ext cx="1755648" cy="731520"/>
           </a:xfrm>
           <a:prstGeom prst="roundRect">
             <a:avLst/>
@@ -4090,7 +4118,7 @@
         </p:nvSpPr>
         <p:spPr>
           <a:xfrm>
-            <a:off x="502920" y="2642616"/>
+            <a:off x="502920" y="2688336"/>
             <a:ext cx="5522975" cy="512064"/>
           </a:xfrm>
           <a:prstGeom prst="roundRect">
@@ -4173,7 +4201,7 @@
         </p:nvSpPr>
         <p:spPr>
           <a:xfrm>
-            <a:off x="6153911" y="2642616"/>
+            <a:off x="6153911" y="2688336"/>
             <a:ext cx="5522975" cy="512064"/>
           </a:xfrm>
           <a:prstGeom prst="roundRect">
@@ -4256,8 +4284,8 @@
         </p:nvSpPr>
         <p:spPr>
           <a:xfrm>
-            <a:off x="502920" y="3182112"/>
-            <a:ext cx="6400800" cy="201168"/>
+            <a:off x="502920" y="3255264"/>
+            <a:ext cx="6858000" cy="201168"/>
           </a:xfrm>
           <a:prstGeom prst="rect">
             <a:avLst/>
@@ -4286,7 +4314,7 @@
                 <a:latin typeface="Noto Sans CJK KR"/>
                 <a:ea typeface="Noto Sans CJK KR"/>
               </a:rPr>
-              <a:t>① 정보수집 — 4개 소스 (수동 취합)</a:t>
+              <a:t>① 정보수집 — 5개 기본축 (수동 소싱)</a:t>
             </a:r>
           </a:p>
         </p:txBody>
@@ -4299,8 +4327,8 @@
         </p:nvSpPr>
         <p:spPr>
           <a:xfrm>
-            <a:off x="502920" y="3401568"/>
-            <a:ext cx="2665476" cy="402336"/>
+            <a:off x="502920" y="3474720"/>
+            <a:ext cx="2134209" cy="402336"/>
           </a:xfrm>
           <a:prstGeom prst="roundRect">
             <a:avLst/>
@@ -4342,7 +4370,7 @@
               </a:spcAft>
             </a:pPr>
             <a:r>
-              <a:rPr sz="950" b="1">
+              <a:rPr sz="919" b="1">
                 <a:solidFill>
                   <a:srgbClr val="22282E"/>
                 </a:solidFill>
@@ -4362,14 +4390,14 @@
               </a:spcAft>
             </a:pPr>
             <a:r>
-              <a:rPr sz="830" b="0">
+              <a:rPr sz="790" b="0">
                 <a:solidFill>
                   <a:srgbClr val="4B555E"/>
                 </a:solidFill>
                 <a:latin typeface="Noto Sans CJK KR"/>
                 <a:ea typeface="Noto Sans CJK KR"/>
               </a:rPr>
-              <a:t>신문스크랩 기사</a:t>
+              <a:t>신문스크랩·일일 발송</a:t>
             </a:r>
           </a:p>
         </p:txBody>
@@ -4382,8 +4410,8 @@
         </p:nvSpPr>
         <p:spPr>
           <a:xfrm>
-            <a:off x="3332988" y="3401568"/>
-            <a:ext cx="2665476" cy="402336"/>
+            <a:off x="2765145" y="3474720"/>
+            <a:ext cx="2134209" cy="402336"/>
           </a:xfrm>
           <a:prstGeom prst="roundRect">
             <a:avLst/>
@@ -4425,14 +4453,14 @@
               </a:spcAft>
             </a:pPr>
             <a:r>
-              <a:rPr sz="950" b="1">
+              <a:rPr sz="919" b="1">
                 <a:solidFill>
                   <a:srgbClr val="22282E"/>
                 </a:solidFill>
                 <a:latin typeface="Noto Sans CJK KR"/>
                 <a:ea typeface="Noto Sans CJK KR"/>
               </a:rPr>
-              <a:t>❷ 사업부메일링</a:t>
+              <a:t>❷ 사업부 시장동향</a:t>
             </a:r>
           </a:p>
           <a:p>
@@ -4445,14 +4473,14 @@
               </a:spcAft>
             </a:pPr>
             <a:r>
-              <a:rPr sz="830" b="0">
+              <a:rPr sz="790" b="0">
                 <a:solidFill>
                   <a:srgbClr val="4B555E"/>
                 </a:solidFill>
                 <a:latin typeface="Noto Sans CJK KR"/>
                 <a:ea typeface="Noto Sans CJK KR"/>
               </a:rPr>
-              <a:t>'오늘의 시장동향'</a:t>
+              <a:t>'오늘의 시장동향'·일일 발송</a:t>
             </a:r>
           </a:p>
         </p:txBody>
@@ -4465,8 +4493,8 @@
         </p:nvSpPr>
         <p:spPr>
           <a:xfrm>
-            <a:off x="6163056" y="3401568"/>
-            <a:ext cx="2665476" cy="402336"/>
+            <a:off x="5027371" y="3474720"/>
+            <a:ext cx="2134209" cy="402336"/>
           </a:xfrm>
           <a:prstGeom prst="roundRect">
             <a:avLst/>
@@ -4508,7 +4536,7 @@
               </a:spcAft>
             </a:pPr>
             <a:r>
-              <a:rPr sz="950" b="1">
+              <a:rPr sz="919" b="1">
                 <a:solidFill>
                   <a:srgbClr val="22282E"/>
                 </a:solidFill>
@@ -4528,14 +4556,14 @@
               </a:spcAft>
             </a:pPr>
             <a:r>
-              <a:rPr sz="830" b="0">
+              <a:rPr sz="790" b="0">
                 <a:solidFill>
                   <a:srgbClr val="4B555E"/>
                 </a:solidFill>
                 <a:latin typeface="Noto Sans CJK KR"/>
                 <a:ea typeface="Noto Sans CJK KR"/>
               </a:rPr>
-              <a:t>IMF·한국은행·KISIA / CES·MWC</a:t>
+              <a:t>보고서 20건·전시회 4건</a:t>
             </a:r>
           </a:p>
         </p:txBody>
@@ -4548,8 +4576,8 @@
         </p:nvSpPr>
         <p:spPr>
           <a:xfrm>
-            <a:off x="8993124" y="3401568"/>
-            <a:ext cx="2665476" cy="402336"/>
+            <a:off x="7289596" y="3474720"/>
+            <a:ext cx="2134209" cy="402336"/>
           </a:xfrm>
           <a:prstGeom prst="roundRect">
             <a:avLst/>
@@ -4591,7 +4619,7 @@
               </a:spcAft>
             </a:pPr>
             <a:r>
-              <a:rPr sz="950" b="1">
+              <a:rPr sz="919" b="1">
                 <a:solidFill>
                   <a:srgbClr val="22282E"/>
                 </a:solidFill>
@@ -4611,14 +4639,14 @@
               </a:spcAft>
             </a:pPr>
             <a:r>
-              <a:rPr sz="830" b="0">
+              <a:rPr sz="790" b="0">
                 <a:solidFill>
                   <a:srgbClr val="4B555E"/>
                 </a:solidFill>
                 <a:latin typeface="Noto Sans CJK KR"/>
                 <a:ea typeface="Noto Sans CJK KR"/>
               </a:rPr>
-              <a:t>경쟁사·글로벌·업계 (중요도순)</a:t>
+              <a:t>57종(경쟁사10·글로벌10·업계37)</a:t>
             </a:r>
           </a:p>
         </p:txBody>
@@ -4631,8 +4659,91 @@
         </p:nvSpPr>
         <p:spPr>
           <a:xfrm>
-            <a:off x="502920" y="3858768"/>
-            <a:ext cx="2148840" cy="365760"/>
+            <a:off x="9551822" y="3474720"/>
+            <a:ext cx="2134209" cy="402336"/>
+          </a:xfrm>
+          <a:prstGeom prst="roundRect">
+            <a:avLst/>
+          </a:prstGeom>
+          <a:solidFill>
+            <a:srgbClr val="ECEEF0"/>
+          </a:solidFill>
+          <a:ln w="9525">
+            <a:solidFill>
+              <a:srgbClr val="C3C9CF"/>
+            </a:solidFill>
+          </a:ln>
+          <a:effectLst/>
+        </p:spPr>
+        <p:style>
+          <a:lnRef idx="1">
+            <a:schemeClr val="accent1"/>
+          </a:lnRef>
+          <a:fillRef idx="3">
+            <a:schemeClr val="accent1"/>
+          </a:fillRef>
+          <a:effectRef idx="2">
+            <a:schemeClr val="accent1"/>
+          </a:effectRef>
+          <a:fontRef idx="minor">
+            <a:schemeClr val="lt1"/>
+          </a:fontRef>
+        </p:style>
+        <p:txBody>
+          <a:bodyPr rtlCol="0" anchor="ctr" wrap="square" lIns="64008" rIns="64008" tIns="27432" bIns="27432"/>
+          <a:lstStyle/>
+          <a:p>
+            <a:pPr algn="ctr">
+              <a:lnSpc>
+                <a:spcPct val="100000"/>
+              </a:lnSpc>
+              <a:spcAft>
+                <a:spcPts val="100"/>
+              </a:spcAft>
+            </a:pPr>
+            <a:r>
+              <a:rPr sz="919" b="1">
+                <a:solidFill>
+                  <a:srgbClr val="22282E"/>
+                </a:solidFill>
+                <a:latin typeface="Noto Sans CJK KR"/>
+                <a:ea typeface="Noto Sans CJK KR"/>
+              </a:rPr>
+              <a:t>❺ 마케팅·사회 트렌드</a:t>
+            </a:r>
+          </a:p>
+          <a:p>
+            <a:pPr algn="ctr">
+              <a:lnSpc>
+                <a:spcPct val="100000"/>
+              </a:lnSpc>
+              <a:spcAft>
+                <a:spcPts val="0"/>
+              </a:spcAft>
+            </a:pPr>
+            <a:r>
+              <a:rPr sz="790" b="0">
+                <a:solidFill>
+                  <a:srgbClr val="4B555E"/>
+                </a:solidFill>
+                <a:latin typeface="Noto Sans CJK KR"/>
+                <a:ea typeface="Noto Sans CJK KR"/>
+              </a:rPr>
+              <a:t>나스미디어 등 광고사 뉴스레터</a:t>
+            </a:r>
+          </a:p>
+        </p:txBody>
+      </p:sp>
+      <p:sp>
+        <p:nvSpPr>
+          <p:cNvPr id="27" name="Rounded Rectangle 26"/>
+          <p:cNvSpPr/>
+          <p:nvPr/>
+        </p:nvSpPr>
+        <p:spPr>
+          <a:xfrm>
+            <a:off x="502920" y="3931920"/>
+            <a:ext cx="2377440" cy="384048"/>
           </a:xfrm>
           <a:prstGeom prst="roundRect">
             <a:avLst/>
@@ -4674,14 +4785,14 @@
               </a:spcAft>
             </a:pPr>
             <a:r>
-              <a:rPr sz="930" b="1">
+              <a:rPr sz="880" b="1">
                 <a:solidFill>
                   <a:srgbClr val="7A381C"/>
                 </a:solidFill>
                 <a:latin typeface="Noto Sans CJK KR"/>
                 <a:ea typeface="Noto Sans CJK KR"/>
               </a:rPr>
-              <a:t>★ ② 선택 우선순위</a:t>
+              <a:t>★ ② 선택 우선순위 (암묵지)</a:t>
             </a:r>
           </a:p>
           <a:p>
@@ -4694,28 +4805,28 @@
               </a:spcAft>
             </a:pPr>
             <a:r>
-              <a:rPr sz="819" b="0">
+              <a:rPr sz="780" b="0">
                 <a:solidFill>
                   <a:srgbClr val="7A381C"/>
                 </a:solidFill>
                 <a:latin typeface="Noto Sans CJK KR"/>
                 <a:ea typeface="Noto Sans CJK KR"/>
               </a:rPr>
-              <a:t>암묵지 = 왜 뽑나</a:t>
-            </a:r>
-          </a:p>
-        </p:txBody>
-      </p:sp>
-      <p:sp>
-        <p:nvSpPr>
-          <p:cNvPr id="27" name="Rounded Rectangle 26"/>
+              <a:t>무엇을·왜 뽑나 = 인사이트</a:t>
+            </a:r>
+          </a:p>
+        </p:txBody>
+      </p:sp>
+      <p:sp>
+        <p:nvSpPr>
+          <p:cNvPr id="28" name="Rounded Rectangle 27"/>
           <p:cNvSpPr/>
           <p:nvPr/>
         </p:nvSpPr>
         <p:spPr>
           <a:xfrm>
-            <a:off x="2761488" y="3858768"/>
-            <a:ext cx="8924544" cy="365760"/>
+            <a:off x="2990088" y="3931920"/>
+            <a:ext cx="8695944" cy="384048"/>
           </a:xfrm>
           <a:prstGeom prst="roundRect">
             <a:avLst/>
@@ -4757,27 +4868,27 @@
               </a:spcAft>
             </a:pPr>
             <a:r>
-              <a:rPr sz="930" b="0">
+              <a:rPr sz="919" b="0">
                 <a:solidFill>
                   <a:srgbClr val="22282E"/>
                 </a:solidFill>
                 <a:latin typeface="Noto Sans CJK KR"/>
                 <a:ea typeface="Noto Sans CJK KR"/>
               </a:rPr>
-              <a:t>당사 연관성 높은 경쟁사 우선  ▸  향후 도입 가능 신기술·신서비스  ▸  영업확대 기회 정책·시장·사회이슈</a:t>
-            </a:r>
-          </a:p>
-        </p:txBody>
-      </p:sp>
-      <p:sp>
-        <p:nvSpPr>
-          <p:cNvPr id="28" name="Rounded Rectangle 27"/>
+              <a:t>판단 기준 ▸ 당사와의 연관성 · 향후 도입 가능 여부 · 과거 시행 여부 · 영업확대 기회(정책·시장·사회이슈)</a:t>
+            </a:r>
+          </a:p>
+        </p:txBody>
+      </p:sp>
+      <p:sp>
+        <p:nvSpPr>
+          <p:cNvPr id="29" name="Rounded Rectangle 28"/>
           <p:cNvSpPr/>
           <p:nvPr/>
         </p:nvSpPr>
         <p:spPr>
           <a:xfrm>
-            <a:off x="502920" y="4343400"/>
+            <a:off x="502920" y="4425696"/>
             <a:ext cx="1234440" cy="292608"/>
           </a:xfrm>
           <a:prstGeom prst="roundRect">
@@ -4832,13 +4943,13 @@
       </p:sp>
       <p:sp>
         <p:nvSpPr>
-          <p:cNvPr id="29" name="TextBox 28"/>
+          <p:cNvPr id="30" name="TextBox 29"/>
           <p:cNvSpPr txBox="1"/>
           <p:nvPr/>
         </p:nvSpPr>
         <p:spPr>
           <a:xfrm>
-            <a:off x="1874519" y="4370832"/>
+            <a:off x="1874519" y="4453128"/>
             <a:ext cx="9418320" cy="274320"/>
           </a:xfrm>
           <a:prstGeom prst="rect">
@@ -4875,13 +4986,13 @@
       </p:sp>
       <p:sp>
         <p:nvSpPr>
-          <p:cNvPr id="30" name="Rounded Rectangle 29"/>
+          <p:cNvPr id="31" name="Rounded Rectangle 30"/>
           <p:cNvSpPr/>
           <p:nvPr/>
         </p:nvSpPr>
         <p:spPr>
           <a:xfrm>
-            <a:off x="539496" y="4892040"/>
+            <a:off x="539496" y="4974336"/>
             <a:ext cx="1005840" cy="182880"/>
           </a:xfrm>
           <a:prstGeom prst="roundRect">
@@ -4936,13 +5047,13 @@
       </p:sp>
       <p:sp>
         <p:nvSpPr>
-          <p:cNvPr id="31" name="Rounded Rectangle 30"/>
+          <p:cNvPr id="32" name="Rounded Rectangle 31"/>
           <p:cNvSpPr/>
           <p:nvPr/>
         </p:nvSpPr>
         <p:spPr>
           <a:xfrm>
-            <a:off x="502920" y="5093208"/>
+            <a:off x="502920" y="5175504"/>
             <a:ext cx="2084831" cy="841248"/>
           </a:xfrm>
           <a:prstGeom prst="roundRect">
@@ -5013,20 +5124,20 @@
                 <a:ea typeface="Noto Sans CJK KR"/>
               </a:rPr>
               <a:t>뉴스·공시·규제·경쟁사
-크롤링·중복제거·1차 스코어링</a:t>
-            </a:r>
-          </a:p>
-        </p:txBody>
-      </p:sp>
-      <p:sp>
-        <p:nvSpPr>
-          <p:cNvPr id="32" name="Chevron 31"/>
+크롤링·중복제거·1차 선별</a:t>
+            </a:r>
+          </a:p>
+        </p:txBody>
+      </p:sp>
+      <p:sp>
+        <p:nvSpPr>
+          <p:cNvPr id="33" name="Chevron 32"/>
           <p:cNvSpPr/>
           <p:nvPr/>
         </p:nvSpPr>
         <p:spPr>
           <a:xfrm>
-            <a:off x="2578608" y="5422392"/>
+            <a:off x="2578608" y="5504688"/>
             <a:ext cx="228600" cy="182880"/>
           </a:xfrm>
           <a:prstGeom prst="chevron">
@@ -5064,13 +5175,13 @@
       </p:sp>
       <p:sp>
         <p:nvSpPr>
-          <p:cNvPr id="33" name="Rounded Rectangle 32"/>
+          <p:cNvPr id="34" name="Rounded Rectangle 33"/>
           <p:cNvSpPr/>
           <p:nvPr/>
         </p:nvSpPr>
         <p:spPr>
           <a:xfrm>
-            <a:off x="2807208" y="4892040"/>
+            <a:off x="2807208" y="4974336"/>
             <a:ext cx="1005840" cy="182880"/>
           </a:xfrm>
           <a:prstGeom prst="roundRect">
@@ -5118,20 +5229,20 @@
                 <a:latin typeface="Noto Sans CJK KR"/>
                 <a:ea typeface="Noto Sans CJK KR"/>
               </a:rPr>
-              <a:t>증폭 · moat</a:t>
-            </a:r>
-          </a:p>
-        </p:txBody>
-      </p:sp>
-      <p:sp>
-        <p:nvSpPr>
-          <p:cNvPr id="34" name="Rounded Rectangle 33"/>
+              <a:t>증폭 · 핵심자산</a:t>
+            </a:r>
+          </a:p>
+        </p:txBody>
+      </p:sp>
+      <p:sp>
+        <p:nvSpPr>
+          <p:cNvPr id="35" name="Rounded Rectangle 34"/>
           <p:cNvSpPr/>
           <p:nvPr/>
         </p:nvSpPr>
         <p:spPr>
           <a:xfrm>
-            <a:off x="2770632" y="5093208"/>
+            <a:off x="2770632" y="5175504"/>
             <a:ext cx="2084831" cy="841248"/>
           </a:xfrm>
           <a:prstGeom prst="roundRect">
@@ -5201,21 +5312,21 @@
                 <a:latin typeface="Noto Sans CJK KR"/>
                 <a:ea typeface="Noto Sans CJK KR"/>
               </a:rPr>
-              <a:t>베테랑 암묵지 KB (moat)
-수주/실주·근거 코퍼스·RAG</a:t>
-            </a:r>
-          </a:p>
-        </p:txBody>
-      </p:sp>
-      <p:sp>
-        <p:nvSpPr>
-          <p:cNvPr id="35" name="Chevron 34"/>
+              <a:t>베테랑 암묵지 저장소
+수주/실주 복기·근거 모음</a:t>
+            </a:r>
+          </a:p>
+        </p:txBody>
+      </p:sp>
+      <p:sp>
+        <p:nvSpPr>
+          <p:cNvPr id="36" name="Chevron 35"/>
           <p:cNvSpPr/>
           <p:nvPr/>
         </p:nvSpPr>
         <p:spPr>
           <a:xfrm>
-            <a:off x="4846320" y="5422392"/>
+            <a:off x="4846320" y="5504688"/>
             <a:ext cx="228600" cy="182880"/>
           </a:xfrm>
           <a:prstGeom prst="chevron">
@@ -5253,13 +5364,13 @@
       </p:sp>
       <p:sp>
         <p:nvSpPr>
-          <p:cNvPr id="36" name="Rounded Rectangle 35"/>
+          <p:cNvPr id="37" name="Rounded Rectangle 36"/>
           <p:cNvSpPr/>
           <p:nvPr/>
         </p:nvSpPr>
         <p:spPr>
           <a:xfrm>
-            <a:off x="5074920" y="4892040"/>
+            <a:off x="5074920" y="4974336"/>
             <a:ext cx="1005840" cy="182880"/>
           </a:xfrm>
           <a:prstGeom prst="roundRect">
@@ -5307,20 +5418,20 @@
                 <a:latin typeface="Noto Sans CJK KR"/>
                 <a:ea typeface="Noto Sans CJK KR"/>
               </a:rPr>
-              <a:t>증폭 · MAGI</a:t>
-            </a:r>
-          </a:p>
-        </p:txBody>
-      </p:sp>
-      <p:sp>
-        <p:nvSpPr>
-          <p:cNvPr id="37" name="Rounded Rectangle 36"/>
+              <a:t>증폭 · 다관점</a:t>
+            </a:r>
+          </a:p>
+        </p:txBody>
+      </p:sp>
+      <p:sp>
+        <p:nvSpPr>
+          <p:cNvPr id="38" name="Rounded Rectangle 37"/>
           <p:cNvSpPr/>
           <p:nvPr/>
         </p:nvSpPr>
         <p:spPr>
           <a:xfrm>
-            <a:off x="5038344" y="5093208"/>
+            <a:off x="5038344" y="5175504"/>
             <a:ext cx="2084831" cy="841248"/>
           </a:xfrm>
           <a:prstGeom prst="roundRect">
@@ -5391,20 +5502,20 @@
                 <a:ea typeface="Noto Sans CJK KR"/>
               </a:rPr>
               <a:t>기획·영업·기술위협·경쟁사
-4관점 MAGI · 관점충돌=신호</a:t>
-            </a:r>
-          </a:p>
-        </p:txBody>
-      </p:sp>
-      <p:sp>
-        <p:nvSpPr>
-          <p:cNvPr id="38" name="Chevron 37"/>
+4개 관점 에이전트 · 충돌=신호</a:t>
+            </a:r>
+          </a:p>
+        </p:txBody>
+      </p:sp>
+      <p:sp>
+        <p:nvSpPr>
+          <p:cNvPr id="39" name="Chevron 38"/>
           <p:cNvSpPr/>
           <p:nvPr/>
         </p:nvSpPr>
         <p:spPr>
           <a:xfrm>
-            <a:off x="7114031" y="5422392"/>
+            <a:off x="7114031" y="5504688"/>
             <a:ext cx="228600" cy="182880"/>
           </a:xfrm>
           <a:prstGeom prst="chevron">
@@ -5442,13 +5553,13 @@
       </p:sp>
       <p:sp>
         <p:nvSpPr>
-          <p:cNvPr id="39" name="Rounded Rectangle 38"/>
+          <p:cNvPr id="40" name="Rounded Rectangle 39"/>
           <p:cNvSpPr/>
           <p:nvPr/>
         </p:nvSpPr>
         <p:spPr>
           <a:xfrm>
-            <a:off x="7342631" y="4892040"/>
+            <a:off x="7342631" y="4974336"/>
             <a:ext cx="1005840" cy="182880"/>
           </a:xfrm>
           <a:prstGeom prst="roundRect">
@@ -5503,13 +5614,13 @@
       </p:sp>
       <p:sp>
         <p:nvSpPr>
-          <p:cNvPr id="40" name="Rounded Rectangle 39"/>
+          <p:cNvPr id="41" name="Rounded Rectangle 40"/>
           <p:cNvSpPr/>
           <p:nvPr/>
         </p:nvSpPr>
         <p:spPr>
           <a:xfrm>
-            <a:off x="7306055" y="5093208"/>
+            <a:off x="7306055" y="5175504"/>
             <a:ext cx="2084831" cy="841248"/>
           </a:xfrm>
           <a:prstGeom prst="roundRect">
@@ -5579,21 +5690,21 @@
                 <a:latin typeface="Noto Sans CJK KR"/>
                 <a:ea typeface="Noto Sans CJK KR"/>
               </a:rPr>
-              <a:t>휴먼인더루프
-채택/기각·good/bad 라벨</a:t>
-            </a:r>
-          </a:p>
-        </p:txBody>
-      </p:sp>
-      <p:sp>
-        <p:nvSpPr>
-          <p:cNvPr id="41" name="Chevron 40"/>
+              <a:t>사람이 최종 판단
+채택/기각 표시</a:t>
+            </a:r>
+          </a:p>
+        </p:txBody>
+      </p:sp>
+      <p:sp>
+        <p:nvSpPr>
+          <p:cNvPr id="42" name="Chevron 41"/>
           <p:cNvSpPr/>
           <p:nvPr/>
         </p:nvSpPr>
         <p:spPr>
           <a:xfrm>
-            <a:off x="9381744" y="5422392"/>
+            <a:off x="9381744" y="5504688"/>
             <a:ext cx="228600" cy="182880"/>
           </a:xfrm>
           <a:prstGeom prst="chevron">
@@ -5631,13 +5742,13 @@
       </p:sp>
       <p:sp>
         <p:nvSpPr>
-          <p:cNvPr id="42" name="Rounded Rectangle 41"/>
+          <p:cNvPr id="43" name="Rounded Rectangle 42"/>
           <p:cNvSpPr/>
           <p:nvPr/>
         </p:nvSpPr>
         <p:spPr>
           <a:xfrm>
-            <a:off x="9610344" y="4892040"/>
+            <a:off x="9610344" y="4974336"/>
             <a:ext cx="1005840" cy="182880"/>
           </a:xfrm>
           <a:prstGeom prst="roundRect">
@@ -5692,13 +5803,13 @@
       </p:sp>
       <p:sp>
         <p:nvSpPr>
-          <p:cNvPr id="43" name="Rounded Rectangle 42"/>
+          <p:cNvPr id="44" name="Rounded Rectangle 43"/>
           <p:cNvSpPr/>
           <p:nvPr/>
         </p:nvSpPr>
         <p:spPr>
           <a:xfrm>
-            <a:off x="9573768" y="5093208"/>
+            <a:off x="9573768" y="5175504"/>
             <a:ext cx="2084831" cy="841248"/>
           </a:xfrm>
           <a:prstGeom prst="roundRect">
@@ -5768,7 +5879,7 @@
                 <a:latin typeface="Noto Sans CJK KR"/>
                 <a:ea typeface="Noto Sans CJK KR"/>
               </a:rPr>
-              <a:t>사례 축적·루브릭/프롬프트
+              <a:t>사례 축적·평가기준·프롬프트
 개선 (피드백 루프)</a:t>
             </a:r>
           </a:p>
@@ -5776,13 +5887,13 @@
       </p:sp>
       <p:sp>
         <p:nvSpPr>
-          <p:cNvPr id="44" name="Rounded Rectangle 43"/>
+          <p:cNvPr id="45" name="Rounded Rectangle 44"/>
           <p:cNvSpPr/>
           <p:nvPr/>
         </p:nvSpPr>
         <p:spPr>
           <a:xfrm>
-            <a:off x="502920" y="6044184"/>
+            <a:off x="502920" y="6126480"/>
             <a:ext cx="11155680" cy="310896"/>
           </a:xfrm>
           <a:prstGeom prst="roundRect">
@@ -5832,20 +5943,20 @@
                 <a:latin typeface="Noto Sans CJK KR"/>
                 <a:ea typeface="Noto Sans CJK KR"/>
               </a:rPr>
-              <a:t>↺  피드백 루프 : L5 good/bad 라벨·사례가 few-shot·검색 컨텍스트로 L2·L3에 재투입 → 관점별 인사이트 품질 개선</a:t>
-            </a:r>
-          </a:p>
-        </p:txBody>
-      </p:sp>
-      <p:sp>
-        <p:nvSpPr>
-          <p:cNvPr id="45" name="Rounded Rectangle 44"/>
+              <a:t>↺  피드백 루프 : L5 학습 단계의 채택/기각 사례를 '예시'로 L2·L3에 다시 반영 → 관점별 인사이트 품질 개선</a:t>
+            </a:r>
+          </a:p>
+        </p:txBody>
+      </p:sp>
+      <p:sp>
+        <p:nvSpPr>
+          <p:cNvPr id="46" name="Rounded Rectangle 45"/>
           <p:cNvSpPr/>
           <p:nvPr/>
         </p:nvSpPr>
         <p:spPr>
           <a:xfrm>
-            <a:off x="10881360" y="4361688"/>
+            <a:off x="10881360" y="4443983"/>
             <a:ext cx="182880" cy="182880"/>
           </a:xfrm>
           <a:prstGeom prst="roundRect">
@@ -5902,13 +6013,13 @@
       </p:sp>
       <p:sp>
         <p:nvSpPr>
-          <p:cNvPr id="46" name="TextBox 45"/>
+          <p:cNvPr id="47" name="TextBox 46"/>
           <p:cNvSpPr txBox="1"/>
           <p:nvPr/>
         </p:nvSpPr>
         <p:spPr>
           <a:xfrm>
-            <a:off x="11119104" y="4370831"/>
+            <a:off x="11119104" y="4453127"/>
             <a:ext cx="1188720" cy="182880"/>
           </a:xfrm>
           <a:prstGeom prst="rect">
@@ -5945,13 +6056,13 @@
       </p:sp>
       <p:sp>
         <p:nvSpPr>
-          <p:cNvPr id="47" name="Rounded Rectangle 46"/>
+          <p:cNvPr id="48" name="Rounded Rectangle 47"/>
           <p:cNvSpPr/>
           <p:nvPr/>
         </p:nvSpPr>
         <p:spPr>
           <a:xfrm>
-            <a:off x="10881360" y="4608575"/>
+            <a:off x="10881360" y="4690871"/>
             <a:ext cx="182880" cy="182880"/>
           </a:xfrm>
           <a:prstGeom prst="roundRect">
@@ -6008,13 +6119,13 @@
       </p:sp>
       <p:sp>
         <p:nvSpPr>
-          <p:cNvPr id="48" name="TextBox 47"/>
+          <p:cNvPr id="49" name="TextBox 48"/>
           <p:cNvSpPr txBox="1"/>
           <p:nvPr/>
         </p:nvSpPr>
         <p:spPr>
           <a:xfrm>
-            <a:off x="11119104" y="4617720"/>
+            <a:off x="11119104" y="4700016"/>
             <a:ext cx="1188720" cy="182880"/>
           </a:xfrm>
           <a:prstGeom prst="rect">
@@ -6149,7 +6260,7 @@
                 <a:latin typeface="Noto Sans CJK KR"/>
                 <a:ea typeface="Noto Sans CJK KR"/>
               </a:rPr>
-              <a:t>To-Be 실행 설계 : MAGI 4관점 에이전트 · 암묵지 코드화 · 추진 로드맵</a:t>
+              <a:t>To-Be 실행 설계 : 다관점 AI 에이전트 · 암묵지 코드화 · 추진 로드맵</a:t>
             </a:r>
           </a:p>
         </p:txBody>
@@ -6241,7 +6352,7 @@
         <p:spPr>
           <a:xfrm>
             <a:off x="502920" y="1280160"/>
-            <a:ext cx="3200400" cy="301752"/>
+            <a:ext cx="3840480" cy="301752"/>
           </a:xfrm>
           <a:prstGeom prst="roundRect">
             <a:avLst/>
@@ -6288,7 +6399,7 @@
                 <a:latin typeface="Noto Sans CJK KR"/>
                 <a:ea typeface="Noto Sans CJK KR"/>
               </a:rPr>
-              <a:t>① MAGI 4관점 에이전트 (L3 코어)</a:t>
+              <a:t>① 다관점 AI 에이전트 (4개 관점, L3 계층)</a:t>
             </a:r>
           </a:p>
         </p:txBody>
@@ -6556,7 +6667,7 @@
                 <a:latin typeface="Noto Sans CJK KR"/>
                 <a:ea typeface="Noto Sans CJK KR"/>
               </a:rPr>
-              <a:t>수주 기회·위협·고객 파이프라인</a:t>
+              <a:t>수주 기회·위협·고객 동향</a:t>
             </a:r>
           </a:p>
           <a:p>
@@ -6844,7 +6955,7 @@
                 <a:latin typeface="Noto Sans CJK KR"/>
                 <a:ea typeface="Noto Sans CJK KR"/>
               </a:rPr>
-              <a:t>경쟁 3사 입장에서 동향 시뮬레이션</a:t>
+              <a:t>경쟁 3사 입장에서 동향 예측</a:t>
             </a:r>
           </a:p>
           <a:p>
@@ -6927,7 +7038,7 @@
                 <a:latin typeface="Noto Sans CJK KR"/>
                 <a:ea typeface="Noto Sans CJK KR"/>
               </a:rPr>
-              <a:t>동일 입력을 각자 스탠스로 해석 → 관점 충돌 = 인간에 우선 노출되는 '주목 신호'</a:t>
+              <a:t>같은 입력도 관점마다 다르게 해석 → 관점 충돌 = 인간에 우선 노출되는 '주목 신호'</a:t>
             </a:r>
           </a:p>
           <a:p>
@@ -6947,7 +7058,7 @@
                 <a:latin typeface="Noto Sans CJK KR"/>
                 <a:ea typeface="Noto Sans CJK KR"/>
               </a:rPr>
-              <a:t>(MAGI 교착 = 의사결정 트리거) · 최종 판단·편집·책임은 인간(휴먼인더루프)</a:t>
+              <a:t>(관점이 갈릴수록 사람이 먼저 봐야 할 신호) · 최종 판단·편집·책임은 사람이 담당</a:t>
             </a:r>
           </a:p>
         </p:txBody>
@@ -6961,7 +7072,7 @@
         <p:spPr>
           <a:xfrm>
             <a:off x="6446520" y="1280160"/>
-            <a:ext cx="4023360" cy="301752"/>
+            <a:ext cx="4206240" cy="301752"/>
           </a:xfrm>
           <a:prstGeom prst="roundRect">
             <a:avLst/>
@@ -7008,7 +7119,7 @@
                 <a:latin typeface="Noto Sans CJK KR"/>
                 <a:ea typeface="Noto Sans CJK KR"/>
               </a:rPr>
-              <a:t>② 암묵지 코드화 (moat) — 사람의 핵심 역할</a:t>
+              <a:t>② 암묵지 코드화 (핵심 자산) — 사람의 역할</a:t>
             </a:r>
           </a:p>
         </p:txBody>
@@ -7168,7 +7279,7 @@
                 <a:latin typeface="Noto Sans CJK KR"/>
                 <a:ea typeface="Noto Sans CJK KR"/>
               </a:rPr>
-              <a:t>결론(what) 아닌 근거(why)를 코드화</a:t>
+              <a:t>결론(무엇을) 아닌 근거(왜)를 코드화</a:t>
             </a:r>
           </a:p>
           <a:p>
@@ -7285,7 +7396,7 @@
                 <a:latin typeface="Noto Sans CJK KR"/>
                 <a:ea typeface="Noto Sans CJK KR"/>
               </a:rPr>
-              <a:t>근거 우선(Evidence-First) 스키마</a:t>
+              <a:t>근거 우선 표준 양식</a:t>
             </a:r>
           </a:p>
           <a:p>
@@ -7305,7 +7416,7 @@
                 <a:latin typeface="Noto Sans CJK KR"/>
                 <a:ea typeface="Noto Sans CJK KR"/>
               </a:rPr>
-              <a:t>트리거→판단→★근거·추론→반대고려→경계조건→검증→라벨</a:t>
+              <a:t>관찰→판단→★근거·추론→반대고려→예외조건→결과검증→기록</a:t>
             </a:r>
           </a:p>
         </p:txBody>
@@ -7422,7 +7533,7 @@
                 <a:latin typeface="Noto Sans CJK KR"/>
                 <a:ea typeface="Noto Sans CJK KR"/>
               </a:rPr>
-              <a:t>'왜' 3회 되묻기 · 시드 20~30건 + 인워크플로 라벨 누적</a:t>
+              <a:t>'왜' 3회 되묻기 · 핵심 사례 20~30건 + 업무 중 계속 축적</a:t>
             </a:r>
           </a:p>
         </p:txBody>
@@ -7519,7 +7630,7 @@
                 <a:latin typeface="Noto Sans CJK KR"/>
                 <a:ea typeface="Noto Sans CJK KR"/>
               </a:rPr>
-              <a:t>good/bad 라벨 = 학습 데이터</a:t>
+              <a:t>채택/기각 기록 = 학습 데이터</a:t>
             </a:r>
           </a:p>
           <a:p>
@@ -7539,7 +7650,7 @@
                 <a:latin typeface="Noto Sans CJK KR"/>
                 <a:ea typeface="Noto Sans CJK KR"/>
               </a:rPr>
-              <a:t>라벨·근거가 few-shot·검색 컨텍스트로 L5 루프에 직접 투입</a:t>
+              <a:t>기록·근거를 '예시'로 학습 단계에 직접 반영</a:t>
             </a:r>
           </a:p>
         </p:txBody>
@@ -7553,7 +7664,7 @@
         <p:spPr>
           <a:xfrm>
             <a:off x="502920" y="4590288"/>
-            <a:ext cx="4114800" cy="301752"/>
+            <a:ext cx="4389120" cy="301752"/>
           </a:xfrm>
           <a:prstGeom prst="roundRect">
             <a:avLst/>
@@ -7600,7 +7711,7 @@
                 <a:latin typeface="Noto Sans CJK KR"/>
                 <a:ea typeface="Noto Sans CJK KR"/>
               </a:rPr>
-              <a:t>③ 추진 로드맵 — 10월 파일럿 완료 목표 (Phase 0→3 압축)</a:t>
+              <a:t>③ 추진 로드맵 — 10월 시범운영 완료 목표 (1~3단계 압축)</a:t>
             </a:r>
           </a:p>
         </p:txBody>
@@ -7613,8 +7724,8 @@
         </p:nvCxnSpPr>
         <p:spPr>
           <a:xfrm>
-            <a:off x="4846320" y="4736592"/>
-            <a:ext cx="6720839" cy="0"/>
+            <a:off x="5120640" y="4736592"/>
+            <a:ext cx="6446519" cy="0"/>
           </a:xfrm>
           <a:prstGeom prst="bentConnector3">
             <a:avLst/>
@@ -7696,7 +7807,7 @@
                 <a:latin typeface="Noto Sans CJK KR"/>
                 <a:ea typeface="Noto Sans CJK KR"/>
               </a:rPr>
-              <a:t>8월   Phase 0~1  정렬·시드·수집 PoC</a:t>
+              <a:t>8월   1단계  기준 정의·사례 정리·수집 자동화</a:t>
             </a:r>
           </a:p>
         </p:txBody>
@@ -7802,7 +7913,7 @@
                 <a:latin typeface="Noto Sans CJK KR"/>
                 <a:ea typeface="Noto Sans CJK KR"/>
               </a:rPr>
-              <a:t>•  범위·스코어링 기준·에이전트 스탠스 정의</a:t>
+              <a:t>•  범위·선별 기준·에이전트 관점(역할) 정의</a:t>
             </a:r>
           </a:p>
           <a:p>
@@ -7822,7 +7933,7 @@
                 <a:latin typeface="Noto Sans CJK KR"/>
                 <a:ea typeface="Noto Sans CJK KR"/>
               </a:rPr>
-              <a:t>•  베테랑 워크숍 → 핵심사례 20~30건 시드 KB</a:t>
+              <a:t>•  베테랑 워크숍 → 핵심 사례 20~30건 정리·저장</a:t>
             </a:r>
           </a:p>
           <a:p>
@@ -7842,7 +7953,7 @@
                 <a:latin typeface="Noto Sans CJK KR"/>
                 <a:ea typeface="Noto Sans CJK KR"/>
               </a:rPr>
-              <a:t>•  L1 수집 자동화 파이프라인 PoC</a:t>
+              <a:t>•  수집 자동화 시범 구축</a:t>
             </a:r>
           </a:p>
         </p:txBody>
@@ -7903,7 +8014,7 @@
                 <a:latin typeface="Noto Sans CJK KR"/>
                 <a:ea typeface="Noto Sans CJK KR"/>
               </a:rPr>
-              <a:t>9월   Phase 2  에이전트 PoC</a:t>
+              <a:t>9월   2단계  에이전트 시범 구축</a:t>
             </a:r>
           </a:p>
         </p:txBody>
@@ -8009,7 +8120,7 @@
                 <a:latin typeface="Noto Sans CJK KR"/>
                 <a:ea typeface="Noto Sans CJK KR"/>
               </a:rPr>
-              <a:t>•  4관점 에이전트 프로토타입 구축</a:t>
+              <a:t>•  4개 관점 에이전트 시제품 구축</a:t>
             </a:r>
           </a:p>
           <a:p>
@@ -8029,7 +8140,7 @@
                 <a:latin typeface="Noto Sans CJK KR"/>
                 <a:ea typeface="Noto Sans CJK KR"/>
               </a:rPr>
-              <a:t>•  과거 리포트로 백테스트·튜닝</a:t>
+              <a:t>•  과거 리포트로 성능 검증</a:t>
             </a:r>
           </a:p>
           <a:p>
@@ -8049,7 +8160,7 @@
                 <a:latin typeface="Noto Sans CJK KR"/>
                 <a:ea typeface="Noto Sans CJK KR"/>
               </a:rPr>
-              <a:t>•  관점 충돌 신호·확신도 뷰 설계</a:t>
+              <a:t>•  관점 충돌·확신도 표시 화면 설계</a:t>
             </a:r>
           </a:p>
         </p:txBody>
@@ -8110,7 +8221,7 @@
                 <a:latin typeface="Noto Sans CJK KR"/>
                 <a:ea typeface="Noto Sans CJK KR"/>
               </a:rPr>
-              <a:t>10월   Phase 3  휴먼인더루프 파일럿</a:t>
+              <a:t>10월   3단계  사람 검토형 시범운영</a:t>
             </a:r>
           </a:p>
         </p:txBody>
@@ -8216,7 +8327,7 @@
                 <a:latin typeface="Noto Sans CJK KR"/>
                 <a:ea typeface="Noto Sans CJK KR"/>
               </a:rPr>
-              <a:t>•  1~2회 실제 발행 사이클 병행 적용</a:t>
+              <a:t>•  1~2회 실제 발행 사이클에 병행 적용</a:t>
             </a:r>
           </a:p>
           <a:p>
@@ -8236,7 +8347,7 @@
                 <a:latin typeface="Noto Sans CJK KR"/>
                 <a:ea typeface="Noto Sans CJK KR"/>
               </a:rPr>
-              <a:t>•  라벨링 운영 → 라벨 데이터셋 확보</a:t>
+              <a:t>•  채택/기각 기록 운영 → 학습 데이터 확보</a:t>
             </a:r>
           </a:p>
           <a:p>
@@ -8256,7 +8367,7 @@
                 <a:latin typeface="Noto Sans CJK KR"/>
                 <a:ea typeface="Noto Sans CJK KR"/>
               </a:rPr>
-              <a:t>•  ※ 이후 Phase 4 정식운영·개선 확장</a:t>
+              <a:t>•  ※ 이후 정식운영·개선 확장(4단계)</a:t>
             </a:r>
           </a:p>
         </p:txBody>

--- a/마켓센싱리포트_AI혁신_2p.pptx
+++ b/마켓센싱리포트_AI혁신_2p.pptx
@@ -5,10 +5,10 @@
     <p:sldMasterId id="2147483648" r:id="rId1"/>
   </p:sldMasterIdLst>
   <p:sldIdLst>
-    <p:sldId id="256" r:id="rId7"/>
-    <p:sldId id="257" r:id="rId8"/>
+    <p:sldId id="256" r:id="rId2"/>
+    <p:sldId id="257" r:id="rId3"/>
   </p:sldIdLst>
-  <p:sldSz cx="12191695" cy="6858000" type="screen4x3"/>
+  <p:sldSz cx="12192000" cy="6858000"/>
   <p:notesSz cx="6858000" cy="9144000"/>
   <p:defaultTextStyle>
     <a:defPPr>
@@ -105,6 +105,22 @@
       </a:defRPr>
     </a:lvl9pPr>
   </p:defaultTextStyle>
+  <p:extLst>
+    <p:ext uri="{EFAFB233-063F-42B5-8137-9DF3F51BA10A}">
+      <p15:sldGuideLst xmlns:p15="http://schemas.microsoft.com/office/powerpoint/2012/main">
+        <p15:guide id="1" orient="horz" pos="2160">
+          <p15:clr>
+            <a:srgbClr val="A4A3A4"/>
+          </p15:clr>
+        </p15:guide>
+        <p15:guide id="2" pos="2880">
+          <p15:clr>
+            <a:srgbClr val="A4A3A4"/>
+          </p15:clr>
+        </p15:guide>
+      </p15:sldGuideLst>
+    </p:ext>
+  </p:extLst>
 </p:presentation>
 </file>
 
@@ -146,10 +162,9 @@
           <a:lstStyle/>
           <a:p>
             <a:r>
-              <a:rPr lang="en-US" smtClean="0"/>
+              <a:rPr lang="en-US"/>
               <a:t>Click to edit Master title style</a:t>
             </a:r>
-            <a:endParaRPr lang="en-US"/>
           </a:p>
         </p:txBody>
       </p:sp>
@@ -265,10 +280,9 @@
           </a:lstStyle>
           <a:p>
             <a:r>
-              <a:rPr lang="en-US" smtClean="0"/>
+              <a:rPr lang="en-US"/>
               <a:t>Click to edit Master subtitle style</a:t>
             </a:r>
-            <a:endParaRPr lang="en-US"/>
           </a:p>
         </p:txBody>
       </p:sp>
@@ -289,7 +303,7 @@
           <a:p>
             <a:fld id="{5BCAD085-E8A6-8845-BD4E-CB4CCA059FC4}" type="datetimeFigureOut">
               <a:rPr lang="en-US" smtClean="0"/>
-              <a:t>1/27/13</a:t>
+              <a:t>7/22/26</a:t>
             </a:fld>
             <a:endParaRPr lang="en-US"/>
           </a:p>
@@ -383,10 +397,9 @@
           <a:lstStyle/>
           <a:p>
             <a:r>
-              <a:rPr lang="en-US" smtClean="0"/>
+              <a:rPr lang="en-US"/>
               <a:t>Click to edit Master title style</a:t>
             </a:r>
-            <a:endParaRPr lang="en-US"/>
           </a:p>
         </p:txBody>
       </p:sp>
@@ -407,38 +420,37 @@
           <a:p>
             <a:pPr lvl="0"/>
             <a:r>
-              <a:rPr lang="en-US" smtClean="0"/>
+              <a:rPr lang="en-US"/>
               <a:t>Click to edit Master text styles</a:t>
             </a:r>
           </a:p>
           <a:p>
             <a:pPr lvl="1"/>
             <a:r>
-              <a:rPr lang="en-US" smtClean="0"/>
+              <a:rPr lang="en-US"/>
               <a:t>Second level</a:t>
             </a:r>
           </a:p>
           <a:p>
             <a:pPr lvl="2"/>
             <a:r>
-              <a:rPr lang="en-US" smtClean="0"/>
+              <a:rPr lang="en-US"/>
               <a:t>Third level</a:t>
             </a:r>
           </a:p>
           <a:p>
             <a:pPr lvl="3"/>
             <a:r>
-              <a:rPr lang="en-US" smtClean="0"/>
+              <a:rPr lang="en-US"/>
               <a:t>Fourth level</a:t>
             </a:r>
           </a:p>
           <a:p>
             <a:pPr lvl="4"/>
             <a:r>
-              <a:rPr lang="en-US" smtClean="0"/>
+              <a:rPr lang="en-US"/>
               <a:t>Fifth level</a:t>
             </a:r>
-            <a:endParaRPr lang="en-US"/>
           </a:p>
         </p:txBody>
       </p:sp>
@@ -459,7 +471,7 @@
           <a:p>
             <a:fld id="{5BCAD085-E8A6-8845-BD4E-CB4CCA059FC4}" type="datetimeFigureOut">
               <a:rPr lang="en-US" smtClean="0"/>
-              <a:t>1/27/13</a:t>
+              <a:t>7/22/26</a:t>
             </a:fld>
             <a:endParaRPr lang="en-US"/>
           </a:p>
@@ -558,10 +570,9 @@
           <a:lstStyle/>
           <a:p>
             <a:r>
-              <a:rPr lang="en-US" smtClean="0"/>
+              <a:rPr lang="en-US"/>
               <a:t>Click to edit Master title style</a:t>
             </a:r>
-            <a:endParaRPr lang="en-US"/>
           </a:p>
         </p:txBody>
       </p:sp>
@@ -587,38 +598,37 @@
           <a:p>
             <a:pPr lvl="0"/>
             <a:r>
-              <a:rPr lang="en-US" smtClean="0"/>
+              <a:rPr lang="en-US"/>
               <a:t>Click to edit Master text styles</a:t>
             </a:r>
           </a:p>
           <a:p>
             <a:pPr lvl="1"/>
             <a:r>
-              <a:rPr lang="en-US" smtClean="0"/>
+              <a:rPr lang="en-US"/>
               <a:t>Second level</a:t>
             </a:r>
           </a:p>
           <a:p>
             <a:pPr lvl="2"/>
             <a:r>
-              <a:rPr lang="en-US" smtClean="0"/>
+              <a:rPr lang="en-US"/>
               <a:t>Third level</a:t>
             </a:r>
           </a:p>
           <a:p>
             <a:pPr lvl="3"/>
             <a:r>
-              <a:rPr lang="en-US" smtClean="0"/>
+              <a:rPr lang="en-US"/>
               <a:t>Fourth level</a:t>
             </a:r>
           </a:p>
           <a:p>
             <a:pPr lvl="4"/>
             <a:r>
-              <a:rPr lang="en-US" smtClean="0"/>
+              <a:rPr lang="en-US"/>
               <a:t>Fifth level</a:t>
             </a:r>
-            <a:endParaRPr lang="en-US"/>
           </a:p>
         </p:txBody>
       </p:sp>
@@ -639,7 +649,7 @@
           <a:p>
             <a:fld id="{5BCAD085-E8A6-8845-BD4E-CB4CCA059FC4}" type="datetimeFigureOut">
               <a:rPr lang="en-US" smtClean="0"/>
-              <a:t>1/27/13</a:t>
+              <a:t>7/22/26</a:t>
             </a:fld>
             <a:endParaRPr lang="en-US"/>
           </a:p>
@@ -733,10 +743,9 @@
           <a:lstStyle/>
           <a:p>
             <a:r>
-              <a:rPr lang="en-US" smtClean="0"/>
+              <a:rPr lang="en-US"/>
               <a:t>Click to edit Master title style</a:t>
             </a:r>
-            <a:endParaRPr lang="en-US"/>
           </a:p>
         </p:txBody>
       </p:sp>
@@ -757,38 +766,37 @@
           <a:p>
             <a:pPr lvl="0"/>
             <a:r>
-              <a:rPr lang="en-US" smtClean="0"/>
+              <a:rPr lang="en-US"/>
               <a:t>Click to edit Master text styles</a:t>
             </a:r>
           </a:p>
           <a:p>
             <a:pPr lvl="1"/>
             <a:r>
-              <a:rPr lang="en-US" smtClean="0"/>
+              <a:rPr lang="en-US"/>
               <a:t>Second level</a:t>
             </a:r>
           </a:p>
           <a:p>
             <a:pPr lvl="2"/>
             <a:r>
-              <a:rPr lang="en-US" smtClean="0"/>
+              <a:rPr lang="en-US"/>
               <a:t>Third level</a:t>
             </a:r>
           </a:p>
           <a:p>
             <a:pPr lvl="3"/>
             <a:r>
-              <a:rPr lang="en-US" smtClean="0"/>
+              <a:rPr lang="en-US"/>
               <a:t>Fourth level</a:t>
             </a:r>
           </a:p>
           <a:p>
             <a:pPr lvl="4"/>
             <a:r>
-              <a:rPr lang="en-US" smtClean="0"/>
+              <a:rPr lang="en-US"/>
               <a:t>Fifth level</a:t>
             </a:r>
-            <a:endParaRPr lang="en-US"/>
           </a:p>
         </p:txBody>
       </p:sp>
@@ -809,7 +817,7 @@
           <a:p>
             <a:fld id="{5BCAD085-E8A6-8845-BD4E-CB4CCA059FC4}" type="datetimeFigureOut">
               <a:rPr lang="en-US" smtClean="0"/>
-              <a:t>1/27/13</a:t>
+              <a:t>7/22/26</a:t>
             </a:fld>
             <a:endParaRPr lang="en-US"/>
           </a:p>
@@ -912,10 +920,9 @@
           </a:lstStyle>
           <a:p>
             <a:r>
-              <a:rPr lang="en-US" smtClean="0"/>
+              <a:rPr lang="en-US"/>
               <a:t>Click to edit Master title style</a:t>
             </a:r>
-            <a:endParaRPr lang="en-US"/>
           </a:p>
         </p:txBody>
       </p:sp>
@@ -1032,7 +1039,7 @@
           <a:p>
             <a:pPr lvl="0"/>
             <a:r>
-              <a:rPr lang="en-US" smtClean="0"/>
+              <a:rPr lang="en-US"/>
               <a:t>Click to edit Master text styles</a:t>
             </a:r>
           </a:p>
@@ -1055,7 +1062,7 @@
           <a:p>
             <a:fld id="{5BCAD085-E8A6-8845-BD4E-CB4CCA059FC4}" type="datetimeFigureOut">
               <a:rPr lang="en-US" smtClean="0"/>
-              <a:t>1/27/13</a:t>
+              <a:t>7/22/26</a:t>
             </a:fld>
             <a:endParaRPr lang="en-US"/>
           </a:p>
@@ -1149,10 +1156,9 @@
           <a:lstStyle/>
           <a:p>
             <a:r>
-              <a:rPr lang="en-US" smtClean="0"/>
+              <a:rPr lang="en-US"/>
               <a:t>Click to edit Master title style</a:t>
             </a:r>
-            <a:endParaRPr lang="en-US"/>
           </a:p>
         </p:txBody>
       </p:sp>
@@ -1206,38 +1212,37 @@
           <a:p>
             <a:pPr lvl="0"/>
             <a:r>
-              <a:rPr lang="en-US" smtClean="0"/>
+              <a:rPr lang="en-US"/>
               <a:t>Click to edit Master text styles</a:t>
             </a:r>
           </a:p>
           <a:p>
             <a:pPr lvl="1"/>
             <a:r>
-              <a:rPr lang="en-US" smtClean="0"/>
+              <a:rPr lang="en-US"/>
               <a:t>Second level</a:t>
             </a:r>
           </a:p>
           <a:p>
             <a:pPr lvl="2"/>
             <a:r>
-              <a:rPr lang="en-US" smtClean="0"/>
+              <a:rPr lang="en-US"/>
               <a:t>Third level</a:t>
             </a:r>
           </a:p>
           <a:p>
             <a:pPr lvl="3"/>
             <a:r>
-              <a:rPr lang="en-US" smtClean="0"/>
+              <a:rPr lang="en-US"/>
               <a:t>Fourth level</a:t>
             </a:r>
           </a:p>
           <a:p>
             <a:pPr lvl="4"/>
             <a:r>
-              <a:rPr lang="en-US" smtClean="0"/>
+              <a:rPr lang="en-US"/>
               <a:t>Fifth level</a:t>
             </a:r>
-            <a:endParaRPr lang="en-US"/>
           </a:p>
         </p:txBody>
       </p:sp>
@@ -1291,38 +1296,37 @@
           <a:p>
             <a:pPr lvl="0"/>
             <a:r>
-              <a:rPr lang="en-US" smtClean="0"/>
+              <a:rPr lang="en-US"/>
               <a:t>Click to edit Master text styles</a:t>
             </a:r>
           </a:p>
           <a:p>
             <a:pPr lvl="1"/>
             <a:r>
-              <a:rPr lang="en-US" smtClean="0"/>
+              <a:rPr lang="en-US"/>
               <a:t>Second level</a:t>
             </a:r>
           </a:p>
           <a:p>
             <a:pPr lvl="2"/>
             <a:r>
-              <a:rPr lang="en-US" smtClean="0"/>
+              <a:rPr lang="en-US"/>
               <a:t>Third level</a:t>
             </a:r>
           </a:p>
           <a:p>
             <a:pPr lvl="3"/>
             <a:r>
-              <a:rPr lang="en-US" smtClean="0"/>
+              <a:rPr lang="en-US"/>
               <a:t>Fourth level</a:t>
             </a:r>
           </a:p>
           <a:p>
             <a:pPr lvl="4"/>
             <a:r>
-              <a:rPr lang="en-US" smtClean="0"/>
+              <a:rPr lang="en-US"/>
               <a:t>Fifth level</a:t>
             </a:r>
-            <a:endParaRPr lang="en-US"/>
           </a:p>
         </p:txBody>
       </p:sp>
@@ -1343,7 +1347,7 @@
           <a:p>
             <a:fld id="{5BCAD085-E8A6-8845-BD4E-CB4CCA059FC4}" type="datetimeFigureOut">
               <a:rPr lang="en-US" smtClean="0"/>
-              <a:t>1/27/13</a:t>
+              <a:t>7/22/26</a:t>
             </a:fld>
             <a:endParaRPr lang="en-US"/>
           </a:p>
@@ -1441,10 +1445,9 @@
           </a:lstStyle>
           <a:p>
             <a:r>
-              <a:rPr lang="en-US" smtClean="0"/>
+              <a:rPr lang="en-US"/>
               <a:t>Click to edit Master title style</a:t>
             </a:r>
-            <a:endParaRPr lang="en-US"/>
           </a:p>
         </p:txBody>
       </p:sp>
@@ -1507,7 +1510,7 @@
           <a:p>
             <a:pPr lvl="0"/>
             <a:r>
-              <a:rPr lang="en-US" smtClean="0"/>
+              <a:rPr lang="en-US"/>
               <a:t>Click to edit Master text styles</a:t>
             </a:r>
           </a:p>
@@ -1563,38 +1566,37 @@
           <a:p>
             <a:pPr lvl="0"/>
             <a:r>
-              <a:rPr lang="en-US" smtClean="0"/>
+              <a:rPr lang="en-US"/>
               <a:t>Click to edit Master text styles</a:t>
             </a:r>
           </a:p>
           <a:p>
             <a:pPr lvl="1"/>
             <a:r>
-              <a:rPr lang="en-US" smtClean="0"/>
+              <a:rPr lang="en-US"/>
               <a:t>Second level</a:t>
             </a:r>
           </a:p>
           <a:p>
             <a:pPr lvl="2"/>
             <a:r>
-              <a:rPr lang="en-US" smtClean="0"/>
+              <a:rPr lang="en-US"/>
               <a:t>Third level</a:t>
             </a:r>
           </a:p>
           <a:p>
             <a:pPr lvl="3"/>
             <a:r>
-              <a:rPr lang="en-US" smtClean="0"/>
+              <a:rPr lang="en-US"/>
               <a:t>Fourth level</a:t>
             </a:r>
           </a:p>
           <a:p>
             <a:pPr lvl="4"/>
             <a:r>
-              <a:rPr lang="en-US" smtClean="0"/>
+              <a:rPr lang="en-US"/>
               <a:t>Fifth level</a:t>
             </a:r>
-            <a:endParaRPr lang="en-US"/>
           </a:p>
         </p:txBody>
       </p:sp>
@@ -1657,7 +1659,7 @@
           <a:p>
             <a:pPr lvl="0"/>
             <a:r>
-              <a:rPr lang="en-US" smtClean="0"/>
+              <a:rPr lang="en-US"/>
               <a:t>Click to edit Master text styles</a:t>
             </a:r>
           </a:p>
@@ -1713,38 +1715,37 @@
           <a:p>
             <a:pPr lvl="0"/>
             <a:r>
-              <a:rPr lang="en-US" smtClean="0"/>
+              <a:rPr lang="en-US"/>
               <a:t>Click to edit Master text styles</a:t>
             </a:r>
           </a:p>
           <a:p>
             <a:pPr lvl="1"/>
             <a:r>
-              <a:rPr lang="en-US" smtClean="0"/>
+              <a:rPr lang="en-US"/>
               <a:t>Second level</a:t>
             </a:r>
           </a:p>
           <a:p>
             <a:pPr lvl="2"/>
             <a:r>
-              <a:rPr lang="en-US" smtClean="0"/>
+              <a:rPr lang="en-US"/>
               <a:t>Third level</a:t>
             </a:r>
           </a:p>
           <a:p>
             <a:pPr lvl="3"/>
             <a:r>
-              <a:rPr lang="en-US" smtClean="0"/>
+              <a:rPr lang="en-US"/>
               <a:t>Fourth level</a:t>
             </a:r>
           </a:p>
           <a:p>
             <a:pPr lvl="4"/>
             <a:r>
-              <a:rPr lang="en-US" smtClean="0"/>
+              <a:rPr lang="en-US"/>
               <a:t>Fifth level</a:t>
             </a:r>
-            <a:endParaRPr lang="en-US"/>
           </a:p>
         </p:txBody>
       </p:sp>
@@ -1765,7 +1766,7 @@
           <a:p>
             <a:fld id="{5BCAD085-E8A6-8845-BD4E-CB4CCA059FC4}" type="datetimeFigureOut">
               <a:rPr lang="en-US" smtClean="0"/>
-              <a:t>1/27/13</a:t>
+              <a:t>7/22/26</a:t>
             </a:fld>
             <a:endParaRPr lang="en-US"/>
           </a:p>
@@ -1859,10 +1860,9 @@
           <a:lstStyle/>
           <a:p>
             <a:r>
-              <a:rPr lang="en-US" smtClean="0"/>
+              <a:rPr lang="en-US"/>
               <a:t>Click to edit Master title style</a:t>
             </a:r>
-            <a:endParaRPr lang="en-US"/>
           </a:p>
         </p:txBody>
       </p:sp>
@@ -1883,7 +1883,7 @@
           <a:p>
             <a:fld id="{5BCAD085-E8A6-8845-BD4E-CB4CCA059FC4}" type="datetimeFigureOut">
               <a:rPr lang="en-US" smtClean="0"/>
-              <a:t>1/27/13</a:t>
+              <a:t>7/22/26</a:t>
             </a:fld>
             <a:endParaRPr lang="en-US"/>
           </a:p>
@@ -1978,7 +1978,7 @@
           <a:p>
             <a:fld id="{5BCAD085-E8A6-8845-BD4E-CB4CCA059FC4}" type="datetimeFigureOut">
               <a:rPr lang="en-US" smtClean="0"/>
-              <a:t>1/27/13</a:t>
+              <a:t>7/22/26</a:t>
             </a:fld>
             <a:endParaRPr lang="en-US"/>
           </a:p>
@@ -2081,10 +2081,9 @@
           </a:lstStyle>
           <a:p>
             <a:r>
-              <a:rPr lang="en-US" smtClean="0"/>
+              <a:rPr lang="en-US"/>
               <a:t>Click to edit Master title style</a:t>
             </a:r>
-            <a:endParaRPr lang="en-US"/>
           </a:p>
         </p:txBody>
       </p:sp>
@@ -2138,38 +2137,37 @@
           <a:p>
             <a:pPr lvl="0"/>
             <a:r>
-              <a:rPr lang="en-US" smtClean="0"/>
+              <a:rPr lang="en-US"/>
               <a:t>Click to edit Master text styles</a:t>
             </a:r>
           </a:p>
           <a:p>
             <a:pPr lvl="1"/>
             <a:r>
-              <a:rPr lang="en-US" smtClean="0"/>
+              <a:rPr lang="en-US"/>
               <a:t>Second level</a:t>
             </a:r>
           </a:p>
           <a:p>
             <a:pPr lvl="2"/>
             <a:r>
-              <a:rPr lang="en-US" smtClean="0"/>
+              <a:rPr lang="en-US"/>
               <a:t>Third level</a:t>
             </a:r>
           </a:p>
           <a:p>
             <a:pPr lvl="3"/>
             <a:r>
-              <a:rPr lang="en-US" smtClean="0"/>
+              <a:rPr lang="en-US"/>
               <a:t>Fourth level</a:t>
             </a:r>
           </a:p>
           <a:p>
             <a:pPr lvl="4"/>
             <a:r>
-              <a:rPr lang="en-US" smtClean="0"/>
+              <a:rPr lang="en-US"/>
               <a:t>Fifth level</a:t>
             </a:r>
-            <a:endParaRPr lang="en-US"/>
           </a:p>
         </p:txBody>
       </p:sp>
@@ -2232,7 +2230,7 @@
           <a:p>
             <a:pPr lvl="0"/>
             <a:r>
-              <a:rPr lang="en-US" smtClean="0"/>
+              <a:rPr lang="en-US"/>
               <a:t>Click to edit Master text styles</a:t>
             </a:r>
           </a:p>
@@ -2255,7 +2253,7 @@
           <a:p>
             <a:fld id="{5BCAD085-E8A6-8845-BD4E-CB4CCA059FC4}" type="datetimeFigureOut">
               <a:rPr lang="en-US" smtClean="0"/>
-              <a:t>1/27/13</a:t>
+              <a:t>7/22/26</a:t>
             </a:fld>
             <a:endParaRPr lang="en-US"/>
           </a:p>
@@ -2358,10 +2356,9 @@
           </a:lstStyle>
           <a:p>
             <a:r>
-              <a:rPr lang="en-US" smtClean="0"/>
+              <a:rPr lang="en-US"/>
               <a:t>Click to edit Master title style</a:t>
             </a:r>
-            <a:endParaRPr lang="en-US"/>
           </a:p>
         </p:txBody>
       </p:sp>
@@ -2485,7 +2482,7 @@
           <a:p>
             <a:pPr lvl="0"/>
             <a:r>
-              <a:rPr lang="en-US" smtClean="0"/>
+              <a:rPr lang="en-US"/>
               <a:t>Click to edit Master text styles</a:t>
             </a:r>
           </a:p>
@@ -2508,7 +2505,7 @@
           <a:p>
             <a:fld id="{5BCAD085-E8A6-8845-BD4E-CB4CCA059FC4}" type="datetimeFigureOut">
               <a:rPr lang="en-US" smtClean="0"/>
-              <a:t>1/27/13</a:t>
+              <a:t>7/22/26</a:t>
             </a:fld>
             <a:endParaRPr lang="en-US"/>
           </a:p>
@@ -2617,10 +2614,9 @@
           <a:lstStyle/>
           <a:p>
             <a:r>
-              <a:rPr lang="en-US" smtClean="0"/>
+              <a:rPr lang="en-US"/>
               <a:t>Click to edit Master title style</a:t>
             </a:r>
-            <a:endParaRPr lang="en-US"/>
           </a:p>
         </p:txBody>
       </p:sp>
@@ -2651,38 +2647,37 @@
           <a:p>
             <a:pPr lvl="0"/>
             <a:r>
-              <a:rPr lang="en-US" smtClean="0"/>
+              <a:rPr lang="en-US"/>
               <a:t>Click to edit Master text styles</a:t>
             </a:r>
           </a:p>
           <a:p>
             <a:pPr lvl="1"/>
             <a:r>
-              <a:rPr lang="en-US" smtClean="0"/>
+              <a:rPr lang="en-US"/>
               <a:t>Second level</a:t>
             </a:r>
           </a:p>
           <a:p>
             <a:pPr lvl="2"/>
             <a:r>
-              <a:rPr lang="en-US" smtClean="0"/>
+              <a:rPr lang="en-US"/>
               <a:t>Third level</a:t>
             </a:r>
           </a:p>
           <a:p>
             <a:pPr lvl="3"/>
             <a:r>
-              <a:rPr lang="en-US" smtClean="0"/>
+              <a:rPr lang="en-US"/>
               <a:t>Fourth level</a:t>
             </a:r>
           </a:p>
           <a:p>
             <a:pPr lvl="4"/>
             <a:r>
-              <a:rPr lang="en-US" smtClean="0"/>
+              <a:rPr lang="en-US"/>
               <a:t>Fifth level</a:t>
             </a:r>
-            <a:endParaRPr lang="en-US"/>
           </a:p>
         </p:txBody>
       </p:sp>
@@ -2721,7 +2716,7 @@
           <a:p>
             <a:fld id="{5BCAD085-E8A6-8845-BD4E-CB4CCA059FC4}" type="datetimeFigureOut">
               <a:rPr lang="en-US" smtClean="0"/>
-              <a:t>1/27/13</a:t>
+              <a:t>7/22/26</a:t>
             </a:fld>
             <a:endParaRPr lang="en-US"/>
           </a:p>
@@ -3080,7 +3075,7 @@
 </file>
 
 <file path=ppt/slides/slide1.xml><?xml version="1.0" encoding="utf-8"?>
-<p:sld xmlns:a="http://schemas.openxmlformats.org/drawingml/2006/main" xmlns:p="http://schemas.openxmlformats.org/presentationml/2006/main" xmlns:r="http://schemas.openxmlformats.org/officeDocument/2006/relationships">
+<p:sld xmlns:a="http://schemas.openxmlformats.org/drawingml/2006/main" xmlns:r="http://schemas.openxmlformats.org/officeDocument/2006/relationships" xmlns:p="http://schemas.openxmlformats.org/presentationml/2006/main">
   <p:cSld>
     <p:spTree>
       <p:nvGrpSpPr>
@@ -3088,7 +3083,14 @@
         <p:cNvGrpSpPr/>
         <p:nvPr/>
       </p:nvGrpSpPr>
-      <p:grpSpPr/>
+      <p:grpSpPr>
+        <a:xfrm>
+          <a:off x="0" y="0"/>
+          <a:ext cx="0" cy="0"/>
+          <a:chOff x="0" y="0"/>
+          <a:chExt cx="0" cy="0"/>
+        </a:xfrm>
+      </p:grpSpPr>
       <p:sp>
         <p:nvSpPr>
           <p:cNvPr id="2" name="Rectangle 1"/>
@@ -3130,6 +3132,7 @@
           <a:lstStyle/>
           <a:p>
             <a:pPr algn="ctr"/>
+            <a:endParaRPr/>
           </a:p>
         </p:txBody>
       </p:sp>
@@ -3150,7 +3153,7 @@
           <a:noFill/>
         </p:spPr>
         <p:txBody>
-          <a:bodyPr wrap="square" anchor="t" lIns="0" rIns="0" tIns="0" bIns="0">
+          <a:bodyPr wrap="square" lIns="0" tIns="0" rIns="0" bIns="0" anchor="t">
             <a:spAutoFit/>
           </a:bodyPr>
           <a:lstStyle/>
@@ -3193,7 +3196,7 @@
           <a:noFill/>
         </p:spPr>
         <p:txBody>
-          <a:bodyPr wrap="square" anchor="t" lIns="0" rIns="0" tIns="0" bIns="0">
+          <a:bodyPr wrap="square" lIns="0" tIns="0" rIns="0" bIns="0" anchor="t">
             <a:spAutoFit/>
           </a:bodyPr>
           <a:lstStyle/>
@@ -3258,7 +3261,7 @@
           </a:fontRef>
         </p:style>
         <p:txBody>
-          <a:bodyPr rtlCol="0" anchor="ctr" wrap="square" lIns="64008" rIns="64008" tIns="27432" bIns="27432"/>
+          <a:bodyPr wrap="square" lIns="64008" tIns="27432" rIns="64008" bIns="27432" rtlCol="0" anchor="ctr"/>
           <a:lstStyle/>
           <a:p>
             <a:pPr algn="ctr">
@@ -3319,7 +3322,7 @@
           </a:fontRef>
         </p:style>
         <p:txBody>
-          <a:bodyPr rtlCol="0" anchor="ctr" wrap="square" lIns="64008" rIns="64008" tIns="27432" bIns="27432"/>
+          <a:bodyPr wrap="square" lIns="64008" tIns="27432" rIns="64008" bIns="27432" rtlCol="0" anchor="ctr"/>
           <a:lstStyle/>
           <a:p>
             <a:pPr algn="ctr">
@@ -3360,7 +3363,7 @@
           <a:noFill/>
         </p:spPr>
         <p:txBody>
-          <a:bodyPr wrap="square" anchor="t" lIns="0" rIns="0" tIns="0" bIns="0">
+          <a:bodyPr wrap="square" lIns="0" tIns="0" rIns="0" bIns="0" anchor="t">
             <a:spAutoFit/>
           </a:bodyPr>
           <a:lstStyle/>
@@ -3425,7 +3428,7 @@
           </a:fontRef>
         </p:style>
         <p:txBody>
-          <a:bodyPr rtlCol="0" anchor="ctr" wrap="square" lIns="64008" rIns="64008" tIns="27432" bIns="27432"/>
+          <a:bodyPr wrap="square" lIns="64008" tIns="27432" rIns="64008" bIns="27432" rtlCol="0" anchor="ctr"/>
           <a:lstStyle/>
           <a:p>
             <a:pPr algn="ctr">
@@ -3511,6 +3514,7 @@
           <a:lstStyle/>
           <a:p>
             <a:pPr algn="ctr"/>
+            <a:endParaRPr/>
           </a:p>
         </p:txBody>
       </p:sp>
@@ -3553,7 +3557,7 @@
           </a:fontRef>
         </p:style>
         <p:txBody>
-          <a:bodyPr rtlCol="0" anchor="ctr" wrap="square" lIns="64008" rIns="64008" tIns="27432" bIns="27432"/>
+          <a:bodyPr wrap="square" lIns="64008" tIns="27432" rIns="64008" bIns="27432" rtlCol="0" anchor="ctr"/>
           <a:lstStyle/>
           <a:p>
             <a:pPr algn="ctr">
@@ -3639,6 +3643,7 @@
           <a:lstStyle/>
           <a:p>
             <a:pPr algn="ctr"/>
+            <a:endParaRPr/>
           </a:p>
         </p:txBody>
       </p:sp>
@@ -3681,7 +3686,7 @@
           </a:fontRef>
         </p:style>
         <p:txBody>
-          <a:bodyPr rtlCol="0" anchor="ctr" wrap="square" lIns="64008" rIns="64008" tIns="27432" bIns="27432"/>
+          <a:bodyPr wrap="square" lIns="64008" tIns="27432" rIns="64008" bIns="27432" rtlCol="0" anchor="ctr"/>
           <a:lstStyle/>
           <a:p>
             <a:pPr algn="ctr">
@@ -3767,6 +3772,7 @@
           <a:lstStyle/>
           <a:p>
             <a:pPr algn="ctr"/>
+            <a:endParaRPr/>
           </a:p>
         </p:txBody>
       </p:sp>
@@ -3809,7 +3815,7 @@
           </a:fontRef>
         </p:style>
         <p:txBody>
-          <a:bodyPr rtlCol="0" anchor="ctr" wrap="square" lIns="64008" rIns="64008" tIns="27432" bIns="27432"/>
+          <a:bodyPr wrap="square" lIns="64008" tIns="27432" rIns="64008" bIns="27432" rtlCol="0" anchor="ctr"/>
           <a:lstStyle/>
           <a:p>
             <a:pPr algn="ctr">
@@ -3895,6 +3901,7 @@
           <a:lstStyle/>
           <a:p>
             <a:pPr algn="ctr"/>
+            <a:endParaRPr/>
           </a:p>
         </p:txBody>
       </p:sp>
@@ -3937,7 +3944,7 @@
           </a:fontRef>
         </p:style>
         <p:txBody>
-          <a:bodyPr rtlCol="0" anchor="ctr" wrap="square" lIns="64008" rIns="64008" tIns="27432" bIns="27432"/>
+          <a:bodyPr wrap="square" lIns="64008" tIns="27432" rIns="64008" bIns="27432" rtlCol="0" anchor="ctr"/>
           <a:lstStyle/>
           <a:p>
             <a:pPr algn="ctr">
@@ -4023,6 +4030,7 @@
           <a:lstStyle/>
           <a:p>
             <a:pPr algn="ctr"/>
+            <a:endParaRPr/>
           </a:p>
         </p:txBody>
       </p:sp>
@@ -4065,7 +4073,7 @@
           </a:fontRef>
         </p:style>
         <p:txBody>
-          <a:bodyPr rtlCol="0" anchor="ctr" wrap="square" lIns="64008" rIns="64008" tIns="27432" bIns="27432"/>
+          <a:bodyPr wrap="square" lIns="64008" tIns="27432" rIns="64008" bIns="27432" rtlCol="0" anchor="ctr"/>
           <a:lstStyle/>
           <a:p>
             <a:pPr algn="ctr">
@@ -4149,7 +4157,7 @@
           </a:fontRef>
         </p:style>
         <p:txBody>
-          <a:bodyPr rtlCol="0" anchor="ctr" wrap="square" lIns="64008" rIns="64008" tIns="27432" bIns="27432"/>
+          <a:bodyPr wrap="square" lIns="64008" tIns="27432" rIns="64008" bIns="27432" rtlCol="0" anchor="ctr"/>
           <a:lstStyle/>
           <a:p>
             <a:pPr algn="ctr">
@@ -4232,7 +4240,7 @@
           </a:fontRef>
         </p:style>
         <p:txBody>
-          <a:bodyPr rtlCol="0" anchor="ctr" wrap="square" lIns="64008" rIns="64008" tIns="27432" bIns="27432"/>
+          <a:bodyPr wrap="square" lIns="64008" tIns="27432" rIns="64008" bIns="27432" rtlCol="0" anchor="ctr"/>
           <a:lstStyle/>
           <a:p>
             <a:pPr algn="ctr">
@@ -4293,7 +4301,7 @@
           <a:noFill/>
         </p:spPr>
         <p:txBody>
-          <a:bodyPr wrap="square" anchor="t" lIns="0" rIns="0" tIns="0" bIns="0">
+          <a:bodyPr wrap="square" lIns="0" tIns="0" rIns="0" bIns="0" anchor="t">
             <a:spAutoFit/>
           </a:bodyPr>
           <a:lstStyle/>
@@ -4358,7 +4366,7 @@
           </a:fontRef>
         </p:style>
         <p:txBody>
-          <a:bodyPr rtlCol="0" anchor="ctr" wrap="square" lIns="64008" rIns="64008" tIns="27432" bIns="27432"/>
+          <a:bodyPr wrap="square" lIns="64008" tIns="27432" rIns="64008" bIns="27432" rtlCol="0" anchor="ctr"/>
           <a:lstStyle/>
           <a:p>
             <a:pPr algn="ctr">
@@ -4441,7 +4449,7 @@
           </a:fontRef>
         </p:style>
         <p:txBody>
-          <a:bodyPr rtlCol="0" anchor="ctr" wrap="square" lIns="64008" rIns="64008" tIns="27432" bIns="27432"/>
+          <a:bodyPr wrap="square" lIns="64008" tIns="27432" rIns="64008" bIns="27432" rtlCol="0" anchor="ctr"/>
           <a:lstStyle/>
           <a:p>
             <a:pPr algn="ctr">
@@ -4524,7 +4532,7 @@
           </a:fontRef>
         </p:style>
         <p:txBody>
-          <a:bodyPr rtlCol="0" anchor="ctr" wrap="square" lIns="64008" rIns="64008" tIns="27432" bIns="27432"/>
+          <a:bodyPr wrap="square" lIns="64008" tIns="27432" rIns="64008" bIns="27432" rtlCol="0" anchor="ctr"/>
           <a:lstStyle/>
           <a:p>
             <a:pPr algn="ctr">
@@ -4607,7 +4615,7 @@
           </a:fontRef>
         </p:style>
         <p:txBody>
-          <a:bodyPr rtlCol="0" anchor="ctr" wrap="square" lIns="64008" rIns="64008" tIns="27432" bIns="27432"/>
+          <a:bodyPr wrap="square" lIns="64008" tIns="27432" rIns="64008" bIns="27432" rtlCol="0" anchor="ctr"/>
           <a:lstStyle/>
           <a:p>
             <a:pPr algn="ctr">
@@ -4690,7 +4698,7 @@
           </a:fontRef>
         </p:style>
         <p:txBody>
-          <a:bodyPr rtlCol="0" anchor="ctr" wrap="square" lIns="64008" rIns="64008" tIns="27432" bIns="27432"/>
+          <a:bodyPr wrap="square" lIns="64008" tIns="27432" rIns="64008" bIns="27432" rtlCol="0" anchor="ctr"/>
           <a:lstStyle/>
           <a:p>
             <a:pPr algn="ctr">
@@ -4773,7 +4781,7 @@
           </a:fontRef>
         </p:style>
         <p:txBody>
-          <a:bodyPr rtlCol="0" anchor="ctr" wrap="square" lIns="64008" rIns="64008" tIns="27432" bIns="27432"/>
+          <a:bodyPr wrap="square" lIns="64008" tIns="27432" rIns="64008" bIns="27432" rtlCol="0" anchor="ctr"/>
           <a:lstStyle/>
           <a:p>
             <a:pPr algn="ctr">
@@ -4856,7 +4864,7 @@
           </a:fontRef>
         </p:style>
         <p:txBody>
-          <a:bodyPr rtlCol="0" anchor="ctr" wrap="square" lIns="64008" rIns="64008" tIns="27432" bIns="27432"/>
+          <a:bodyPr wrap="square" lIns="64008" tIns="27432" rIns="64008" bIns="27432" rtlCol="0" anchor="ctr"/>
           <a:lstStyle/>
           <a:p>
             <a:pPr algn="ctr">
@@ -4917,7 +4925,7 @@
           </a:fontRef>
         </p:style>
         <p:txBody>
-          <a:bodyPr rtlCol="0" anchor="ctr" wrap="square" lIns="64008" rIns="64008" tIns="27432" bIns="27432"/>
+          <a:bodyPr wrap="square" lIns="64008" tIns="27432" rIns="64008" bIns="27432" rtlCol="0" anchor="ctr"/>
           <a:lstStyle/>
           <a:p>
             <a:pPr algn="ctr">
@@ -4958,7 +4966,7 @@
           <a:noFill/>
         </p:spPr>
         <p:txBody>
-          <a:bodyPr wrap="square" anchor="t" lIns="0" rIns="0" tIns="0" bIns="0">
+          <a:bodyPr wrap="square" lIns="0" tIns="0" rIns="0" bIns="0" anchor="t">
             <a:spAutoFit/>
           </a:bodyPr>
           <a:lstStyle/>
@@ -5021,7 +5029,7 @@
           </a:fontRef>
         </p:style>
         <p:txBody>
-          <a:bodyPr rtlCol="0" anchor="ctr" wrap="square" lIns="64008" rIns="64008" tIns="27432" bIns="27432"/>
+          <a:bodyPr wrap="square" lIns="64008" tIns="27432" rIns="64008" bIns="27432" rtlCol="0" anchor="ctr"/>
           <a:lstStyle/>
           <a:p>
             <a:pPr algn="ctr">
@@ -5084,7 +5092,7 @@
           </a:fontRef>
         </p:style>
         <p:txBody>
-          <a:bodyPr rtlCol="0" anchor="ctr" wrap="square" lIns="64008" rIns="64008" tIns="27432" bIns="27432"/>
+          <a:bodyPr wrap="square" lIns="64008" tIns="27432" rIns="64008" bIns="27432" rtlCol="0" anchor="ctr"/>
           <a:lstStyle/>
           <a:p>
             <a:pPr algn="ctr">
@@ -5170,6 +5178,7 @@
           <a:lstStyle/>
           <a:p>
             <a:pPr algn="ctr"/>
+            <a:endParaRPr/>
           </a:p>
         </p:txBody>
       </p:sp>
@@ -5210,7 +5219,7 @@
           </a:fontRef>
         </p:style>
         <p:txBody>
-          <a:bodyPr rtlCol="0" anchor="ctr" wrap="square" lIns="64008" rIns="64008" tIns="27432" bIns="27432"/>
+          <a:bodyPr wrap="square" lIns="64008" tIns="27432" rIns="64008" bIns="27432" rtlCol="0" anchor="ctr"/>
           <a:lstStyle/>
           <a:p>
             <a:pPr algn="ctr">
@@ -5273,7 +5282,7 @@
           </a:fontRef>
         </p:style>
         <p:txBody>
-          <a:bodyPr rtlCol="0" anchor="ctr" wrap="square" lIns="64008" rIns="64008" tIns="27432" bIns="27432"/>
+          <a:bodyPr wrap="square" lIns="64008" tIns="27432" rIns="64008" bIns="27432" rtlCol="0" anchor="ctr"/>
           <a:lstStyle/>
           <a:p>
             <a:pPr algn="ctr">
@@ -5359,6 +5368,7 @@
           <a:lstStyle/>
           <a:p>
             <a:pPr algn="ctr"/>
+            <a:endParaRPr/>
           </a:p>
         </p:txBody>
       </p:sp>
@@ -5399,7 +5409,7 @@
           </a:fontRef>
         </p:style>
         <p:txBody>
-          <a:bodyPr rtlCol="0" anchor="ctr" wrap="square" lIns="64008" rIns="64008" tIns="27432" bIns="27432"/>
+          <a:bodyPr wrap="square" lIns="64008" tIns="27432" rIns="64008" bIns="27432" rtlCol="0" anchor="ctr"/>
           <a:lstStyle/>
           <a:p>
             <a:pPr algn="ctr">
@@ -5462,7 +5472,7 @@
           </a:fontRef>
         </p:style>
         <p:txBody>
-          <a:bodyPr rtlCol="0" anchor="ctr" wrap="square" lIns="64008" rIns="64008" tIns="27432" bIns="27432"/>
+          <a:bodyPr wrap="square" lIns="64008" tIns="27432" rIns="64008" bIns="27432" rtlCol="0" anchor="ctr"/>
           <a:lstStyle/>
           <a:p>
             <a:pPr algn="ctr">
@@ -5548,6 +5558,7 @@
           <a:lstStyle/>
           <a:p>
             <a:pPr algn="ctr"/>
+            <a:endParaRPr/>
           </a:p>
         </p:txBody>
       </p:sp>
@@ -5588,7 +5599,7 @@
           </a:fontRef>
         </p:style>
         <p:txBody>
-          <a:bodyPr rtlCol="0" anchor="ctr" wrap="square" lIns="64008" rIns="64008" tIns="27432" bIns="27432"/>
+          <a:bodyPr wrap="square" lIns="64008" tIns="27432" rIns="64008" bIns="27432" rtlCol="0" anchor="ctr"/>
           <a:lstStyle/>
           <a:p>
             <a:pPr algn="ctr">
@@ -5651,7 +5662,7 @@
           </a:fontRef>
         </p:style>
         <p:txBody>
-          <a:bodyPr rtlCol="0" anchor="ctr" wrap="square" lIns="64008" rIns="64008" tIns="27432" bIns="27432"/>
+          <a:bodyPr wrap="square" lIns="64008" tIns="27432" rIns="64008" bIns="27432" rtlCol="0" anchor="ctr"/>
           <a:lstStyle/>
           <a:p>
             <a:pPr algn="ctr">
@@ -5737,6 +5748,7 @@
           <a:lstStyle/>
           <a:p>
             <a:pPr algn="ctr"/>
+            <a:endParaRPr/>
           </a:p>
         </p:txBody>
       </p:sp>
@@ -5777,7 +5789,7 @@
           </a:fontRef>
         </p:style>
         <p:txBody>
-          <a:bodyPr rtlCol="0" anchor="ctr" wrap="square" lIns="64008" rIns="64008" tIns="27432" bIns="27432"/>
+          <a:bodyPr wrap="square" lIns="64008" tIns="27432" rIns="64008" bIns="27432" rtlCol="0" anchor="ctr"/>
           <a:lstStyle/>
           <a:p>
             <a:pPr algn="ctr">
@@ -5840,7 +5852,7 @@
           </a:fontRef>
         </p:style>
         <p:txBody>
-          <a:bodyPr rtlCol="0" anchor="ctr" wrap="square" lIns="64008" rIns="64008" tIns="27432" bIns="27432"/>
+          <a:bodyPr wrap="square" lIns="64008" tIns="27432" rIns="64008" bIns="27432" rtlCol="0" anchor="ctr"/>
           <a:lstStyle/>
           <a:p>
             <a:pPr algn="ctr">
@@ -5924,7 +5936,7 @@
           </a:fontRef>
         </p:style>
         <p:txBody>
-          <a:bodyPr rtlCol="0" anchor="ctr" wrap="square" lIns="64008" rIns="64008" tIns="27432" bIns="27432"/>
+          <a:bodyPr wrap="square" lIns="64008" tIns="27432" rIns="64008" bIns="27432" rtlCol="0" anchor="ctr"/>
           <a:lstStyle/>
           <a:p>
             <a:pPr algn="ctr">
@@ -5987,7 +5999,7 @@
           </a:fontRef>
         </p:style>
         <p:txBody>
-          <a:bodyPr rtlCol="0" anchor="ctr" wrap="square" lIns="64008" rIns="64008" tIns="27432" bIns="27432"/>
+          <a:bodyPr wrap="square" lIns="64008" tIns="27432" rIns="64008" bIns="27432" rtlCol="0" anchor="ctr"/>
           <a:lstStyle/>
           <a:p>
             <a:pPr algn="ctr">
@@ -5998,16 +6010,7 @@
                 <a:spcPts val="0"/>
               </a:spcAft>
             </a:pPr>
-            <a:r>
-              <a:rPr sz="100" b="0">
-                <a:solidFill>
-                  <a:srgbClr val="2E6E69"/>
-                </a:solidFill>
-                <a:latin typeface="Noto Sans CJK KR"/>
-                <a:ea typeface="Noto Sans CJK KR"/>
-              </a:rPr>
-              <a:t/>
-            </a:r>
+            <a:endParaRPr/>
           </a:p>
         </p:txBody>
       </p:sp>
@@ -6028,7 +6031,7 @@
           <a:noFill/>
         </p:spPr>
         <p:txBody>
-          <a:bodyPr wrap="square" anchor="t" lIns="0" rIns="0" tIns="0" bIns="0">
+          <a:bodyPr wrap="square" lIns="0" tIns="0" rIns="0" bIns="0" anchor="t">
             <a:spAutoFit/>
           </a:bodyPr>
           <a:lstStyle/>
@@ -6093,7 +6096,7 @@
           </a:fontRef>
         </p:style>
         <p:txBody>
-          <a:bodyPr rtlCol="0" anchor="ctr" wrap="square" lIns="64008" rIns="64008" tIns="27432" bIns="27432"/>
+          <a:bodyPr wrap="square" lIns="64008" tIns="27432" rIns="64008" bIns="27432" rtlCol="0" anchor="ctr"/>
           <a:lstStyle/>
           <a:p>
             <a:pPr algn="ctr">
@@ -6104,16 +6107,7 @@
                 <a:spcPts val="0"/>
               </a:spcAft>
             </a:pPr>
-            <a:r>
-              <a:rPr sz="100" b="0">
-                <a:solidFill>
-                  <a:srgbClr val="8A5A1E"/>
-                </a:solidFill>
-                <a:latin typeface="Noto Sans CJK KR"/>
-                <a:ea typeface="Noto Sans CJK KR"/>
-              </a:rPr>
-              <a:t/>
-            </a:r>
+            <a:endParaRPr/>
           </a:p>
         </p:txBody>
       </p:sp>
@@ -6134,7 +6128,7 @@
           <a:noFill/>
         </p:spPr>
         <p:txBody>
-          <a:bodyPr wrap="square" anchor="t" lIns="0" rIns="0" tIns="0" bIns="0">
+          <a:bodyPr wrap="square" lIns="0" tIns="0" rIns="0" bIns="0" anchor="t">
             <a:spAutoFit/>
           </a:bodyPr>
           <a:lstStyle/>
@@ -6169,7 +6163,7 @@
 </file>
 
 <file path=ppt/slides/slide2.xml><?xml version="1.0" encoding="utf-8"?>
-<p:sld xmlns:a="http://schemas.openxmlformats.org/drawingml/2006/main" xmlns:p="http://schemas.openxmlformats.org/presentationml/2006/main" xmlns:r="http://schemas.openxmlformats.org/officeDocument/2006/relationships">
+<p:sld xmlns:a="http://schemas.openxmlformats.org/drawingml/2006/main" xmlns:r="http://schemas.openxmlformats.org/officeDocument/2006/relationships" xmlns:p="http://schemas.openxmlformats.org/presentationml/2006/main">
   <p:cSld>
     <p:spTree>
       <p:nvGrpSpPr>
@@ -6177,7 +6171,14 @@
         <p:cNvGrpSpPr/>
         <p:nvPr/>
       </p:nvGrpSpPr>
-      <p:grpSpPr/>
+      <p:grpSpPr>
+        <a:xfrm>
+          <a:off x="0" y="0"/>
+          <a:ext cx="0" cy="0"/>
+          <a:chOff x="0" y="0"/>
+          <a:chExt cx="0" cy="0"/>
+        </a:xfrm>
+      </p:grpSpPr>
       <p:sp>
         <p:nvSpPr>
           <p:cNvPr id="2" name="Rectangle 1"/>
@@ -6219,6 +6220,7 @@
           <a:lstStyle/>
           <a:p>
             <a:pPr algn="ctr"/>
+            <a:endParaRPr/>
           </a:p>
         </p:txBody>
       </p:sp>
@@ -6239,7 +6241,7 @@
           <a:noFill/>
         </p:spPr>
         <p:txBody>
-          <a:bodyPr wrap="square" anchor="t" lIns="0" rIns="0" tIns="0" bIns="0">
+          <a:bodyPr wrap="square" lIns="0" tIns="0" rIns="0" bIns="0" anchor="t">
             <a:spAutoFit/>
           </a:bodyPr>
           <a:lstStyle/>
@@ -6282,7 +6284,7 @@
           <a:noFill/>
         </p:spPr>
         <p:txBody>
-          <a:bodyPr wrap="square" anchor="t" lIns="0" rIns="0" tIns="0" bIns="0">
+          <a:bodyPr wrap="square" lIns="0" tIns="0" rIns="0" bIns="0" anchor="t">
             <a:spAutoFit/>
           </a:bodyPr>
           <a:lstStyle/>
@@ -6380,7 +6382,7 @@
           </a:fontRef>
         </p:style>
         <p:txBody>
-          <a:bodyPr rtlCol="0" anchor="ctr" wrap="square" lIns="64008" rIns="64008" tIns="27432" bIns="27432"/>
+          <a:bodyPr wrap="square" lIns="64008" tIns="27432" rIns="64008" bIns="27432" rtlCol="0" anchor="ctr"/>
           <a:lstStyle/>
           <a:p>
             <a:pPr algn="ctr">
@@ -6441,7 +6443,7 @@
           </a:fontRef>
         </p:style>
         <p:txBody>
-          <a:bodyPr rtlCol="0" anchor="ctr" wrap="square" lIns="64008" rIns="64008" tIns="27432" bIns="27432"/>
+          <a:bodyPr wrap="square" lIns="64008" tIns="27432" rIns="64008" bIns="27432" rtlCol="0" anchor="ctr"/>
           <a:lstStyle/>
           <a:p>
             <a:pPr algn="ctr">
@@ -6504,7 +6506,7 @@
           </a:fontRef>
         </p:style>
         <p:txBody>
-          <a:bodyPr rtlCol="0" anchor="ctr" wrap="square" lIns="64008" rIns="64008" tIns="27432" bIns="27432"/>
+          <a:bodyPr wrap="square" lIns="64008" tIns="27432" rIns="64008" bIns="27432" rtlCol="0" anchor="ctr"/>
           <a:lstStyle/>
           <a:p>
             <a:pPr algn="ctr">
@@ -6585,7 +6587,7 @@
           </a:fontRef>
         </p:style>
         <p:txBody>
-          <a:bodyPr rtlCol="0" anchor="ctr" wrap="square" lIns="64008" rIns="64008" tIns="27432" bIns="27432"/>
+          <a:bodyPr wrap="square" lIns="64008" tIns="27432" rIns="64008" bIns="27432" rtlCol="0" anchor="ctr"/>
           <a:lstStyle/>
           <a:p>
             <a:pPr algn="ctr">
@@ -6648,7 +6650,7 @@
           </a:fontRef>
         </p:style>
         <p:txBody>
-          <a:bodyPr rtlCol="0" anchor="ctr" wrap="square" lIns="64008" rIns="64008" tIns="27432" bIns="27432"/>
+          <a:bodyPr wrap="square" lIns="64008" tIns="27432" rIns="64008" bIns="27432" rtlCol="0" anchor="ctr"/>
           <a:lstStyle/>
           <a:p>
             <a:pPr algn="ctr">
@@ -6729,7 +6731,7 @@
           </a:fontRef>
         </p:style>
         <p:txBody>
-          <a:bodyPr rtlCol="0" anchor="ctr" wrap="square" lIns="64008" rIns="64008" tIns="27432" bIns="27432"/>
+          <a:bodyPr wrap="square" lIns="64008" tIns="27432" rIns="64008" bIns="27432" rtlCol="0" anchor="ctr"/>
           <a:lstStyle/>
           <a:p>
             <a:pPr algn="ctr">
@@ -6792,7 +6794,7 @@
           </a:fontRef>
         </p:style>
         <p:txBody>
-          <a:bodyPr rtlCol="0" anchor="ctr" wrap="square" lIns="64008" rIns="64008" tIns="27432" bIns="27432"/>
+          <a:bodyPr wrap="square" lIns="64008" tIns="27432" rIns="64008" bIns="27432" rtlCol="0" anchor="ctr"/>
           <a:lstStyle/>
           <a:p>
             <a:pPr algn="ctr">
@@ -6873,7 +6875,7 @@
           </a:fontRef>
         </p:style>
         <p:txBody>
-          <a:bodyPr rtlCol="0" anchor="ctr" wrap="square" lIns="64008" rIns="64008" tIns="27432" bIns="27432"/>
+          <a:bodyPr wrap="square" lIns="64008" tIns="27432" rIns="64008" bIns="27432" rtlCol="0" anchor="ctr"/>
           <a:lstStyle/>
           <a:p>
             <a:pPr algn="ctr">
@@ -6936,7 +6938,7 @@
           </a:fontRef>
         </p:style>
         <p:txBody>
-          <a:bodyPr rtlCol="0" anchor="ctr" wrap="square" lIns="64008" rIns="64008" tIns="27432" bIns="27432"/>
+          <a:bodyPr wrap="square" lIns="64008" tIns="27432" rIns="64008" bIns="27432" rtlCol="0" anchor="ctr"/>
           <a:lstStyle/>
           <a:p>
             <a:pPr algn="ctr">
@@ -7019,7 +7021,7 @@
           </a:fontRef>
         </p:style>
         <p:txBody>
-          <a:bodyPr rtlCol="0" anchor="ctr" wrap="square" lIns="64008" rIns="64008" tIns="27432" bIns="27432"/>
+          <a:bodyPr wrap="square" lIns="64008" tIns="27432" rIns="64008" bIns="27432" rtlCol="0" anchor="ctr"/>
           <a:lstStyle/>
           <a:p>
             <a:pPr algn="ctr">
@@ -7100,7 +7102,7 @@
           </a:fontRef>
         </p:style>
         <p:txBody>
-          <a:bodyPr rtlCol="0" anchor="ctr" wrap="square" lIns="64008" rIns="64008" tIns="27432" bIns="27432"/>
+          <a:bodyPr wrap="square" lIns="64008" tIns="27432" rIns="64008" bIns="27432" rtlCol="0" anchor="ctr"/>
           <a:lstStyle/>
           <a:p>
             <a:pPr algn="ctr">
@@ -7163,7 +7165,7 @@
           </a:fontRef>
         </p:style>
         <p:txBody>
-          <a:bodyPr rtlCol="0" anchor="ctr" wrap="square" lIns="64008" rIns="64008" tIns="27432" bIns="27432"/>
+          <a:bodyPr wrap="square" lIns="64008" tIns="27432" rIns="64008" bIns="27432" rtlCol="0" anchor="ctr"/>
           <a:lstStyle/>
           <a:p>
             <a:pPr algn="ctr">
@@ -7174,16 +7176,7 @@
                 <a:spcPts val="0"/>
               </a:spcAft>
             </a:pPr>
-            <a:r>
-              <a:rPr sz="100" b="0">
-                <a:solidFill>
-                  <a:srgbClr val="8A5A1E"/>
-                </a:solidFill>
-                <a:latin typeface="Noto Sans CJK KR"/>
-                <a:ea typeface="Noto Sans CJK KR"/>
-              </a:rPr>
-              <a:t/>
-            </a:r>
+            <a:endParaRPr/>
           </a:p>
         </p:txBody>
       </p:sp>
@@ -7258,7 +7251,7 @@
           <a:noFill/>
         </p:spPr>
         <p:txBody>
-          <a:bodyPr wrap="square" anchor="ctr" lIns="0" rIns="0" tIns="0" bIns="0">
+          <a:bodyPr wrap="square" lIns="0" tIns="0" rIns="0" bIns="0" anchor="ctr">
             <a:spAutoFit/>
           </a:bodyPr>
           <a:lstStyle/>
@@ -7375,7 +7368,7 @@
           <a:noFill/>
         </p:spPr>
         <p:txBody>
-          <a:bodyPr wrap="square" anchor="ctr" lIns="0" rIns="0" tIns="0" bIns="0">
+          <a:bodyPr wrap="square" lIns="0" tIns="0" rIns="0" bIns="0" anchor="ctr">
             <a:spAutoFit/>
           </a:bodyPr>
           <a:lstStyle/>
@@ -7492,7 +7485,7 @@
           <a:noFill/>
         </p:spPr>
         <p:txBody>
-          <a:bodyPr wrap="square" anchor="ctr" lIns="0" rIns="0" tIns="0" bIns="0">
+          <a:bodyPr wrap="square" lIns="0" tIns="0" rIns="0" bIns="0" anchor="ctr">
             <a:spAutoFit/>
           </a:bodyPr>
           <a:lstStyle/>
@@ -7609,7 +7602,7 @@
           <a:noFill/>
         </p:spPr>
         <p:txBody>
-          <a:bodyPr wrap="square" anchor="ctr" lIns="0" rIns="0" tIns="0" bIns="0">
+          <a:bodyPr wrap="square" lIns="0" tIns="0" rIns="0" bIns="0" anchor="ctr">
             <a:spAutoFit/>
           </a:bodyPr>
           <a:lstStyle/>
@@ -7692,7 +7685,7 @@
           </a:fontRef>
         </p:style>
         <p:txBody>
-          <a:bodyPr rtlCol="0" anchor="ctr" wrap="square" lIns="64008" rIns="64008" tIns="27432" bIns="27432"/>
+          <a:bodyPr wrap="square" lIns="64008" tIns="27432" rIns="64008" bIns="27432" rtlCol="0" anchor="ctr"/>
           <a:lstStyle/>
           <a:p>
             <a:pPr algn="ctr">
@@ -7788,7 +7781,7 @@
           </a:fontRef>
         </p:style>
         <p:txBody>
-          <a:bodyPr rtlCol="0" anchor="ctr" wrap="square" lIns="64008" rIns="64008" tIns="27432" bIns="27432"/>
+          <a:bodyPr wrap="square" lIns="64008" tIns="27432" rIns="64008" bIns="27432" rtlCol="0" anchor="ctr"/>
           <a:lstStyle/>
           <a:p>
             <a:pPr algn="ctr">
@@ -7851,7 +7844,7 @@
           </a:fontRef>
         </p:style>
         <p:txBody>
-          <a:bodyPr rtlCol="0" anchor="ctr" wrap="square" lIns="64008" rIns="64008" tIns="27432" bIns="27432"/>
+          <a:bodyPr wrap="square" lIns="64008" tIns="27432" rIns="64008" bIns="27432" rtlCol="0" anchor="ctr"/>
           <a:lstStyle/>
           <a:p>
             <a:pPr algn="ctr">
@@ -7862,16 +7855,7 @@
                 <a:spcPts val="0"/>
               </a:spcAft>
             </a:pPr>
-            <a:r>
-              <a:rPr sz="100" b="0">
-                <a:solidFill>
-                  <a:srgbClr val="4B555E"/>
-                </a:solidFill>
-                <a:latin typeface="Noto Sans CJK KR"/>
-                <a:ea typeface="Noto Sans CJK KR"/>
-              </a:rPr>
-              <a:t/>
-            </a:r>
+            <a:endParaRPr/>
           </a:p>
         </p:txBody>
       </p:sp>
@@ -7995,7 +7979,7 @@
           </a:fontRef>
         </p:style>
         <p:txBody>
-          <a:bodyPr rtlCol="0" anchor="ctr" wrap="square" lIns="64008" rIns="64008" tIns="27432" bIns="27432"/>
+          <a:bodyPr wrap="square" lIns="64008" tIns="27432" rIns="64008" bIns="27432" rtlCol="0" anchor="ctr"/>
           <a:lstStyle/>
           <a:p>
             <a:pPr algn="ctr">
@@ -8058,7 +8042,7 @@
           </a:fontRef>
         </p:style>
         <p:txBody>
-          <a:bodyPr rtlCol="0" anchor="ctr" wrap="square" lIns="64008" rIns="64008" tIns="27432" bIns="27432"/>
+          <a:bodyPr wrap="square" lIns="64008" tIns="27432" rIns="64008" bIns="27432" rtlCol="0" anchor="ctr"/>
           <a:lstStyle/>
           <a:p>
             <a:pPr algn="ctr">
@@ -8069,16 +8053,7 @@
                 <a:spcPts val="0"/>
               </a:spcAft>
             </a:pPr>
-            <a:r>
-              <a:rPr sz="100" b="0">
-                <a:solidFill>
-                  <a:srgbClr val="4B555E"/>
-                </a:solidFill>
-                <a:latin typeface="Noto Sans CJK KR"/>
-                <a:ea typeface="Noto Sans CJK KR"/>
-              </a:rPr>
-              <a:t/>
-            </a:r>
+            <a:endParaRPr/>
           </a:p>
         </p:txBody>
       </p:sp>
@@ -8202,7 +8177,7 @@
           </a:fontRef>
         </p:style>
         <p:txBody>
-          <a:bodyPr rtlCol="0" anchor="ctr" wrap="square" lIns="64008" rIns="64008" tIns="27432" bIns="27432"/>
+          <a:bodyPr wrap="square" lIns="64008" tIns="27432" rIns="64008" bIns="27432" rtlCol="0" anchor="ctr"/>
           <a:lstStyle/>
           <a:p>
             <a:pPr algn="ctr">
@@ -8265,7 +8240,7 @@
           </a:fontRef>
         </p:style>
         <p:txBody>
-          <a:bodyPr rtlCol="0" anchor="ctr" wrap="square" lIns="64008" rIns="64008" tIns="27432" bIns="27432"/>
+          <a:bodyPr wrap="square" lIns="64008" tIns="27432" rIns="64008" bIns="27432" rtlCol="0" anchor="ctr"/>
           <a:lstStyle/>
           <a:p>
             <a:pPr algn="ctr">
@@ -8276,16 +8251,7 @@
                 <a:spcPts val="0"/>
               </a:spcAft>
             </a:pPr>
-            <a:r>
-              <a:rPr sz="100" b="0">
-                <a:solidFill>
-                  <a:srgbClr val="4B555E"/>
-                </a:solidFill>
-                <a:latin typeface="Noto Sans CJK KR"/>
-                <a:ea typeface="Noto Sans CJK KR"/>
-              </a:rPr>
-              <a:t/>
-            </a:r>
+            <a:endParaRPr/>
           </a:p>
         </p:txBody>
       </p:sp>

--- a/마켓센싱리포트_AI혁신_2p.pptx
+++ b/마켓센싱리포트_AI혁신_2p.pptx
@@ -303,7 +303,7 @@
           <a:p>
             <a:fld id="{5BCAD085-E8A6-8845-BD4E-CB4CCA059FC4}" type="datetimeFigureOut">
               <a:rPr lang="en-US" smtClean="0"/>
-              <a:t>7/22/26</a:t>
+              <a:t>7/23/26</a:t>
             </a:fld>
             <a:endParaRPr lang="en-US"/>
           </a:p>
@@ -471,7 +471,7 @@
           <a:p>
             <a:fld id="{5BCAD085-E8A6-8845-BD4E-CB4CCA059FC4}" type="datetimeFigureOut">
               <a:rPr lang="en-US" smtClean="0"/>
-              <a:t>7/22/26</a:t>
+              <a:t>7/23/26</a:t>
             </a:fld>
             <a:endParaRPr lang="en-US"/>
           </a:p>
@@ -649,7 +649,7 @@
           <a:p>
             <a:fld id="{5BCAD085-E8A6-8845-BD4E-CB4CCA059FC4}" type="datetimeFigureOut">
               <a:rPr lang="en-US" smtClean="0"/>
-              <a:t>7/22/26</a:t>
+              <a:t>7/23/26</a:t>
             </a:fld>
             <a:endParaRPr lang="en-US"/>
           </a:p>
@@ -817,7 +817,7 @@
           <a:p>
             <a:fld id="{5BCAD085-E8A6-8845-BD4E-CB4CCA059FC4}" type="datetimeFigureOut">
               <a:rPr lang="en-US" smtClean="0"/>
-              <a:t>7/22/26</a:t>
+              <a:t>7/23/26</a:t>
             </a:fld>
             <a:endParaRPr lang="en-US"/>
           </a:p>
@@ -1062,7 +1062,7 @@
           <a:p>
             <a:fld id="{5BCAD085-E8A6-8845-BD4E-CB4CCA059FC4}" type="datetimeFigureOut">
               <a:rPr lang="en-US" smtClean="0"/>
-              <a:t>7/22/26</a:t>
+              <a:t>7/23/26</a:t>
             </a:fld>
             <a:endParaRPr lang="en-US"/>
           </a:p>
@@ -1347,7 +1347,7 @@
           <a:p>
             <a:fld id="{5BCAD085-E8A6-8845-BD4E-CB4CCA059FC4}" type="datetimeFigureOut">
               <a:rPr lang="en-US" smtClean="0"/>
-              <a:t>7/22/26</a:t>
+              <a:t>7/23/26</a:t>
             </a:fld>
             <a:endParaRPr lang="en-US"/>
           </a:p>
@@ -1766,7 +1766,7 @@
           <a:p>
             <a:fld id="{5BCAD085-E8A6-8845-BD4E-CB4CCA059FC4}" type="datetimeFigureOut">
               <a:rPr lang="en-US" smtClean="0"/>
-              <a:t>7/22/26</a:t>
+              <a:t>7/23/26</a:t>
             </a:fld>
             <a:endParaRPr lang="en-US"/>
           </a:p>
@@ -1883,7 +1883,7 @@
           <a:p>
             <a:fld id="{5BCAD085-E8A6-8845-BD4E-CB4CCA059FC4}" type="datetimeFigureOut">
               <a:rPr lang="en-US" smtClean="0"/>
-              <a:t>7/22/26</a:t>
+              <a:t>7/23/26</a:t>
             </a:fld>
             <a:endParaRPr lang="en-US"/>
           </a:p>
@@ -1978,7 +1978,7 @@
           <a:p>
             <a:fld id="{5BCAD085-E8A6-8845-BD4E-CB4CCA059FC4}" type="datetimeFigureOut">
               <a:rPr lang="en-US" smtClean="0"/>
-              <a:t>7/22/26</a:t>
+              <a:t>7/23/26</a:t>
             </a:fld>
             <a:endParaRPr lang="en-US"/>
           </a:p>
@@ -2253,7 +2253,7 @@
           <a:p>
             <a:fld id="{5BCAD085-E8A6-8845-BD4E-CB4CCA059FC4}" type="datetimeFigureOut">
               <a:rPr lang="en-US" smtClean="0"/>
-              <a:t>7/22/26</a:t>
+              <a:t>7/23/26</a:t>
             </a:fld>
             <a:endParaRPr lang="en-US"/>
           </a:p>
@@ -2505,7 +2505,7 @@
           <a:p>
             <a:fld id="{5BCAD085-E8A6-8845-BD4E-CB4CCA059FC4}" type="datetimeFigureOut">
               <a:rPr lang="en-US" smtClean="0"/>
-              <a:t>7/22/26</a:t>
+              <a:t>7/23/26</a:t>
             </a:fld>
             <a:endParaRPr lang="en-US"/>
           </a:p>
@@ -2716,7 +2716,7 @@
           <a:p>
             <a:fld id="{5BCAD085-E8A6-8845-BD4E-CB4CCA059FC4}" type="datetimeFigureOut">
               <a:rPr lang="en-US" smtClean="0"/>
-              <a:t>7/22/26</a:t>
+              <a:t>7/23/26</a:t>
             </a:fld>
             <a:endParaRPr lang="en-US"/>
           </a:p>
@@ -3167,14 +3167,64 @@
               </a:spcAft>
             </a:pPr>
             <a:r>
-              <a:rPr sz="2100" b="1">
+              <a:rPr sz="2100" b="1" dirty="0" err="1">
                 <a:solidFill>
                   <a:srgbClr val="22282E"/>
                 </a:solidFill>
                 <a:latin typeface="Noto Sans CJK KR"/>
                 <a:ea typeface="Noto Sans CJK KR"/>
               </a:rPr>
-              <a:t>마켓센싱 리포트 AI 전환 : As-Is → To-Be</a:t>
+              <a:t>마켓센싱</a:t>
+            </a:r>
+            <a:r>
+              <a:rPr sz="2100" b="1" dirty="0">
+                <a:solidFill>
+                  <a:srgbClr val="22282E"/>
+                </a:solidFill>
+                <a:latin typeface="Noto Sans CJK KR"/>
+                <a:ea typeface="Noto Sans CJK KR"/>
+              </a:rPr>
+              <a:t> </a:t>
+            </a:r>
+            <a:r>
+              <a:rPr sz="2100" b="1" dirty="0" err="1">
+                <a:solidFill>
+                  <a:srgbClr val="22282E"/>
+                </a:solidFill>
+                <a:latin typeface="Noto Sans CJK KR"/>
+                <a:ea typeface="Noto Sans CJK KR"/>
+              </a:rPr>
+              <a:t>리포트</a:t>
+            </a:r>
+            <a:r>
+              <a:rPr sz="2100" b="1" dirty="0">
+                <a:solidFill>
+                  <a:srgbClr val="22282E"/>
+                </a:solidFill>
+                <a:latin typeface="Noto Sans CJK KR"/>
+                <a:ea typeface="Noto Sans CJK KR"/>
+              </a:rPr>
+              <a:t> AI </a:t>
+            </a:r>
+            <a:r>
+              <a:rPr sz="2100" b="1" dirty="0" err="1">
+                <a:solidFill>
+                  <a:srgbClr val="22282E"/>
+                </a:solidFill>
+                <a:latin typeface="Noto Sans CJK KR"/>
+                <a:ea typeface="Noto Sans CJK KR"/>
+              </a:rPr>
+              <a:t>전환</a:t>
+            </a:r>
+            <a:r>
+              <a:rPr sz="2100" b="1" dirty="0">
+                <a:solidFill>
+                  <a:srgbClr val="22282E"/>
+                </a:solidFill>
+                <a:latin typeface="Noto Sans CJK KR"/>
+                <a:ea typeface="Noto Sans CJK KR"/>
+              </a:rPr>
+              <a:t> : As-Is → To-Be</a:t>
             </a:r>
           </a:p>
         </p:txBody>
@@ -3210,78 +3260,222 @@
               </a:spcAft>
             </a:pPr>
             <a:r>
-              <a:rPr sz="1150" b="0">
+              <a:rPr sz="1150" b="0" dirty="0" err="1">
                 <a:solidFill>
                   <a:srgbClr val="8A939B"/>
                 </a:solidFill>
                 <a:latin typeface="Noto Sans CJK KR"/>
                 <a:ea typeface="Noto Sans CJK KR"/>
               </a:rPr>
-              <a:t>정형·반복 업무는 '대체', 암묵지 기반 판단은 '증폭' — 다관점 AI 에이전트 · 5계층 구조로 재설계</a:t>
-            </a:r>
-          </a:p>
-        </p:txBody>
-      </p:sp>
-      <p:sp>
-        <p:nvSpPr>
-          <p:cNvPr id="5" name="Rounded Rectangle 4"/>
-          <p:cNvSpPr/>
-          <p:nvPr/>
-        </p:nvSpPr>
-        <p:spPr>
-          <a:xfrm>
-            <a:off x="502920" y="932688"/>
-            <a:ext cx="11183112" cy="384048"/>
-          </a:xfrm>
-          <a:prstGeom prst="roundRect">
-            <a:avLst/>
-          </a:prstGeom>
-          <a:solidFill>
-            <a:srgbClr val="E7F0EE"/>
-          </a:solidFill>
-          <a:ln w="15875">
-            <a:solidFill>
-              <a:srgbClr val="2E6E69"/>
-            </a:solidFill>
-          </a:ln>
-          <a:effectLst/>
-        </p:spPr>
-        <p:style>
-          <a:lnRef idx="1">
-            <a:schemeClr val="accent1"/>
-          </a:lnRef>
-          <a:fillRef idx="3">
-            <a:schemeClr val="accent1"/>
-          </a:fillRef>
-          <a:effectRef idx="2">
-            <a:schemeClr val="accent1"/>
-          </a:effectRef>
-          <a:fontRef idx="minor">
-            <a:schemeClr val="lt1"/>
-          </a:fontRef>
-        </p:style>
-        <p:txBody>
-          <a:bodyPr wrap="square" lIns="64008" tIns="27432" rIns="64008" bIns="27432" rtlCol="0" anchor="ctr"/>
-          <a:lstStyle/>
-          <a:p>
-            <a:pPr algn="ctr">
-              <a:lnSpc>
-                <a:spcPct val="100000"/>
-              </a:lnSpc>
-              <a:spcAft>
-                <a:spcPts val="0"/>
-              </a:spcAft>
-            </a:pPr>
-            <a:r>
-              <a:rPr sz="1050" b="1">
-                <a:solidFill>
-                  <a:srgbClr val="2E6E69"/>
-                </a:solidFill>
-                <a:latin typeface="Noto Sans CJK KR"/>
-                <a:ea typeface="Noto Sans CJK KR"/>
-              </a:rPr>
-              <a:t>★ 리포트의 진짜 가치는 뉴스 나열이 아니라, 오래 근무한 내부 직원의 '암묵지' 기반 해석에서 나온다 — 이 암묵지의 속인화(屬人化)가 최대 리스크</a:t>
-            </a:r>
+              <a:t>정형·반복</a:t>
+            </a:r>
+            <a:r>
+              <a:rPr sz="1150" b="0" dirty="0">
+                <a:solidFill>
+                  <a:srgbClr val="8A939B"/>
+                </a:solidFill>
+                <a:latin typeface="Noto Sans CJK KR"/>
+                <a:ea typeface="Noto Sans CJK KR"/>
+              </a:rPr>
+              <a:t> </a:t>
+            </a:r>
+            <a:r>
+              <a:rPr sz="1150" b="0" dirty="0" err="1">
+                <a:solidFill>
+                  <a:srgbClr val="8A939B"/>
+                </a:solidFill>
+                <a:latin typeface="Noto Sans CJK KR"/>
+                <a:ea typeface="Noto Sans CJK KR"/>
+              </a:rPr>
+              <a:t>업무는</a:t>
+            </a:r>
+            <a:r>
+              <a:rPr sz="1150" b="0" dirty="0">
+                <a:solidFill>
+                  <a:srgbClr val="8A939B"/>
+                </a:solidFill>
+                <a:latin typeface="Noto Sans CJK KR"/>
+                <a:ea typeface="Noto Sans CJK KR"/>
+              </a:rPr>
+              <a:t> '</a:t>
+            </a:r>
+            <a:r>
+              <a:rPr sz="1150" b="0" dirty="0" err="1">
+                <a:solidFill>
+                  <a:srgbClr val="8A939B"/>
+                </a:solidFill>
+                <a:latin typeface="Noto Sans CJK KR"/>
+                <a:ea typeface="Noto Sans CJK KR"/>
+              </a:rPr>
+              <a:t>대체</a:t>
+            </a:r>
+            <a:r>
+              <a:rPr sz="1150" b="0" dirty="0">
+                <a:solidFill>
+                  <a:srgbClr val="8A939B"/>
+                </a:solidFill>
+                <a:latin typeface="Noto Sans CJK KR"/>
+                <a:ea typeface="Noto Sans CJK KR"/>
+              </a:rPr>
+              <a:t>', </a:t>
+            </a:r>
+            <a:r>
+              <a:rPr sz="1150" b="0" dirty="0" err="1">
+                <a:solidFill>
+                  <a:srgbClr val="8A939B"/>
+                </a:solidFill>
+                <a:latin typeface="Noto Sans CJK KR"/>
+                <a:ea typeface="Noto Sans CJK KR"/>
+              </a:rPr>
+              <a:t>암묵지</a:t>
+            </a:r>
+            <a:r>
+              <a:rPr sz="1150" b="0" dirty="0">
+                <a:solidFill>
+                  <a:srgbClr val="8A939B"/>
+                </a:solidFill>
+                <a:latin typeface="Noto Sans CJK KR"/>
+                <a:ea typeface="Noto Sans CJK KR"/>
+              </a:rPr>
+              <a:t> </a:t>
+            </a:r>
+            <a:r>
+              <a:rPr sz="1150" b="0" dirty="0" err="1">
+                <a:solidFill>
+                  <a:srgbClr val="8A939B"/>
+                </a:solidFill>
+                <a:latin typeface="Noto Sans CJK KR"/>
+                <a:ea typeface="Noto Sans CJK KR"/>
+              </a:rPr>
+              <a:t>기반</a:t>
+            </a:r>
+            <a:r>
+              <a:rPr sz="1150" b="0" dirty="0">
+                <a:solidFill>
+                  <a:srgbClr val="8A939B"/>
+                </a:solidFill>
+                <a:latin typeface="Noto Sans CJK KR"/>
+                <a:ea typeface="Noto Sans CJK KR"/>
+              </a:rPr>
+              <a:t> </a:t>
+            </a:r>
+            <a:r>
+              <a:rPr sz="1150" b="0" dirty="0" err="1">
+                <a:solidFill>
+                  <a:srgbClr val="8A939B"/>
+                </a:solidFill>
+                <a:latin typeface="Noto Sans CJK KR"/>
+                <a:ea typeface="Noto Sans CJK KR"/>
+              </a:rPr>
+              <a:t>판단은</a:t>
+            </a:r>
+            <a:r>
+              <a:rPr sz="1150" b="0" dirty="0">
+                <a:solidFill>
+                  <a:srgbClr val="8A939B"/>
+                </a:solidFill>
+                <a:latin typeface="Noto Sans CJK KR"/>
+                <a:ea typeface="Noto Sans CJK KR"/>
+              </a:rPr>
+              <a:t> '</a:t>
+            </a:r>
+            <a:r>
+              <a:rPr sz="1150" b="0" dirty="0" err="1">
+                <a:solidFill>
+                  <a:srgbClr val="8A939B"/>
+                </a:solidFill>
+                <a:latin typeface="Noto Sans CJK KR"/>
+                <a:ea typeface="Noto Sans CJK KR"/>
+              </a:rPr>
+              <a:t>증폭</a:t>
+            </a:r>
+            <a:r>
+              <a:rPr sz="1150" b="0" dirty="0">
+                <a:solidFill>
+                  <a:srgbClr val="8A939B"/>
+                </a:solidFill>
+                <a:latin typeface="Noto Sans CJK KR"/>
+                <a:ea typeface="Noto Sans CJK KR"/>
+              </a:rPr>
+              <a:t>' — </a:t>
+            </a:r>
+            <a:r>
+              <a:rPr sz="1150" b="0" dirty="0" err="1">
+                <a:solidFill>
+                  <a:srgbClr val="8A939B"/>
+                </a:solidFill>
+                <a:latin typeface="Noto Sans CJK KR"/>
+                <a:ea typeface="Noto Sans CJK KR"/>
+              </a:rPr>
+              <a:t>다관점</a:t>
+            </a:r>
+            <a:r>
+              <a:rPr sz="1150" b="0" dirty="0">
+                <a:solidFill>
+                  <a:srgbClr val="8A939B"/>
+                </a:solidFill>
+                <a:latin typeface="Noto Sans CJK KR"/>
+                <a:ea typeface="Noto Sans CJK KR"/>
+              </a:rPr>
+              <a:t> AI </a:t>
+            </a:r>
+            <a:r>
+              <a:rPr sz="1150" b="0" dirty="0" err="1">
+                <a:solidFill>
+                  <a:srgbClr val="8A939B"/>
+                </a:solidFill>
+                <a:latin typeface="Noto Sans CJK KR"/>
+                <a:ea typeface="Noto Sans CJK KR"/>
+              </a:rPr>
+              <a:t>에이전트</a:t>
+            </a:r>
+            <a:r>
+              <a:rPr sz="1150" b="0" dirty="0">
+                <a:solidFill>
+                  <a:srgbClr val="8A939B"/>
+                </a:solidFill>
+                <a:latin typeface="Noto Sans CJK KR"/>
+                <a:ea typeface="Noto Sans CJK KR"/>
+              </a:rPr>
+              <a:t> · 5계층 </a:t>
+            </a:r>
+            <a:r>
+              <a:rPr sz="1150" b="0" dirty="0" err="1">
+                <a:solidFill>
+                  <a:srgbClr val="8A939B"/>
+                </a:solidFill>
+                <a:latin typeface="Noto Sans CJK KR"/>
+                <a:ea typeface="Noto Sans CJK KR"/>
+              </a:rPr>
+              <a:t>구조로</a:t>
+            </a:r>
+            <a:r>
+              <a:rPr sz="1150" b="0" dirty="0">
+                <a:solidFill>
+                  <a:srgbClr val="8A939B"/>
+                </a:solidFill>
+                <a:latin typeface="Noto Sans CJK KR"/>
+                <a:ea typeface="Noto Sans CJK KR"/>
+              </a:rPr>
+              <a:t> </a:t>
+            </a:r>
+            <a:r>
+              <a:rPr sz="1150" b="0" dirty="0" err="1">
+                <a:solidFill>
+                  <a:srgbClr val="8A939B"/>
+                </a:solidFill>
+                <a:latin typeface="Noto Sans CJK KR"/>
+                <a:ea typeface="Noto Sans CJK KR"/>
+              </a:rPr>
+              <a:t>재설계</a:t>
+            </a:r>
+            <a:endParaRPr sz="1150" b="0" dirty="0">
+              <a:solidFill>
+                <a:srgbClr val="8A939B"/>
+              </a:solidFill>
+              <a:latin typeface="Noto Sans CJK KR"/>
+              <a:ea typeface="Noto Sans CJK KR"/>
+            </a:endParaRPr>
           </a:p>
         </p:txBody>
       </p:sp>
@@ -4085,15 +4279,52 @@
               </a:spcAft>
             </a:pPr>
             <a:r>
-              <a:rPr sz="1100" b="1">
+              <a:rPr sz="1100" b="1" dirty="0">
                 <a:solidFill>
                   <a:srgbClr val="22282E"/>
                 </a:solidFill>
                 <a:latin typeface="Noto Sans CJK KR"/>
                 <a:ea typeface="Noto Sans CJK KR"/>
               </a:rPr>
-              <a:t>⑥ 리포트 작성</a:t>
-            </a:r>
+              <a:t>⑥ </a:t>
+            </a:r>
+            <a:r>
+              <a:rPr sz="1100" b="1" dirty="0" err="1">
+                <a:solidFill>
+                  <a:srgbClr val="22282E"/>
+                </a:solidFill>
+                <a:latin typeface="Noto Sans CJK KR"/>
+                <a:ea typeface="Noto Sans CJK KR"/>
+              </a:rPr>
+              <a:t>리포트</a:t>
+            </a:r>
+            <a:r>
+              <a:rPr sz="1100" b="1" dirty="0">
+                <a:solidFill>
+                  <a:srgbClr val="22282E"/>
+                </a:solidFill>
+                <a:latin typeface="Noto Sans CJK KR"/>
+                <a:ea typeface="Noto Sans CJK KR"/>
+              </a:rPr>
+              <a:t> </a:t>
+            </a:r>
+            <a:r>
+              <a:rPr sz="1100" b="1" dirty="0" err="1">
+                <a:solidFill>
+                  <a:srgbClr val="22282E"/>
+                </a:solidFill>
+                <a:latin typeface="Noto Sans CJK KR"/>
+                <a:ea typeface="Noto Sans CJK KR"/>
+              </a:rPr>
+              <a:t>작성</a:t>
+            </a:r>
+            <a:endParaRPr sz="1100" b="1" dirty="0">
+              <a:solidFill>
+                <a:srgbClr val="22282E"/>
+              </a:solidFill>
+              <a:latin typeface="Noto Sans CJK KR"/>
+              <a:ea typeface="Noto Sans CJK KR"/>
+            </a:endParaRPr>
           </a:p>
           <a:p>
             <a:pPr algn="ctr">
@@ -4105,16 +4336,22 @@
               </a:spcAft>
             </a:pPr>
             <a:r>
-              <a:rPr sz="850" b="0">
+              <a:rPr sz="850" b="0" dirty="0" err="1">
                 <a:solidFill>
                   <a:srgbClr val="4B555E"/>
                 </a:solidFill>
                 <a:latin typeface="Noto Sans CJK KR"/>
                 <a:ea typeface="Noto Sans CJK KR"/>
               </a:rPr>
-              <a:t>취합·편집·
-발송</a:t>
-            </a:r>
+              <a:t>취합·편집·발송</a:t>
+            </a:r>
+            <a:endParaRPr sz="850" b="0" dirty="0">
+              <a:solidFill>
+                <a:srgbClr val="4B555E"/>
+              </a:solidFill>
+              <a:latin typeface="Noto Sans CJK KR"/>
+              <a:ea typeface="Noto Sans CJK KR"/>
+            </a:endParaRPr>
           </a:p>
         </p:txBody>
       </p:sp>
@@ -4252,15 +4489,72 @@
               </a:spcAft>
             </a:pPr>
             <a:r>
-              <a:rPr sz="950" b="1">
+              <a:rPr sz="950" b="1" dirty="0">
                 <a:solidFill>
                   <a:srgbClr val="B4532A"/>
                 </a:solidFill>
                 <a:latin typeface="Noto Sans CJK KR"/>
                 <a:ea typeface="Noto Sans CJK KR"/>
               </a:rPr>
-              <a:t>★ 암묵지·품질 병목 · 속인화</a:t>
-            </a:r>
+              <a:t>★ </a:t>
+            </a:r>
+            <a:r>
+              <a:rPr sz="950" b="1" dirty="0" err="1">
+                <a:solidFill>
+                  <a:srgbClr val="B4532A"/>
+                </a:solidFill>
+                <a:latin typeface="Noto Sans CJK KR"/>
+                <a:ea typeface="Noto Sans CJK KR"/>
+              </a:rPr>
+              <a:t>암묵지·품질</a:t>
+            </a:r>
+            <a:r>
+              <a:rPr sz="950" b="1" dirty="0">
+                <a:solidFill>
+                  <a:srgbClr val="B4532A"/>
+                </a:solidFill>
+                <a:latin typeface="Noto Sans CJK KR"/>
+                <a:ea typeface="Noto Sans CJK KR"/>
+              </a:rPr>
+              <a:t> </a:t>
+            </a:r>
+            <a:r>
+              <a:rPr sz="950" b="1" dirty="0" err="1">
+                <a:solidFill>
+                  <a:srgbClr val="B4532A"/>
+                </a:solidFill>
+                <a:latin typeface="Noto Sans CJK KR"/>
+                <a:ea typeface="Noto Sans CJK KR"/>
+              </a:rPr>
+              <a:t>병목</a:t>
+            </a:r>
+            <a:r>
+              <a:rPr sz="950" b="1" dirty="0">
+                <a:solidFill>
+                  <a:srgbClr val="B4532A"/>
+                </a:solidFill>
+                <a:latin typeface="Noto Sans CJK KR"/>
+                <a:ea typeface="Noto Sans CJK KR"/>
+              </a:rPr>
+              <a:t> · </a:t>
+            </a:r>
+            <a:r>
+              <a:rPr lang="ko-KR" altLang="en-US" sz="950" b="1" dirty="0">
+                <a:solidFill>
+                  <a:srgbClr val="B4532A"/>
+                </a:solidFill>
+                <a:latin typeface="Noto Sans CJK KR"/>
+                <a:ea typeface="Noto Sans CJK KR"/>
+              </a:rPr>
+              <a:t>특정인 의존</a:t>
+            </a:r>
+            <a:endParaRPr sz="950" b="1" dirty="0">
+              <a:solidFill>
+                <a:srgbClr val="B4532A"/>
+              </a:solidFill>
+              <a:latin typeface="Noto Sans CJK KR"/>
+              <a:ea typeface="Noto Sans CJK KR"/>
+            </a:endParaRPr>
           </a:p>
           <a:p>
             <a:pPr algn="ctr">
@@ -4272,15 +4566,212 @@
               </a:spcAft>
             </a:pPr>
             <a:r>
-              <a:rPr sz="850" b="0">
+              <a:rPr sz="850" b="0" dirty="0">
                 <a:solidFill>
                   <a:srgbClr val="7A381C"/>
                 </a:solidFill>
                 <a:latin typeface="Noto Sans CJK KR"/>
                 <a:ea typeface="Noto Sans CJK KR"/>
               </a:rPr>
-              <a:t>② 주제 선정 = '선택 우선순위'(왜 뽑나 = 인사이트) · ⑤ 인사이트 도출 → 편차</a:t>
-            </a:r>
+              <a:t>② </a:t>
+            </a:r>
+            <a:r>
+              <a:rPr sz="850" b="0" dirty="0" err="1">
+                <a:solidFill>
+                  <a:srgbClr val="7A381C"/>
+                </a:solidFill>
+                <a:latin typeface="Noto Sans CJK KR"/>
+                <a:ea typeface="Noto Sans CJK KR"/>
+              </a:rPr>
+              <a:t>주제</a:t>
+            </a:r>
+            <a:r>
+              <a:rPr sz="850" b="0" dirty="0">
+                <a:solidFill>
+                  <a:srgbClr val="7A381C"/>
+                </a:solidFill>
+                <a:latin typeface="Noto Sans CJK KR"/>
+                <a:ea typeface="Noto Sans CJK KR"/>
+              </a:rPr>
+              <a:t> </a:t>
+            </a:r>
+            <a:r>
+              <a:rPr sz="850" b="0" dirty="0" err="1">
+                <a:solidFill>
+                  <a:srgbClr val="7A381C"/>
+                </a:solidFill>
+                <a:latin typeface="Noto Sans CJK KR"/>
+                <a:ea typeface="Noto Sans CJK KR"/>
+              </a:rPr>
+              <a:t>선정</a:t>
+            </a:r>
+            <a:r>
+              <a:rPr sz="850" b="0" dirty="0">
+                <a:solidFill>
+                  <a:srgbClr val="7A381C"/>
+                </a:solidFill>
+                <a:latin typeface="Noto Sans CJK KR"/>
+                <a:ea typeface="Noto Sans CJK KR"/>
+              </a:rPr>
+              <a:t> = '</a:t>
+            </a:r>
+            <a:r>
+              <a:rPr sz="850" b="0" dirty="0" err="1">
+                <a:solidFill>
+                  <a:srgbClr val="7A381C"/>
+                </a:solidFill>
+                <a:latin typeface="Noto Sans CJK KR"/>
+                <a:ea typeface="Noto Sans CJK KR"/>
+              </a:rPr>
+              <a:t>선택</a:t>
+            </a:r>
+            <a:r>
+              <a:rPr sz="850" b="0" dirty="0">
+                <a:solidFill>
+                  <a:srgbClr val="7A381C"/>
+                </a:solidFill>
+                <a:latin typeface="Noto Sans CJK KR"/>
+                <a:ea typeface="Noto Sans CJK KR"/>
+              </a:rPr>
+              <a:t> </a:t>
+            </a:r>
+            <a:r>
+              <a:rPr sz="850" b="0" dirty="0" err="1">
+                <a:solidFill>
+                  <a:srgbClr val="7A381C"/>
+                </a:solidFill>
+                <a:latin typeface="Noto Sans CJK KR"/>
+                <a:ea typeface="Noto Sans CJK KR"/>
+              </a:rPr>
+              <a:t>우선순위</a:t>
+            </a:r>
+            <a:r>
+              <a:rPr sz="850" b="0" dirty="0">
+                <a:solidFill>
+                  <a:srgbClr val="7A381C"/>
+                </a:solidFill>
+                <a:latin typeface="Noto Sans CJK KR"/>
+                <a:ea typeface="Noto Sans CJK KR"/>
+              </a:rPr>
+              <a:t>'(</a:t>
+            </a:r>
+            <a:r>
+              <a:rPr sz="850" b="0" dirty="0" err="1">
+                <a:solidFill>
+                  <a:srgbClr val="7A381C"/>
+                </a:solidFill>
+                <a:latin typeface="Noto Sans CJK KR"/>
+                <a:ea typeface="Noto Sans CJK KR"/>
+              </a:rPr>
+              <a:t>왜</a:t>
+            </a:r>
+            <a:r>
+              <a:rPr sz="850" b="0" dirty="0">
+                <a:solidFill>
+                  <a:srgbClr val="7A381C"/>
+                </a:solidFill>
+                <a:latin typeface="Noto Sans CJK KR"/>
+                <a:ea typeface="Noto Sans CJK KR"/>
+              </a:rPr>
+              <a:t> </a:t>
+            </a:r>
+            <a:r>
+              <a:rPr sz="850" b="0" dirty="0" err="1">
+                <a:solidFill>
+                  <a:srgbClr val="7A381C"/>
+                </a:solidFill>
+                <a:latin typeface="Noto Sans CJK KR"/>
+                <a:ea typeface="Noto Sans CJK KR"/>
+              </a:rPr>
+              <a:t>뽑나</a:t>
+            </a:r>
+            <a:r>
+              <a:rPr sz="850" b="0" dirty="0">
+                <a:solidFill>
+                  <a:srgbClr val="7A381C"/>
+                </a:solidFill>
+                <a:latin typeface="Noto Sans CJK KR"/>
+                <a:ea typeface="Noto Sans CJK KR"/>
+              </a:rPr>
+              <a:t> = </a:t>
+            </a:r>
+            <a:r>
+              <a:rPr sz="850" b="0" dirty="0" err="1">
+                <a:solidFill>
+                  <a:srgbClr val="7A381C"/>
+                </a:solidFill>
+                <a:latin typeface="Noto Sans CJK KR"/>
+                <a:ea typeface="Noto Sans CJK KR"/>
+              </a:rPr>
+              <a:t>인사이트</a:t>
+            </a:r>
+            <a:r>
+              <a:rPr sz="850" b="0" dirty="0">
+                <a:solidFill>
+                  <a:srgbClr val="7A381C"/>
+                </a:solidFill>
+                <a:latin typeface="Noto Sans CJK KR"/>
+                <a:ea typeface="Noto Sans CJK KR"/>
+              </a:rPr>
+              <a:t>) · ⑤ </a:t>
+            </a:r>
+            <a:r>
+              <a:rPr sz="850" b="0" dirty="0" err="1">
+                <a:solidFill>
+                  <a:srgbClr val="7A381C"/>
+                </a:solidFill>
+                <a:latin typeface="Noto Sans CJK KR"/>
+                <a:ea typeface="Noto Sans CJK KR"/>
+              </a:rPr>
+              <a:t>인사이트</a:t>
+            </a:r>
+            <a:r>
+              <a:rPr sz="850" b="0" dirty="0">
+                <a:solidFill>
+                  <a:srgbClr val="7A381C"/>
+                </a:solidFill>
+                <a:latin typeface="Noto Sans CJK KR"/>
+                <a:ea typeface="Noto Sans CJK KR"/>
+              </a:rPr>
+              <a:t> </a:t>
+            </a:r>
+            <a:r>
+              <a:rPr sz="850" b="0" dirty="0" err="1">
+                <a:solidFill>
+                  <a:srgbClr val="7A381C"/>
+                </a:solidFill>
+                <a:latin typeface="Noto Sans CJK KR"/>
+                <a:ea typeface="Noto Sans CJK KR"/>
+              </a:rPr>
+              <a:t>도출</a:t>
+            </a:r>
+            <a:r>
+              <a:rPr sz="850" b="0" dirty="0">
+                <a:solidFill>
+                  <a:srgbClr val="7A381C"/>
+                </a:solidFill>
+                <a:latin typeface="Noto Sans CJK KR"/>
+                <a:ea typeface="Noto Sans CJK KR"/>
+              </a:rPr>
+              <a:t> → </a:t>
+            </a:r>
+            <a:r>
+              <a:rPr sz="850" b="0" dirty="0" err="1">
+                <a:solidFill>
+                  <a:srgbClr val="7A381C"/>
+                </a:solidFill>
+                <a:latin typeface="Noto Sans CJK KR"/>
+                <a:ea typeface="Noto Sans CJK KR"/>
+              </a:rPr>
+              <a:t>편차</a:t>
+            </a:r>
+            <a:endParaRPr sz="850" b="0" dirty="0">
+              <a:solidFill>
+                <a:srgbClr val="7A381C"/>
+              </a:solidFill>
+              <a:latin typeface="Noto Sans CJK KR"/>
+              <a:ea typeface="Noto Sans CJK KR"/>
+            </a:endParaRPr>
           </a:p>
         </p:txBody>
       </p:sp>
@@ -4378,15 +4869,52 @@
               </a:spcAft>
             </a:pPr>
             <a:r>
-              <a:rPr sz="919" b="1">
+              <a:rPr sz="919" b="1" dirty="0">
                 <a:solidFill>
                   <a:srgbClr val="22282E"/>
                 </a:solidFill>
                 <a:latin typeface="Noto Sans CJK KR"/>
                 <a:ea typeface="Noto Sans CJK KR"/>
               </a:rPr>
-              <a:t>❶ 커뮤니케이션팀</a:t>
-            </a:r>
+              <a:t>❶ </a:t>
+            </a:r>
+            <a:r>
+              <a:rPr lang="ko-KR" altLang="en-US" sz="919" b="1" dirty="0">
+                <a:solidFill>
+                  <a:srgbClr val="22282E"/>
+                </a:solidFill>
+                <a:latin typeface="Noto Sans CJK KR"/>
+                <a:ea typeface="Noto Sans CJK KR"/>
+              </a:rPr>
+              <a:t>공공 </a:t>
+            </a:r>
+            <a:r>
+              <a:rPr lang="en-US" altLang="ko-KR" sz="919" b="1" dirty="0">
+                <a:solidFill>
+                  <a:srgbClr val="22282E"/>
+                </a:solidFill>
+                <a:latin typeface="Noto Sans CJK KR"/>
+                <a:ea typeface="Noto Sans CJK KR"/>
+              </a:rPr>
+              <a:t>·</a:t>
+            </a:r>
+            <a:r>
+              <a:rPr lang="ko-KR" altLang="en-US" sz="919" b="1" dirty="0">
+                <a:solidFill>
+                  <a:srgbClr val="22282E"/>
+                </a:solidFill>
+                <a:latin typeface="Noto Sans CJK KR"/>
+                <a:ea typeface="Noto Sans CJK KR"/>
+              </a:rPr>
+              <a:t> 정책 채널</a:t>
+            </a:r>
+            <a:endParaRPr sz="919" b="1" dirty="0">
+              <a:solidFill>
+                <a:srgbClr val="22282E"/>
+              </a:solidFill>
+              <a:latin typeface="Noto Sans CJK KR"/>
+              <a:ea typeface="Noto Sans CJK KR"/>
+            </a:endParaRPr>
           </a:p>
           <a:p>
             <a:pPr algn="ctr">
@@ -4398,15 +4926,42 @@
               </a:spcAft>
             </a:pPr>
             <a:r>
-              <a:rPr sz="790" b="0">
+              <a:rPr lang="ko-KR" altLang="en-US" sz="790" b="0" dirty="0">
                 <a:solidFill>
                   <a:srgbClr val="4B555E"/>
                 </a:solidFill>
                 <a:latin typeface="Noto Sans CJK KR"/>
                 <a:ea typeface="Noto Sans CJK KR"/>
               </a:rPr>
-              <a:t>신문스크랩·일일 발송</a:t>
-            </a:r>
+              <a:t>정책브리핑</a:t>
+            </a:r>
+            <a:r>
+              <a:rPr lang="en-US" altLang="ko-KR" sz="790" b="0" dirty="0">
+                <a:solidFill>
+                  <a:srgbClr val="4B555E"/>
+                </a:solidFill>
+                <a:latin typeface="Noto Sans CJK KR"/>
+                <a:ea typeface="Noto Sans CJK KR"/>
+              </a:rPr>
+              <a:t>,</a:t>
+            </a:r>
+            <a:r>
+              <a:rPr lang="ko-KR" altLang="en-US" sz="790" b="0" dirty="0">
+                <a:solidFill>
+                  <a:srgbClr val="4B555E"/>
+                </a:solidFill>
+                <a:latin typeface="Noto Sans CJK KR"/>
+                <a:ea typeface="Noto Sans CJK KR"/>
+              </a:rPr>
+              <a:t> 국가데이터처 등</a:t>
+            </a:r>
+            <a:endParaRPr sz="790" b="0" dirty="0">
+              <a:solidFill>
+                <a:srgbClr val="4B555E"/>
+              </a:solidFill>
+              <a:latin typeface="Noto Sans CJK KR"/>
+              <a:ea typeface="Noto Sans CJK KR"/>
+            </a:endParaRPr>
           </a:p>
         </p:txBody>
       </p:sp>
@@ -4461,15 +5016,52 @@
               </a:spcAft>
             </a:pPr>
             <a:r>
-              <a:rPr sz="919" b="1">
+              <a:rPr sz="919" b="1" dirty="0">
                 <a:solidFill>
                   <a:srgbClr val="22282E"/>
                 </a:solidFill>
                 <a:latin typeface="Noto Sans CJK KR"/>
                 <a:ea typeface="Noto Sans CJK KR"/>
               </a:rPr>
-              <a:t>❷ 사업부 시장동향</a:t>
-            </a:r>
+              <a:t>❷ </a:t>
+            </a:r>
+            <a:r>
+              <a:rPr lang="ko-KR" altLang="en-US" sz="919" b="1" dirty="0">
+                <a:solidFill>
+                  <a:srgbClr val="22282E"/>
+                </a:solidFill>
+                <a:latin typeface="Noto Sans CJK KR"/>
+                <a:ea typeface="Noto Sans CJK KR"/>
+              </a:rPr>
+              <a:t>미디어 </a:t>
+            </a:r>
+            <a:r>
+              <a:rPr lang="en-US" altLang="ko-KR" sz="919" b="1" dirty="0">
+                <a:solidFill>
+                  <a:srgbClr val="22282E"/>
+                </a:solidFill>
+                <a:latin typeface="Noto Sans CJK KR"/>
+                <a:ea typeface="Noto Sans CJK KR"/>
+              </a:rPr>
+              <a:t>· </a:t>
+            </a:r>
+            <a:r>
+              <a:rPr lang="ko-KR" altLang="en-US" sz="919" b="1" dirty="0">
+                <a:solidFill>
+                  <a:srgbClr val="22282E"/>
+                </a:solidFill>
+                <a:latin typeface="Noto Sans CJK KR"/>
+                <a:ea typeface="Noto Sans CJK KR"/>
+              </a:rPr>
+              <a:t>뉴스 채널</a:t>
+            </a:r>
+            <a:endParaRPr sz="919" b="1" dirty="0">
+              <a:solidFill>
+                <a:srgbClr val="22282E"/>
+              </a:solidFill>
+              <a:latin typeface="Noto Sans CJK KR"/>
+              <a:ea typeface="Noto Sans CJK KR"/>
+            </a:endParaRPr>
           </a:p>
           <a:p>
             <a:pPr algn="ctr">
@@ -4481,15 +5073,42 @@
               </a:spcAft>
             </a:pPr>
             <a:r>
-              <a:rPr sz="790" b="0">
+              <a:rPr lang="ko-KR" altLang="en-US" sz="790" dirty="0">
                 <a:solidFill>
                   <a:srgbClr val="4B555E"/>
                 </a:solidFill>
                 <a:latin typeface="Noto Sans CJK KR"/>
                 <a:ea typeface="Noto Sans CJK KR"/>
               </a:rPr>
-              <a:t>'오늘의 시장동향'·일일 발송</a:t>
-            </a:r>
+              <a:t>주요 언론사</a:t>
+            </a:r>
+            <a:r>
+              <a:rPr lang="en-US" altLang="ko-KR" sz="790" dirty="0">
+                <a:solidFill>
+                  <a:srgbClr val="4B555E"/>
+                </a:solidFill>
+                <a:latin typeface="Noto Sans CJK KR"/>
+                <a:ea typeface="Noto Sans CJK KR"/>
+              </a:rPr>
+              <a:t>,</a:t>
+            </a:r>
+            <a:r>
+              <a:rPr lang="ko-KR" altLang="en-US" sz="790" dirty="0">
+                <a:solidFill>
+                  <a:srgbClr val="4B555E"/>
+                </a:solidFill>
+                <a:latin typeface="Noto Sans CJK KR"/>
+                <a:ea typeface="Noto Sans CJK KR"/>
+              </a:rPr>
+              <a:t> 포털사이트</a:t>
+            </a:r>
+            <a:endParaRPr sz="790" b="0" dirty="0">
+              <a:solidFill>
+                <a:srgbClr val="4B555E"/>
+              </a:solidFill>
+              <a:latin typeface="Noto Sans CJK KR"/>
+              <a:ea typeface="Noto Sans CJK KR"/>
+            </a:endParaRPr>
           </a:p>
         </p:txBody>
       </p:sp>
@@ -4544,15 +5163,52 @@
               </a:spcAft>
             </a:pPr>
             <a:r>
-              <a:rPr sz="919" b="1">
+              <a:rPr sz="919" b="1" dirty="0">
                 <a:solidFill>
                   <a:srgbClr val="22282E"/>
                 </a:solidFill>
                 <a:latin typeface="Noto Sans CJK KR"/>
                 <a:ea typeface="Noto Sans CJK KR"/>
               </a:rPr>
-              <a:t>❸ 정기보고서·전시회</a:t>
-            </a:r>
+              <a:t>❸ </a:t>
+            </a:r>
+            <a:r>
+              <a:rPr lang="ko-KR" altLang="en-US" sz="919" b="1" dirty="0">
+                <a:solidFill>
+                  <a:srgbClr val="22282E"/>
+                </a:solidFill>
+                <a:latin typeface="Noto Sans CJK KR"/>
+                <a:ea typeface="Noto Sans CJK KR"/>
+              </a:rPr>
+              <a:t>연구 </a:t>
+            </a:r>
+            <a:r>
+              <a:rPr lang="en-US" altLang="ko-KR" sz="919" b="1" dirty="0">
+                <a:solidFill>
+                  <a:srgbClr val="22282E"/>
+                </a:solidFill>
+                <a:latin typeface="Noto Sans CJK KR"/>
+                <a:ea typeface="Noto Sans CJK KR"/>
+              </a:rPr>
+              <a:t>·</a:t>
+            </a:r>
+            <a:r>
+              <a:rPr lang="ko-KR" altLang="en-US" sz="919" b="1" dirty="0">
+                <a:solidFill>
+                  <a:srgbClr val="22282E"/>
+                </a:solidFill>
+                <a:latin typeface="Noto Sans CJK KR"/>
+                <a:ea typeface="Noto Sans CJK KR"/>
+              </a:rPr>
+              <a:t> 전문보고서</a:t>
+            </a:r>
+            <a:endParaRPr sz="919" b="1" dirty="0">
+              <a:solidFill>
+                <a:srgbClr val="22282E"/>
+              </a:solidFill>
+              <a:latin typeface="Noto Sans CJK KR"/>
+              <a:ea typeface="Noto Sans CJK KR"/>
+            </a:endParaRPr>
           </a:p>
           <a:p>
             <a:pPr algn="ctr">
@@ -4564,15 +5220,62 @@
               </a:spcAft>
             </a:pPr>
             <a:r>
-              <a:rPr sz="790" b="0">
+              <a:rPr lang="ko-KR" altLang="en-US" sz="790" dirty="0">
                 <a:solidFill>
                   <a:srgbClr val="4B555E"/>
                 </a:solidFill>
                 <a:latin typeface="Noto Sans CJK KR"/>
                 <a:ea typeface="Noto Sans CJK KR"/>
               </a:rPr>
-              <a:t>보고서 20건·전시회 4건</a:t>
-            </a:r>
+              <a:t>한국은행</a:t>
+            </a:r>
+            <a:r>
+              <a:rPr lang="en-US" altLang="ko-KR" sz="790" dirty="0">
+                <a:solidFill>
+                  <a:srgbClr val="4B555E"/>
+                </a:solidFill>
+                <a:latin typeface="Noto Sans CJK KR"/>
+                <a:ea typeface="Noto Sans CJK KR"/>
+              </a:rPr>
+              <a:t>,</a:t>
+            </a:r>
+            <a:r>
+              <a:rPr lang="ko-KR" altLang="en-US" sz="790" dirty="0">
+                <a:solidFill>
+                  <a:srgbClr val="4B555E"/>
+                </a:solidFill>
+                <a:latin typeface="Noto Sans CJK KR"/>
+                <a:ea typeface="Noto Sans CJK KR"/>
+              </a:rPr>
+              <a:t> </a:t>
+            </a:r>
+            <a:r>
+              <a:rPr lang="en-US" altLang="ko-KR" sz="790" dirty="0">
+                <a:solidFill>
+                  <a:srgbClr val="4B555E"/>
+                </a:solidFill>
+                <a:latin typeface="Noto Sans CJK KR"/>
+                <a:ea typeface="Noto Sans CJK KR"/>
+              </a:rPr>
+              <a:t>KDI, </a:t>
+            </a:r>
+            <a:r>
+              <a:rPr lang="ko-KR" altLang="en-US" sz="790" dirty="0">
+                <a:solidFill>
+                  <a:srgbClr val="4B555E"/>
+                </a:solidFill>
+                <a:latin typeface="Noto Sans CJK KR"/>
+                <a:ea typeface="Noto Sans CJK KR"/>
+              </a:rPr>
+              <a:t>산업연구원 등</a:t>
+            </a:r>
+            <a:endParaRPr sz="790" b="0" dirty="0">
+              <a:solidFill>
+                <a:srgbClr val="4B555E"/>
+              </a:solidFill>
+              <a:latin typeface="Noto Sans CJK KR"/>
+              <a:ea typeface="Noto Sans CJK KR"/>
+            </a:endParaRPr>
           </a:p>
         </p:txBody>
       </p:sp>
@@ -4627,15 +5330,42 @@
               </a:spcAft>
             </a:pPr>
             <a:r>
-              <a:rPr sz="919" b="1">
+              <a:rPr sz="919" b="1" dirty="0">
                 <a:solidFill>
                   <a:srgbClr val="22282E"/>
                 </a:solidFill>
                 <a:latin typeface="Noto Sans CJK KR"/>
                 <a:ea typeface="Noto Sans CJK KR"/>
               </a:rPr>
-              <a:t>❹ 검색어 기반 검색</a:t>
-            </a:r>
+              <a:t>❹ </a:t>
+            </a:r>
+            <a:r>
+              <a:rPr lang="ko-KR" altLang="en-US" sz="919" b="1" dirty="0">
+                <a:solidFill>
+                  <a:srgbClr val="22282E"/>
+                </a:solidFill>
+                <a:latin typeface="Noto Sans CJK KR"/>
+                <a:ea typeface="Noto Sans CJK KR"/>
+              </a:rPr>
+              <a:t>국내외 </a:t>
+            </a:r>
+            <a:r>
+              <a:rPr lang="ko-KR" altLang="en-US" sz="919" b="1" dirty="0" err="1">
+                <a:solidFill>
+                  <a:srgbClr val="22282E"/>
+                </a:solidFill>
+                <a:latin typeface="Noto Sans CJK KR"/>
+                <a:ea typeface="Noto Sans CJK KR"/>
+              </a:rPr>
+              <a:t>기술전</a:t>
+            </a:r>
+            <a:endParaRPr lang="en-US" altLang="ko-KR" sz="919" b="1" dirty="0">
+              <a:solidFill>
+                <a:srgbClr val="22282E"/>
+              </a:solidFill>
+              <a:latin typeface="Noto Sans CJK KR"/>
+              <a:ea typeface="Noto Sans CJK KR"/>
+            </a:endParaRPr>
           </a:p>
           <a:p>
             <a:pPr algn="ctr">
@@ -4643,19 +5373,66 @@
                 <a:spcPct val="100000"/>
               </a:lnSpc>
               <a:spcAft>
-                <a:spcPts val="0"/>
+                <a:spcPts val="100"/>
               </a:spcAft>
             </a:pPr>
             <a:r>
-              <a:rPr sz="790" b="0">
+              <a:rPr lang="ko-KR" altLang="en-US" sz="790" dirty="0">
                 <a:solidFill>
                   <a:srgbClr val="4B555E"/>
                 </a:solidFill>
                 <a:latin typeface="Noto Sans CJK KR"/>
                 <a:ea typeface="Noto Sans CJK KR"/>
               </a:rPr>
-              <a:t>57종(경쟁사10·글로벌10·업계37)</a:t>
-            </a:r>
+              <a:t>박람회</a:t>
+            </a:r>
+            <a:r>
+              <a:rPr lang="en-US" altLang="ko-KR" sz="790" dirty="0">
+                <a:solidFill>
+                  <a:srgbClr val="4B555E"/>
+                </a:solidFill>
+                <a:latin typeface="Noto Sans CJK KR"/>
+                <a:ea typeface="Noto Sans CJK KR"/>
+              </a:rPr>
+              <a:t>,</a:t>
+            </a:r>
+            <a:r>
+              <a:rPr lang="ko-KR" altLang="en-US" sz="790" dirty="0">
+                <a:solidFill>
+                  <a:srgbClr val="4B555E"/>
+                </a:solidFill>
+                <a:latin typeface="Noto Sans CJK KR"/>
+                <a:ea typeface="Noto Sans CJK KR"/>
+              </a:rPr>
+              <a:t> 컨퍼런스</a:t>
+            </a:r>
+            <a:r>
+              <a:rPr lang="en-US" altLang="ko-KR" sz="790" dirty="0">
+                <a:solidFill>
+                  <a:srgbClr val="4B555E"/>
+                </a:solidFill>
+                <a:latin typeface="Noto Sans CJK KR"/>
+                <a:ea typeface="Noto Sans CJK KR"/>
+              </a:rPr>
+              <a:t>,</a:t>
+            </a:r>
+            <a:r>
+              <a:rPr lang="ko-KR" altLang="en-US" sz="790" dirty="0">
+                <a:solidFill>
+                  <a:srgbClr val="4B555E"/>
+                </a:solidFill>
+                <a:latin typeface="Noto Sans CJK KR"/>
+                <a:ea typeface="Noto Sans CJK KR"/>
+              </a:rPr>
+              <a:t> 기업행사</a:t>
+            </a:r>
+            <a:endParaRPr sz="790" b="0" dirty="0">
+              <a:solidFill>
+                <a:srgbClr val="4B555E"/>
+              </a:solidFill>
+              <a:latin typeface="Noto Sans CJK KR"/>
+              <a:ea typeface="Noto Sans CJK KR"/>
+            </a:endParaRPr>
           </a:p>
         </p:txBody>
       </p:sp>
@@ -4710,15 +5487,52 @@
               </a:spcAft>
             </a:pPr>
             <a:r>
-              <a:rPr sz="919" b="1">
+              <a:rPr sz="919" b="1" dirty="0">
                 <a:solidFill>
                   <a:srgbClr val="22282E"/>
                 </a:solidFill>
                 <a:latin typeface="Noto Sans CJK KR"/>
                 <a:ea typeface="Noto Sans CJK KR"/>
               </a:rPr>
-              <a:t>❺ 마케팅·사회 트렌드</a:t>
-            </a:r>
+              <a:t>❺</a:t>
+            </a:r>
+            <a:r>
+              <a:rPr lang="ko-KR" altLang="en-US" sz="919" b="1" dirty="0">
+                <a:solidFill>
+                  <a:srgbClr val="22282E"/>
+                </a:solidFill>
+                <a:latin typeface="Noto Sans CJK KR"/>
+                <a:ea typeface="Noto Sans CJK KR"/>
+              </a:rPr>
+              <a:t> 트렌드 </a:t>
+            </a:r>
+            <a:r>
+              <a:rPr sz="919" b="1" dirty="0">
+                <a:solidFill>
+                  <a:srgbClr val="22282E"/>
+                </a:solidFill>
+                <a:latin typeface="Noto Sans CJK KR"/>
+                <a:ea typeface="Noto Sans CJK KR"/>
+              </a:rPr>
+              <a:t>·</a:t>
+            </a:r>
+            <a:r>
+              <a:rPr lang="ko-KR" altLang="en-US" sz="919" b="1" dirty="0">
+                <a:solidFill>
+                  <a:srgbClr val="22282E"/>
+                </a:solidFill>
+                <a:latin typeface="Noto Sans CJK KR"/>
+                <a:ea typeface="Noto Sans CJK KR"/>
+              </a:rPr>
+              <a:t> 인사이트 채널</a:t>
+            </a:r>
+            <a:endParaRPr sz="919" b="1" dirty="0">
+              <a:solidFill>
+                <a:srgbClr val="22282E"/>
+              </a:solidFill>
+              <a:latin typeface="Noto Sans CJK KR"/>
+              <a:ea typeface="Noto Sans CJK KR"/>
+            </a:endParaRPr>
           </a:p>
           <a:p>
             <a:pPr algn="ctr">
@@ -4730,161 +5544,52 @@
               </a:spcAft>
             </a:pPr>
             <a:r>
-              <a:rPr sz="790" b="0">
+              <a:rPr sz="790" b="0" dirty="0" err="1">
                 <a:solidFill>
                   <a:srgbClr val="4B555E"/>
                 </a:solidFill>
                 <a:latin typeface="Noto Sans CJK KR"/>
                 <a:ea typeface="Noto Sans CJK KR"/>
               </a:rPr>
-              <a:t>나스미디어 등 광고사 뉴스레터</a:t>
-            </a:r>
-          </a:p>
-        </p:txBody>
-      </p:sp>
-      <p:sp>
-        <p:nvSpPr>
-          <p:cNvPr id="27" name="Rounded Rectangle 26"/>
-          <p:cNvSpPr/>
-          <p:nvPr/>
-        </p:nvSpPr>
-        <p:spPr>
-          <a:xfrm>
-            <a:off x="502920" y="3931920"/>
-            <a:ext cx="2377440" cy="384048"/>
-          </a:xfrm>
-          <a:prstGeom prst="roundRect">
-            <a:avLst/>
-          </a:prstGeom>
-          <a:solidFill>
-            <a:srgbClr val="F7EAE3"/>
-          </a:solidFill>
-          <a:ln w="9525">
-            <a:solidFill>
-              <a:srgbClr val="B4532A"/>
-            </a:solidFill>
-          </a:ln>
-          <a:effectLst/>
-        </p:spPr>
-        <p:style>
-          <a:lnRef idx="1">
-            <a:schemeClr val="accent1"/>
-          </a:lnRef>
-          <a:fillRef idx="3">
-            <a:schemeClr val="accent1"/>
-          </a:fillRef>
-          <a:effectRef idx="2">
-            <a:schemeClr val="accent1"/>
-          </a:effectRef>
-          <a:fontRef idx="minor">
-            <a:schemeClr val="lt1"/>
-          </a:fontRef>
-        </p:style>
-        <p:txBody>
-          <a:bodyPr wrap="square" lIns="64008" tIns="27432" rIns="64008" bIns="27432" rtlCol="0" anchor="ctr"/>
-          <a:lstStyle/>
-          <a:p>
-            <a:pPr algn="ctr">
-              <a:lnSpc>
-                <a:spcPct val="100000"/>
-              </a:lnSpc>
-              <a:spcAft>
-                <a:spcPts val="100"/>
-              </a:spcAft>
-            </a:pPr>
-            <a:r>
-              <a:rPr sz="880" b="1">
-                <a:solidFill>
-                  <a:srgbClr val="7A381C"/>
-                </a:solidFill>
-                <a:latin typeface="Noto Sans CJK KR"/>
-                <a:ea typeface="Noto Sans CJK KR"/>
-              </a:rPr>
-              <a:t>★ ② 선택 우선순위 (암묵지)</a:t>
-            </a:r>
-          </a:p>
-          <a:p>
-            <a:pPr algn="ctr">
-              <a:lnSpc>
-                <a:spcPct val="100000"/>
-              </a:lnSpc>
-              <a:spcAft>
-                <a:spcPts val="0"/>
-              </a:spcAft>
-            </a:pPr>
-            <a:r>
-              <a:rPr sz="780" b="0">
-                <a:solidFill>
-                  <a:srgbClr val="7A381C"/>
-                </a:solidFill>
-                <a:latin typeface="Noto Sans CJK KR"/>
-                <a:ea typeface="Noto Sans CJK KR"/>
-              </a:rPr>
-              <a:t>무엇을·왜 뽑나 = 인사이트</a:t>
-            </a:r>
-          </a:p>
-        </p:txBody>
-      </p:sp>
-      <p:sp>
-        <p:nvSpPr>
-          <p:cNvPr id="28" name="Rounded Rectangle 27"/>
-          <p:cNvSpPr/>
-          <p:nvPr/>
-        </p:nvSpPr>
-        <p:spPr>
-          <a:xfrm>
-            <a:off x="2990088" y="3931920"/>
-            <a:ext cx="8695944" cy="384048"/>
-          </a:xfrm>
-          <a:prstGeom prst="roundRect">
-            <a:avLst/>
-          </a:prstGeom>
-          <a:solidFill>
-            <a:srgbClr val="FCF8F5"/>
-          </a:solidFill>
-          <a:ln w="9525">
-            <a:solidFill>
-              <a:srgbClr val="B4532A"/>
-            </a:solidFill>
-          </a:ln>
-          <a:effectLst/>
-        </p:spPr>
-        <p:style>
-          <a:lnRef idx="1">
-            <a:schemeClr val="accent1"/>
-          </a:lnRef>
-          <a:fillRef idx="3">
-            <a:schemeClr val="accent1"/>
-          </a:fillRef>
-          <a:effectRef idx="2">
-            <a:schemeClr val="accent1"/>
-          </a:effectRef>
-          <a:fontRef idx="minor">
-            <a:schemeClr val="lt1"/>
-          </a:fontRef>
-        </p:style>
-        <p:txBody>
-          <a:bodyPr wrap="square" lIns="64008" tIns="27432" rIns="64008" bIns="27432" rtlCol="0" anchor="ctr"/>
-          <a:lstStyle/>
-          <a:p>
-            <a:pPr algn="ctr">
-              <a:lnSpc>
-                <a:spcPct val="100000"/>
-              </a:lnSpc>
-              <a:spcAft>
-                <a:spcPts val="0"/>
-              </a:spcAft>
-            </a:pPr>
-            <a:r>
-              <a:rPr sz="919" b="0">
-                <a:solidFill>
-                  <a:srgbClr val="22282E"/>
-                </a:solidFill>
-                <a:latin typeface="Noto Sans CJK KR"/>
-                <a:ea typeface="Noto Sans CJK KR"/>
-              </a:rPr>
-              <a:t>판단 기준 ▸ 당사와의 연관성 · 향후 도입 가능 여부 · 과거 시행 여부 · 영업확대 기회(정책·시장·사회이슈)</a:t>
-            </a:r>
+              <a:t>광고사</a:t>
+            </a:r>
+            <a:r>
+              <a:rPr sz="790" b="0" dirty="0">
+                <a:solidFill>
+                  <a:srgbClr val="4B555E"/>
+                </a:solidFill>
+                <a:latin typeface="Noto Sans CJK KR"/>
+                <a:ea typeface="Noto Sans CJK KR"/>
+              </a:rPr>
+              <a:t> </a:t>
+            </a:r>
+            <a:r>
+              <a:rPr sz="790" b="0" dirty="0" err="1">
+                <a:solidFill>
+                  <a:srgbClr val="4B555E"/>
+                </a:solidFill>
+                <a:latin typeface="Noto Sans CJK KR"/>
+                <a:ea typeface="Noto Sans CJK KR"/>
+              </a:rPr>
+              <a:t>뉴스레터</a:t>
+            </a:r>
+            <a:r>
+              <a:rPr lang="ko-KR" altLang="en-US" sz="790" b="0" dirty="0">
+                <a:solidFill>
+                  <a:srgbClr val="4B555E"/>
+                </a:solidFill>
+                <a:latin typeface="Noto Sans CJK KR"/>
+                <a:ea typeface="Noto Sans CJK KR"/>
+              </a:rPr>
+              <a:t> 등</a:t>
+            </a:r>
+            <a:endParaRPr sz="790" b="0" dirty="0">
+              <a:solidFill>
+                <a:srgbClr val="4B555E"/>
+              </a:solidFill>
+              <a:latin typeface="Noto Sans CJK KR"/>
+              <a:ea typeface="Noto Sans CJK KR"/>
+            </a:endParaRPr>
           </a:p>
         </p:txBody>
       </p:sp>
@@ -4958,7 +5663,7 @@
         <p:spPr>
           <a:xfrm>
             <a:off x="1874519" y="4453128"/>
-            <a:ext cx="9418320" cy="274320"/>
+            <a:ext cx="9418320" cy="161519"/>
           </a:xfrm>
           <a:prstGeom prst="rect">
             <a:avLst/>
@@ -4980,15 +5685,152 @@
               </a:spcAft>
             </a:pPr>
             <a:r>
-              <a:rPr sz="1050" b="1">
+              <a:rPr sz="1050" b="1" dirty="0">
                 <a:solidFill>
                   <a:srgbClr val="2E6E69"/>
                 </a:solidFill>
                 <a:latin typeface="Noto Sans CJK KR"/>
                 <a:ea typeface="Noto Sans CJK KR"/>
               </a:rPr>
-              <a:t>L1 수집은 자동화로 '대체', L2~L4 암묵지·4관점 판단은 '증폭' — 최종 판단·책임은 인간</a:t>
-            </a:r>
+              <a:t>L1 </a:t>
+            </a:r>
+            <a:r>
+              <a:rPr sz="1050" b="1" dirty="0" err="1">
+                <a:solidFill>
+                  <a:srgbClr val="2E6E69"/>
+                </a:solidFill>
+                <a:latin typeface="Noto Sans CJK KR"/>
+                <a:ea typeface="Noto Sans CJK KR"/>
+              </a:rPr>
+              <a:t>수집은</a:t>
+            </a:r>
+            <a:r>
+              <a:rPr sz="1050" b="1" dirty="0">
+                <a:solidFill>
+                  <a:srgbClr val="2E6E69"/>
+                </a:solidFill>
+                <a:latin typeface="Noto Sans CJK KR"/>
+                <a:ea typeface="Noto Sans CJK KR"/>
+              </a:rPr>
+              <a:t> </a:t>
+            </a:r>
+            <a:r>
+              <a:rPr sz="1050" b="1" dirty="0" err="1">
+                <a:solidFill>
+                  <a:srgbClr val="2E6E69"/>
+                </a:solidFill>
+                <a:latin typeface="Noto Sans CJK KR"/>
+                <a:ea typeface="Noto Sans CJK KR"/>
+              </a:rPr>
+              <a:t>자동화로</a:t>
+            </a:r>
+            <a:r>
+              <a:rPr sz="1050" b="1" dirty="0">
+                <a:solidFill>
+                  <a:srgbClr val="2E6E69"/>
+                </a:solidFill>
+                <a:latin typeface="Noto Sans CJK KR"/>
+                <a:ea typeface="Noto Sans CJK KR"/>
+              </a:rPr>
+              <a:t> '</a:t>
+            </a:r>
+            <a:r>
+              <a:rPr sz="1050" b="1" dirty="0" err="1">
+                <a:solidFill>
+                  <a:srgbClr val="2E6E69"/>
+                </a:solidFill>
+                <a:latin typeface="Noto Sans CJK KR"/>
+                <a:ea typeface="Noto Sans CJK KR"/>
+              </a:rPr>
+              <a:t>대체</a:t>
+            </a:r>
+            <a:r>
+              <a:rPr sz="1050" b="1" dirty="0">
+                <a:solidFill>
+                  <a:srgbClr val="2E6E69"/>
+                </a:solidFill>
+                <a:latin typeface="Noto Sans CJK KR"/>
+                <a:ea typeface="Noto Sans CJK KR"/>
+              </a:rPr>
+              <a:t>', L2~L4 암묵지·4관점 </a:t>
+            </a:r>
+            <a:r>
+              <a:rPr sz="1050" b="1" dirty="0" err="1">
+                <a:solidFill>
+                  <a:srgbClr val="2E6E69"/>
+                </a:solidFill>
+                <a:latin typeface="Noto Sans CJK KR"/>
+                <a:ea typeface="Noto Sans CJK KR"/>
+              </a:rPr>
+              <a:t>판단은</a:t>
+            </a:r>
+            <a:r>
+              <a:rPr sz="1050" b="1" dirty="0">
+                <a:solidFill>
+                  <a:srgbClr val="2E6E69"/>
+                </a:solidFill>
+                <a:latin typeface="Noto Sans CJK KR"/>
+                <a:ea typeface="Noto Sans CJK KR"/>
+              </a:rPr>
+              <a:t> '</a:t>
+            </a:r>
+            <a:r>
+              <a:rPr sz="1050" b="1" dirty="0" err="1">
+                <a:solidFill>
+                  <a:srgbClr val="2E6E69"/>
+                </a:solidFill>
+                <a:latin typeface="Noto Sans CJK KR"/>
+                <a:ea typeface="Noto Sans CJK KR"/>
+              </a:rPr>
+              <a:t>증폭</a:t>
+            </a:r>
+            <a:r>
+              <a:rPr sz="1050" b="1" dirty="0">
+                <a:solidFill>
+                  <a:srgbClr val="2E6E69"/>
+                </a:solidFill>
+                <a:latin typeface="Noto Sans CJK KR"/>
+                <a:ea typeface="Noto Sans CJK KR"/>
+              </a:rPr>
+              <a:t>’</a:t>
+            </a:r>
+            <a:r>
+              <a:rPr lang="ko-KR" altLang="en-US" sz="1050" b="1" dirty="0">
+                <a:solidFill>
+                  <a:srgbClr val="2E6E69"/>
+                </a:solidFill>
+                <a:latin typeface="Noto Sans CJK KR"/>
+                <a:ea typeface="Noto Sans CJK KR"/>
+              </a:rPr>
+              <a:t> </a:t>
+            </a:r>
+            <a:r>
+              <a:rPr lang="en-US" altLang="ko-KR" sz="1050" b="1" dirty="0">
+                <a:solidFill>
+                  <a:srgbClr val="2E6E69"/>
+                </a:solidFill>
+                <a:latin typeface="Noto Sans CJK KR"/>
+                <a:ea typeface="Noto Sans CJK KR"/>
+              </a:rPr>
+              <a:t>–</a:t>
+            </a:r>
+            <a:r>
+              <a:rPr lang="ko-KR" altLang="en-US" sz="1050" b="1" dirty="0">
+                <a:solidFill>
+                  <a:srgbClr val="2E6E69"/>
+                </a:solidFill>
+                <a:latin typeface="Noto Sans CJK KR"/>
+                <a:ea typeface="Noto Sans CJK KR"/>
+              </a:rPr>
+              <a:t> 최종 판단은 사람</a:t>
+            </a:r>
+            <a:endParaRPr sz="1050" b="1" dirty="0">
+              <a:solidFill>
+                <a:srgbClr val="2E6E69"/>
+              </a:solidFill>
+              <a:latin typeface="Noto Sans CJK KR"/>
+              <a:ea typeface="Noto Sans CJK KR"/>
+            </a:endParaRPr>
           </a:p>
         </p:txBody>
       </p:sp>
@@ -5104,15 +5946,62 @@
               </a:spcAft>
             </a:pPr>
             <a:r>
-              <a:rPr sz="1050" b="1">
+              <a:rPr sz="1050" b="1" dirty="0">
                 <a:solidFill>
                   <a:srgbClr val="2E6E69"/>
                 </a:solidFill>
                 <a:latin typeface="Noto Sans CJK KR"/>
                 <a:ea typeface="Noto Sans CJK KR"/>
               </a:rPr>
-              <a:t>L1  수집 계층</a:t>
-            </a:r>
+              <a:t>L1  </a:t>
+            </a:r>
+            <a:r>
+              <a:rPr lang="ko-KR" altLang="en-US" sz="1050" b="1" dirty="0">
+                <a:solidFill>
+                  <a:srgbClr val="2E6E69"/>
+                </a:solidFill>
+                <a:latin typeface="Noto Sans CJK KR"/>
+                <a:ea typeface="Noto Sans CJK KR"/>
+              </a:rPr>
+              <a:t>정보 </a:t>
+            </a:r>
+            <a:r>
+              <a:rPr sz="1050" b="1" dirty="0" err="1">
+                <a:solidFill>
+                  <a:srgbClr val="2E6E69"/>
+                </a:solidFill>
+                <a:latin typeface="Noto Sans CJK KR"/>
+                <a:ea typeface="Noto Sans CJK KR"/>
+              </a:rPr>
+              <a:t>수집</a:t>
+            </a:r>
+            <a:r>
+              <a:rPr sz="1050" b="1" dirty="0">
+                <a:solidFill>
+                  <a:srgbClr val="2E6E69"/>
+                </a:solidFill>
+                <a:latin typeface="Noto Sans CJK KR"/>
+                <a:ea typeface="Noto Sans CJK KR"/>
+              </a:rPr>
+              <a:t> </a:t>
+            </a:r>
+            <a:r>
+              <a:rPr sz="1050" b="1" dirty="0" err="1">
+                <a:solidFill>
+                  <a:srgbClr val="2E6E69"/>
+                </a:solidFill>
+                <a:latin typeface="Noto Sans CJK KR"/>
+                <a:ea typeface="Noto Sans CJK KR"/>
+              </a:rPr>
+              <a:t>계층</a:t>
+            </a:r>
+            <a:endParaRPr sz="1050" b="1" dirty="0">
+              <a:solidFill>
+                <a:srgbClr val="2E6E69"/>
+              </a:solidFill>
+              <a:latin typeface="Noto Sans CJK KR"/>
+              <a:ea typeface="Noto Sans CJK KR"/>
+            </a:endParaRPr>
           </a:p>
           <a:p>
             <a:pPr algn="ctr">
@@ -5124,16 +6013,53 @@
               </a:spcAft>
             </a:pPr>
             <a:r>
-              <a:rPr sz="830" b="0">
+              <a:rPr lang="en-US" altLang="ko-KR" sz="830" dirty="0">
                 <a:solidFill>
                   <a:srgbClr val="4B555E"/>
                 </a:solidFill>
                 <a:latin typeface="Noto Sans CJK KR"/>
                 <a:ea typeface="Noto Sans CJK KR"/>
               </a:rPr>
-              <a:t>뉴스·공시·규제·경쟁사
-크롤링·중복제거·1차 선별</a:t>
-            </a:r>
+              <a:t>5</a:t>
+            </a:r>
+            <a:r>
+              <a:rPr lang="ko-KR" altLang="en-US" sz="830" dirty="0">
+                <a:solidFill>
+                  <a:srgbClr val="4B555E"/>
+                </a:solidFill>
+                <a:latin typeface="Noto Sans CJK KR"/>
+                <a:ea typeface="Noto Sans CJK KR"/>
+              </a:rPr>
+              <a:t>개 기본축 정보 수집</a:t>
+            </a:r>
+            <a:r>
+              <a:rPr sz="830" b="0" dirty="0">
+                <a:solidFill>
+                  <a:srgbClr val="4B555E"/>
+                </a:solidFill>
+                <a:latin typeface="Noto Sans CJK KR"/>
+                <a:ea typeface="Noto Sans CJK KR"/>
+              </a:rPr>
+              <a:t>
+크롤링·중복제거·1차 </a:t>
+            </a:r>
+            <a:r>
+              <a:rPr sz="830" b="0" dirty="0" err="1">
+                <a:solidFill>
+                  <a:srgbClr val="4B555E"/>
+                </a:solidFill>
+                <a:latin typeface="Noto Sans CJK KR"/>
+                <a:ea typeface="Noto Sans CJK KR"/>
+              </a:rPr>
+              <a:t>선별</a:t>
+            </a:r>
+            <a:endParaRPr sz="830" b="0" dirty="0">
+              <a:solidFill>
+                <a:srgbClr val="4B555E"/>
+              </a:solidFill>
+              <a:latin typeface="Noto Sans CJK KR"/>
+              <a:ea typeface="Noto Sans CJK KR"/>
+            </a:endParaRPr>
           </a:p>
         </p:txBody>
       </p:sp>
@@ -5294,14 +6220,54 @@
               </a:spcAft>
             </a:pPr>
             <a:r>
-              <a:rPr sz="1050" b="1">
+              <a:rPr sz="1050" b="1" dirty="0">
                 <a:solidFill>
                   <a:srgbClr val="8A5A1E"/>
                 </a:solidFill>
                 <a:latin typeface="Noto Sans CJK KR"/>
                 <a:ea typeface="Noto Sans CJK KR"/>
               </a:rPr>
-              <a:t>L2  지식 계층 ★</a:t>
+              <a:t>L2  </a:t>
+            </a:r>
+            <a:r>
+              <a:rPr sz="1050" b="1" dirty="0" err="1">
+                <a:solidFill>
+                  <a:srgbClr val="8A5A1E"/>
+                </a:solidFill>
+                <a:latin typeface="Noto Sans CJK KR"/>
+                <a:ea typeface="Noto Sans CJK KR"/>
+              </a:rPr>
+              <a:t>지식</a:t>
+            </a:r>
+            <a:r>
+              <a:rPr sz="1050" b="1" dirty="0">
+                <a:solidFill>
+                  <a:srgbClr val="8A5A1E"/>
+                </a:solidFill>
+                <a:latin typeface="Noto Sans CJK KR"/>
+                <a:ea typeface="Noto Sans CJK KR"/>
+              </a:rPr>
+              <a:t> </a:t>
+            </a:r>
+            <a:r>
+              <a:rPr sz="1050" b="1" dirty="0" err="1">
+                <a:solidFill>
+                  <a:srgbClr val="8A5A1E"/>
+                </a:solidFill>
+                <a:latin typeface="Noto Sans CJK KR"/>
+                <a:ea typeface="Noto Sans CJK KR"/>
+              </a:rPr>
+              <a:t>계층</a:t>
+            </a:r>
+            <a:r>
+              <a:rPr sz="1050" b="1" dirty="0">
+                <a:solidFill>
+                  <a:srgbClr val="8A5A1E"/>
+                </a:solidFill>
+                <a:latin typeface="Noto Sans CJK KR"/>
+                <a:ea typeface="Noto Sans CJK KR"/>
+              </a:rPr>
+              <a:t> ★</a:t>
             </a:r>
           </a:p>
           <a:p>
@@ -5314,16 +6280,109 @@
               </a:spcAft>
             </a:pPr>
             <a:r>
-              <a:rPr sz="830" b="0">
+              <a:rPr lang="ko-KR" altLang="en-US" sz="830" dirty="0">
                 <a:solidFill>
                   <a:srgbClr val="4B555E"/>
                 </a:solidFill>
                 <a:latin typeface="Noto Sans CJK KR"/>
                 <a:ea typeface="Noto Sans CJK KR"/>
               </a:rPr>
-              <a:t>베테랑 암묵지 저장소
-수주/실주 복기·근거 모음</a:t>
-            </a:r>
+              <a:t>정보의 채택</a:t>
+            </a:r>
+            <a:r>
+              <a:rPr lang="en-US" altLang="ko-KR" sz="830" dirty="0">
+                <a:solidFill>
+                  <a:srgbClr val="4B555E"/>
+                </a:solidFill>
+                <a:latin typeface="Noto Sans CJK KR"/>
+                <a:ea typeface="Noto Sans CJK KR"/>
+              </a:rPr>
+              <a:t>/</a:t>
+            </a:r>
+            <a:r>
+              <a:rPr lang="ko-KR" altLang="en-US" sz="830" dirty="0">
+                <a:solidFill>
+                  <a:srgbClr val="4B555E"/>
+                </a:solidFill>
+                <a:latin typeface="Noto Sans CJK KR"/>
+                <a:ea typeface="Noto Sans CJK KR"/>
+              </a:rPr>
+              <a:t>기각 요인</a:t>
+            </a:r>
+            <a:r>
+              <a:rPr lang="en-US" altLang="ko-KR" sz="830" dirty="0">
+                <a:solidFill>
+                  <a:srgbClr val="4B555E"/>
+                </a:solidFill>
+                <a:latin typeface="Noto Sans CJK KR"/>
+                <a:ea typeface="Noto Sans CJK KR"/>
+              </a:rPr>
+              <a:t>,</a:t>
+            </a:r>
+            <a:r>
+              <a:rPr lang="ko-KR" altLang="en-US" sz="830" dirty="0">
+                <a:solidFill>
+                  <a:srgbClr val="4B555E"/>
+                </a:solidFill>
+                <a:latin typeface="Noto Sans CJK KR"/>
+                <a:ea typeface="Noto Sans CJK KR"/>
+              </a:rPr>
+              <a:t> 판단근거 등</a:t>
+            </a:r>
+            <a:endParaRPr lang="en-US" altLang="ko-KR" sz="830" dirty="0">
+              <a:solidFill>
+                <a:srgbClr val="4B555E"/>
+              </a:solidFill>
+              <a:latin typeface="Noto Sans CJK KR"/>
+              <a:ea typeface="Noto Sans CJK KR"/>
+            </a:endParaRPr>
+          </a:p>
+          <a:p>
+            <a:pPr algn="ctr">
+              <a:lnSpc>
+                <a:spcPct val="100000"/>
+              </a:lnSpc>
+              <a:spcAft>
+                <a:spcPts val="0"/>
+              </a:spcAft>
+            </a:pPr>
+            <a:r>
+              <a:rPr lang="ko-KR" altLang="en-US" sz="830" b="0" dirty="0">
+                <a:solidFill>
+                  <a:srgbClr val="4B555E"/>
+                </a:solidFill>
+                <a:latin typeface="Noto Sans CJK KR"/>
+                <a:ea typeface="Noto Sans CJK KR"/>
+              </a:rPr>
+              <a:t>암묵지를 </a:t>
+            </a:r>
+            <a:r>
+              <a:rPr lang="ko-KR" altLang="en-US" sz="830" b="0" dirty="0" err="1">
+                <a:solidFill>
+                  <a:srgbClr val="4B555E"/>
+                </a:solidFill>
+                <a:latin typeface="Noto Sans CJK KR"/>
+                <a:ea typeface="Noto Sans CJK KR"/>
+              </a:rPr>
+              <a:t>구조화하여</a:t>
+            </a:r>
+            <a:r>
+              <a:rPr lang="ko-KR" altLang="en-US" sz="830" b="0" dirty="0">
+                <a:solidFill>
+                  <a:srgbClr val="4B555E"/>
+                </a:solidFill>
+                <a:latin typeface="Noto Sans CJK KR"/>
+                <a:ea typeface="Noto Sans CJK KR"/>
+              </a:rPr>
+              <a:t> 기록</a:t>
+            </a:r>
+            <a:endParaRPr sz="830" b="0" dirty="0">
+              <a:solidFill>
+                <a:srgbClr val="4B555E"/>
+              </a:solidFill>
+              <a:latin typeface="Noto Sans CJK KR"/>
+              <a:ea typeface="Noto Sans CJK KR"/>
+            </a:endParaRPr>
           </a:p>
         </p:txBody>
       </p:sp>
@@ -5484,15 +6543,52 @@
               </a:spcAft>
             </a:pPr>
             <a:r>
-              <a:rPr sz="1050" b="1">
+              <a:rPr sz="1050" b="1" dirty="0">
                 <a:solidFill>
                   <a:srgbClr val="2E6E69"/>
                 </a:solidFill>
                 <a:latin typeface="Noto Sans CJK KR"/>
                 <a:ea typeface="Noto Sans CJK KR"/>
               </a:rPr>
-              <a:t>L3  에이전트 계층</a:t>
-            </a:r>
+              <a:t>L3  </a:t>
+            </a:r>
+            <a:r>
+              <a:rPr sz="1050" b="1" dirty="0" err="1">
+                <a:solidFill>
+                  <a:srgbClr val="2E6E69"/>
+                </a:solidFill>
+                <a:latin typeface="Noto Sans CJK KR"/>
+                <a:ea typeface="Noto Sans CJK KR"/>
+              </a:rPr>
+              <a:t>에이전트</a:t>
+            </a:r>
+            <a:r>
+              <a:rPr sz="1050" b="1" dirty="0">
+                <a:solidFill>
+                  <a:srgbClr val="2E6E69"/>
+                </a:solidFill>
+                <a:latin typeface="Noto Sans CJK KR"/>
+                <a:ea typeface="Noto Sans CJK KR"/>
+              </a:rPr>
+              <a:t> </a:t>
+            </a:r>
+            <a:r>
+              <a:rPr sz="1050" b="1" dirty="0" err="1">
+                <a:solidFill>
+                  <a:srgbClr val="2E6E69"/>
+                </a:solidFill>
+                <a:latin typeface="Noto Sans CJK KR"/>
+                <a:ea typeface="Noto Sans CJK KR"/>
+              </a:rPr>
+              <a:t>계층</a:t>
+            </a:r>
+            <a:endParaRPr sz="1050" b="1" dirty="0">
+              <a:solidFill>
+                <a:srgbClr val="2E6E69"/>
+              </a:solidFill>
+              <a:latin typeface="Noto Sans CJK KR"/>
+              <a:ea typeface="Noto Sans CJK KR"/>
+            </a:endParaRPr>
           </a:p>
           <a:p>
             <a:pPr algn="ctr">
@@ -5504,16 +6600,120 @@
               </a:spcAft>
             </a:pPr>
             <a:r>
-              <a:rPr sz="830" b="0">
+              <a:rPr lang="en-US" sz="830" b="0" dirty="0">
                 <a:solidFill>
                   <a:srgbClr val="4B555E"/>
                 </a:solidFill>
                 <a:latin typeface="Noto Sans CJK KR"/>
                 <a:ea typeface="Noto Sans CJK KR"/>
               </a:rPr>
-              <a:t>기획·영업·기술위협·경쟁사
-4개 관점 에이전트 · 충돌=신호</a:t>
-            </a:r>
+              <a:t>L1, L2</a:t>
+            </a:r>
+            <a:r>
+              <a:rPr lang="ko-KR" altLang="en-US" sz="830" b="0" dirty="0" err="1">
+                <a:solidFill>
+                  <a:srgbClr val="4B555E"/>
+                </a:solidFill>
+                <a:latin typeface="Noto Sans CJK KR"/>
+                <a:ea typeface="Noto Sans CJK KR"/>
+              </a:rPr>
+              <a:t>를</a:t>
+            </a:r>
+            <a:r>
+              <a:rPr lang="ko-KR" altLang="en-US" sz="830" b="0" dirty="0">
+                <a:solidFill>
+                  <a:srgbClr val="4B555E"/>
+                </a:solidFill>
+                <a:latin typeface="Noto Sans CJK KR"/>
+                <a:ea typeface="Noto Sans CJK KR"/>
+              </a:rPr>
+              <a:t> </a:t>
+            </a:r>
+            <a:r>
+              <a:rPr lang="ko-KR" altLang="en-US" sz="830" b="0" dirty="0" err="1">
+                <a:solidFill>
+                  <a:srgbClr val="4B555E"/>
+                </a:solidFill>
+                <a:latin typeface="Noto Sans CJK KR"/>
+                <a:ea typeface="Noto Sans CJK KR"/>
+              </a:rPr>
+              <a:t>믹싱하여</a:t>
+            </a:r>
+            <a:r>
+              <a:rPr sz="830" b="0" dirty="0">
+                <a:solidFill>
+                  <a:srgbClr val="4B555E"/>
+                </a:solidFill>
+                <a:latin typeface="Noto Sans CJK KR"/>
+                <a:ea typeface="Noto Sans CJK KR"/>
+              </a:rPr>
+              <a:t>
+</a:t>
+            </a:r>
+            <a:r>
+              <a:rPr lang="ko-KR" altLang="en-US" sz="830" dirty="0">
+                <a:solidFill>
+                  <a:srgbClr val="4B555E"/>
+                </a:solidFill>
+                <a:latin typeface="Noto Sans CJK KR"/>
+                <a:ea typeface="Noto Sans CJK KR"/>
+              </a:rPr>
+              <a:t>다양한 관점에서 시사점을 도출</a:t>
+            </a:r>
+            <a:endParaRPr lang="en-US" altLang="ko-KR" sz="830" dirty="0">
+              <a:solidFill>
+                <a:srgbClr val="4B555E"/>
+              </a:solidFill>
+              <a:latin typeface="Noto Sans CJK KR"/>
+              <a:ea typeface="Noto Sans CJK KR"/>
+            </a:endParaRPr>
+          </a:p>
+          <a:p>
+            <a:pPr algn="ctr">
+              <a:lnSpc>
+                <a:spcPct val="100000"/>
+              </a:lnSpc>
+              <a:spcAft>
+                <a:spcPts val="0"/>
+              </a:spcAft>
+            </a:pPr>
+            <a:r>
+              <a:rPr lang="en-US" altLang="ko-KR" sz="830" b="0" dirty="0">
+                <a:solidFill>
+                  <a:srgbClr val="4B555E"/>
+                </a:solidFill>
+                <a:latin typeface="Noto Sans CJK KR"/>
+                <a:ea typeface="Noto Sans CJK KR"/>
+              </a:rPr>
+              <a:t>(</a:t>
+            </a:r>
+            <a:r>
+              <a:rPr lang="ko-KR" altLang="en-US" sz="830" b="0" dirty="0">
+                <a:solidFill>
+                  <a:srgbClr val="4B555E"/>
+                </a:solidFill>
+                <a:latin typeface="Noto Sans CJK KR"/>
+                <a:ea typeface="Noto Sans CJK KR"/>
+              </a:rPr>
+              <a:t>관점 충돌 시 사람이 판단</a:t>
+            </a:r>
+            <a:r>
+              <a:rPr lang="en-US" altLang="ko-KR" sz="830" b="0" dirty="0">
+                <a:solidFill>
+                  <a:srgbClr val="4B555E"/>
+                </a:solidFill>
+                <a:latin typeface="Noto Sans CJK KR"/>
+                <a:ea typeface="Noto Sans CJK KR"/>
+              </a:rPr>
+              <a:t>)</a:t>
+            </a:r>
+            <a:endParaRPr sz="830" b="0" dirty="0">
+              <a:solidFill>
+                <a:srgbClr val="4B555E"/>
+              </a:solidFill>
+              <a:latin typeface="Noto Sans CJK KR"/>
+              <a:ea typeface="Noto Sans CJK KR"/>
+            </a:endParaRPr>
           </a:p>
         </p:txBody>
       </p:sp>
@@ -5899,69 +7099,6 @@
       </p:sp>
       <p:sp>
         <p:nvSpPr>
-          <p:cNvPr id="45" name="Rounded Rectangle 44"/>
-          <p:cNvSpPr/>
-          <p:nvPr/>
-        </p:nvSpPr>
-        <p:spPr>
-          <a:xfrm>
-            <a:off x="502920" y="6126480"/>
-            <a:ext cx="11155680" cy="310896"/>
-          </a:xfrm>
-          <a:prstGeom prst="roundRect">
-            <a:avLst/>
-          </a:prstGeom>
-          <a:solidFill>
-            <a:srgbClr val="FBFBFC"/>
-          </a:solidFill>
-          <a:ln w="9525">
-            <a:solidFill>
-              <a:srgbClr val="D5D9DD"/>
-            </a:solidFill>
-          </a:ln>
-          <a:effectLst/>
-        </p:spPr>
-        <p:style>
-          <a:lnRef idx="1">
-            <a:schemeClr val="accent1"/>
-          </a:lnRef>
-          <a:fillRef idx="3">
-            <a:schemeClr val="accent1"/>
-          </a:fillRef>
-          <a:effectRef idx="2">
-            <a:schemeClr val="accent1"/>
-          </a:effectRef>
-          <a:fontRef idx="minor">
-            <a:schemeClr val="lt1"/>
-          </a:fontRef>
-        </p:style>
-        <p:txBody>
-          <a:bodyPr wrap="square" lIns="64008" tIns="27432" rIns="64008" bIns="27432" rtlCol="0" anchor="ctr"/>
-          <a:lstStyle/>
-          <a:p>
-            <a:pPr algn="ctr">
-              <a:lnSpc>
-                <a:spcPct val="100000"/>
-              </a:lnSpc>
-              <a:spcAft>
-                <a:spcPts val="0"/>
-              </a:spcAft>
-            </a:pPr>
-            <a:r>
-              <a:rPr sz="900" b="0">
-                <a:solidFill>
-                  <a:srgbClr val="4B555E"/>
-                </a:solidFill>
-                <a:latin typeface="Noto Sans CJK KR"/>
-                <a:ea typeface="Noto Sans CJK KR"/>
-              </a:rPr>
-              <a:t>↺  피드백 루프 : L5 학습 단계의 채택/기각 사례를 '예시'로 L2·L3에 다시 반영 → 관점별 인사이트 품질 개선</a:t>
-            </a:r>
-          </a:p>
-        </p:txBody>
-      </p:sp>
-      <p:sp>
-        <p:nvSpPr>
           <p:cNvPr id="46" name="Rounded Rectangle 45"/>
           <p:cNvSpPr/>
           <p:nvPr/>
@@ -6154,6 +7291,96 @@
           </a:p>
         </p:txBody>
       </p:sp>
+      <p:cxnSp>
+        <p:nvCxnSpPr>
+          <p:cNvPr id="51" name="꺾인 연결선[E] 50">
+            <a:extLst>
+              <a:ext uri="{FF2B5EF4-FFF2-40B4-BE49-F238E27FC236}">
+                <a16:creationId xmlns:a16="http://schemas.microsoft.com/office/drawing/2014/main" id="{CB557D0C-EB43-BFEA-DDE4-B5891F31EC89}"/>
+              </a:ext>
+            </a:extLst>
+          </p:cNvPr>
+          <p:cNvCxnSpPr>
+            <a:cxnSpLocks/>
+            <a:stCxn id="44" idx="2"/>
+            <a:endCxn id="35" idx="2"/>
+          </p:cNvCxnSpPr>
+          <p:nvPr/>
+        </p:nvCxnSpPr>
+        <p:spPr>
+          <a:xfrm rot="5400000">
+            <a:off x="7214616" y="2615184"/>
+            <a:ext cx="12700" cy="6803136"/>
+          </a:xfrm>
+          <a:prstGeom prst="bentConnector3">
+            <a:avLst>
+              <a:gd name="adj1" fmla="val 1800000"/>
+            </a:avLst>
+          </a:prstGeom>
+          <a:ln>
+            <a:tailEnd type="triangle"/>
+          </a:ln>
+        </p:spPr>
+        <p:style>
+          <a:lnRef idx="2">
+            <a:schemeClr val="accent1"/>
+          </a:lnRef>
+          <a:fillRef idx="0">
+            <a:schemeClr val="accent1"/>
+          </a:fillRef>
+          <a:effectRef idx="1">
+            <a:schemeClr val="accent1"/>
+          </a:effectRef>
+          <a:fontRef idx="minor">
+            <a:schemeClr val="tx1"/>
+          </a:fontRef>
+        </p:style>
+      </p:cxnSp>
+      <p:cxnSp>
+        <p:nvCxnSpPr>
+          <p:cNvPr id="53" name="꺾인 연결선[E] 52">
+            <a:extLst>
+              <a:ext uri="{FF2B5EF4-FFF2-40B4-BE49-F238E27FC236}">
+                <a16:creationId xmlns:a16="http://schemas.microsoft.com/office/drawing/2014/main" id="{445B1DBE-8708-BC2D-AA62-FD4853C3510A}"/>
+              </a:ext>
+            </a:extLst>
+          </p:cNvPr>
+          <p:cNvCxnSpPr>
+            <a:cxnSpLocks/>
+            <a:stCxn id="44" idx="2"/>
+            <a:endCxn id="41" idx="2"/>
+          </p:cNvCxnSpPr>
+          <p:nvPr/>
+        </p:nvCxnSpPr>
+        <p:spPr>
+          <a:xfrm rot="5400000">
+            <a:off x="9482328" y="4882896"/>
+            <a:ext cx="12700" cy="2267713"/>
+          </a:xfrm>
+          <a:prstGeom prst="bentConnector3">
+            <a:avLst>
+              <a:gd name="adj1" fmla="val 1800000"/>
+            </a:avLst>
+          </a:prstGeom>
+          <a:ln>
+            <a:tailEnd type="triangle"/>
+          </a:ln>
+        </p:spPr>
+        <p:style>
+          <a:lnRef idx="2">
+            <a:schemeClr val="accent1"/>
+          </a:lnRef>
+          <a:fillRef idx="0">
+            <a:schemeClr val="accent1"/>
+          </a:fillRef>
+          <a:effectRef idx="1">
+            <a:schemeClr val="accent1"/>
+          </a:effectRef>
+          <a:fontRef idx="minor">
+            <a:schemeClr val="tx1"/>
+          </a:fontRef>
+        </p:style>
+      </p:cxnSp>
     </p:spTree>
   </p:cSld>
   <p:clrMapOvr>
@@ -6233,7 +7460,7 @@
         <p:spPr>
           <a:xfrm>
             <a:off x="502920" y="256032"/>
-            <a:ext cx="11155680" cy="548640"/>
+            <a:ext cx="11155680" cy="322974"/>
           </a:xfrm>
           <a:prstGeom prst="rect">
             <a:avLst/>
@@ -6255,14 +7482,134 @@
               </a:spcAft>
             </a:pPr>
             <a:r>
-              <a:rPr sz="2100" b="1">
+              <a:rPr sz="2100" b="1" dirty="0">
                 <a:solidFill>
                   <a:srgbClr val="22282E"/>
                 </a:solidFill>
                 <a:latin typeface="Noto Sans CJK KR"/>
                 <a:ea typeface="Noto Sans CJK KR"/>
               </a:rPr>
-              <a:t>To-Be 실행 설계 : 다관점 AI 에이전트 · 암묵지 코드화 · 추진 로드맵</a:t>
+              <a:t>To-Be </a:t>
+            </a:r>
+            <a:r>
+              <a:rPr sz="2100" b="1" dirty="0" err="1">
+                <a:solidFill>
+                  <a:srgbClr val="22282E"/>
+                </a:solidFill>
+                <a:latin typeface="Noto Sans CJK KR"/>
+                <a:ea typeface="Noto Sans CJK KR"/>
+              </a:rPr>
+              <a:t>실행</a:t>
+            </a:r>
+            <a:r>
+              <a:rPr sz="2100" b="1" dirty="0">
+                <a:solidFill>
+                  <a:srgbClr val="22282E"/>
+                </a:solidFill>
+                <a:latin typeface="Noto Sans CJK KR"/>
+                <a:ea typeface="Noto Sans CJK KR"/>
+              </a:rPr>
+              <a:t> </a:t>
+            </a:r>
+            <a:r>
+              <a:rPr sz="2100" b="1" dirty="0" err="1">
+                <a:solidFill>
+                  <a:srgbClr val="22282E"/>
+                </a:solidFill>
+                <a:latin typeface="Noto Sans CJK KR"/>
+                <a:ea typeface="Noto Sans CJK KR"/>
+              </a:rPr>
+              <a:t>설계</a:t>
+            </a:r>
+            <a:r>
+              <a:rPr sz="2100" b="1" dirty="0">
+                <a:solidFill>
+                  <a:srgbClr val="22282E"/>
+                </a:solidFill>
+                <a:latin typeface="Noto Sans CJK KR"/>
+                <a:ea typeface="Noto Sans CJK KR"/>
+              </a:rPr>
+              <a:t> : </a:t>
+            </a:r>
+            <a:r>
+              <a:rPr sz="2100" b="1" dirty="0" err="1">
+                <a:solidFill>
+                  <a:srgbClr val="22282E"/>
+                </a:solidFill>
+                <a:latin typeface="Noto Sans CJK KR"/>
+                <a:ea typeface="Noto Sans CJK KR"/>
+              </a:rPr>
+              <a:t>다관점</a:t>
+            </a:r>
+            <a:r>
+              <a:rPr sz="2100" b="1" dirty="0">
+                <a:solidFill>
+                  <a:srgbClr val="22282E"/>
+                </a:solidFill>
+                <a:latin typeface="Noto Sans CJK KR"/>
+                <a:ea typeface="Noto Sans CJK KR"/>
+              </a:rPr>
+              <a:t> AI </a:t>
+            </a:r>
+            <a:r>
+              <a:rPr sz="2100" b="1" dirty="0" err="1">
+                <a:solidFill>
+                  <a:srgbClr val="22282E"/>
+                </a:solidFill>
+                <a:latin typeface="Noto Sans CJK KR"/>
+                <a:ea typeface="Noto Sans CJK KR"/>
+              </a:rPr>
+              <a:t>에이전트</a:t>
+            </a:r>
+            <a:r>
+              <a:rPr sz="2100" b="1" dirty="0">
+                <a:solidFill>
+                  <a:srgbClr val="22282E"/>
+                </a:solidFill>
+                <a:latin typeface="Noto Sans CJK KR"/>
+                <a:ea typeface="Noto Sans CJK KR"/>
+              </a:rPr>
+              <a:t> · </a:t>
+            </a:r>
+            <a:r>
+              <a:rPr sz="2100" b="1" dirty="0" err="1">
+                <a:solidFill>
+                  <a:srgbClr val="22282E"/>
+                </a:solidFill>
+                <a:latin typeface="Noto Sans CJK KR"/>
+                <a:ea typeface="Noto Sans CJK KR"/>
+              </a:rPr>
+              <a:t>암묵지</a:t>
+            </a:r>
+            <a:r>
+              <a:rPr sz="2100" b="1" dirty="0">
+                <a:solidFill>
+                  <a:srgbClr val="22282E"/>
+                </a:solidFill>
+                <a:latin typeface="Noto Sans CJK KR"/>
+                <a:ea typeface="Noto Sans CJK KR"/>
+              </a:rPr>
+              <a:t> </a:t>
+            </a:r>
+            <a:r>
+              <a:rPr sz="2100" b="1" dirty="0" err="1">
+                <a:solidFill>
+                  <a:srgbClr val="22282E"/>
+                </a:solidFill>
+                <a:latin typeface="Noto Sans CJK KR"/>
+                <a:ea typeface="Noto Sans CJK KR"/>
+              </a:rPr>
+              <a:t>코드화</a:t>
+            </a:r>
+            <a:r>
+              <a:rPr sz="2100" b="1" dirty="0">
+                <a:solidFill>
+                  <a:srgbClr val="22282E"/>
+                </a:solidFill>
+                <a:latin typeface="Noto Sans CJK KR"/>
+                <a:ea typeface="Noto Sans CJK KR"/>
+              </a:rPr>
+              <a:t> </a:t>
             </a:r>
           </a:p>
         </p:txBody>
@@ -6276,7 +7623,7 @@
         <p:spPr>
           <a:xfrm>
             <a:off x="502920" y="676656"/>
-            <a:ext cx="11155680" cy="320040"/>
+            <a:ext cx="11155680" cy="184538"/>
           </a:xfrm>
           <a:prstGeom prst="rect">
             <a:avLst/>
@@ -6298,14 +7645,144 @@
               </a:spcAft>
             </a:pPr>
             <a:r>
-              <a:rPr sz="1200" b="0">
+              <a:rPr sz="1200" b="0" dirty="0" err="1">
                 <a:solidFill>
                   <a:srgbClr val="8A939B"/>
                 </a:solidFill>
                 <a:latin typeface="Noto Sans CJK KR"/>
                 <a:ea typeface="Noto Sans CJK KR"/>
               </a:rPr>
-              <a:t>차별화는 '증폭'과 '암묵지 코드화'에서 나온다 — 크롤러에 3을 쓰면 지식 캡처에 7을 쓰는 비대칭 투자</a:t>
+              <a:t>차별화는</a:t>
+            </a:r>
+            <a:r>
+              <a:rPr sz="1200" b="0" dirty="0">
+                <a:solidFill>
+                  <a:srgbClr val="8A939B"/>
+                </a:solidFill>
+                <a:latin typeface="Noto Sans CJK KR"/>
+                <a:ea typeface="Noto Sans CJK KR"/>
+              </a:rPr>
+              <a:t> ＇</a:t>
+            </a:r>
+            <a:r>
+              <a:rPr lang="ko-KR" altLang="en-US" sz="1200" dirty="0" err="1">
+                <a:solidFill>
+                  <a:srgbClr val="8A939B"/>
+                </a:solidFill>
+                <a:latin typeface="Noto Sans CJK KR"/>
+                <a:ea typeface="Noto Sans CJK KR"/>
+              </a:rPr>
+              <a:t>다관점</a:t>
+            </a:r>
+            <a:r>
+              <a:rPr lang="ko-KR" altLang="en-US" sz="1200" dirty="0">
+                <a:solidFill>
+                  <a:srgbClr val="8A939B"/>
+                </a:solidFill>
+                <a:latin typeface="Noto Sans CJK KR"/>
+                <a:ea typeface="Noto Sans CJK KR"/>
+              </a:rPr>
+              <a:t> 에이전트 </a:t>
+            </a:r>
+            <a:r>
+              <a:rPr sz="1200" b="0" dirty="0">
+                <a:solidFill>
+                  <a:srgbClr val="8A939B"/>
+                </a:solidFill>
+                <a:latin typeface="Noto Sans CJK KR"/>
+                <a:ea typeface="Noto Sans CJK KR"/>
+              </a:rPr>
+              <a:t>'</a:t>
+            </a:r>
+            <a:r>
+              <a:rPr lang="ko-KR" altLang="en-US" sz="1200" b="0" dirty="0">
+                <a:solidFill>
+                  <a:srgbClr val="8A939B"/>
+                </a:solidFill>
+                <a:latin typeface="Noto Sans CJK KR"/>
+                <a:ea typeface="Noto Sans CJK KR"/>
+              </a:rPr>
+              <a:t> </a:t>
+            </a:r>
+            <a:r>
+              <a:rPr lang="ko-KR" altLang="en-US" sz="1200" dirty="0">
+                <a:solidFill>
+                  <a:srgbClr val="8A939B"/>
+                </a:solidFill>
+                <a:latin typeface="Noto Sans CJK KR"/>
+                <a:ea typeface="Noto Sans CJK KR"/>
+              </a:rPr>
+              <a:t>와</a:t>
+            </a:r>
+            <a:r>
+              <a:rPr sz="1200" b="0" dirty="0">
+                <a:solidFill>
+                  <a:srgbClr val="8A939B"/>
+                </a:solidFill>
+                <a:latin typeface="Noto Sans CJK KR"/>
+                <a:ea typeface="Noto Sans CJK KR"/>
+              </a:rPr>
+              <a:t> '</a:t>
+            </a:r>
+            <a:r>
+              <a:rPr sz="1200" b="0" dirty="0" err="1">
+                <a:solidFill>
+                  <a:srgbClr val="8A939B"/>
+                </a:solidFill>
+                <a:latin typeface="Noto Sans CJK KR"/>
+                <a:ea typeface="Noto Sans CJK KR"/>
+              </a:rPr>
+              <a:t>암묵지</a:t>
+            </a:r>
+            <a:r>
+              <a:rPr sz="1200" b="0" dirty="0">
+                <a:solidFill>
+                  <a:srgbClr val="8A939B"/>
+                </a:solidFill>
+                <a:latin typeface="Noto Sans CJK KR"/>
+                <a:ea typeface="Noto Sans CJK KR"/>
+              </a:rPr>
+              <a:t> </a:t>
+            </a:r>
+            <a:r>
+              <a:rPr sz="1200" b="0" dirty="0" err="1">
+                <a:solidFill>
+                  <a:srgbClr val="8A939B"/>
+                </a:solidFill>
+                <a:latin typeface="Noto Sans CJK KR"/>
+                <a:ea typeface="Noto Sans CJK KR"/>
+              </a:rPr>
+              <a:t>코드화'에서</a:t>
+            </a:r>
+            <a:r>
+              <a:rPr sz="1200" b="0" dirty="0">
+                <a:solidFill>
+                  <a:srgbClr val="8A939B"/>
+                </a:solidFill>
+                <a:latin typeface="Noto Sans CJK KR"/>
+                <a:ea typeface="Noto Sans CJK KR"/>
+              </a:rPr>
+              <a:t> </a:t>
+            </a:r>
+            <a:r>
+              <a:rPr sz="1200" b="0" dirty="0" err="1">
+                <a:solidFill>
+                  <a:srgbClr val="8A939B"/>
+                </a:solidFill>
+                <a:latin typeface="Noto Sans CJK KR"/>
+                <a:ea typeface="Noto Sans CJK KR"/>
+              </a:rPr>
+              <a:t>나온다</a:t>
+            </a:r>
+            <a:r>
+              <a:rPr sz="1200" b="0" dirty="0">
+                <a:solidFill>
+                  <a:srgbClr val="8A939B"/>
+                </a:solidFill>
+                <a:latin typeface="Noto Sans CJK KR"/>
+                <a:ea typeface="Noto Sans CJK KR"/>
+              </a:rPr>
+              <a:t> </a:t>
             </a:r>
           </a:p>
         </p:txBody>
@@ -6455,15 +7932,42 @@
               </a:spcAft>
             </a:pPr>
             <a:r>
-              <a:rPr sz="1050" b="1">
+              <a:rPr lang="ko-KR" altLang="en-US" sz="1050" b="1" dirty="0">
                 <a:solidFill>
                   <a:srgbClr val="FFFFFF"/>
                 </a:solidFill>
                 <a:latin typeface="Noto Sans CJK KR"/>
                 <a:ea typeface="Noto Sans CJK KR"/>
               </a:rPr>
-              <a:t>기획</a:t>
-            </a:r>
+              <a:t>상품</a:t>
+            </a:r>
+            <a:r>
+              <a:rPr lang="en-US" altLang="ko-KR" sz="1050" b="1" dirty="0">
+                <a:solidFill>
+                  <a:srgbClr val="FFFFFF"/>
+                </a:solidFill>
+                <a:latin typeface="Noto Sans CJK KR"/>
+                <a:ea typeface="Noto Sans CJK KR"/>
+              </a:rPr>
+              <a:t>/</a:t>
+            </a:r>
+            <a:r>
+              <a:rPr lang="ko-KR" altLang="en-US" sz="1050" b="1" dirty="0">
+                <a:solidFill>
+                  <a:srgbClr val="FFFFFF"/>
+                </a:solidFill>
+                <a:latin typeface="Noto Sans CJK KR"/>
+                <a:ea typeface="Noto Sans CJK KR"/>
+              </a:rPr>
+              <a:t>서비스</a:t>
+            </a:r>
+            <a:endParaRPr sz="1050" b="1" dirty="0">
+              <a:solidFill>
+                <a:srgbClr val="FFFFFF"/>
+              </a:solidFill>
+              <a:latin typeface="Noto Sans CJK KR"/>
+              <a:ea typeface="Noto Sans CJK KR"/>
+            </a:endParaRPr>
           </a:p>
         </p:txBody>
       </p:sp>
@@ -6518,35 +8022,52 @@
               </a:spcAft>
             </a:pPr>
             <a:r>
-              <a:rPr sz="950" b="1">
+              <a:rPr lang="ko-KR" altLang="en-US" sz="950" b="1" dirty="0">
                 <a:solidFill>
                   <a:srgbClr val="22282E"/>
                 </a:solidFill>
                 <a:latin typeface="Noto Sans CJK KR"/>
                 <a:ea typeface="Noto Sans CJK KR"/>
               </a:rPr>
-              <a:t>제품·시장전략·중장기 트렌드</a:t>
-            </a:r>
-          </a:p>
-          <a:p>
-            <a:pPr algn="ctr">
-              <a:lnSpc>
-                <a:spcPct val="100000"/>
-              </a:lnSpc>
-              <a:spcAft>
-                <a:spcPts val="0"/>
-              </a:spcAft>
-            </a:pPr>
-            <a:r>
-              <a:rPr sz="900" b="0">
-                <a:solidFill>
-                  <a:srgbClr val="2E6E69"/>
-                </a:solidFill>
-                <a:latin typeface="Noto Sans CJK KR"/>
-                <a:ea typeface="Noto Sans CJK KR"/>
-              </a:rPr>
-              <a:t>Q. 우리 제품/로드맵에 주는 의미는?</a:t>
-            </a:r>
+              <a:t>외부 변화가 우리가 제공하는 상품</a:t>
+            </a:r>
+            <a:r>
+              <a:rPr lang="en-US" altLang="ko-KR" sz="950" b="1" dirty="0">
+                <a:solidFill>
+                  <a:srgbClr val="22282E"/>
+                </a:solidFill>
+                <a:latin typeface="Noto Sans CJK KR"/>
+                <a:ea typeface="Noto Sans CJK KR"/>
+              </a:rPr>
+              <a:t>/</a:t>
+            </a:r>
+            <a:r>
+              <a:rPr lang="ko-KR" altLang="en-US" sz="950" b="1" dirty="0">
+                <a:solidFill>
+                  <a:srgbClr val="22282E"/>
+                </a:solidFill>
+                <a:latin typeface="Noto Sans CJK KR"/>
+                <a:ea typeface="Noto Sans CJK KR"/>
+              </a:rPr>
+              <a:t>서비스의 본질과 라인업에 </a:t>
+            </a:r>
+            <a:r>
+              <a:rPr lang="ko-KR" altLang="en-US" sz="950" b="1">
+                <a:solidFill>
+                  <a:srgbClr val="22282E"/>
+                </a:solidFill>
+                <a:latin typeface="Noto Sans CJK KR"/>
+                <a:ea typeface="Noto Sans CJK KR"/>
+              </a:rPr>
+              <a:t>미치는 영향</a:t>
+            </a:r>
+            <a:endParaRPr lang="en-US" altLang="ko-KR" sz="950" b="1" dirty="0">
+              <a:solidFill>
+                <a:srgbClr val="22282E"/>
+              </a:solidFill>
+              <a:latin typeface="Noto Sans CJK KR"/>
+              <a:ea typeface="Noto Sans CJK KR"/>
+            </a:endParaRPr>
           </a:p>
         </p:txBody>
       </p:sp>
@@ -6599,7 +8120,7 @@
               </a:spcAft>
             </a:pPr>
             <a:r>
-              <a:rPr sz="1050" b="1">
+              <a:rPr lang="ko-KR" altLang="en-US" sz="1050" b="1" dirty="0">
                 <a:solidFill>
                   <a:srgbClr val="FFFFFF"/>
                 </a:solidFill>
@@ -6608,6 +8129,33 @@
               </a:rPr>
               <a:t>영업</a:t>
             </a:r>
+            <a:r>
+              <a:rPr lang="en-US" altLang="ko-KR" sz="1050" b="1" dirty="0">
+                <a:solidFill>
+                  <a:srgbClr val="FFFFFF"/>
+                </a:solidFill>
+                <a:latin typeface="Noto Sans CJK KR"/>
+                <a:ea typeface="Noto Sans CJK KR"/>
+              </a:rPr>
+              <a:t>/</a:t>
+            </a:r>
+            <a:r>
+              <a:rPr lang="ko-KR" altLang="en-US" sz="1050" b="1" dirty="0">
+                <a:solidFill>
+                  <a:srgbClr val="FFFFFF"/>
+                </a:solidFill>
+                <a:latin typeface="Noto Sans CJK KR"/>
+                <a:ea typeface="Noto Sans CJK KR"/>
+              </a:rPr>
+              <a:t>채널</a:t>
+            </a:r>
+            <a:endParaRPr sz="1050" b="1" dirty="0">
+              <a:solidFill>
+                <a:srgbClr val="FFFFFF"/>
+              </a:solidFill>
+              <a:latin typeface="Noto Sans CJK KR"/>
+              <a:ea typeface="Noto Sans CJK KR"/>
+            </a:endParaRPr>
           </a:p>
         </p:txBody>
       </p:sp>
@@ -6662,34 +8210,14 @@
               </a:spcAft>
             </a:pPr>
             <a:r>
-              <a:rPr sz="950" b="1">
+              <a:rPr lang="ko-KR" altLang="en-US" sz="950" b="1" dirty="0">
                 <a:solidFill>
                   <a:srgbClr val="22282E"/>
                 </a:solidFill>
                 <a:latin typeface="Noto Sans CJK KR"/>
                 <a:ea typeface="Noto Sans CJK KR"/>
               </a:rPr>
-              <a:t>수주 기회·위협·고객 동향</a:t>
-            </a:r>
-          </a:p>
-          <a:p>
-            <a:pPr algn="ctr">
-              <a:lnSpc>
-                <a:spcPct val="100000"/>
-              </a:lnSpc>
-              <a:spcAft>
-                <a:spcPts val="0"/>
-              </a:spcAft>
-            </a:pPr>
-            <a:r>
-              <a:rPr sz="900" b="0">
-                <a:solidFill>
-                  <a:srgbClr val="2E6E69"/>
-                </a:solidFill>
-                <a:latin typeface="Noto Sans CJK KR"/>
-                <a:ea typeface="Noto Sans CJK KR"/>
-              </a:rPr>
-              <a:t>Q. 딜과 고객관계에 주는 의미는?</a:t>
+              <a:t>외부 변화가 영업 기회와 매출에 미치는 영향</a:t>
             </a:r>
           </a:p>
         </p:txBody>
@@ -6743,15 +8271,42 @@
               </a:spcAft>
             </a:pPr>
             <a:r>
-              <a:rPr sz="1050" b="1">
+              <a:rPr lang="ko-KR" altLang="en-US" sz="1050" b="1" dirty="0">
                 <a:solidFill>
                   <a:srgbClr val="FFFFFF"/>
                 </a:solidFill>
                 <a:latin typeface="Noto Sans CJK KR"/>
                 <a:ea typeface="Noto Sans CJK KR"/>
               </a:rPr>
-              <a:t>기술·위협</a:t>
-            </a:r>
+              <a:t>기술</a:t>
+            </a:r>
+            <a:r>
+              <a:rPr lang="en-US" altLang="ko-KR" sz="1050" b="1" dirty="0">
+                <a:solidFill>
+                  <a:srgbClr val="FFFFFF"/>
+                </a:solidFill>
+                <a:latin typeface="Noto Sans CJK KR"/>
+                <a:ea typeface="Noto Sans CJK KR"/>
+              </a:rPr>
+              <a:t>/</a:t>
+            </a:r>
+            <a:r>
+              <a:rPr lang="ko-KR" altLang="en-US" sz="1050" b="1" dirty="0">
+                <a:solidFill>
+                  <a:srgbClr val="FFFFFF"/>
+                </a:solidFill>
+                <a:latin typeface="Noto Sans CJK KR"/>
+                <a:ea typeface="Noto Sans CJK KR"/>
+              </a:rPr>
+              <a:t>인프라</a:t>
+            </a:r>
+            <a:endParaRPr sz="1050" b="1" dirty="0">
+              <a:solidFill>
+                <a:srgbClr val="FFFFFF"/>
+              </a:solidFill>
+              <a:latin typeface="Noto Sans CJK KR"/>
+              <a:ea typeface="Noto Sans CJK KR"/>
+            </a:endParaRPr>
           </a:p>
         </p:txBody>
       </p:sp>
@@ -6806,15 +8361,22 @@
               </a:spcAft>
             </a:pPr>
             <a:r>
-              <a:rPr sz="950" b="1">
+              <a:rPr lang="ko-KR" altLang="en-US" sz="950" b="1" dirty="0">
                 <a:solidFill>
                   <a:srgbClr val="22282E"/>
                 </a:solidFill>
                 <a:latin typeface="Noto Sans CJK KR"/>
                 <a:ea typeface="Noto Sans CJK KR"/>
               </a:rPr>
-              <a:t>보안위협·신기술·규제 파급</a:t>
-            </a:r>
+              <a:t>외부 변화를 뒷받침하거나 대응하기 위한 내부 기술 역량과 시스템의 영향</a:t>
+            </a:r>
+            <a:endParaRPr lang="en-US" altLang="ko-KR" sz="950" b="1" dirty="0">
+              <a:solidFill>
+                <a:srgbClr val="22282E"/>
+              </a:solidFill>
+              <a:latin typeface="Noto Sans CJK KR"/>
+              <a:ea typeface="Noto Sans CJK KR"/>
+            </a:endParaRPr>
           </a:p>
           <a:p>
             <a:pPr algn="ctr">
@@ -6822,19 +8384,16 @@
                 <a:spcPct val="100000"/>
               </a:lnSpc>
               <a:spcAft>
-                <a:spcPts val="0"/>
+                <a:spcPts val="200"/>
               </a:spcAft>
             </a:pPr>
-            <a:r>
-              <a:rPr sz="900" b="0">
-                <a:solidFill>
-                  <a:srgbClr val="2E6E69"/>
-                </a:solidFill>
-                <a:latin typeface="Noto Sans CJK KR"/>
-                <a:ea typeface="Noto Sans CJK KR"/>
-              </a:rPr>
-              <a:t>Q. 위협지형·기술경쟁력에 주는 의미는?</a:t>
-            </a:r>
+            <a:endParaRPr sz="900" b="0" dirty="0">
+              <a:solidFill>
+                <a:srgbClr val="2E6E69"/>
+              </a:solidFill>
+              <a:latin typeface="Noto Sans CJK KR"/>
+              <a:ea typeface="Noto Sans CJK KR"/>
+            </a:endParaRPr>
           </a:p>
         </p:txBody>
       </p:sp>
@@ -6887,15 +8446,22 @@
               </a:spcAft>
             </a:pPr>
             <a:r>
-              <a:rPr sz="1050" b="1">
+              <a:rPr lang="ko-KR" altLang="en-US" sz="1050" b="1" dirty="0">
                 <a:solidFill>
                   <a:srgbClr val="FFFFFF"/>
                 </a:solidFill>
                 <a:latin typeface="Noto Sans CJK KR"/>
                 <a:ea typeface="Noto Sans CJK KR"/>
               </a:rPr>
-              <a:t>경쟁사</a:t>
-            </a:r>
+              <a:t>마케팅</a:t>
+            </a:r>
+            <a:endParaRPr sz="1050" b="1" dirty="0">
+              <a:solidFill>
+                <a:srgbClr val="FFFFFF"/>
+              </a:solidFill>
+              <a:latin typeface="Noto Sans CJK KR"/>
+              <a:ea typeface="Noto Sans CJK KR"/>
+            </a:endParaRPr>
           </a:p>
         </p:txBody>
       </p:sp>
@@ -6950,118 +8516,42 @@
               </a:spcAft>
             </a:pPr>
             <a:r>
-              <a:rPr sz="950" b="1">
+              <a:rPr lang="ko-KR" altLang="en-US" sz="950" b="1" dirty="0">
                 <a:solidFill>
                   <a:srgbClr val="22282E"/>
                 </a:solidFill>
                 <a:latin typeface="Noto Sans CJK KR"/>
                 <a:ea typeface="Noto Sans CJK KR"/>
               </a:rPr>
-              <a:t>경쟁 3사 입장에서 동향 예측</a:t>
-            </a:r>
-          </a:p>
-          <a:p>
-            <a:pPr algn="ctr">
-              <a:lnSpc>
-                <a:spcPct val="100000"/>
-              </a:lnSpc>
-              <a:spcAft>
-                <a:spcPts val="0"/>
-              </a:spcAft>
-            </a:pPr>
-            <a:r>
-              <a:rPr sz="900" b="0">
-                <a:solidFill>
-                  <a:srgbClr val="2E6E69"/>
-                </a:solidFill>
-                <a:latin typeface="Noto Sans CJK KR"/>
-                <a:ea typeface="Noto Sans CJK KR"/>
-              </a:rPr>
-              <a:t>Q. 경쟁사라면 어떻게 움직일까?</a:t>
-            </a:r>
-          </a:p>
-        </p:txBody>
-      </p:sp>
-      <p:sp>
-        <p:nvSpPr>
-          <p:cNvPr id="15" name="Rounded Rectangle 14"/>
-          <p:cNvSpPr/>
-          <p:nvPr/>
-        </p:nvSpPr>
-        <p:spPr>
-          <a:xfrm>
-            <a:off x="502920" y="3886200"/>
-            <a:ext cx="5623560" cy="603504"/>
-          </a:xfrm>
-          <a:prstGeom prst="roundRect">
-            <a:avLst/>
-          </a:prstGeom>
-          <a:solidFill>
-            <a:srgbClr val="E7F0EE"/>
-          </a:solidFill>
-          <a:ln w="12700">
-            <a:solidFill>
-              <a:srgbClr val="2E6E69"/>
-            </a:solidFill>
-          </a:ln>
-          <a:effectLst/>
-        </p:spPr>
-        <p:style>
-          <a:lnRef idx="1">
-            <a:schemeClr val="accent1"/>
-          </a:lnRef>
-          <a:fillRef idx="3">
-            <a:schemeClr val="accent1"/>
-          </a:fillRef>
-          <a:effectRef idx="2">
-            <a:schemeClr val="accent1"/>
-          </a:effectRef>
-          <a:fontRef idx="minor">
-            <a:schemeClr val="lt1"/>
-          </a:fontRef>
-        </p:style>
-        <p:txBody>
-          <a:bodyPr wrap="square" lIns="64008" tIns="27432" rIns="64008" bIns="27432" rtlCol="0" anchor="ctr"/>
-          <a:lstStyle/>
-          <a:p>
-            <a:pPr algn="ctr">
-              <a:lnSpc>
-                <a:spcPct val="100000"/>
-              </a:lnSpc>
-              <a:spcAft>
-                <a:spcPts val="300"/>
-              </a:spcAft>
-            </a:pPr>
-            <a:r>
-              <a:rPr sz="930" b="1">
-                <a:solidFill>
-                  <a:srgbClr val="2E6E69"/>
-                </a:solidFill>
-                <a:latin typeface="Noto Sans CJK KR"/>
-                <a:ea typeface="Noto Sans CJK KR"/>
-              </a:rPr>
-              <a:t>같은 입력도 관점마다 다르게 해석 → 관점 충돌 = 인간에 우선 노출되는 '주목 신호'</a:t>
-            </a:r>
-          </a:p>
-          <a:p>
-            <a:pPr algn="ctr">
-              <a:lnSpc>
-                <a:spcPct val="100000"/>
-              </a:lnSpc>
-              <a:spcAft>
-                <a:spcPts val="0"/>
-              </a:spcAft>
-            </a:pPr>
-            <a:r>
-              <a:rPr sz="900" b="0">
-                <a:solidFill>
-                  <a:srgbClr val="4B555E"/>
-                </a:solidFill>
-                <a:latin typeface="Noto Sans CJK KR"/>
-                <a:ea typeface="Noto Sans CJK KR"/>
-              </a:rPr>
-              <a:t>(관점이 갈릴수록 사람이 먼저 봐야 할 신호) · 최종 판단·편집·책임은 사람이 담당</a:t>
-            </a:r>
+              <a:t>상품 메시징 및 포지셔닝</a:t>
+            </a:r>
+            <a:r>
+              <a:rPr lang="en-US" altLang="ko-KR" sz="950" b="1" dirty="0">
+                <a:solidFill>
+                  <a:srgbClr val="22282E"/>
+                </a:solidFill>
+                <a:latin typeface="Noto Sans CJK KR"/>
+                <a:ea typeface="Noto Sans CJK KR"/>
+              </a:rPr>
+              <a:t>,</a:t>
+            </a:r>
+            <a:r>
+              <a:rPr lang="ko-KR" altLang="en-US" sz="950" b="1" dirty="0">
+                <a:solidFill>
+                  <a:srgbClr val="22282E"/>
+                </a:solidFill>
+                <a:latin typeface="Noto Sans CJK KR"/>
+                <a:ea typeface="Noto Sans CJK KR"/>
+              </a:rPr>
+              <a:t> 마케팅 캠페인 등 인사이트 도출</a:t>
+            </a:r>
+            <a:endParaRPr sz="900" b="0" dirty="0">
+              <a:solidFill>
+                <a:srgbClr val="2E6E69"/>
+              </a:solidFill>
+              <a:latin typeface="Noto Sans CJK KR"/>
+              <a:ea typeface="Noto Sans CJK KR"/>
+            </a:endParaRPr>
           </a:p>
         </p:txBody>
       </p:sp>
@@ -7242,8 +8732,8 @@
         </p:nvSpPr>
         <p:spPr>
           <a:xfrm>
-            <a:off x="7050024" y="1810512"/>
-            <a:ext cx="4462272" cy="548640"/>
+            <a:off x="7050024" y="1917991"/>
+            <a:ext cx="4462272" cy="333681"/>
           </a:xfrm>
           <a:prstGeom prst="rect">
             <a:avLst/>
@@ -7265,15 +8755,142 @@
               </a:spcAft>
             </a:pPr>
             <a:r>
-              <a:rPr sz="1050" b="1">
+              <a:rPr sz="1050" b="1" dirty="0" err="1">
                 <a:solidFill>
                   <a:srgbClr val="22282E"/>
                 </a:solidFill>
                 <a:latin typeface="Noto Sans CJK KR"/>
                 <a:ea typeface="Noto Sans CJK KR"/>
               </a:rPr>
-              <a:t>결론(무엇을) 아닌 근거(왜)를 코드화</a:t>
-            </a:r>
+              <a:t>결론</a:t>
+            </a:r>
+            <a:r>
+              <a:rPr sz="1050" b="1" dirty="0">
+                <a:solidFill>
+                  <a:srgbClr val="22282E"/>
+                </a:solidFill>
+                <a:latin typeface="Noto Sans CJK KR"/>
+                <a:ea typeface="Noto Sans CJK KR"/>
+              </a:rPr>
+              <a:t>(</a:t>
+            </a:r>
+            <a:r>
+              <a:rPr sz="1050" b="1" dirty="0" err="1">
+                <a:solidFill>
+                  <a:srgbClr val="22282E"/>
+                </a:solidFill>
+                <a:latin typeface="Noto Sans CJK KR"/>
+                <a:ea typeface="Noto Sans CJK KR"/>
+              </a:rPr>
+              <a:t>무엇을</a:t>
+            </a:r>
+            <a:r>
+              <a:rPr sz="1050" b="1" dirty="0">
+                <a:solidFill>
+                  <a:srgbClr val="22282E"/>
+                </a:solidFill>
+                <a:latin typeface="Noto Sans CJK KR"/>
+                <a:ea typeface="Noto Sans CJK KR"/>
+              </a:rPr>
+              <a:t>) </a:t>
+            </a:r>
+            <a:r>
+              <a:rPr sz="1050" b="1" dirty="0" err="1">
+                <a:solidFill>
+                  <a:srgbClr val="22282E"/>
+                </a:solidFill>
+                <a:latin typeface="Noto Sans CJK KR"/>
+                <a:ea typeface="Noto Sans CJK KR"/>
+              </a:rPr>
+              <a:t>아닌</a:t>
+            </a:r>
+            <a:r>
+              <a:rPr sz="1050" b="1" dirty="0">
+                <a:solidFill>
+                  <a:srgbClr val="22282E"/>
+                </a:solidFill>
+                <a:latin typeface="Noto Sans CJK KR"/>
+                <a:ea typeface="Noto Sans CJK KR"/>
+              </a:rPr>
+              <a:t> </a:t>
+            </a:r>
+            <a:r>
+              <a:rPr sz="1050" b="1" dirty="0" err="1">
+                <a:solidFill>
+                  <a:srgbClr val="22282E"/>
+                </a:solidFill>
+                <a:latin typeface="Noto Sans CJK KR"/>
+                <a:ea typeface="Noto Sans CJK KR"/>
+              </a:rPr>
+              <a:t>근거</a:t>
+            </a:r>
+            <a:r>
+              <a:rPr sz="1050" b="1" dirty="0">
+                <a:solidFill>
+                  <a:srgbClr val="22282E"/>
+                </a:solidFill>
+                <a:latin typeface="Noto Sans CJK KR"/>
+                <a:ea typeface="Noto Sans CJK KR"/>
+              </a:rPr>
+              <a:t>(</a:t>
+            </a:r>
+            <a:r>
+              <a:rPr sz="1050" b="1" dirty="0" err="1">
+                <a:solidFill>
+                  <a:srgbClr val="22282E"/>
+                </a:solidFill>
+                <a:latin typeface="Noto Sans CJK KR"/>
+                <a:ea typeface="Noto Sans CJK KR"/>
+              </a:rPr>
+              <a:t>왜</a:t>
+            </a:r>
+            <a:r>
+              <a:rPr sz="1050" b="1" dirty="0">
+                <a:solidFill>
+                  <a:srgbClr val="22282E"/>
+                </a:solidFill>
+                <a:latin typeface="Noto Sans CJK KR"/>
+                <a:ea typeface="Noto Sans CJK KR"/>
+              </a:rPr>
+              <a:t>)</a:t>
+            </a:r>
+            <a:r>
+              <a:rPr sz="1050" b="1" dirty="0" err="1">
+                <a:solidFill>
+                  <a:srgbClr val="22282E"/>
+                </a:solidFill>
+                <a:latin typeface="Noto Sans CJK KR"/>
+                <a:ea typeface="Noto Sans CJK KR"/>
+              </a:rPr>
+              <a:t>를</a:t>
+            </a:r>
+            <a:r>
+              <a:rPr sz="1050" b="1" dirty="0">
+                <a:solidFill>
+                  <a:srgbClr val="22282E"/>
+                </a:solidFill>
+                <a:latin typeface="Noto Sans CJK KR"/>
+                <a:ea typeface="Noto Sans CJK KR"/>
+              </a:rPr>
+              <a:t> </a:t>
+            </a:r>
+            <a:r>
+              <a:rPr sz="1050" b="1" dirty="0" err="1">
+                <a:solidFill>
+                  <a:srgbClr val="22282E"/>
+                </a:solidFill>
+                <a:latin typeface="Noto Sans CJK KR"/>
+                <a:ea typeface="Noto Sans CJK KR"/>
+              </a:rPr>
+              <a:t>코드화</a:t>
+            </a:r>
+            <a:endParaRPr sz="1050" b="1" dirty="0">
+              <a:solidFill>
+                <a:srgbClr val="22282E"/>
+              </a:solidFill>
+              <a:latin typeface="Noto Sans CJK KR"/>
+              <a:ea typeface="Noto Sans CJK KR"/>
+            </a:endParaRPr>
           </a:p>
           <a:p>
             <a:pPr algn="l">
@@ -7284,16 +8901,13 @@
                 <a:spcPts val="0"/>
               </a:spcAft>
             </a:pPr>
-            <a:r>
-              <a:rPr sz="900" b="0">
-                <a:solidFill>
-                  <a:srgbClr val="4B555E"/>
-                </a:solidFill>
-                <a:latin typeface="Noto Sans CJK KR"/>
-                <a:ea typeface="Noto Sans CJK KR"/>
-              </a:rPr>
-              <a:t>전이되는 건 결론이 아니라 근거 — 항상 '왜'를 잡는다</a:t>
-            </a:r>
+            <a:endParaRPr sz="900" b="0" dirty="0">
+              <a:solidFill>
+                <a:srgbClr val="4B555E"/>
+              </a:solidFill>
+              <a:latin typeface="Noto Sans CJK KR"/>
+              <a:ea typeface="Noto Sans CJK KR"/>
+            </a:endParaRPr>
           </a:p>
         </p:txBody>
       </p:sp>
@@ -7359,8 +8973,8 @@
         </p:nvSpPr>
         <p:spPr>
           <a:xfrm>
-            <a:off x="7050024" y="2400300"/>
-            <a:ext cx="4462272" cy="548640"/>
+            <a:off x="7050024" y="2512835"/>
+            <a:ext cx="4462272" cy="161519"/>
           </a:xfrm>
           <a:prstGeom prst="rect">
             <a:avLst/>
@@ -7382,34 +8996,64 @@
               </a:spcAft>
             </a:pPr>
             <a:r>
-              <a:rPr sz="1050" b="1">
+              <a:rPr sz="1050" b="1" dirty="0" err="1">
                 <a:solidFill>
                   <a:srgbClr val="22282E"/>
                 </a:solidFill>
                 <a:latin typeface="Noto Sans CJK KR"/>
                 <a:ea typeface="Noto Sans CJK KR"/>
               </a:rPr>
-              <a:t>근거 우선 표준 양식</a:t>
-            </a:r>
-          </a:p>
-          <a:p>
-            <a:pPr algn="l">
-              <a:lnSpc>
-                <a:spcPct val="105000"/>
-              </a:lnSpc>
-              <a:spcAft>
-                <a:spcPts val="0"/>
-              </a:spcAft>
-            </a:pPr>
-            <a:r>
-              <a:rPr sz="900" b="0">
-                <a:solidFill>
-                  <a:srgbClr val="4B555E"/>
-                </a:solidFill>
-                <a:latin typeface="Noto Sans CJK KR"/>
-                <a:ea typeface="Noto Sans CJK KR"/>
-              </a:rPr>
-              <a:t>관찰→판단→★근거·추론→반대고려→예외조건→결과검증→기록</a:t>
+              <a:t>근거</a:t>
+            </a:r>
+            <a:r>
+              <a:rPr sz="1050" b="1" dirty="0">
+                <a:solidFill>
+                  <a:srgbClr val="22282E"/>
+                </a:solidFill>
+                <a:latin typeface="Noto Sans CJK KR"/>
+                <a:ea typeface="Noto Sans CJK KR"/>
+              </a:rPr>
+              <a:t> </a:t>
+            </a:r>
+            <a:r>
+              <a:rPr sz="1050" b="1" dirty="0" err="1">
+                <a:solidFill>
+                  <a:srgbClr val="22282E"/>
+                </a:solidFill>
+                <a:latin typeface="Noto Sans CJK KR"/>
+                <a:ea typeface="Noto Sans CJK KR"/>
+              </a:rPr>
+              <a:t>우선</a:t>
+            </a:r>
+            <a:r>
+              <a:rPr sz="1050" b="1" dirty="0">
+                <a:solidFill>
+                  <a:srgbClr val="22282E"/>
+                </a:solidFill>
+                <a:latin typeface="Noto Sans CJK KR"/>
+                <a:ea typeface="Noto Sans CJK KR"/>
+              </a:rPr>
+              <a:t> </a:t>
+            </a:r>
+            <a:r>
+              <a:rPr sz="1050" b="1" dirty="0" err="1">
+                <a:solidFill>
+                  <a:srgbClr val="22282E"/>
+                </a:solidFill>
+                <a:latin typeface="Noto Sans CJK KR"/>
+                <a:ea typeface="Noto Sans CJK KR"/>
+              </a:rPr>
+              <a:t>표준</a:t>
+            </a:r>
+            <a:r>
+              <a:rPr lang="ko-KR" altLang="en-US" sz="1050" b="1" dirty="0">
+                <a:solidFill>
+                  <a:srgbClr val="22282E"/>
+                </a:solidFill>
+                <a:latin typeface="Noto Sans CJK KR"/>
+                <a:ea typeface="Noto Sans CJK KR"/>
+              </a:rPr>
+              <a:t> 양식</a:t>
             </a:r>
           </a:p>
         </p:txBody>
@@ -7476,8 +9120,8 @@
         </p:nvSpPr>
         <p:spPr>
           <a:xfrm>
-            <a:off x="7050024" y="2990088"/>
-            <a:ext cx="4462272" cy="548640"/>
+            <a:off x="7050024" y="3114199"/>
+            <a:ext cx="4462272" cy="161519"/>
           </a:xfrm>
           <a:prstGeom prst="rect">
             <a:avLst/>
@@ -7499,35 +9143,82 @@
               </a:spcAft>
             </a:pPr>
             <a:r>
-              <a:rPr sz="1050" b="1">
+              <a:rPr sz="1050" b="1" dirty="0" err="1">
                 <a:solidFill>
                   <a:srgbClr val="22282E"/>
                 </a:solidFill>
                 <a:latin typeface="Noto Sans CJK KR"/>
                 <a:ea typeface="Noto Sans CJK KR"/>
               </a:rPr>
-              <a:t>구체 사례 인터뷰로 추출</a:t>
-            </a:r>
-          </a:p>
-          <a:p>
-            <a:pPr algn="l">
-              <a:lnSpc>
-                <a:spcPct val="105000"/>
-              </a:lnSpc>
-              <a:spcAft>
-                <a:spcPts val="0"/>
-              </a:spcAft>
-            </a:pPr>
-            <a:r>
-              <a:rPr sz="900" b="0">
-                <a:solidFill>
-                  <a:srgbClr val="4B555E"/>
-                </a:solidFill>
-                <a:latin typeface="Noto Sans CJK KR"/>
-                <a:ea typeface="Noto Sans CJK KR"/>
-              </a:rPr>
-              <a:t>'왜' 3회 되묻기 · 핵심 사례 20~30건 + 업무 중 계속 축적</a:t>
-            </a:r>
+              <a:t>구체</a:t>
+            </a:r>
+            <a:r>
+              <a:rPr sz="1050" b="1" dirty="0">
+                <a:solidFill>
+                  <a:srgbClr val="22282E"/>
+                </a:solidFill>
+                <a:latin typeface="Noto Sans CJK KR"/>
+                <a:ea typeface="Noto Sans CJK KR"/>
+              </a:rPr>
+              <a:t> </a:t>
+            </a:r>
+            <a:r>
+              <a:rPr sz="1050" b="1" dirty="0" err="1">
+                <a:solidFill>
+                  <a:srgbClr val="22282E"/>
+                </a:solidFill>
+                <a:latin typeface="Noto Sans CJK KR"/>
+                <a:ea typeface="Noto Sans CJK KR"/>
+              </a:rPr>
+              <a:t>사례</a:t>
+            </a:r>
+            <a:r>
+              <a:rPr sz="1050" b="1" dirty="0">
+                <a:solidFill>
+                  <a:srgbClr val="22282E"/>
+                </a:solidFill>
+                <a:latin typeface="Noto Sans CJK KR"/>
+                <a:ea typeface="Noto Sans CJK KR"/>
+              </a:rPr>
+              <a:t> </a:t>
+            </a:r>
+            <a:r>
+              <a:rPr sz="1050" b="1" dirty="0" err="1">
+                <a:solidFill>
+                  <a:srgbClr val="22282E"/>
+                </a:solidFill>
+                <a:latin typeface="Noto Sans CJK KR"/>
+                <a:ea typeface="Noto Sans CJK KR"/>
+              </a:rPr>
+              <a:t>인터뷰로</a:t>
+            </a:r>
+            <a:r>
+              <a:rPr sz="1050" b="1" dirty="0">
+                <a:solidFill>
+                  <a:srgbClr val="22282E"/>
+                </a:solidFill>
+                <a:latin typeface="Noto Sans CJK KR"/>
+                <a:ea typeface="Noto Sans CJK KR"/>
+              </a:rPr>
+              <a:t> </a:t>
+            </a:r>
+            <a:r>
+              <a:rPr sz="1050" b="1" dirty="0" err="1">
+                <a:solidFill>
+                  <a:srgbClr val="22282E"/>
+                </a:solidFill>
+                <a:latin typeface="Noto Sans CJK KR"/>
+                <a:ea typeface="Noto Sans CJK KR"/>
+              </a:rPr>
+              <a:t>추출</a:t>
+            </a:r>
+            <a:endParaRPr sz="1050" b="1" dirty="0">
+              <a:solidFill>
+                <a:srgbClr val="22282E"/>
+              </a:solidFill>
+              <a:latin typeface="Noto Sans CJK KR"/>
+              <a:ea typeface="Noto Sans CJK KR"/>
+            </a:endParaRPr>
           </a:p>
         </p:txBody>
       </p:sp>
@@ -7593,8 +9284,8 @@
         </p:nvSpPr>
         <p:spPr>
           <a:xfrm>
-            <a:off x="7050024" y="3579876"/>
-            <a:ext cx="4462272" cy="548640"/>
+            <a:off x="7050024" y="3692412"/>
+            <a:ext cx="4462272" cy="161519"/>
           </a:xfrm>
           <a:prstGeom prst="rect">
             <a:avLst/>
@@ -7616,35 +9307,102 @@
               </a:spcAft>
             </a:pPr>
             <a:r>
-              <a:rPr sz="1050" b="1">
+              <a:rPr sz="1050" b="1" dirty="0" err="1">
                 <a:solidFill>
                   <a:srgbClr val="22282E"/>
                 </a:solidFill>
                 <a:latin typeface="Noto Sans CJK KR"/>
                 <a:ea typeface="Noto Sans CJK KR"/>
               </a:rPr>
-              <a:t>채택/기각 기록 = 학습 데이터</a:t>
-            </a:r>
-          </a:p>
-          <a:p>
-            <a:pPr algn="l">
-              <a:lnSpc>
-                <a:spcPct val="105000"/>
-              </a:lnSpc>
-              <a:spcAft>
-                <a:spcPts val="0"/>
-              </a:spcAft>
-            </a:pPr>
-            <a:r>
-              <a:rPr sz="900" b="0">
-                <a:solidFill>
-                  <a:srgbClr val="4B555E"/>
-                </a:solidFill>
-                <a:latin typeface="Noto Sans CJK KR"/>
-                <a:ea typeface="Noto Sans CJK KR"/>
-              </a:rPr>
-              <a:t>기록·근거를 '예시'로 학습 단계에 직접 반영</a:t>
-            </a:r>
+              <a:t>채택</a:t>
+            </a:r>
+            <a:r>
+              <a:rPr sz="1050" b="1" dirty="0">
+                <a:solidFill>
+                  <a:srgbClr val="22282E"/>
+                </a:solidFill>
+                <a:latin typeface="Noto Sans CJK KR"/>
+                <a:ea typeface="Noto Sans CJK KR"/>
+              </a:rPr>
+              <a:t>/</a:t>
+            </a:r>
+            <a:r>
+              <a:rPr sz="1050" b="1" dirty="0" err="1">
+                <a:solidFill>
+                  <a:srgbClr val="22282E"/>
+                </a:solidFill>
+                <a:latin typeface="Noto Sans CJK KR"/>
+                <a:ea typeface="Noto Sans CJK KR"/>
+              </a:rPr>
+              <a:t>기각</a:t>
+            </a:r>
+            <a:r>
+              <a:rPr sz="1050" b="1" dirty="0">
+                <a:solidFill>
+                  <a:srgbClr val="22282E"/>
+                </a:solidFill>
+                <a:latin typeface="Noto Sans CJK KR"/>
+                <a:ea typeface="Noto Sans CJK KR"/>
+              </a:rPr>
+              <a:t> </a:t>
+            </a:r>
+            <a:r>
+              <a:rPr sz="1050" b="1" dirty="0" err="1">
+                <a:solidFill>
+                  <a:srgbClr val="22282E"/>
+                </a:solidFill>
+                <a:latin typeface="Noto Sans CJK KR"/>
+                <a:ea typeface="Noto Sans CJK KR"/>
+              </a:rPr>
+              <a:t>기록</a:t>
+            </a:r>
+            <a:r>
+              <a:rPr sz="1050" b="1" dirty="0">
+                <a:solidFill>
+                  <a:srgbClr val="22282E"/>
+                </a:solidFill>
+                <a:latin typeface="Noto Sans CJK KR"/>
+                <a:ea typeface="Noto Sans CJK KR"/>
+              </a:rPr>
+              <a:t> = </a:t>
+            </a:r>
+            <a:r>
+              <a:rPr sz="1050" b="1" dirty="0" err="1">
+                <a:solidFill>
+                  <a:srgbClr val="22282E"/>
+                </a:solidFill>
+                <a:latin typeface="Noto Sans CJK KR"/>
+                <a:ea typeface="Noto Sans CJK KR"/>
+              </a:rPr>
+              <a:t>학습</a:t>
+            </a:r>
+            <a:r>
+              <a:rPr sz="1050" b="1" dirty="0">
+                <a:solidFill>
+                  <a:srgbClr val="22282E"/>
+                </a:solidFill>
+                <a:latin typeface="Noto Sans CJK KR"/>
+                <a:ea typeface="Noto Sans CJK KR"/>
+              </a:rPr>
+              <a:t> </a:t>
+            </a:r>
+            <a:r>
+              <a:rPr sz="1050" b="1" dirty="0" err="1">
+                <a:solidFill>
+                  <a:srgbClr val="22282E"/>
+                </a:solidFill>
+                <a:latin typeface="Noto Sans CJK KR"/>
+                <a:ea typeface="Noto Sans CJK KR"/>
+              </a:rPr>
+              <a:t>데이터</a:t>
+            </a:r>
+            <a:endParaRPr sz="1050" b="1" dirty="0">
+              <a:solidFill>
+                <a:srgbClr val="22282E"/>
+              </a:solidFill>
+              <a:latin typeface="Noto Sans CJK KR"/>
+              <a:ea typeface="Noto Sans CJK KR"/>
+            </a:endParaRPr>
           </a:p>
         </p:txBody>
       </p:sp>
@@ -7697,15 +9455,32 @@
               </a:spcAft>
             </a:pPr>
             <a:r>
-              <a:rPr sz="1050" b="1">
+              <a:rPr sz="1050" b="1" dirty="0">
                 <a:solidFill>
                   <a:srgbClr val="FFFFFF"/>
                 </a:solidFill>
                 <a:latin typeface="Noto Sans CJK KR"/>
                 <a:ea typeface="Noto Sans CJK KR"/>
               </a:rPr>
-              <a:t>③ 추진 로드맵 — 10월 시범운영 완료 목표 (1~3단계 압축)</a:t>
-            </a:r>
+              <a:t>③ </a:t>
+            </a:r>
+            <a:r>
+              <a:rPr lang="ko-KR" altLang="en-US" sz="1050" b="1" dirty="0">
+                <a:solidFill>
+                  <a:srgbClr val="FFFFFF"/>
+                </a:solidFill>
+                <a:latin typeface="Noto Sans CJK KR"/>
+                <a:ea typeface="Noto Sans CJK KR"/>
+              </a:rPr>
+              <a:t>추진 계획</a:t>
+            </a:r>
+            <a:endParaRPr sz="1050" b="1" dirty="0">
+              <a:solidFill>
+                <a:srgbClr val="FFFFFF"/>
+              </a:solidFill>
+              <a:latin typeface="Noto Sans CJK KR"/>
+              <a:ea typeface="Noto Sans CJK KR"/>
+            </a:endParaRPr>
           </a:p>
         </p:txBody>
       </p:sp>
@@ -7793,15 +9568,92 @@
               </a:spcAft>
             </a:pPr>
             <a:r>
-              <a:rPr sz="1100" b="1">
+              <a:rPr sz="1100" b="1" dirty="0">
                 <a:solidFill>
                   <a:srgbClr val="FFFFFF"/>
                 </a:solidFill>
                 <a:latin typeface="Noto Sans CJK KR"/>
                 <a:ea typeface="Noto Sans CJK KR"/>
               </a:rPr>
-              <a:t>8월   1단계  기준 정의·사례 정리·수집 자동화</a:t>
-            </a:r>
+              <a:t>8월   </a:t>
+            </a:r>
+            <a:r>
+              <a:rPr sz="1100" b="1" dirty="0" err="1">
+                <a:solidFill>
+                  <a:srgbClr val="FFFFFF"/>
+                </a:solidFill>
+                <a:latin typeface="Noto Sans CJK KR"/>
+                <a:ea typeface="Noto Sans CJK KR"/>
+              </a:rPr>
+              <a:t>기준</a:t>
+            </a:r>
+            <a:r>
+              <a:rPr sz="1100" b="1" dirty="0">
+                <a:solidFill>
+                  <a:srgbClr val="FFFFFF"/>
+                </a:solidFill>
+                <a:latin typeface="Noto Sans CJK KR"/>
+                <a:ea typeface="Noto Sans CJK KR"/>
+              </a:rPr>
+              <a:t> </a:t>
+            </a:r>
+            <a:r>
+              <a:rPr sz="1100" b="1" dirty="0" err="1">
+                <a:solidFill>
+                  <a:srgbClr val="FFFFFF"/>
+                </a:solidFill>
+                <a:latin typeface="Noto Sans CJK KR"/>
+                <a:ea typeface="Noto Sans CJK KR"/>
+              </a:rPr>
+              <a:t>정의·사례</a:t>
+            </a:r>
+            <a:r>
+              <a:rPr sz="1100" b="1" dirty="0">
+                <a:solidFill>
+                  <a:srgbClr val="FFFFFF"/>
+                </a:solidFill>
+                <a:latin typeface="Noto Sans CJK KR"/>
+                <a:ea typeface="Noto Sans CJK KR"/>
+              </a:rPr>
+              <a:t> </a:t>
+            </a:r>
+            <a:r>
+              <a:rPr sz="1100" b="1" dirty="0" err="1">
+                <a:solidFill>
+                  <a:srgbClr val="FFFFFF"/>
+                </a:solidFill>
+                <a:latin typeface="Noto Sans CJK KR"/>
+                <a:ea typeface="Noto Sans CJK KR"/>
+              </a:rPr>
+              <a:t>정리·수집</a:t>
+            </a:r>
+            <a:r>
+              <a:rPr sz="1100" b="1" dirty="0">
+                <a:solidFill>
+                  <a:srgbClr val="FFFFFF"/>
+                </a:solidFill>
+                <a:latin typeface="Noto Sans CJK KR"/>
+                <a:ea typeface="Noto Sans CJK KR"/>
+              </a:rPr>
+              <a:t> </a:t>
+            </a:r>
+            <a:r>
+              <a:rPr sz="1100" b="1" dirty="0" err="1">
+                <a:solidFill>
+                  <a:srgbClr val="FFFFFF"/>
+                </a:solidFill>
+                <a:latin typeface="Noto Sans CJK KR"/>
+                <a:ea typeface="Noto Sans CJK KR"/>
+              </a:rPr>
+              <a:t>자동화</a:t>
+            </a:r>
+            <a:endParaRPr sz="1100" b="1" dirty="0">
+              <a:solidFill>
+                <a:srgbClr val="FFFFFF"/>
+              </a:solidFill>
+              <a:latin typeface="Noto Sans CJK KR"/>
+              <a:ea typeface="Noto Sans CJK KR"/>
+            </a:endParaRPr>
           </a:p>
         </p:txBody>
       </p:sp>
@@ -7991,15 +9843,72 @@
               </a:spcAft>
             </a:pPr>
             <a:r>
-              <a:rPr sz="1100" b="1">
+              <a:rPr sz="1100" b="1" dirty="0">
                 <a:solidFill>
                   <a:srgbClr val="FFFFFF"/>
                 </a:solidFill>
                 <a:latin typeface="Noto Sans CJK KR"/>
                 <a:ea typeface="Noto Sans CJK KR"/>
               </a:rPr>
-              <a:t>9월   2단계  에이전트 시범 구축</a:t>
-            </a:r>
+              <a:t>9월   </a:t>
+            </a:r>
+            <a:r>
+              <a:rPr sz="1100" b="1" dirty="0" err="1">
+                <a:solidFill>
+                  <a:srgbClr val="FFFFFF"/>
+                </a:solidFill>
+                <a:latin typeface="Noto Sans CJK KR"/>
+                <a:ea typeface="Noto Sans CJK KR"/>
+              </a:rPr>
+              <a:t>에이전트</a:t>
+            </a:r>
+            <a:r>
+              <a:rPr sz="1100" b="1" dirty="0">
+                <a:solidFill>
+                  <a:srgbClr val="FFFFFF"/>
+                </a:solidFill>
+                <a:latin typeface="Noto Sans CJK KR"/>
+                <a:ea typeface="Noto Sans CJK KR"/>
+              </a:rPr>
+              <a:t> </a:t>
+            </a:r>
+            <a:r>
+              <a:rPr sz="1100" b="1" dirty="0" err="1">
+                <a:solidFill>
+                  <a:srgbClr val="FFFFFF"/>
+                </a:solidFill>
+                <a:latin typeface="Noto Sans CJK KR"/>
+                <a:ea typeface="Noto Sans CJK KR"/>
+              </a:rPr>
+              <a:t>시범</a:t>
+            </a:r>
+            <a:r>
+              <a:rPr sz="1100" b="1" dirty="0">
+                <a:solidFill>
+                  <a:srgbClr val="FFFFFF"/>
+                </a:solidFill>
+                <a:latin typeface="Noto Sans CJK KR"/>
+                <a:ea typeface="Noto Sans CJK KR"/>
+              </a:rPr>
+              <a:t> </a:t>
+            </a:r>
+            <a:r>
+              <a:rPr sz="1100" b="1" dirty="0" err="1">
+                <a:solidFill>
+                  <a:srgbClr val="FFFFFF"/>
+                </a:solidFill>
+                <a:latin typeface="Noto Sans CJK KR"/>
+                <a:ea typeface="Noto Sans CJK KR"/>
+              </a:rPr>
+              <a:t>구축</a:t>
+            </a:r>
+            <a:endParaRPr sz="1100" b="1" dirty="0">
+              <a:solidFill>
+                <a:srgbClr val="FFFFFF"/>
+              </a:solidFill>
+              <a:latin typeface="Noto Sans CJK KR"/>
+              <a:ea typeface="Noto Sans CJK KR"/>
+            </a:endParaRPr>
           </a:p>
         </p:txBody>
       </p:sp>
@@ -8189,15 +10098,32 @@
               </a:spcAft>
             </a:pPr>
             <a:r>
-              <a:rPr sz="1100" b="1">
+              <a:rPr sz="1100" b="1" dirty="0">
                 <a:solidFill>
                   <a:srgbClr val="FFFFFF"/>
                 </a:solidFill>
                 <a:latin typeface="Noto Sans CJK KR"/>
                 <a:ea typeface="Noto Sans CJK KR"/>
               </a:rPr>
-              <a:t>10월   3단계  사람 검토형 시범운영</a:t>
-            </a:r>
+              <a:t>10월  </a:t>
+            </a:r>
+            <a:r>
+              <a:rPr sz="1100" b="1" dirty="0" err="1">
+                <a:solidFill>
+                  <a:srgbClr val="FFFFFF"/>
+                </a:solidFill>
+                <a:latin typeface="Noto Sans CJK KR"/>
+                <a:ea typeface="Noto Sans CJK KR"/>
+              </a:rPr>
+              <a:t>시범운영</a:t>
+            </a:r>
+            <a:endParaRPr sz="1100" b="1" dirty="0">
+              <a:solidFill>
+                <a:srgbClr val="FFFFFF"/>
+              </a:solidFill>
+              <a:latin typeface="Noto Sans CJK KR"/>
+              <a:ea typeface="Noto Sans CJK KR"/>
+            </a:endParaRPr>
           </a:p>
         </p:txBody>
       </p:sp>
